--- a/Materials/Presentation.pptx
+++ b/Materials/Presentation.pptx
@@ -14520,7 +14520,7 @@
                 </a:solidFill>
                 <a:latin typeface="Calibri"/>
               </a:rPr>
-              <a:t>It spans two orders of magnitude</a:t>
+              <a:t>It spans a factor of about 72</a:t>
             </a:r>
             <a:r>
               <a:rPr sz="1100" b="0" i="0">

--- a/Materials/Presentation.pptx
+++ b/Materials/Presentation.pptx
@@ -1213,7 +1213,7 @@
                 </a:solidFill>
                 <a:latin typeface="Calibri"/>
               </a:rPr>
-              <a:t>Enhancing-tumour Dice by tumour grade</a:t>
+              <a:t>Enhancing-tumour Dice by tumour grade (internal)</a:t>
             </a:r>
           </a:p>
         </c:rich>
@@ -1247,53 +1247,47 @@
           </c:spPr>
           <c:cat>
             <c:strRef>
-              <c:f>Sheet1!$A$2:$A$7</c:f>
+              <c:f>Sheet1!$A$2:$A$6</c:f>
               <c:strCache>
-                <c:ptCount val="6"/>
+                <c:ptCount val="5"/>
                 <c:pt idx="0">
-                  <c:v>UNet</c:v>
+                  <c:v>nnU-Net</c:v>
                 </c:pt>
                 <c:pt idx="1">
-                  <c:v>nnU-Net-style</c:v>
+                  <c:v>SegResNet</c:v>
                 </c:pt>
                 <c:pt idx="2">
-                  <c:v>VNet</c:v>
+                  <c:v>Swin UNETR</c:v>
                 </c:pt>
                 <c:pt idx="3">
-                  <c:v>Swin UNETR</c:v>
+                  <c:v>CNN mean</c:v>
                 </c:pt>
                 <c:pt idx="4">
-                  <c:v>TransBTS</c:v>
-                </c:pt>
-                <c:pt idx="5">
-                  <c:v>UNETR</c:v>
+                  <c:v>Proposed</c:v>
                 </c:pt>
               </c:strCache>
             </c:strRef>
           </c:cat>
           <c:val>
             <c:numRef>
-              <c:f>Sheet1!$B$2:$B$7</c:f>
+              <c:f>Sheet1!$B$2:$B$6</c:f>
               <c:numCache>
                 <c:formatCode>General</c:formatCode>
-                <c:ptCount val="6"/>
+                <c:ptCount val="5"/>
                 <c:pt idx="0">
-                  <c:v>0.8117</c:v>
+                  <c:v>0.8531</c:v>
                 </c:pt>
                 <c:pt idx="1">
-                  <c:v>0.8124</c:v>
+                  <c:v>0.8715</c:v>
                 </c:pt>
                 <c:pt idx="2">
-                  <c:v>0.7923</c:v>
+                  <c:v>0.8529</c:v>
                 </c:pt>
                 <c:pt idx="3">
-                  <c:v>0.7262</c:v>
+                  <c:v>0.8622</c:v>
                 </c:pt>
                 <c:pt idx="4">
-                  <c:v>0.674</c:v>
-                </c:pt>
-                <c:pt idx="5">
-                  <c:v>0.6773</c:v>
+                  <c:v>0.8648</c:v>
                 </c:pt>
               </c:numCache>
             </c:numRef>
@@ -1320,53 +1314,47 @@
           </c:spPr>
           <c:cat>
             <c:strRef>
-              <c:f>Sheet1!$A$2:$A$7</c:f>
+              <c:f>Sheet1!$A$2:$A$6</c:f>
               <c:strCache>
-                <c:ptCount val="6"/>
+                <c:ptCount val="5"/>
                 <c:pt idx="0">
-                  <c:v>UNet</c:v>
+                  <c:v>nnU-Net</c:v>
                 </c:pt>
                 <c:pt idx="1">
-                  <c:v>nnU-Net-style</c:v>
+                  <c:v>SegResNet</c:v>
                 </c:pt>
                 <c:pt idx="2">
-                  <c:v>VNet</c:v>
+                  <c:v>Swin UNETR</c:v>
                 </c:pt>
                 <c:pt idx="3">
-                  <c:v>Swin UNETR</c:v>
+                  <c:v>CNN mean</c:v>
                 </c:pt>
                 <c:pt idx="4">
-                  <c:v>TransBTS</c:v>
-                </c:pt>
-                <c:pt idx="5">
-                  <c:v>UNETR</c:v>
+                  <c:v>Proposed</c:v>
                 </c:pt>
               </c:strCache>
             </c:strRef>
           </c:cat>
           <c:val>
             <c:numRef>
-              <c:f>Sheet1!$C$2:$C$7</c:f>
+              <c:f>Sheet1!$C$2:$C$6</c:f>
               <c:numCache>
                 <c:formatCode>General</c:formatCode>
-                <c:ptCount val="6"/>
+                <c:ptCount val="5"/>
                 <c:pt idx="0">
-                  <c:v>0.4237</c:v>
+                  <c:v>0.4089</c:v>
                 </c:pt>
                 <c:pt idx="1">
-                  <c:v>0.4112</c:v>
+                  <c:v>0.5822</c:v>
                 </c:pt>
                 <c:pt idx="2">
-                  <c:v>0.3885</c:v>
+                  <c:v>0.3681</c:v>
                 </c:pt>
                 <c:pt idx="3">
-                  <c:v>0.2193</c:v>
+                  <c:v>0.4223</c:v>
                 </c:pt>
                 <c:pt idx="4">
-                  <c:v>0.1613</c:v>
-                </c:pt>
-                <c:pt idx="5">
-                  <c:v>0.1857</c:v>
+                  <c:v>0.4197</c:v>
                 </c:pt>
               </c:numCache>
             </c:numRef>
@@ -1534,7 +1522,7 @@
                 </a:solidFill>
                 <a:latin typeface="Calibri"/>
               </a:rPr>
-              <a:t>Mean Dice vs latency per volume (bubble area: parameters)</a:t>
+              <a:t>Internal mean Dice vs latency with TTA (bubble area: parameters)</a:t>
             </a:r>
           </a:p>
         </c:rich>
@@ -1556,7 +1544,7 @@
               <c:strCache>
                 <c:ptCount val="1"/>
                 <c:pt idx="0">
-                  <c:v>UNet</c:v>
+                  <c:v>nnU-Net</c:v>
                 </c:pt>
               </c:strCache>
             </c:strRef>
@@ -1587,12 +1575,12 @@
                         </a:solidFill>
                         <a:latin typeface="Calibri"/>
                       </a:rPr>
-                      <a:t>UNet</a:t>
+                      <a:t>nnU-Net</a:t>
                     </a:r>
                   </a:p>
                 </c:rich>
               </c:tx>
-              <c:dLblPos val="l"/>
+              <c:dLblPos val="b"/>
               <c:showLegendKey val="0"/>
               <c:showVal val="1"/>
               <c:showCatName val="0"/>
@@ -1615,7 +1603,7 @@
                 <c:formatCode>General</c:formatCode>
                 <c:ptCount val="1"/>
                 <c:pt idx="0">
-                  <c:v>0.1076</c:v>
+                  <c:v>8.2</c:v>
                 </c:pt>
               </c:numCache>
             </c:numRef>
@@ -1627,7 +1615,7 @@
                 <c:formatCode>General</c:formatCode>
                 <c:ptCount val="1"/>
                 <c:pt idx="0">
-                  <c:v>0.8199</c:v>
+                  <c:v>0.8404</c:v>
                 </c:pt>
               </c:numCache>
             </c:numRef>
@@ -1639,7 +1627,7 @@
                 <c:formatCode>General</c:formatCode>
                 <c:ptCount val="1"/>
                 <c:pt idx="0">
-                  <c:v>5.6</c:v>
+                  <c:v>31.42</c:v>
                 </c:pt>
               </c:numCache>
             </c:numRef>
@@ -1655,7 +1643,7 @@
               <c:strCache>
                 <c:ptCount val="1"/>
                 <c:pt idx="0">
-                  <c:v>nnU-Net-style</c:v>
+                  <c:v>SegResNet</c:v>
                 </c:pt>
               </c:strCache>
             </c:strRef>
@@ -1686,7 +1674,7 @@
                         </a:solidFill>
                         <a:latin typeface="Calibri"/>
                       </a:rPr>
-                      <a:t>nnU-Net-style</a:t>
+                      <a:t>SegResNet</a:t>
                     </a:r>
                   </a:p>
                 </c:rich>
@@ -1714,7 +1702,7 @@
                 <c:formatCode>General</c:formatCode>
                 <c:ptCount val="1"/>
                 <c:pt idx="0">
-                  <c:v>0.1112</c:v>
+                  <c:v>8.08</c:v>
                 </c:pt>
               </c:numCache>
             </c:numRef>
@@ -1726,7 +1714,7 @@
                 <c:formatCode>General</c:formatCode>
                 <c:ptCount val="1"/>
                 <c:pt idx="0">
-                  <c:v>0.8192</c:v>
+                  <c:v>0.8717</c:v>
                 </c:pt>
               </c:numCache>
             </c:numRef>
@@ -1738,7 +1726,7 @@
                 <c:formatCode>General</c:formatCode>
                 <c:ptCount val="1"/>
                 <c:pt idx="0">
-                  <c:v>16.55</c:v>
+                  <c:v>19.92</c:v>
                 </c:pt>
               </c:numCache>
             </c:numRef>
@@ -1751,204 +1739,6 @@
           <c:tx>
             <c:strRef>
               <c:f>Sheet1!$B$7</c:f>
-              <c:strCache>
-                <c:ptCount val="1"/>
-                <c:pt idx="0">
-                  <c:v>VNet</c:v>
-                </c:pt>
-              </c:strCache>
-            </c:strRef>
-          </c:tx>
-          <c:spPr>
-            <a:solidFill>
-              <a:srgbClr val="1F3A68"/>
-            </a:solidFill>
-            <a:ln>
-              <a:solidFill>
-                <a:srgbClr val="FFFFFF"/>
-              </a:solidFill>
-            </a:ln>
-          </c:spPr>
-          <c:invertIfNegative val="0"/>
-          <c:dLbls>
-            <c:dLbl>
-              <c:idx val="0"/>
-              <c:tx>
-                <c:rich>
-                  <a:bodyPr/>
-                  <a:lstStyle/>
-                  <a:p>
-                    <a:r>
-                      <a:rPr sz="900">
-                        <a:solidFill>
-                          <a:srgbClr val="1E2430"/>
-                        </a:solidFill>
-                        <a:latin typeface="Calibri"/>
-                      </a:rPr>
-                      <a:t>VNet</a:t>
-                    </a:r>
-                  </a:p>
-                </c:rich>
-              </c:tx>
-              <c:dLblPos val="r"/>
-              <c:showLegendKey val="0"/>
-              <c:showVal val="1"/>
-              <c:showCatName val="0"/>
-              <c:showSerName val="0"/>
-              <c:showPercent val="0"/>
-              <c:showBubbleSize val="0"/>
-            </c:dLbl>
-            <c:showLegendKey val="0"/>
-            <c:showVal val="0"/>
-            <c:showCatName val="0"/>
-            <c:showSerName val="0"/>
-            <c:showPercent val="0"/>
-            <c:showBubbleSize val="0"/>
-            <c:showLeaderLines val="1"/>
-          </c:dLbls>
-          <c:xVal>
-            <c:numRef>
-              <c:f>Sheet1!$A$8:$A$8</c:f>
-              <c:numCache>
-                <c:formatCode>General</c:formatCode>
-                <c:ptCount val="1"/>
-                <c:pt idx="0">
-                  <c:v>0.0375</c:v>
-                </c:pt>
-              </c:numCache>
-            </c:numRef>
-          </c:xVal>
-          <c:yVal>
-            <c:numRef>
-              <c:f>Sheet1!$B$8:$B$8</c:f>
-              <c:numCache>
-                <c:formatCode>General</c:formatCode>
-                <c:ptCount val="1"/>
-                <c:pt idx="0">
-                  <c:v>0.7965</c:v>
-                </c:pt>
-              </c:numCache>
-            </c:numRef>
-          </c:yVal>
-          <c:bubbleSize>
-            <c:numRef>
-              <c:f>Sheet1!$C$8:$C$8</c:f>
-              <c:numCache>
-                <c:formatCode>General</c:formatCode>
-                <c:ptCount val="1"/>
-                <c:pt idx="0">
-                  <c:v>1.4</c:v>
-                </c:pt>
-              </c:numCache>
-            </c:numRef>
-          </c:bubbleSize>
-          <c:bubble3D val="0"/>
-        </c:ser>
-        <c:ser>
-          <c:idx val="3"/>
-          <c:order val="3"/>
-          <c:tx>
-            <c:strRef>
-              <c:f>Sheet1!$B$10</c:f>
-              <c:strCache>
-                <c:ptCount val="1"/>
-                <c:pt idx="0">
-                  <c:v>UNETR</c:v>
-                </c:pt>
-              </c:strCache>
-            </c:strRef>
-          </c:tx>
-          <c:spPr>
-            <a:solidFill>
-              <a:srgbClr val="B4532A"/>
-            </a:solidFill>
-            <a:ln>
-              <a:solidFill>
-                <a:srgbClr val="FFFFFF"/>
-              </a:solidFill>
-            </a:ln>
-          </c:spPr>
-          <c:invertIfNegative val="0"/>
-          <c:dLbls>
-            <c:dLbl>
-              <c:idx val="0"/>
-              <c:tx>
-                <c:rich>
-                  <a:bodyPr/>
-                  <a:lstStyle/>
-                  <a:p>
-                    <a:r>
-                      <a:rPr sz="900">
-                        <a:solidFill>
-                          <a:srgbClr val="1E2430"/>
-                        </a:solidFill>
-                        <a:latin typeface="Calibri"/>
-                      </a:rPr>
-                      <a:t>UNETR</a:t>
-                    </a:r>
-                  </a:p>
-                </c:rich>
-              </c:tx>
-              <c:dLblPos val="r"/>
-              <c:showLegendKey val="0"/>
-              <c:showVal val="1"/>
-              <c:showCatName val="0"/>
-              <c:showSerName val="0"/>
-              <c:showPercent val="0"/>
-              <c:showBubbleSize val="0"/>
-            </c:dLbl>
-            <c:showLegendKey val="0"/>
-            <c:showVal val="0"/>
-            <c:showCatName val="0"/>
-            <c:showSerName val="0"/>
-            <c:showPercent val="0"/>
-            <c:showBubbleSize val="0"/>
-            <c:showLeaderLines val="1"/>
-          </c:dLbls>
-          <c:xVal>
-            <c:numRef>
-              <c:f>Sheet1!$A$11:$A$11</c:f>
-              <c:numCache>
-                <c:formatCode>General</c:formatCode>
-                <c:ptCount val="1"/>
-                <c:pt idx="0">
-                  <c:v>0.2094</c:v>
-                </c:pt>
-              </c:numCache>
-            </c:numRef>
-          </c:xVal>
-          <c:yVal>
-            <c:numRef>
-              <c:f>Sheet1!$B$11:$B$11</c:f>
-              <c:numCache>
-                <c:formatCode>General</c:formatCode>
-                <c:ptCount val="1"/>
-                <c:pt idx="0">
-                  <c:v>0.7056</c:v>
-                </c:pt>
-              </c:numCache>
-            </c:numRef>
-          </c:yVal>
-          <c:bubbleSize>
-            <c:numRef>
-              <c:f>Sheet1!$C$11:$C$11</c:f>
-              <c:numCache>
-                <c:formatCode>General</c:formatCode>
-                <c:ptCount val="1"/>
-                <c:pt idx="0">
-                  <c:v>137.6</c:v>
-                </c:pt>
-              </c:numCache>
-            </c:numRef>
-          </c:bubbleSize>
-          <c:bubble3D val="0"/>
-        </c:ser>
-        <c:ser>
-          <c:idx val="4"/>
-          <c:order val="4"/>
-          <c:tx>
-            <c:strRef>
-              <c:f>Sheet1!$B$13</c:f>
               <c:strCache>
                 <c:ptCount val="1"/>
                 <c:pt idx="0">
@@ -2006,36 +1796,36 @@
           </c:dLbls>
           <c:xVal>
             <c:numRef>
-              <c:f>Sheet1!$A$14:$A$14</c:f>
+              <c:f>Sheet1!$A$8:$A$8</c:f>
               <c:numCache>
                 <c:formatCode>General</c:formatCode>
                 <c:ptCount val="1"/>
                 <c:pt idx="0">
-                  <c:v>0.4893</c:v>
+                  <c:v>31.92</c:v>
                 </c:pt>
               </c:numCache>
             </c:numRef>
           </c:xVal>
           <c:yVal>
             <c:numRef>
-              <c:f>Sheet1!$B$14:$B$14</c:f>
+              <c:f>Sheet1!$B$8:$B$8</c:f>
               <c:numCache>
                 <c:formatCode>General</c:formatCode>
                 <c:ptCount val="1"/>
                 <c:pt idx="0">
-                  <c:v>0.7462</c:v>
+                  <c:v>0.836</c:v>
                 </c:pt>
               </c:numCache>
             </c:numRef>
           </c:yVal>
           <c:bubbleSize>
             <c:numRef>
-              <c:f>Sheet1!$C$14:$C$14</c:f>
+              <c:f>Sheet1!$C$8:$C$8</c:f>
               <c:numCache>
                 <c:formatCode>General</c:formatCode>
                 <c:ptCount val="1"/>
                 <c:pt idx="0">
-                  <c:v>10.52</c:v>
+                  <c:v>72.77</c:v>
                 </c:pt>
               </c:numCache>
             </c:numRef>
@@ -2043,15 +1833,15 @@
           <c:bubble3D val="0"/>
         </c:ser>
         <c:ser>
-          <c:idx val="5"/>
-          <c:order val="5"/>
+          <c:idx val="3"/>
+          <c:order val="3"/>
           <c:tx>
             <c:strRef>
-              <c:f>Sheet1!$B$16</c:f>
+              <c:f>Sheet1!$B$10</c:f>
               <c:strCache>
                 <c:ptCount val="1"/>
                 <c:pt idx="0">
-                  <c:v>TransBTS</c:v>
+                  <c:v>CNN mean</c:v>
                 </c:pt>
               </c:strCache>
             </c:strRef>
@@ -2082,7 +1872,7 @@
                         </a:solidFill>
                         <a:latin typeface="Calibri"/>
                       </a:rPr>
-                      <a:t>TransBTS</a:t>
+                      <a:t>CNN mean</a:t>
                     </a:r>
                   </a:p>
                 </c:rich>
@@ -2105,36 +1895,135 @@
           </c:dLbls>
           <c:xVal>
             <c:numRef>
-              <c:f>Sheet1!$A$17:$A$17</c:f>
+              <c:f>Sheet1!$A$11:$A$11</c:f>
               <c:numCache>
                 <c:formatCode>General</c:formatCode>
                 <c:ptCount val="1"/>
                 <c:pt idx="0">
-                  <c:v>0.1291</c:v>
+                  <c:v>16.28</c:v>
                 </c:pt>
               </c:numCache>
             </c:numRef>
           </c:xVal>
           <c:yVal>
             <c:numRef>
-              <c:f>Sheet1!$B$17:$B$17</c:f>
+              <c:f>Sheet1!$B$11:$B$11</c:f>
               <c:numCache>
                 <c:formatCode>General</c:formatCode>
                 <c:ptCount val="1"/>
                 <c:pt idx="0">
-                  <c:v>0.7291</c:v>
+                  <c:v>0.8512</c:v>
                 </c:pt>
               </c:numCache>
             </c:numRef>
           </c:yVal>
           <c:bubbleSize>
             <c:numRef>
-              <c:f>Sheet1!$C$17:$C$17</c:f>
+              <c:f>Sheet1!$C$11:$C$11</c:f>
               <c:numCache>
                 <c:formatCode>General</c:formatCode>
                 <c:ptCount val="1"/>
                 <c:pt idx="0">
-                  <c:v>35.81</c:v>
+                  <c:v>51.34</c:v>
+                </c:pt>
+              </c:numCache>
+            </c:numRef>
+          </c:bubbleSize>
+          <c:bubble3D val="0"/>
+        </c:ser>
+        <c:ser>
+          <c:idx val="4"/>
+          <c:order val="4"/>
+          <c:tx>
+            <c:strRef>
+              <c:f>Sheet1!$B$13</c:f>
+              <c:strCache>
+                <c:ptCount val="1"/>
+                <c:pt idx="0">
+                  <c:v>Proposed</c:v>
+                </c:pt>
+              </c:strCache>
+            </c:strRef>
+          </c:tx>
+          <c:spPr>
+            <a:solidFill>
+              <a:srgbClr val="2E7D74"/>
+            </a:solidFill>
+            <a:ln>
+              <a:solidFill>
+                <a:srgbClr val="FFFFFF"/>
+              </a:solidFill>
+            </a:ln>
+          </c:spPr>
+          <c:invertIfNegative val="0"/>
+          <c:dLbls>
+            <c:dLbl>
+              <c:idx val="0"/>
+              <c:tx>
+                <c:rich>
+                  <a:bodyPr/>
+                  <a:lstStyle/>
+                  <a:p>
+                    <a:r>
+                      <a:rPr sz="900">
+                        <a:solidFill>
+                          <a:srgbClr val="1E2430"/>
+                        </a:solidFill>
+                        <a:latin typeface="Calibri"/>
+                      </a:rPr>
+                      <a:t>Proposed</a:t>
+                    </a:r>
+                  </a:p>
+                </c:rich>
+              </c:tx>
+              <c:dLblPos val="l"/>
+              <c:showLegendKey val="0"/>
+              <c:showVal val="1"/>
+              <c:showCatName val="0"/>
+              <c:showSerName val="0"/>
+              <c:showPercent val="0"/>
+              <c:showBubbleSize val="0"/>
+            </c:dLbl>
+            <c:showLegendKey val="0"/>
+            <c:showVal val="0"/>
+            <c:showCatName val="0"/>
+            <c:showSerName val="0"/>
+            <c:showPercent val="0"/>
+            <c:showBubbleSize val="0"/>
+            <c:showLeaderLines val="1"/>
+          </c:dLbls>
+          <c:xVal>
+            <c:numRef>
+              <c:f>Sheet1!$A$14:$A$14</c:f>
+              <c:numCache>
+                <c:formatCode>General</c:formatCode>
+                <c:ptCount val="1"/>
+                <c:pt idx="0">
+                  <c:v>48.2</c:v>
+                </c:pt>
+              </c:numCache>
+            </c:numRef>
+          </c:xVal>
+          <c:yVal>
+            <c:numRef>
+              <c:f>Sheet1!$B$14:$B$14</c:f>
+              <c:numCache>
+                <c:formatCode>General</c:formatCode>
+                <c:ptCount val="1"/>
+                <c:pt idx="0">
+                  <c:v>0.853</c:v>
+                </c:pt>
+              </c:numCache>
+            </c:numRef>
+          </c:yVal>
+          <c:bubbleSize>
+            <c:numRef>
+              <c:f>Sheet1!$C$14:$C$14</c:f>
+              <c:numCache>
+                <c:formatCode>General</c:formatCode>
+                <c:ptCount val="1"/>
+                <c:pt idx="0">
+                  <c:v>124.11</c:v>
                 </c:pt>
               </c:numCache>
             </c:numRef>
@@ -2158,7 +2047,7 @@
         <c:axId val="-2115720072"/>
         <c:scaling>
           <c:orientation val="minMax"/>
-          <c:max val="0.55"/>
+          <c:max val="55.0"/>
           <c:min val="0.0"/>
         </c:scaling>
         <c:delete val="0"/>
@@ -2175,7 +2064,7 @@
                       <a:srgbClr val="5B6472"/>
                     </a:solidFill>
                   </a:rPr>
-                  <a:t>Latency per volume (s, no TTA)</a:t>
+                  <a:t>Latency per case with TTA (s)</a:t>
                 </a:r>
               </a:p>
             </c:rich>
@@ -2183,7 +2072,7 @@
           <c:layout/>
           <c:overlay val="0"/>
         </c:title>
-        <c:numFmt formatCode="0.0" sourceLinked="0"/>
+        <c:numFmt formatCode="0" sourceLinked="0"/>
         <c:majorTickMark val="out"/>
         <c:minorTickMark val="none"/>
         <c:tickLblPos val="nextTo"/>
@@ -2215,8 +2104,8 @@
         <c:axId val="-2115723560"/>
         <c:scaling>
           <c:orientation val="minMax"/>
-          <c:max val="0.84"/>
-          <c:min val="0.68"/>
+          <c:max val="0.88"/>
+          <c:min val="0.82"/>
         </c:scaling>
         <c:delete val="0"/>
         <c:axPos val="l"/>
@@ -2696,7 +2585,7 @@
           <a:lstStyle/>
           <a:p>
             <a:r>
-              <a:t>Introduce the team and the guide. The project has two research outputs and one product: a 2D classification benchmark, a 3D segmentation benchmark, and the NeuroScan AI web application that deploys the models those benchmarks selected.</a:t>
+              <a:t>Introduce the team and the guide. The project has two research outputs and one product: a 2D classification benchmark, a 3D segmentation study with external validation, and the NeuroScan AI web application that deploys the models those studies selected.</a:t>
             </a:r>
           </a:p>
         </p:txBody>
@@ -3046,7 +2935,7 @@
           <a:lstStyle/>
           <a:p>
             <a:r>
-              <a:t>All six networks are implemented from scratch in one notebook and take the same four-channel 128³ input. VNet, shaded, is the deployed model; its module names match the application's network class, so its weights load unchanged.</a:t>
+              <a:t>The search gave the transformer weight only for the tumour core. SegResNet, shaded, is the deployed model; the web application loads its checkpoint with the same MONAI version and runs it without TTA.</a:t>
             </a:r>
           </a:p>
         </p:txBody>
@@ -3116,7 +3005,7 @@
           <a:lstStyle/>
           <a:p>
             <a:r>
-              <a:t>UNet leads VNet by a median 0.0119 Dice and every transformer-based model by 0.0738 to 0.1139. Best validation Dice: UNet 0.7845 (epoch 45), nnU-Net-style 0.7824 (50), VNet 0.7598 (44), Swin UNETR 0.7235 (33), TransBTS 0.7102 (45), UNETR 0.6960 (39).</a:t>
+              <a:t>Best validation Dice: nnU-Net 0.8415 (epoch 55), SegResNet 0.8390 (50), Swin UNETR 0.8191 (30). The ensemble has the highest sensitivity in every region, from thresholds below 0.5, but not the highest Dice. Swin UNETR loses the least externally (0.047) and SegResNet the most (0.075).</a:t>
             </a:r>
           </a:p>
         </p:txBody>
@@ -3186,7 +3075,7 @@
           <a:lstStyle/>
           <a:p>
             <a:r>
-              <a:t>Swin UNETR is the slowest model (0.4893 s per volume, 5.29 training hours) despite 10.52 M parameters, because its first stage attends over 64³ tokens. TTA multiplies latency by about eight for every model. In the bubble chart, navy marks CNNs, brick transformers and teal the hybrid.</a:t>
+              <a:t>LGG cases are the weak spot of every model, because many have no enhancing tumour; SegResNet's internal lead comes mostly from them. Disagreement cannot flag a tumour that all networks miss. In the bubble chart, navy marks the CNNs, brick the transformer and teal the ensembles.</a:t>
             </a:r>
           </a:p>
         </p:txBody>
@@ -3256,7 +3145,7 @@
           <a:lstStyle/>
           <a:p>
             <a:r>
-              <a:t>Recommendation: UNet for the highest accuracy; VNet and EfficientNetB0 for deployment with limited compute. Transformers should be revisited with pretraining, more data or higher resolution.</a:t>
+              <a:t>Recommendation: SegResNet and EfficientNetB0 for deployment; in 3D, an architecturally different second network is most useful as a disagreement check. External validation changed the 3D ranking.</a:t>
             </a:r>
           </a:p>
         </p:txBody>
@@ -3396,7 +3285,7 @@
           <a:lstStyle/>
           <a:p>
             <a:r>
-              <a:t>IEEE-style references, numbered in order of first citation in this deck; all 88 references cited by the two manuscripts are included.</a:t>
+              <a:t>IEEE-style references, numbered in order of first citation in this deck; all 96 references cited by the two manuscripts are included.</a:t>
             </a:r>
           </a:p>
         </p:txBody>
@@ -3536,7 +3425,7 @@
           <a:lstStyle/>
           <a:p>
             <a:r>
-              <a:t>IEEE-style references, numbered in order of first citation in this deck; all 88 references cited by the two manuscripts are included.</a:t>
+              <a:t>IEEE-style references, numbered in order of first citation in this deck; all 96 references cited by the two manuscripts are included.</a:t>
             </a:r>
           </a:p>
         </p:txBody>
@@ -3676,7 +3565,7 @@
           <a:lstStyle/>
           <a:p>
             <a:r>
-              <a:t>One problem, two controlled benchmarks, one deployed system. The headline accuracy is measured after deduplication, and the shortcut audit qualifies it.</a:t>
+              <a:t>One problem, two controlled studies, one deployed system. The 2D headline accuracy is measured after deduplication and qualified by the shortcut audit; in 3D the honest result is that the ensemble does not beat SegResNet, while the disagreement between its members is a strong quality signal.</a:t>
             </a:r>
           </a:p>
         </p:txBody>
@@ -7615,7 +7504,7 @@
                 </a:solidFill>
                 <a:latin typeface="Calibri"/>
               </a:rPr>
-              <a:t>Based on two research manuscripts: a leakage-controlled benchmark of 2D backbones for detection and subtype classification, and a benchmark of 3D segmentation architectures on BraTS 2020</a:t>
+              <a:t>Based on two research manuscripts: a leakage-controlled benchmark of 2D backbones for detection and subtype classification, and a region-adaptive CNN-transformer ensemble for 3D segmentation with external validation</a:t>
             </a:r>
           </a:p>
         </p:txBody>
@@ -7923,7 +7812,7 @@
                 </a:solidFill>
                 <a:latin typeface="Calibri"/>
               </a:rPr>
-              <a:t>greyscale, 5×5 Gaussian, threshold 45, largest contour [47]</a:t>
+              <a:t>greyscale, 5×5 Gaussian, threshold 45, largest contour [48]</a:t>
             </a:r>
           </a:p>
         </p:txBody>
@@ -7992,7 +7881,7 @@
                 </a:solidFill>
                 <a:latin typeface="Calibri"/>
               </a:rPr>
-              <a:t>64-bit pHash [48] and a 64×64 thumbnail per image</a:t>
+              <a:t>64-bit pHash [49] and a 64×64 thumbnail per image</a:t>
             </a:r>
           </a:p>
         </p:txBody>
@@ -8097,7 +7986,7 @@
                 </a:solidFill>
                 <a:latin typeface="Calibri"/>
               </a:rPr>
-              <a:t>same label, Hamming ≤ 5 [49]: keep one; cross-label NCC ≥ 0.98 [50]: drop both</a:t>
+              <a:t>same label, Hamming ≤ 5 [50]: keep one; cross-label NCC ≥ 0.98 [51]: drop both</a:t>
             </a:r>
           </a:p>
         </p:txBody>
@@ -8307,7 +8196,7 @@
                 </a:solidFill>
                 <a:latin typeface="Calibri"/>
               </a:rPr>
-              <a:t>stratified group k-fold [51, 52]: 15% test, five folds; no test image near development</a:t>
+              <a:t>stratified group k-fold [52, 53]: 15% test, five folds; no test image near development</a:t>
             </a:r>
           </a:p>
         </p:txBody>
@@ -8551,7 +8440,7 @@
                           </a:solidFill>
                           <a:latin typeface="Calibri"/>
                         </a:rPr>
-                        <a:t>Br35H [53], Chakrabarty [54]</a:t>
+                        <a:t>Br35H [54], Chakrabarty [55]</a:t>
                       </a:r>
                     </a:p>
                   </a:txBody>
@@ -8691,7 +8580,7 @@
                           </a:solidFill>
                           <a:latin typeface="Calibri"/>
                         </a:rPr>
-                        <a:t>Bhuvaji [55], Cheng [13, 56, 57]</a:t>
+                        <a:t>Bhuvaji [56], Cheng [17, 57, 58]</a:t>
                       </a:r>
                     </a:p>
                   </a:txBody>
@@ -8874,7 +8763,7 @@
         </p:nvGraphicFramePr>
         <p:xfrm>
           <a:off x="6263640" y="2468880"/>
-          <a:ext cx="5376672" cy="2373376"/>
+          <a:ext cx="5376672" cy="1987296"/>
         </p:xfrm>
         <a:graphic>
           <a:graphicData uri="http://schemas.openxmlformats.org/drawingml/2006/chart">
@@ -8890,8 +8779,8 @@
         </p:nvSpPr>
         <p:spPr>
           <a:xfrm>
-            <a:off x="6263640" y="5070856"/>
-            <a:ext cx="5376672" cy="1101344"/>
+            <a:off x="6263640" y="4684776"/>
+            <a:ext cx="5376672" cy="1487423"/>
           </a:xfrm>
           <a:prstGeom prst="rect">
             <a:avLst/>
@@ -8934,8 +8823,8 @@
         </p:nvSpPr>
         <p:spPr>
           <a:xfrm>
-            <a:off x="6428231" y="5235448"/>
-            <a:ext cx="5047488" cy="772160"/>
+            <a:off x="6428231" y="4849367"/>
+            <a:ext cx="5047488" cy="1158240"/>
           </a:xfrm>
           <a:prstGeom prst="rect">
             <a:avLst/>
@@ -8993,6 +8882,30 @@
                 <a:latin typeface="Calibri"/>
               </a:rPr>
               <a:t>One subtype group held 1,431 images, so the subtype test set has only 45 images (1 glioma, 13 meningioma, 31 pituitary).</a:t>
+            </a:r>
+          </a:p>
+          <a:p>
+            <a:pPr algn="l" marL="180594" indent="-180594">
+              <a:lnSpc>
+                <a:spcPct val="100000"/>
+              </a:lnSpc>
+              <a:spcAft>
+                <a:spcPts val="400"/>
+              </a:spcAft>
+              <a:buClr>
+                <a:srgbClr val="1F3A68"/>
+              </a:buClr>
+              <a:buFont typeface="Arial"/>
+              <a:buChar char="•"/>
+            </a:pPr>
+            <a:r>
+              <a:rPr sz="1100" b="0" i="0">
+                <a:solidFill>
+                  <a:srgbClr val="1E2430"/>
+                </a:solidFill>
+                <a:latin typeface="Calibri"/>
+              </a:rPr>
+              <a:t>The all-pairs search grows with the square of the pool; multi-index hashing [59] would scale it to larger collections.</a:t>
             </a:r>
           </a:p>
         </p:txBody>
@@ -9452,7 +9365,7 @@
                 </a:solidFill>
                 <a:latin typeface="Calibri"/>
               </a:rPr>
-              <a:t>CNNs lead in 3D.</a:t>
+              <a:t>Fusion does not beat SegResNet in 3D.</a:t>
             </a:r>
             <a:r>
               <a:rPr sz="1300" b="0" i="0">
@@ -9461,7 +9374,7 @@
                 </a:solidFill>
                 <a:latin typeface="Calibri"/>
               </a:rPr>
-              <a:t> UNet (0.8199) and nnU-Net-style (0.8192) lead, every CNN beats every from-scratch transformer-based model, and VNet gives 97% of the UNet Dice at about a third of its latency.</a:t>
+              <a:t> The region-adaptive ensemble (0.8530 internal, 0.7966 external) beats two of its networks but not SegResNet alone (0.8717, 0.7967), at six times its cost.</a:t>
             </a:r>
           </a:p>
         </p:txBody>
@@ -9517,6 +9430,99 @@
         <p:spPr>
           <a:xfrm>
             <a:off x="960120" y="4251959"/>
+            <a:ext cx="6172200" cy="640080"/>
+          </a:xfrm>
+          <a:prstGeom prst="rect">
+            <a:avLst/>
+          </a:prstGeom>
+          <a:noFill/>
+        </p:spPr>
+        <p:txBody>
+          <a:bodyPr wrap="square" lIns="0" rIns="0" tIns="0" bIns="0" anchor="t">
+            <a:noAutofit/>
+          </a:bodyPr>
+          <a:lstStyle/>
+          <a:p>
+            <a:pPr algn="l">
+              <a:lnSpc>
+                <a:spcPct val="100000"/>
+              </a:lnSpc>
+              <a:spcAft>
+                <a:spcPts val="400"/>
+              </a:spcAft>
+            </a:pPr>
+            <a:r>
+              <a:rPr sz="1300" b="1" i="0">
+                <a:solidFill>
+                  <a:srgbClr val="1E2430"/>
+                </a:solidFill>
+                <a:latin typeface="Calibri"/>
+              </a:rPr>
+              <a:t>Disagreement is the useful product.</a:t>
+            </a:r>
+            <a:r>
+              <a:rPr sz="1300" b="0" i="0">
+                <a:solidFill>
+                  <a:srgbClr val="1E2430"/>
+                </a:solidFill>
+                <a:latin typeface="Calibri"/>
+              </a:rPr>
+              <a:t> Disagreement between the networks flags failed cases with AUC 0.993 internally and 0.870 externally; every model loses 0.047 to 0.075 Dice on BraTS-Africa, and LGG ET Dice is 0.37 to 0.58.</a:t>
+            </a:r>
+          </a:p>
+        </p:txBody>
+      </p:sp>
+      <p:sp>
+        <p:nvSpPr>
+          <p:cNvPr id="15" name="TextBox 14"/>
+          <p:cNvSpPr txBox="1"/>
+          <p:nvPr/>
+        </p:nvSpPr>
+        <p:spPr>
+          <a:xfrm>
+            <a:off x="548640" y="5221223"/>
+            <a:ext cx="365760" cy="365760"/>
+          </a:xfrm>
+          <a:prstGeom prst="rect">
+            <a:avLst/>
+          </a:prstGeom>
+          <a:noFill/>
+        </p:spPr>
+        <p:txBody>
+          <a:bodyPr wrap="square" lIns="0" rIns="0" tIns="0" bIns="0" anchor="t">
+            <a:noAutofit/>
+          </a:bodyPr>
+          <a:lstStyle/>
+          <a:p>
+            <a:pPr algn="l">
+              <a:lnSpc>
+                <a:spcPct val="100000"/>
+              </a:lnSpc>
+              <a:spcAft>
+                <a:spcPts val="400"/>
+              </a:spcAft>
+            </a:pPr>
+            <a:r>
+              <a:rPr sz="1800" b="1" i="0">
+                <a:solidFill>
+                  <a:srgbClr val="1F3A68"/>
+                </a:solidFill>
+                <a:latin typeface="Calibri"/>
+              </a:rPr>
+              <a:t>5</a:t>
+            </a:r>
+          </a:p>
+        </p:txBody>
+      </p:sp>
+      <p:sp>
+        <p:nvSpPr>
+          <p:cNvPr id="16" name="TextBox 15"/>
+          <p:cNvSpPr txBox="1"/>
+          <p:nvPr/>
+        </p:nvSpPr>
+        <p:spPr>
+          <a:xfrm>
+            <a:off x="960120" y="5257799"/>
             <a:ext cx="6172200" cy="441960"/>
           </a:xfrm>
           <a:prstGeom prst="rect">
@@ -9545,7 +9551,7 @@
                 </a:solidFill>
                 <a:latin typeface="Calibri"/>
               </a:rPr>
-              <a:t>The weak spot is known.</a:t>
+              <a:t>From benchmark to tool.</a:t>
             </a:r>
             <a:r>
               <a:rPr sz="1300" b="0" i="0">
@@ -9554,100 +9560,7 @@
                 </a:solidFill>
                 <a:latin typeface="Calibri"/>
               </a:rPr>
-              <a:t> Whole-tumour Dice is 0.87 to 0.90 for every model, but LGG enhancing-tumour Dice is 0.16 to 0.42, a bias that must be disclosed to users.</a:t>
-            </a:r>
-          </a:p>
-        </p:txBody>
-      </p:sp>
-      <p:sp>
-        <p:nvSpPr>
-          <p:cNvPr id="15" name="TextBox 14"/>
-          <p:cNvSpPr txBox="1"/>
-          <p:nvPr/>
-        </p:nvSpPr>
-        <p:spPr>
-          <a:xfrm>
-            <a:off x="548640" y="5023104"/>
-            <a:ext cx="365760" cy="365760"/>
-          </a:xfrm>
-          <a:prstGeom prst="rect">
-            <a:avLst/>
-          </a:prstGeom>
-          <a:noFill/>
-        </p:spPr>
-        <p:txBody>
-          <a:bodyPr wrap="square" lIns="0" rIns="0" tIns="0" bIns="0" anchor="t">
-            <a:noAutofit/>
-          </a:bodyPr>
-          <a:lstStyle/>
-          <a:p>
-            <a:pPr algn="l">
-              <a:lnSpc>
-                <a:spcPct val="100000"/>
-              </a:lnSpc>
-              <a:spcAft>
-                <a:spcPts val="400"/>
-              </a:spcAft>
-            </a:pPr>
-            <a:r>
-              <a:rPr sz="1800" b="1" i="0">
-                <a:solidFill>
-                  <a:srgbClr val="1F3A68"/>
-                </a:solidFill>
-                <a:latin typeface="Calibri"/>
-              </a:rPr>
-              <a:t>5</a:t>
-            </a:r>
-          </a:p>
-        </p:txBody>
-      </p:sp>
-      <p:sp>
-        <p:nvSpPr>
-          <p:cNvPr id="16" name="TextBox 15"/>
-          <p:cNvSpPr txBox="1"/>
-          <p:nvPr/>
-        </p:nvSpPr>
-        <p:spPr>
-          <a:xfrm>
-            <a:off x="960120" y="5059680"/>
-            <a:ext cx="6172200" cy="441960"/>
-          </a:xfrm>
-          <a:prstGeom prst="rect">
-            <a:avLst/>
-          </a:prstGeom>
-          <a:noFill/>
-        </p:spPr>
-        <p:txBody>
-          <a:bodyPr wrap="square" lIns="0" rIns="0" tIns="0" bIns="0" anchor="t">
-            <a:noAutofit/>
-          </a:bodyPr>
-          <a:lstStyle/>
-          <a:p>
-            <a:pPr algn="l">
-              <a:lnSpc>
-                <a:spcPct val="100000"/>
-              </a:lnSpc>
-              <a:spcAft>
-                <a:spcPts val="400"/>
-              </a:spcAft>
-            </a:pPr>
-            <a:r>
-              <a:rPr sz="1300" b="1" i="0">
-                <a:solidFill>
-                  <a:srgbClr val="1E2430"/>
-                </a:solidFill>
-                <a:latin typeface="Calibri"/>
-              </a:rPr>
-              <a:t>From benchmark to tool.</a:t>
-            </a:r>
-            <a:r>
-              <a:rPr sz="1300" b="0" i="0">
-                <a:solidFill>
-                  <a:srgbClr val="1E2430"/>
-                </a:solidFill>
-                <a:latin typeface="Calibri"/>
-              </a:rPr>
-              <a:t> NeuroScan AI deploys EfficientNetB0 and VNet in a secure, tested application; it is a research prototype, not a diagnostic device.</a:t>
+              <a:t> NeuroScan AI deploys EfficientNetB0 and SegResNet in a secure, tested application; it is a research prototype, not a diagnostic device.</a:t>
             </a:r>
           </a:p>
         </p:txBody>
@@ -9853,7 +9766,7 @@
                 </a:solidFill>
                 <a:latin typeface="Calibri"/>
               </a:rPr>
-              <a:t>Several seeds and cross-validation for the 3D benchmark</a:t>
+              <a:t>Several seeds and cross-validated fusion for the 3D study</a:t>
             </a:r>
           </a:p>
           <a:p>
@@ -9877,7 +9790,7 @@
                 </a:solidFill>
                 <a:latin typeface="Calibri"/>
               </a:rPr>
-              <a:t>Pretrained transformer encoders; higher-resolution or patch-based training</a:t>
+              <a:t>More external cohorts with raw clinical preprocessing</a:t>
             </a:r>
           </a:p>
           <a:p>
@@ -9901,7 +9814,7 @@
                 </a:solidFill>
                 <a:latin typeface="Calibri"/>
               </a:rPr>
-              <a:t>Grade-aware ET post-processing for LGG cases</a:t>
+              <a:t>Show member disagreement in the application; grade-aware ET post-processing</a:t>
             </a:r>
           </a:p>
           <a:p>
@@ -9939,7 +9852,7 @@
         <p:spPr>
           <a:xfrm>
             <a:off x="7360920" y="4301744"/>
-            <a:ext cx="4279392" cy="1436623"/>
+            <a:ext cx="4279392" cy="1619504"/>
           </a:xfrm>
           <a:prstGeom prst="rect">
             <a:avLst/>
@@ -9983,7 +9896,7 @@
         <p:spPr>
           <a:xfrm>
             <a:off x="7525512" y="4466336"/>
-            <a:ext cx="3950208" cy="1107439"/>
+            <a:ext cx="3950208" cy="1290319"/>
           </a:xfrm>
           <a:prstGeom prst="rect">
             <a:avLst/>
@@ -10035,7 +9948,7 @@
                 </a:solidFill>
                 <a:latin typeface="Calibri"/>
               </a:rPr>
-              <a:t>Highest 3D accuracy: UNet; limited compute and deployment: VNet (3D) and EfficientNetB0 (2D)</a:t>
+              <a:t>Deploy SegResNet (3D) and EfficientNetB0 (2D); use a second, different network to measure disagreement rather than to fuse</a:t>
             </a:r>
           </a:p>
           <a:p>
@@ -10059,7 +9972,7 @@
                 </a:solidFill>
                 <a:latin typeface="Calibri"/>
               </a:rPr>
-              <a:t>Revisit transformers with pretraining, larger datasets or higher-resolution training</a:t>
+              <a:t>Validate externally before trusting an internal ranking: it changed on BraTS-Africa</a:t>
             </a:r>
           </a:p>
         </p:txBody>
@@ -10408,7 +10321,7 @@
                 </a:solidFill>
                 <a:latin typeface="Calibri"/>
               </a:rPr>
-              <a:t>“Standardised Comparison of Convolutional and Transformer Backbones for Brain Tumour Magnetic Resonance Image Classification under Perceptual-Hash Deduplication”</a:t>
+              <a:t>“Brain Tumour Magnetic Resonance Image Classification with Perceptual-Hash Deduplication: A Comparative Study Using Advanced Deep Learning Models”</a:t>
             </a:r>
           </a:p>
           <a:p>
@@ -10560,7 +10473,7 @@
                 </a:solidFill>
                 <a:latin typeface="Calibri"/>
               </a:rPr>
-              <a:t>“A Comprehensive Benchmark of Three-Dimensional Segmentation Architectures for Brain Tumour Segmentation”</a:t>
+              <a:t>“Region-Adaptive CNN-Transformer Ensembles for Brain Tumour Segmentation with External Validation and Disagreement-Based Quality Control”</a:t>
             </a:r>
           </a:p>
           <a:p>
@@ -10717,7 +10630,7 @@
                 </a:solidFill>
                 <a:latin typeface="Calibri"/>
               </a:rPr>
-              <a:t>Open-source NeuroScan AI web application (TRL 4) with 61 backend and 39 frontend automated tests</a:t>
+              <a:t>Open-source NeuroScan AI web application (TRL 4) with 64 backend and 39 frontend automated tests</a:t>
             </a:r>
           </a:p>
           <a:p>
@@ -11384,7 +11297,7 @@
                 </a:solidFill>
                 <a:latin typeface="Calibri"/>
               </a:rPr>
-              <a:t>E. I. Zacharaki et al., “Classification of brain tumor type and grade using MRI texture and shape in a machine learning scheme,” </a:t>
+              <a:t>F. Isensee, P. F. Jaeger, S. A. A. Kohl, J. Petersen, and K. H. Maier-Hein, “nnU-Net: A self-configuring method for deep learning-based biomedical image segmentation,” </a:t>
             </a:r>
             <a:r>
               <a:rPr sz="780" i="1">
@@ -11393,7 +11306,7 @@
                 </a:solidFill>
                 <a:latin typeface="Calibri"/>
               </a:rPr>
-              <a:t>Magnetic Resonance in Medicine</a:t>
+              <a:t>Nature Methods</a:t>
             </a:r>
             <a:r>
               <a:rPr sz="780" i="0">
@@ -11402,7 +11315,7 @@
                 </a:solidFill>
                 <a:latin typeface="Calibri"/>
               </a:rPr>
-              <a:t>, vol. 62, no. 6, pp. 1609–1618, 2009.</a:t>
+              <a:t>, vol. 18, no. 2, pp. 203–211, 2021.</a:t>
             </a:r>
           </a:p>
           <a:p>
@@ -11427,7 +11340,7 @@
                 </a:solidFill>
                 <a:latin typeface="Calibri"/>
               </a:rPr>
-              <a:t>N. Gordillo, E. Montseny, and P. Sobrevilla, “State of the art survey on MRI brain tumor segmentation,” </a:t>
+              <a:t>A. Myronenko, “3D MRI brain tumor segmentation using autoencoder regularization,” in </a:t>
             </a:r>
             <a:r>
               <a:rPr sz="780" i="1">
@@ -11436,7 +11349,7 @@
                 </a:solidFill>
                 <a:latin typeface="Calibri"/>
               </a:rPr>
-              <a:t>Magnetic Resonance Imaging</a:t>
+              <a:t>Brainlesion: Glioma, Multiple Sclerosis, Stroke and Traumatic Brain Injuries (BrainLes 2018)</a:t>
             </a:r>
             <a:r>
               <a:rPr sz="780" i="0">
@@ -11445,7 +11358,7 @@
                 </a:solidFill>
                 <a:latin typeface="Calibri"/>
               </a:rPr>
-              <a:t>, vol. 31, no. 8, pp. 1426–1438, 2013.</a:t>
+              <a:t>, 2019, pp. 311–320.</a:t>
             </a:r>
           </a:p>
           <a:p>
@@ -11470,7 +11383,7 @@
                 </a:solidFill>
                 <a:latin typeface="Calibri"/>
               </a:rPr>
-              <a:t>G. Litjens et al., “A survey on deep learning in medical image analysis,” </a:t>
+              <a:t>Y. He, V. Nath, D. Yang, Y. Tang, A. Myronenko, and D. Xu, “SwinUNETR-V2: Stronger Swin transformers with stagewise convolutions for 3D medical image segmentation,” in </a:t>
             </a:r>
             <a:r>
               <a:rPr sz="780" i="1">
@@ -11479,7 +11392,7 @@
                 </a:solidFill>
                 <a:latin typeface="Calibri"/>
               </a:rPr>
-              <a:t>Medical Image Analysis</a:t>
+              <a:t>Medical Image Computing and Computer Assisted Intervention (MICCAI 2023)</a:t>
             </a:r>
             <a:r>
               <a:rPr sz="780" i="0">
@@ -11488,7 +11401,7 @@
                 </a:solidFill>
                 <a:latin typeface="Calibri"/>
               </a:rPr>
-              <a:t>, vol. 42, pp. 60–88, 2017.</a:t>
+              <a:t>, 2023, pp. 416–426.</a:t>
             </a:r>
           </a:p>
           <a:p>
@@ -11513,7 +11426,7 @@
                 </a:solidFill>
                 <a:latin typeface="Calibri"/>
               </a:rPr>
-              <a:t>J. Cheng et al., “Enhanced performance of brain tumor classification via tumor region augmentation and partition,” </a:t>
+              <a:t>M. Adewole et al., “The BraTS-Africa dataset: Expanding the brain tumor segmentation data to capture African populations,” </a:t>
             </a:r>
             <a:r>
               <a:rPr sz="780" i="1">
@@ -11522,7 +11435,7 @@
                 </a:solidFill>
                 <a:latin typeface="Calibri"/>
               </a:rPr>
-              <a:t>PLoS ONE</a:t>
+              <a:t>Radiology: Artificial Intelligence</a:t>
             </a:r>
             <a:r>
               <a:rPr sz="780" i="0">
@@ -11531,7 +11444,7 @@
                 </a:solidFill>
                 <a:latin typeface="Calibri"/>
               </a:rPr>
-              <a:t>, vol. 10, no. 10, Art. no. e0140381, 2015.</a:t>
+              <a:t>, vol. 7, no. 4, Art. no. e240528, 2025.</a:t>
             </a:r>
           </a:p>
           <a:p>
@@ -11556,7 +11469,7 @@
                 </a:solidFill>
                 <a:latin typeface="Calibri"/>
               </a:rPr>
-              <a:t>J. Seetha and S. S. Raja, “Brain tumor classification using convolutional neural networks,” </a:t>
+              <a:t>E. I. Zacharaki et al., “Classification of brain tumor type and grade using MRI texture and shape in a machine learning scheme,” </a:t>
             </a:r>
             <a:r>
               <a:rPr sz="780" i="1">
@@ -11565,7 +11478,7 @@
                 </a:solidFill>
                 <a:latin typeface="Calibri"/>
               </a:rPr>
-              <a:t>Biomedical and Pharmacology Journal</a:t>
+              <a:t>Magnetic Resonance in Medicine</a:t>
             </a:r>
             <a:r>
               <a:rPr sz="780" i="0">
@@ -11574,7 +11487,7 @@
                 </a:solidFill>
                 <a:latin typeface="Calibri"/>
               </a:rPr>
-              <a:t>, vol. 11, no. 3, pp. 1457–1461, 2018.</a:t>
+              <a:t>, vol. 62, no. 6, pp. 1609–1618, 2009.</a:t>
             </a:r>
           </a:p>
           <a:p>
@@ -11599,7 +11512,7 @@
                 </a:solidFill>
                 <a:latin typeface="Calibri"/>
               </a:rPr>
-              <a:t>M. Talo, U. B. Baloglu, Ö. Yıldırım, and U. R. Acharya, “Application of deep transfer learning for automated brain abnormality classification using MR images,” </a:t>
+              <a:t>N. Gordillo, E. Montseny, and P. Sobrevilla, “State of the art survey on MRI brain tumor segmentation,” </a:t>
             </a:r>
             <a:r>
               <a:rPr sz="780" i="1">
@@ -11608,7 +11521,7 @@
                 </a:solidFill>
                 <a:latin typeface="Calibri"/>
               </a:rPr>
-              <a:t>Cognitive Systems Research</a:t>
+              <a:t>Magnetic Resonance Imaging</a:t>
             </a:r>
             <a:r>
               <a:rPr sz="780" i="0">
@@ -11617,7 +11530,7 @@
                 </a:solidFill>
                 <a:latin typeface="Calibri"/>
               </a:rPr>
-              <a:t>, vol. 54, pp. 176–188, 2019.</a:t>
+              <a:t>, vol. 31, no. 8, pp. 1426–1438, 2013.</a:t>
             </a:r>
           </a:p>
           <a:p>
@@ -11642,7 +11555,7 @@
                 </a:solidFill>
                 <a:latin typeface="Calibri"/>
               </a:rPr>
-              <a:t>K. He, X. Zhang, S. Ren, and J. Sun, “Deep residual learning for image recognition,” in </a:t>
+              <a:t>G. Litjens et al., “A survey on deep learning in medical image analysis,” </a:t>
             </a:r>
             <a:r>
               <a:rPr sz="780" i="1">
@@ -11651,7 +11564,7 @@
                 </a:solidFill>
                 <a:latin typeface="Calibri"/>
               </a:rPr>
-              <a:t>Proc. IEEE Conference on Computer Vision and Pattern Recognition (CVPR)</a:t>
+              <a:t>Medical Image Analysis</a:t>
             </a:r>
             <a:r>
               <a:rPr sz="780" i="0">
@@ -11660,7 +11573,7 @@
                 </a:solidFill>
                 <a:latin typeface="Calibri"/>
               </a:rPr>
-              <a:t>, 2016, pp. 770–778.</a:t>
+              <a:t>, vol. 42, pp. 60–88, 2017.</a:t>
             </a:r>
           </a:p>
           <a:p>
@@ -11685,7 +11598,7 @@
                 </a:solidFill>
                 <a:latin typeface="Calibri"/>
               </a:rPr>
-              <a:t>A. Krizhevsky, I. Sutskever, and G. E. Hinton, “ImageNet classification with deep convolutional neural networks,” </a:t>
+              <a:t>J. Cheng et al., “Enhanced performance of brain tumor classification via tumor region augmentation and partition,” </a:t>
             </a:r>
             <a:r>
               <a:rPr sz="780" i="1">
@@ -11694,7 +11607,7 @@
                 </a:solidFill>
                 <a:latin typeface="Calibri"/>
               </a:rPr>
-              <a:t>Communications of the ACM</a:t>
+              <a:t>PLoS ONE</a:t>
             </a:r>
             <a:r>
               <a:rPr sz="780" i="0">
@@ -11703,7 +11616,7 @@
                 </a:solidFill>
                 <a:latin typeface="Calibri"/>
               </a:rPr>
-              <a:t>, vol. 60, no. 6, pp. 84–90, 2017.</a:t>
+              <a:t>, vol. 10, no. 10, Art. no. e0140381, 2015.</a:t>
             </a:r>
           </a:p>
           <a:p>
@@ -11728,7 +11641,7 @@
                 </a:solidFill>
                 <a:latin typeface="Calibri"/>
               </a:rPr>
-              <a:t>S. Deepak and P. M. Ameer, “Brain tumor classification using deep CNN features via transfer learning,” </a:t>
+              <a:t>J. Seetha and S. S. Raja, “Brain tumor classification using convolutional neural networks,” </a:t>
             </a:r>
             <a:r>
               <a:rPr sz="780" i="1">
@@ -11737,7 +11650,7 @@
                 </a:solidFill>
                 <a:latin typeface="Calibri"/>
               </a:rPr>
-              <a:t>Computers in Biology and Medicine</a:t>
+              <a:t>Biomedical and Pharmacology Journal</a:t>
             </a:r>
             <a:r>
               <a:rPr sz="780" i="0">
@@ -11746,7 +11659,7 @@
                 </a:solidFill>
                 <a:latin typeface="Calibri"/>
               </a:rPr>
-              <a:t>, vol. 111, Art. no. 103345, 2019.</a:t>
+              <a:t>, vol. 11, no. 3, pp. 1457–1461, 2018.</a:t>
             </a:r>
           </a:p>
           <a:p>
@@ -11771,7 +11684,7 @@
                 </a:solidFill>
                 <a:latin typeface="Calibri"/>
               </a:rPr>
-              <a:t>N. Ghassemi, A. Shoeibi, and M. Rouhani, “Deep neural network with generative adversarial networks pre-training for brain tumor classification based on MR images,” </a:t>
+              <a:t>M. Talo, U. B. Baloglu, Ö. Yıldırım, and U. R. Acharya, “Application of deep transfer learning for automated brain abnormality classification using MR images,” </a:t>
             </a:r>
             <a:r>
               <a:rPr sz="780" i="1">
@@ -11780,7 +11693,7 @@
                 </a:solidFill>
                 <a:latin typeface="Calibri"/>
               </a:rPr>
-              <a:t>Biomedical Signal Processing and Control</a:t>
+              <a:t>Cognitive Systems Research</a:t>
             </a:r>
             <a:r>
               <a:rPr sz="780" i="0">
@@ -11789,7 +11702,7 @@
                 </a:solidFill>
                 <a:latin typeface="Calibri"/>
               </a:rPr>
-              <a:t>, vol. 57, Art. no. 101678, 2020.</a:t>
+              <a:t>, vol. 54, pp. 176–188, 2019.</a:t>
             </a:r>
           </a:p>
           <a:p>
@@ -11814,7 +11727,7 @@
                 </a:solidFill>
                 <a:latin typeface="Calibri"/>
               </a:rPr>
-              <a:t>A. Rehman, S. Naz, M. I. Razzak, F. Akram, and M. Imran, “A deep learning-based framework for automatic brain tumors classification using transfer learning,” </a:t>
+              <a:t>K. He, X. Zhang, S. Ren, and J. Sun, “Deep residual learning for image recognition,” in </a:t>
             </a:r>
             <a:r>
               <a:rPr sz="780" i="1">
@@ -11823,7 +11736,7 @@
                 </a:solidFill>
                 <a:latin typeface="Calibri"/>
               </a:rPr>
-              <a:t>Circuits, Systems, and Signal Processing</a:t>
+              <a:t>Proc. IEEE Conference on Computer Vision and Pattern Recognition (CVPR)</a:t>
             </a:r>
             <a:r>
               <a:rPr sz="780" i="0">
@@ -11832,7 +11745,7 @@
                 </a:solidFill>
                 <a:latin typeface="Calibri"/>
               </a:rPr>
-              <a:t>, vol. 39, no. 2, pp. 757–775, 2020.</a:t>
+              <a:t>, 2016, pp. 770–778.</a:t>
             </a:r>
           </a:p>
           <a:p>
@@ -11857,7 +11770,7 @@
                 </a:solidFill>
                 <a:latin typeface="Calibri"/>
               </a:rPr>
-              <a:t>N. Noreen, S. Palaniappan, A. Qayyum, I. Ahmad, M. Imran, and M. Shoaib, “A deep learning model based on concatenation approach for the diagnosis of brain tumor,” </a:t>
+              <a:t>A. Krizhevsky, I. Sutskever, and G. E. Hinton, “ImageNet classification with deep convolutional neural networks,” </a:t>
             </a:r>
             <a:r>
               <a:rPr sz="780" i="1">
@@ -11866,7 +11779,7 @@
                 </a:solidFill>
                 <a:latin typeface="Calibri"/>
               </a:rPr>
-              <a:t>IEEE Access</a:t>
+              <a:t>Communications of the ACM</a:t>
             </a:r>
             <a:r>
               <a:rPr sz="780" i="0">
@@ -11875,7 +11788,7 @@
                 </a:solidFill>
                 <a:latin typeface="Calibri"/>
               </a:rPr>
-              <a:t>, vol. 8, pp. 55135–55144, 2020.</a:t>
+              <a:t>, vol. 60, no. 6, pp. 84–90, 2017.</a:t>
             </a:r>
           </a:p>
           <a:p>
@@ -11900,7 +11813,7 @@
                 </a:solidFill>
                 <a:latin typeface="Calibri"/>
               </a:rPr>
-              <a:t>K. Simonyan and A. Zisserman, “Very deep convolutional networks for large-scale image recognition,” in </a:t>
+              <a:t>S. Deepak and P. M. Ameer, “Brain tumor classification using deep CNN features via transfer learning,” </a:t>
             </a:r>
             <a:r>
               <a:rPr sz="780" i="1">
@@ -11909,7 +11822,7 @@
                 </a:solidFill>
                 <a:latin typeface="Calibri"/>
               </a:rPr>
-              <a:t>Proc. International Conference on Learning Representations (ICLR)</a:t>
+              <a:t>Computers in Biology and Medicine</a:t>
             </a:r>
             <a:r>
               <a:rPr sz="780" i="0">
@@ -11918,7 +11831,93 @@
                 </a:solidFill>
                 <a:latin typeface="Calibri"/>
               </a:rPr>
-              <a:t>, 2015.</a:t>
+              <a:t>, vol. 111, Art. no. 103345, 2019.</a:t>
+            </a:r>
+          </a:p>
+          <a:p>
+            <a:pPr marL="274320" indent="-274320">
+              <a:spcAft>
+                <a:spcPts val="100"/>
+              </a:spcAft>
+            </a:pPr>
+            <a:r>
+              <a:rPr sz="780" i="0">
+                <a:solidFill>
+                  <a:srgbClr val="1E2430"/>
+                </a:solidFill>
+                <a:latin typeface="Calibri"/>
+              </a:rPr>
+              <a:t>[23]	</a:t>
+            </a:r>
+            <a:r>
+              <a:rPr sz="780" i="0">
+                <a:solidFill>
+                  <a:srgbClr val="1E2430"/>
+                </a:solidFill>
+                <a:latin typeface="Calibri"/>
+              </a:rPr>
+              <a:t>N. Ghassemi, A. Shoeibi, and M. Rouhani, “Deep neural network with generative adversarial networks pre-training for brain tumor classification based on MR images,” </a:t>
+            </a:r>
+            <a:r>
+              <a:rPr sz="780" i="1">
+                <a:solidFill>
+                  <a:srgbClr val="1E2430"/>
+                </a:solidFill>
+                <a:latin typeface="Calibri"/>
+              </a:rPr>
+              <a:t>Biomedical Signal Processing and Control</a:t>
+            </a:r>
+            <a:r>
+              <a:rPr sz="780" i="0">
+                <a:solidFill>
+                  <a:srgbClr val="1E2430"/>
+                </a:solidFill>
+                <a:latin typeface="Calibri"/>
+              </a:rPr>
+              <a:t>, vol. 57, Art. no. 101678, 2020.</a:t>
+            </a:r>
+          </a:p>
+          <a:p>
+            <a:pPr marL="274320" indent="-274320">
+              <a:spcAft>
+                <a:spcPts val="100"/>
+              </a:spcAft>
+            </a:pPr>
+            <a:r>
+              <a:rPr sz="780" i="0">
+                <a:solidFill>
+                  <a:srgbClr val="1E2430"/>
+                </a:solidFill>
+                <a:latin typeface="Calibri"/>
+              </a:rPr>
+              <a:t>[24]	</a:t>
+            </a:r>
+            <a:r>
+              <a:rPr sz="780" i="0">
+                <a:solidFill>
+                  <a:srgbClr val="1E2430"/>
+                </a:solidFill>
+                <a:latin typeface="Calibri"/>
+              </a:rPr>
+              <a:t>A. Rehman, S. Naz, M. I. Razzak, F. Akram, and M. Imran, “A deep learning-based framework for automatic brain tumors classification using transfer learning,” </a:t>
+            </a:r>
+            <a:r>
+              <a:rPr sz="780" i="1">
+                <a:solidFill>
+                  <a:srgbClr val="1E2430"/>
+                </a:solidFill>
+                <a:latin typeface="Calibri"/>
+              </a:rPr>
+              <a:t>Circuits, Systems, and Signal Processing</a:t>
+            </a:r>
+            <a:r>
+              <a:rPr sz="780" i="0">
+                <a:solidFill>
+                  <a:srgbClr val="1E2430"/>
+                </a:solidFill>
+                <a:latin typeface="Calibri"/>
+              </a:rPr>
+              <a:t>, vol. 39, no. 2, pp. 757–775, 2020.</a:t>
             </a:r>
           </a:p>
         </p:txBody>
@@ -11957,7 +11956,7 @@
                 </a:solidFill>
                 <a:latin typeface="Calibri"/>
               </a:rPr>
-              <a:t>[23]	</a:t>
+              <a:t>[25]	</a:t>
             </a:r>
             <a:r>
               <a:rPr sz="780" i="0">
@@ -11966,7 +11965,7 @@
                 </a:solidFill>
                 <a:latin typeface="Calibri"/>
               </a:rPr>
-              <a:t>C. Szegedy, V. Vanhoucke, S. Ioffe, J. Shlens, and Z. Wojna, “Rethinking the inception architecture for computer vision,” in </a:t>
+              <a:t>N. Noreen, S. Palaniappan, A. Qayyum, I. Ahmad, M. Imran, and M. Shoaib, “A deep learning model based on concatenation approach for the diagnosis of brain tumor,” </a:t>
             </a:r>
             <a:r>
               <a:rPr sz="780" i="1">
@@ -11975,7 +11974,7 @@
                 </a:solidFill>
                 <a:latin typeface="Calibri"/>
               </a:rPr>
-              <a:t>Proc. IEEE Conference on Computer Vision and Pattern Recognition (CVPR)</a:t>
+              <a:t>IEEE Access</a:t>
             </a:r>
             <a:r>
               <a:rPr sz="780" i="0">
@@ -11984,7 +11983,7 @@
                 </a:solidFill>
                 <a:latin typeface="Calibri"/>
               </a:rPr>
-              <a:t>, 2016, pp. 2818–2826.</a:t>
+              <a:t>, vol. 8, pp. 55135–55144, 2020.</a:t>
             </a:r>
           </a:p>
           <a:p>
@@ -12000,7 +11999,7 @@
                 </a:solidFill>
                 <a:latin typeface="Calibri"/>
               </a:rPr>
-              <a:t>[24]	</a:t>
+              <a:t>[26]	</a:t>
             </a:r>
             <a:r>
               <a:rPr sz="780" i="0">
@@ -12009,7 +12008,7 @@
                 </a:solidFill>
                 <a:latin typeface="Calibri"/>
               </a:rPr>
-              <a:t>G. Huang, Z. Liu, L. van der Maaten, and K. Q. Weinberger, “Densely connected convolutional networks,” in </a:t>
+              <a:t>K. Simonyan and A. Zisserman, “Very deep convolutional networks for large-scale image recognition,” in </a:t>
             </a:r>
             <a:r>
               <a:rPr sz="780" i="1">
@@ -12018,7 +12017,7 @@
                 </a:solidFill>
                 <a:latin typeface="Calibri"/>
               </a:rPr>
-              <a:t>Proc. IEEE Conference on Computer Vision and Pattern Recognition (CVPR)</a:t>
+              <a:t>Proc. International Conference on Learning Representations (ICLR)</a:t>
             </a:r>
             <a:r>
               <a:rPr sz="780" i="0">
@@ -12027,7 +12026,7 @@
                 </a:solidFill>
                 <a:latin typeface="Calibri"/>
               </a:rPr>
-              <a:t>, 2017, pp. 2261–2269.</a:t>
+              <a:t>, 2015.</a:t>
             </a:r>
           </a:p>
           <a:p>
@@ -12043,7 +12042,7 @@
                 </a:solidFill>
                 <a:latin typeface="Calibri"/>
               </a:rPr>
-              <a:t>[25]	</a:t>
+              <a:t>[27]	</a:t>
             </a:r>
             <a:r>
               <a:rPr sz="780" i="0">
@@ -12052,7 +12051,7 @@
                 </a:solidFill>
                 <a:latin typeface="Calibri"/>
               </a:rPr>
-              <a:t>M. A. Khan et al., “Multimodal brain tumor classification using deep learning and robust feature selection: A machine learning application for radiologists,” </a:t>
+              <a:t>C. Szegedy, V. Vanhoucke, S. Ioffe, J. Shlens, and Z. Wojna, “Rethinking the inception architecture for computer vision,” in </a:t>
             </a:r>
             <a:r>
               <a:rPr sz="780" i="1">
@@ -12061,7 +12060,7 @@
                 </a:solidFill>
                 <a:latin typeface="Calibri"/>
               </a:rPr>
-              <a:t>Diagnostics</a:t>
+              <a:t>Proc. IEEE Conference on Computer Vision and Pattern Recognition (CVPR)</a:t>
             </a:r>
             <a:r>
               <a:rPr sz="780" i="0">
@@ -12070,7 +12069,7 @@
                 </a:solidFill>
                 <a:latin typeface="Calibri"/>
               </a:rPr>
-              <a:t>, vol. 10, no. 8, Art. no. 565, 2020.</a:t>
+              <a:t>, 2016, pp. 2818–2826.</a:t>
             </a:r>
           </a:p>
           <a:p>
@@ -12086,7 +12085,7 @@
                 </a:solidFill>
                 <a:latin typeface="Calibri"/>
               </a:rPr>
-              <a:t>[26]	</a:t>
+              <a:t>[28]	</a:t>
             </a:r>
             <a:r>
               <a:rPr sz="780" i="0">
@@ -12095,7 +12094,7 @@
                 </a:solidFill>
                 <a:latin typeface="Calibri"/>
               </a:rPr>
-              <a:t>S. Tummala, S. Kadry, S. A. C. Bukhari, and H. T. Rauf, “Classification of brain tumor from magnetic resonance imaging using vision transformers ensembling,” </a:t>
+              <a:t>G. Huang, Z. Liu, L. van der Maaten, and K. Q. Weinberger, “Densely connected convolutional networks,” in </a:t>
             </a:r>
             <a:r>
               <a:rPr sz="780" i="1">
@@ -12104,7 +12103,7 @@
                 </a:solidFill>
                 <a:latin typeface="Calibri"/>
               </a:rPr>
-              <a:t>Current Oncology</a:t>
+              <a:t>Proc. IEEE Conference on Computer Vision and Pattern Recognition (CVPR)</a:t>
             </a:r>
             <a:r>
               <a:rPr sz="780" i="0">
@@ -12113,7 +12112,7 @@
                 </a:solidFill>
                 <a:latin typeface="Calibri"/>
               </a:rPr>
-              <a:t>, vol. 29, no. 10, pp. 7498–7511, 2022.</a:t>
+              <a:t>, 2017, pp. 2261–2269.</a:t>
             </a:r>
           </a:p>
           <a:p>
@@ -12129,7 +12128,7 @@
                 </a:solidFill>
                 <a:latin typeface="Calibri"/>
               </a:rPr>
-              <a:t>[27]	</a:t>
+              <a:t>[29]	</a:t>
             </a:r>
             <a:r>
               <a:rPr sz="780" i="0">
@@ -12138,7 +12137,7 @@
                 </a:solidFill>
                 <a:latin typeface="Calibri"/>
               </a:rPr>
-              <a:t>A. A. Asiri et al., “Advancing brain tumor detection: Harnessing the Swin Transformer's power for accurate classification and performance analysis,” </a:t>
+              <a:t>M. A. Khan et al., “Multimodal brain tumor classification using deep learning and robust feature selection: A machine learning application for radiologists,” </a:t>
             </a:r>
             <a:r>
               <a:rPr sz="780" i="1">
@@ -12147,7 +12146,7 @@
                 </a:solidFill>
                 <a:latin typeface="Calibri"/>
               </a:rPr>
-              <a:t>PeerJ Computer Science</a:t>
+              <a:t>Diagnostics</a:t>
             </a:r>
             <a:r>
               <a:rPr sz="780" i="0">
@@ -12156,7 +12155,7 @@
                 </a:solidFill>
                 <a:latin typeface="Calibri"/>
               </a:rPr>
-              <a:t>, vol. 10, Art. no. e1867, 2024.</a:t>
+              <a:t>, vol. 10, no. 8, Art. no. 565, 2020.</a:t>
             </a:r>
           </a:p>
           <a:p>
@@ -12172,7 +12171,7 @@
                 </a:solidFill>
                 <a:latin typeface="Calibri"/>
               </a:rPr>
-              <a:t>[28]	</a:t>
+              <a:t>[30]	</a:t>
             </a:r>
             <a:r>
               <a:rPr sz="780" i="0">
@@ -12181,7 +12180,7 @@
                 </a:solidFill>
                 <a:latin typeface="Calibri"/>
               </a:rPr>
-              <a:t>A. Dosovitskiy et al., “An image is worth 16x16 words: Transformers for image recognition at scale,” in </a:t>
+              <a:t>S. Tummala, S. Kadry, S. A. C. Bukhari, and H. T. Rauf, “Classification of brain tumor from magnetic resonance imaging using vision transformers ensembling,” </a:t>
             </a:r>
             <a:r>
               <a:rPr sz="780" i="1">
@@ -12190,7 +12189,7 @@
                 </a:solidFill>
                 <a:latin typeface="Calibri"/>
               </a:rPr>
-              <a:t>Proc. International Conference on Learning Representations (ICLR)</a:t>
+              <a:t>Current Oncology</a:t>
             </a:r>
             <a:r>
               <a:rPr sz="780" i="0">
@@ -12199,7 +12198,7 @@
                 </a:solidFill>
                 <a:latin typeface="Calibri"/>
               </a:rPr>
-              <a:t>, 2021.</a:t>
+              <a:t>, vol. 29, no. 10, pp. 7498–7511, 2022.</a:t>
             </a:r>
           </a:p>
           <a:p>
@@ -12215,7 +12214,7 @@
                 </a:solidFill>
                 <a:latin typeface="Calibri"/>
               </a:rPr>
-              <a:t>[29]	</a:t>
+              <a:t>[31]	</a:t>
             </a:r>
             <a:r>
               <a:rPr sz="780" i="0">
@@ -12224,7 +12223,7 @@
                 </a:solidFill>
                 <a:latin typeface="Calibri"/>
               </a:rPr>
-              <a:t>Z. Liu et al., “Swin transformer: Hierarchical vision transformer using shifted windows,” in </a:t>
+              <a:t>A. A. Asiri et al., “Advancing brain tumor detection: Harnessing the Swin Transformer's power for accurate classification and performance analysis,” </a:t>
             </a:r>
             <a:r>
               <a:rPr sz="780" i="1">
@@ -12233,7 +12232,7 @@
                 </a:solidFill>
                 <a:latin typeface="Calibri"/>
               </a:rPr>
-              <a:t>Proc. IEEE/CVF International Conference on Computer Vision (ICCV)</a:t>
+              <a:t>PeerJ Computer Science</a:t>
             </a:r>
             <a:r>
               <a:rPr sz="780" i="0">
@@ -12242,7 +12241,7 @@
                 </a:solidFill>
                 <a:latin typeface="Calibri"/>
               </a:rPr>
-              <a:t>, 2021, pp. 9992–10002.</a:t>
+              <a:t>, vol. 10, Art. no. e1867, 2024.</a:t>
             </a:r>
           </a:p>
           <a:p>
@@ -12258,7 +12257,7 @@
                 </a:solidFill>
                 <a:latin typeface="Calibri"/>
               </a:rPr>
-              <a:t>[30]	</a:t>
+              <a:t>[32]	</a:t>
             </a:r>
             <a:r>
               <a:rPr sz="780" i="0">
@@ -12267,7 +12266,7 @@
                 </a:solidFill>
                 <a:latin typeface="Calibri"/>
               </a:rPr>
-              <a:t>O. Ronneberger, P. Fischer, and T. Brox, “U-Net: Convolutional networks for biomedical image segmentation,” in </a:t>
+              <a:t>A. Dosovitskiy et al., “An image is worth 16x16 words: Transformers for image recognition at scale,” in </a:t>
             </a:r>
             <a:r>
               <a:rPr sz="780" i="1">
@@ -12276,7 +12275,7 @@
                 </a:solidFill>
                 <a:latin typeface="Calibri"/>
               </a:rPr>
-              <a:t>Medical Image Computing and Computer-Assisted Intervention (MICCAI 2015)</a:t>
+              <a:t>Proc. International Conference on Learning Representations (ICLR)</a:t>
             </a:r>
             <a:r>
               <a:rPr sz="780" i="0">
@@ -12285,7 +12284,7 @@
                 </a:solidFill>
                 <a:latin typeface="Calibri"/>
               </a:rPr>
-              <a:t>, 2015, pp. 234–241.</a:t>
+              <a:t>, 2021.</a:t>
             </a:r>
           </a:p>
           <a:p>
@@ -12301,7 +12300,7 @@
                 </a:solidFill>
                 <a:latin typeface="Calibri"/>
               </a:rPr>
-              <a:t>[31]	</a:t>
+              <a:t>[33]	</a:t>
             </a:r>
             <a:r>
               <a:rPr sz="780" i="0">
@@ -12310,7 +12309,7 @@
                 </a:solidFill>
                 <a:latin typeface="Calibri"/>
               </a:rPr>
-              <a:t>Ö. Çiçek, A. Abdulkadir, S. S. Lienkamp, T. Brox, and O. Ronneberger, “3D U-Net: Learning dense volumetric segmentation from sparse annotation,” in </a:t>
+              <a:t>Z. Liu et al., “Swin transformer: Hierarchical vision transformer using shifted windows,” in </a:t>
             </a:r>
             <a:r>
               <a:rPr sz="780" i="1">
@@ -12319,7 +12318,7 @@
                 </a:solidFill>
                 <a:latin typeface="Calibri"/>
               </a:rPr>
-              <a:t>Medical Image Computing and Computer-Assisted Intervention (MICCAI 2016)</a:t>
+              <a:t>Proc. IEEE/CVF International Conference on Computer Vision (ICCV)</a:t>
             </a:r>
             <a:r>
               <a:rPr sz="780" i="0">
@@ -12328,7 +12327,7 @@
                 </a:solidFill>
                 <a:latin typeface="Calibri"/>
               </a:rPr>
-              <a:t>, 2016, pp. 424–432.</a:t>
+              <a:t>, 2021, pp. 9992–10002.</a:t>
             </a:r>
           </a:p>
           <a:p>
@@ -12344,7 +12343,7 @@
                 </a:solidFill>
                 <a:latin typeface="Calibri"/>
               </a:rPr>
-              <a:t>[32]	</a:t>
+              <a:t>[34]	</a:t>
             </a:r>
             <a:r>
               <a:rPr sz="780" i="0">
@@ -12353,7 +12352,7 @@
                 </a:solidFill>
                 <a:latin typeface="Calibri"/>
               </a:rPr>
-              <a:t>F. Milletari, N. Navab, and S.-A. Ahmadi, “V-Net: Fully convolutional neural networks for volumetric medical image segmentation,” in </a:t>
+              <a:t>O. Ronneberger, P. Fischer, and T. Brox, “U-Net: Convolutional networks for biomedical image segmentation,” in </a:t>
             </a:r>
             <a:r>
               <a:rPr sz="780" i="1">
@@ -12362,7 +12361,7 @@
                 </a:solidFill>
                 <a:latin typeface="Calibri"/>
               </a:rPr>
-              <a:t>Proc. Fourth International Conference on 3D Vision (3DV)</a:t>
+              <a:t>Medical Image Computing and Computer-Assisted Intervention (MICCAI 2015)</a:t>
             </a:r>
             <a:r>
               <a:rPr sz="780" i="0">
@@ -12371,7 +12370,7 @@
                 </a:solidFill>
                 <a:latin typeface="Calibri"/>
               </a:rPr>
-              <a:t>, 2016, pp. 565–571.</a:t>
+              <a:t>, 2015, pp. 234–241.</a:t>
             </a:r>
           </a:p>
           <a:p>
@@ -12387,7 +12386,7 @@
                 </a:solidFill>
                 <a:latin typeface="Calibri"/>
               </a:rPr>
-              <a:t>[33]	</a:t>
+              <a:t>[35]	</a:t>
             </a:r>
             <a:r>
               <a:rPr sz="780" i="0">
@@ -12396,7 +12395,7 @@
                 </a:solidFill>
                 <a:latin typeface="Calibri"/>
               </a:rPr>
-              <a:t>F. Isensee, P. F. Jaeger, S. A. A. Kohl, J. Petersen, and K. H. Maier-Hein, “nnU-Net: A self-configuring method for deep learning-based biomedical image segmentation,” </a:t>
+              <a:t>Ö. Çiçek, A. Abdulkadir, S. S. Lienkamp, T. Brox, and O. Ronneberger, “3D U-Net: Learning dense volumetric segmentation from sparse annotation,” in </a:t>
             </a:r>
             <a:r>
               <a:rPr sz="780" i="1">
@@ -12405,7 +12404,7 @@
                 </a:solidFill>
                 <a:latin typeface="Calibri"/>
               </a:rPr>
-              <a:t>Nature Methods</a:t>
+              <a:t>Medical Image Computing and Computer-Assisted Intervention (MICCAI 2016)</a:t>
             </a:r>
             <a:r>
               <a:rPr sz="780" i="0">
@@ -12414,7 +12413,7 @@
                 </a:solidFill>
                 <a:latin typeface="Calibri"/>
               </a:rPr>
-              <a:t>, vol. 18, no. 2, pp. 203–211, 2021.</a:t>
+              <a:t>, 2016, pp. 424–432.</a:t>
             </a:r>
           </a:p>
           <a:p>
@@ -12430,7 +12429,7 @@
                 </a:solidFill>
                 <a:latin typeface="Calibri"/>
               </a:rPr>
-              <a:t>[34]	</a:t>
+              <a:t>[36]	</a:t>
             </a:r>
             <a:r>
               <a:rPr sz="780" i="0">
@@ -12473,7 +12472,7 @@
                 </a:solidFill>
                 <a:latin typeface="Calibri"/>
               </a:rPr>
-              <a:t>[35]	</a:t>
+              <a:t>[37]	</a:t>
             </a:r>
             <a:r>
               <a:rPr sz="780" i="0">
@@ -12516,7 +12515,7 @@
                 </a:solidFill>
                 <a:latin typeface="Calibri"/>
               </a:rPr>
-              <a:t>[36]	</a:t>
+              <a:t>[38]	</a:t>
             </a:r>
             <a:r>
               <a:rPr sz="780" i="0">
@@ -12559,7 +12558,7 @@
                 </a:solidFill>
                 <a:latin typeface="Calibri"/>
               </a:rPr>
-              <a:t>[37]	</a:t>
+              <a:t>[39]	</a:t>
             </a:r>
             <a:r>
               <a:rPr sz="780" i="0">
@@ -12602,7 +12601,7 @@
                 </a:solidFill>
                 <a:latin typeface="Calibri"/>
               </a:rPr>
-              <a:t>[38]	</a:t>
+              <a:t>[40]	</a:t>
             </a:r>
             <a:r>
               <a:rPr sz="780" i="0">
@@ -12611,7 +12610,7 @@
                 </a:solidFill>
                 <a:latin typeface="Calibri"/>
               </a:rPr>
-              <a:t>H. Touvron, M. Cord, M. Douze, F. Massa, A. Sablayrolles, and H. Jégou, “Training data-efficient image transformers and distillation through attention,” in </a:t>
+              <a:t>K. Kamnitsas et al., “Ensembles of multiple models and architectures for robust brain tumour segmentation,” in </a:t>
             </a:r>
             <a:r>
               <a:rPr sz="780" i="1">
@@ -12620,7 +12619,7 @@
                 </a:solidFill>
                 <a:latin typeface="Calibri"/>
               </a:rPr>
-              <a:t>Proc. 38th International Conference on Machine Learning (ICML)</a:t>
+              <a:t>Brainlesion: Glioma, Multiple Sclerosis, Stroke and Traumatic Brain Injuries (BrainLes 2017)</a:t>
             </a:r>
             <a:r>
               <a:rPr sz="780" i="0">
@@ -12629,7 +12628,7 @@
                 </a:solidFill>
                 <a:latin typeface="Calibri"/>
               </a:rPr>
-              <a:t>, 2021, pp. 10347–10357.</a:t>
+              <a:t>, 2018, pp. 450–462.</a:t>
             </a:r>
           </a:p>
           <a:p>
@@ -12645,7 +12644,7 @@
                 </a:solidFill>
                 <a:latin typeface="Calibri"/>
               </a:rPr>
-              <a:t>[39]	</a:t>
+              <a:t>[41]	</a:t>
             </a:r>
             <a:r>
               <a:rPr sz="780" i="0">
@@ -12688,7 +12687,7 @@
                 </a:solidFill>
                 <a:latin typeface="Calibri"/>
               </a:rPr>
-              <a:t>[40]	</a:t>
+              <a:t>[42]	</a:t>
             </a:r>
             <a:r>
               <a:rPr sz="780" i="0">
@@ -12731,7 +12730,7 @@
                 </a:solidFill>
                 <a:latin typeface="Calibri"/>
               </a:rPr>
-              <a:t>[41]	</a:t>
+              <a:t>[43]	</a:t>
             </a:r>
             <a:r>
               <a:rPr sz="780" i="0">
@@ -12774,7 +12773,7 @@
                 </a:solidFill>
                 <a:latin typeface="Calibri"/>
               </a:rPr>
-              <a:t>[42]	</a:t>
+              <a:t>[44]	</a:t>
             </a:r>
             <a:r>
               <a:rPr sz="780" i="0">
@@ -12802,6 +12801,135 @@
                 <a:latin typeface="Calibri"/>
               </a:rPr>
               <a:t>, vol. 2, no. 11, pp. 665–673, 2020.</a:t>
+            </a:r>
+          </a:p>
+          <a:p>
+            <a:pPr marL="274320" indent="-274320">
+              <a:spcAft>
+                <a:spcPts val="100"/>
+              </a:spcAft>
+            </a:pPr>
+            <a:r>
+              <a:rPr sz="780" i="0">
+                <a:solidFill>
+                  <a:srgbClr val="1E2430"/>
+                </a:solidFill>
+                <a:latin typeface="Calibri"/>
+              </a:rPr>
+              <a:t>[45]	</a:t>
+            </a:r>
+            <a:r>
+              <a:rPr sz="780" i="0">
+                <a:solidFill>
+                  <a:srgbClr val="1E2430"/>
+                </a:solidFill>
+                <a:latin typeface="Calibri"/>
+              </a:rPr>
+              <a:t>J. R. Zech, M. A. Badgeley, M. Liu, A. B. Costa, J. J. Titano, and E. K. Oermann, “Variable generalization performance of a deep learning model to detect pneumonia in chest radiographs: A cross-sectional study,” </a:t>
+            </a:r>
+            <a:r>
+              <a:rPr sz="780" i="1">
+                <a:solidFill>
+                  <a:srgbClr val="1E2430"/>
+                </a:solidFill>
+                <a:latin typeface="Calibri"/>
+              </a:rPr>
+              <a:t>PLOS Medicine</a:t>
+            </a:r>
+            <a:r>
+              <a:rPr sz="780" i="0">
+                <a:solidFill>
+                  <a:srgbClr val="1E2430"/>
+                </a:solidFill>
+                <a:latin typeface="Calibri"/>
+              </a:rPr>
+              <a:t>, vol. 15, no. 11, Art. no. e1002683, 2018.</a:t>
+            </a:r>
+          </a:p>
+          <a:p>
+            <a:pPr marL="274320" indent="-274320">
+              <a:spcAft>
+                <a:spcPts val="100"/>
+              </a:spcAft>
+            </a:pPr>
+            <a:r>
+              <a:rPr sz="780" i="0">
+                <a:solidFill>
+                  <a:srgbClr val="1E2430"/>
+                </a:solidFill>
+                <a:latin typeface="Calibri"/>
+              </a:rPr>
+              <a:t>[46]	</a:t>
+            </a:r>
+            <a:r>
+              <a:rPr sz="780" i="0">
+                <a:solidFill>
+                  <a:srgbClr val="1E2430"/>
+                </a:solidFill>
+                <a:latin typeface="Calibri"/>
+              </a:rPr>
+              <a:t>A. J. DeGrave, J. D. Janizek, and S.-I. Lee, “AI for radiographic COVID-19 detection selects shortcuts over signal,” </a:t>
+            </a:r>
+            <a:r>
+              <a:rPr sz="780" i="1">
+                <a:solidFill>
+                  <a:srgbClr val="1E2430"/>
+                </a:solidFill>
+                <a:latin typeface="Calibri"/>
+              </a:rPr>
+              <a:t>Nature Machine Intelligence</a:t>
+            </a:r>
+            <a:r>
+              <a:rPr sz="780" i="0">
+                <a:solidFill>
+                  <a:srgbClr val="1E2430"/>
+                </a:solidFill>
+                <a:latin typeface="Calibri"/>
+              </a:rPr>
+              <a:t>, vol. 3, no. 7, pp. 610–619, 2021.</a:t>
+            </a:r>
+          </a:p>
+          <a:p>
+            <a:pPr marL="274320" indent="-274320">
+              <a:spcAft>
+                <a:spcPts val="100"/>
+              </a:spcAft>
+            </a:pPr>
+            <a:r>
+              <a:rPr sz="780" i="0">
+                <a:solidFill>
+                  <a:srgbClr val="1E2430"/>
+                </a:solidFill>
+                <a:latin typeface="Calibri"/>
+              </a:rPr>
+              <a:t>[47]	</a:t>
+            </a:r>
+            <a:r>
+              <a:rPr sz="780" i="0">
+                <a:solidFill>
+                  <a:srgbClr val="1E2430"/>
+                </a:solidFill>
+                <a:latin typeface="Calibri"/>
+              </a:rPr>
+              <a:t>A. Jungo and M. Reyes, “Assessing reliability and challenges of uncertainty estimations for medical image segmentation,” in </a:t>
+            </a:r>
+            <a:r>
+              <a:rPr sz="780" i="1">
+                <a:solidFill>
+                  <a:srgbClr val="1E2430"/>
+                </a:solidFill>
+                <a:latin typeface="Calibri"/>
+              </a:rPr>
+              <a:t>Medical Image Computing and Computer Assisted Intervention (MICCAI 2019)</a:t>
+            </a:r>
+            <a:r>
+              <a:rPr sz="780" i="0">
+                <a:solidFill>
+                  <a:srgbClr val="1E2430"/>
+                </a:solidFill>
+                <a:latin typeface="Calibri"/>
+              </a:rPr>
+              <a:t>, 2019, pp. 48–56.</a:t>
             </a:r>
           </a:p>
         </p:txBody>
@@ -13205,7 +13333,7 @@
                           </a:solidFill>
                           <a:latin typeface="Calibri"/>
                         </a:rPr>
-                        <a:t>ResNet50 [16]</a:t>
+                        <a:t>ResNet50 [20]</a:t>
                       </a:r>
                     </a:p>
                   </a:txBody>
@@ -13345,7 +13473,7 @@
                           </a:solidFill>
                           <a:latin typeface="Calibri"/>
                         </a:rPr>
-                        <a:t>VGG16 [22]</a:t>
+                        <a:t>VGG16 [26]</a:t>
                       </a:r>
                     </a:p>
                   </a:txBody>
@@ -13485,7 +13613,7 @@
                           </a:solidFill>
                           <a:latin typeface="Calibri"/>
                         </a:rPr>
-                        <a:t>DenseNet121 [24]</a:t>
+                        <a:t>DenseNet121 [28]</a:t>
                       </a:r>
                     </a:p>
                   </a:txBody>
@@ -13625,7 +13753,7 @@
                           </a:solidFill>
                           <a:latin typeface="Calibri"/>
                         </a:rPr>
-                        <a:t>EfficientNetB0 [58]</a:t>
+                        <a:t>EfficientNetB0 [60]</a:t>
                       </a:r>
                     </a:p>
                   </a:txBody>
@@ -13765,7 +13893,7 @@
                           </a:solidFill>
                           <a:latin typeface="Calibri"/>
                         </a:rPr>
-                        <a:t>MobileNetV3-Large [59, 60]</a:t>
+                        <a:t>MobileNetV3-Large [61, 62]</a:t>
                       </a:r>
                     </a:p>
                   </a:txBody>
@@ -13905,7 +14033,7 @@
                           </a:solidFill>
                           <a:latin typeface="Calibri"/>
                         </a:rPr>
-                        <a:t>InceptionV3 [23]</a:t>
+                        <a:t>InceptionV3 [27]</a:t>
                       </a:r>
                     </a:p>
                   </a:txBody>
@@ -14045,7 +14173,7 @@
                           </a:solidFill>
                           <a:latin typeface="Calibri"/>
                         </a:rPr>
-                        <a:t>ViT-B/16 [28, 61]</a:t>
+                        <a:t>ViT-B/16 [32, 63]</a:t>
                       </a:r>
                     </a:p>
                   </a:txBody>
@@ -14185,7 +14313,7 @@
                           </a:solidFill>
                           <a:latin typeface="Calibri"/>
                         </a:rPr>
-                        <a:t>Swin-Base [29]</a:t>
+                        <a:t>Swin-Base [33]</a:t>
                       </a:r>
                     </a:p>
                   </a:txBody>
@@ -14325,7 +14453,7 @@
                           </a:solidFill>
                           <a:latin typeface="Calibri"/>
                         </a:rPr>
-                        <a:t>CoAtNet-0 [62]</a:t>
+                        <a:t>CoAtNet-0 [64]</a:t>
                       </a:r>
                     </a:p>
                   </a:txBody>
@@ -14492,7 +14620,7 @@
                 </a:solidFill>
                 <a:latin typeface="Calibri"/>
               </a:rPr>
-              <a:t>CNNs stack learned convolutional filters [63, 64]; transformers relate all image patches through self-attention. All models are ImageNet-pretrained [65, 66] torchvision or timm models in PyTorch [67], with a one-output (detection) or three-output (subtype) head.</a:t>
+              <a:t>CNNs stack learned convolutional filters [65, 66]; transformers relate all image patches through self-attention. All models are ImageNet-pretrained [67, 68] torchvision or timm models in PyTorch [69], with a one-output (detection) or three-output (subtype) head.</a:t>
             </a:r>
           </a:p>
           <a:p>
@@ -14639,7 +14767,7 @@
                 </a:solidFill>
                 <a:latin typeface="Calibri"/>
               </a:rPr>
-              <a:t>AdamW [68], learning rate 3×10⁻⁴, weight decay 0.01</a:t>
+              <a:t>AdamW [70], learning rate 3×10⁻⁴, weight decay 0.01</a:t>
             </a:r>
           </a:p>
           <a:p>
@@ -14687,7 +14815,7 @@
                 </a:solidFill>
                 <a:latin typeface="Calibri"/>
               </a:rPr>
-              <a:t>One-epoch warm-up and cosine decay [69]; half precision [70]; gradient clipping at 1.0 [71]</a:t>
+              <a:t>One-epoch warm-up and cosine decay [71]; half precision [72]; gradient clipping at 1.0 [73]</a:t>
             </a:r>
           </a:p>
           <a:p>
@@ -14711,7 +14839,7 @@
                 </a:solidFill>
                 <a:latin typeface="Calibri"/>
               </a:rPr>
-              <a:t>Flip, ±10° rotation, ±20% brightness and contrast; checkpoint at the lowest validation log-loss [72]</a:t>
+              <a:t>Flip, ±10° rotation, ±20% brightness and contrast; checkpoint at the lowest validation log-loss [74]</a:t>
             </a:r>
           </a:p>
         </p:txBody>
@@ -14821,7 +14949,7 @@
                 </a:solidFill>
                 <a:latin typeface="Calibri"/>
               </a:rPr>
-              <a:t>Temperature scaling [73] and Youden threshold [74] fitted on each validation fold</a:t>
+              <a:t>Temperature scaling [75] and Youden threshold [76] fitted on each validation fold</a:t>
             </a:r>
           </a:p>
           <a:p>
@@ -14869,7 +14997,7 @@
                 </a:solidFill>
                 <a:latin typeface="Calibri"/>
               </a:rPr>
-              <a:t>Accuracy, macro F1, AUC [75, 76], MCC [77, 78] and ECE with 15 bins [79]</a:t>
+              <a:t>Accuracy, macro F1, AUC [77, 78], MCC [79, 80] and ECE with 15 bins [81]</a:t>
             </a:r>
           </a:p>
           <a:p>
@@ -14893,7 +15021,7 @@
                 </a:solidFill>
                 <a:latin typeface="Calibri"/>
               </a:rPr>
-              <a:t>Bootstrap 95% CIs from 2,000 resamples [80]; exact McNemar tests [81], Holm-corrected over 36 pairs [82]</a:t>
+              <a:t>Bootstrap 95% CIs from 2,000 resamples [82]; exact McNemar tests [83], Holm-corrected over 36 pairs [84]</a:t>
             </a:r>
           </a:p>
         </p:txBody>
@@ -16720,7 +16848,7 @@
                 </a:solidFill>
                 <a:latin typeface="Calibri"/>
               </a:rPr>
-              <a:t>Grad-CAM [83]: correct tumour predictions peak on the lesion; a missed temporal lesion peaks at the lower border</a:t>
+              <a:t>Grad-CAM [85]: correct tumour predictions peak on the lesion; a missed temporal lesion peaks at the lower border</a:t>
             </a:r>
           </a:p>
           <a:p>
@@ -16744,7 +16872,7 @@
                 </a:solidFill>
                 <a:latin typeface="Calibri"/>
               </a:rPr>
-              <a:t>ViT-B/16 attention rollout [84] puts 42.1% of its weight outside the head on tumour-negative images</a:t>
+              <a:t>ViT-B/16 attention rollout [86] puts 42.1% of its weight outside the head on tumour-negative images</a:t>
             </a:r>
           </a:p>
           <a:p>
@@ -16768,7 +16896,7 @@
                 </a:solidFill>
                 <a:latin typeface="Calibri"/>
               </a:rPr>
-              <a:t>Occlusion sensitivity [85] outside the head: 0.7% to 19.4% (detection)</a:t>
+              <a:t>Occlusion sensitivity [87] outside the head: 0.7% to 19.4% (detection)</a:t>
             </a:r>
           </a:p>
         </p:txBody>
@@ -16896,7 +17024,7 @@
                 </a:solidFill>
                 <a:latin typeface="Calibri"/>
               </a:rPr>
-              <a:t>Head-only inputs (Otsu head mask [86]) keep 93.7% to 96.8% (detection) and 94.2% to 99.6% (subtype) accuracy</a:t>
+              <a:t>Head-only inputs (Otsu head mask [88]) keep 93.7% to 96.8% (detection) and 94.2% to 99.6% (subtype) accuracy</a:t>
             </a:r>
           </a:p>
           <a:p>
@@ -16944,7 +17072,7 @@
                 </a:solidFill>
                 <a:latin typeface="Calibri"/>
               </a:rPr>
-              <a:t>Retrained on background only, 7 of 9 detection and 9 of 9 subtype backbones beat the majority-class rate (binomial test, Holm) [42]; grey bars are not significant</a:t>
+              <a:t>Retrained on background only, 7 of 9 detection and 9 of 9 subtype backbones beat the majority-class rate (binomial test, Holm) [44]; grey bars are not significant</a:t>
             </a:r>
           </a:p>
           <a:p>
@@ -17030,7 +17158,7 @@
                 </a:solidFill>
                 <a:latin typeface="Times New Roman"/>
               </a:rPr>
-              <a:t>BraTS 2020 Data and 3D Architectures</a:t>
+              <a:t>Data, Networks and Region-Adaptive Fusion</a:t>
             </a:r>
           </a:p>
         </p:txBody>
@@ -17204,7 +17332,7 @@
         <p:spPr>
           <a:xfrm>
             <a:off x="548640" y="1234440"/>
-            <a:ext cx="4343400" cy="2203362"/>
+            <a:ext cx="4343400" cy="1947779"/>
           </a:xfrm>
           <a:prstGeom prst="rect">
             <a:avLst/>
@@ -17219,8 +17347,8 @@
         </p:nvSpPr>
         <p:spPr>
           <a:xfrm>
-            <a:off x="548640" y="3666402"/>
-            <a:ext cx="4343400" cy="2505797"/>
+            <a:off x="548640" y="3410819"/>
+            <a:ext cx="4343400" cy="2761380"/>
           </a:xfrm>
           <a:prstGeom prst="rect">
             <a:avLst/>
@@ -17253,7 +17381,7 @@
                 </a:solidFill>
                 <a:latin typeface="Calibri"/>
               </a:rPr>
-              <a:t>BraTS 2020 [2, 87, 88]: 369 cases (293 HGG, 76 LGG) with FLAIR, T1, T1CE and T2</a:t>
+              <a:t>BraTS 2020 [2, 89]: 369 cases (293 HGG, 76 LGG); split 257 / 56 / 56 by grade</a:t>
             </a:r>
           </a:p>
           <a:p>
@@ -17277,7 +17405,7 @@
                 </a:solidFill>
                 <a:latin typeface="Calibri"/>
               </a:rPr>
-              <a:t>Labels 1, 2 and 4 give nested regions: WT (all labels), TC (1 and 4), ET (4)</a:t>
+              <a:t>BraTS-Africa [13]: 60 external cases, never used for training or selection</a:t>
             </a:r>
           </a:p>
           <a:p>
@@ -17301,7 +17429,7 @@
                 </a:solidFill>
                 <a:latin typeface="Calibri"/>
               </a:rPr>
-              <a:t>Median ET volume 0.82 cm³ in LGG vs 19.46 cm³ in HGG; 27 of 76 LGG cases have no ET</a:t>
+              <a:t>Nested regions: WT (all labels), TC (core and ET), ET; 27 of 76 LGG cases have no ET</a:t>
             </a:r>
           </a:p>
           <a:p>
@@ -17325,7 +17453,7 @@
                 </a:solidFill>
                 <a:latin typeface="Calibri"/>
               </a:rPr>
-              <a:t>Foreground z-score per sequence; 240×240×155 resampled to 128³ (trilinear; masks nearest); flips, intensity scale 0.9 to 1.1 and shift ±0.1</a:t>
+              <a:t>Brain crop and foreground z-score at native 1 mm; 128³ patches, one third on tumour; rotation, scaling, mirroring, noise, brightness, contrast and gamma</a:t>
             </a:r>
           </a:p>
           <a:p>
@@ -17349,7 +17477,7 @@
                 </a:solidFill>
                 <a:latin typeface="Calibri"/>
               </a:rPr>
-              <a:t>Grade-stratified split with seed 42: 257 training, 56 validation, 56 test (44 HGG, 12 LGG)</a:t>
+              <a:t>Gaussian 128³ sliding windows with eight-flip TTA; ET size filter tuned on validation</a:t>
             </a:r>
           </a:p>
         </p:txBody>
@@ -17364,7 +17492,7 @@
         </p:nvGraphicFramePr>
         <p:xfrm>
           <a:off x="5120640" y="1234440"/>
-          <a:ext cx="6519671" cy="2688336"/>
+          <a:ext cx="6519672" cy="1536192"/>
         </p:xfrm>
         <a:graphic>
           <a:graphicData uri="http://schemas.openxmlformats.org/drawingml/2006/table">
@@ -17373,11 +17501,11 @@
                 <a:tableStyleId>{5C22544A-7EE6-4342-B048-85BDC9FD1C3A}</a:tableStyleId>
               </a:tblPr>
               <a:tblGrid>
-                <a:gridCol w="1874519"/>
+                <a:gridCol w="2103120"/>
                 <a:gridCol w="868680"/>
-                <a:gridCol w="2331720"/>
+                <a:gridCol w="2240280"/>
                 <a:gridCol w="713232"/>
-                <a:gridCol w="731520"/>
+                <a:gridCol w="594360"/>
               </a:tblGrid>
               <a:tr h="384048">
                 <a:tc>
@@ -17393,7 +17521,7 @@
                           </a:solidFill>
                           <a:latin typeface="Calibri"/>
                         </a:rPr>
-                        <a:t>Model</a:t>
+                        <a:t>Network</a:t>
                       </a:r>
                     </a:p>
                   </a:txBody>
@@ -17439,7 +17567,7 @@
                           </a:solidFill>
                           <a:latin typeface="Calibri"/>
                         </a:rPr>
-                        <a:t>Design</a:t>
+                        <a:t>Design (MONAI 1.6.1)</a:t>
                       </a:r>
                     </a:p>
                   </a:txBody>
@@ -17485,7 +17613,7 @@
                           </a:solidFill>
                           <a:latin typeface="Calibri"/>
                         </a:rPr>
-                        <a:t>GFLOPs</a:t>
+                        <a:t>Epochs</a:t>
                       </a:r>
                     </a:p>
                   </a:txBody>
@@ -17510,7 +17638,7 @@
                           </a:solidFill>
                           <a:latin typeface="Calibri"/>
                         </a:rPr>
-                        <a:t>UNet [30, 31]</a:t>
+                        <a:t>nnU-Net [10]</a:t>
                       </a:r>
                     </a:p>
                   </a:txBody>
@@ -17556,7 +17684,7 @@
                           </a:solidFill>
                           <a:latin typeface="Calibri"/>
                         </a:rPr>
-                        <a:t>Four levels, 32 to 256 channels, LeakyReLU</a:t>
+                        <a:t>Residual DynUNet, 6 stages, 32 to 320 ch.</a:t>
                       </a:r>
                     </a:p>
                   </a:txBody>
@@ -17579,7 +17707,7 @@
                           </a:solidFill>
                           <a:latin typeface="Calibri"/>
                         </a:rPr>
-                        <a:t>5.60</a:t>
+                        <a:t>31.42</a:t>
                       </a:r>
                     </a:p>
                   </a:txBody>
@@ -17602,7 +17730,7 @@
                           </a:solidFill>
                           <a:latin typeface="Calibri"/>
                         </a:rPr>
-                        <a:t>907.0</a:t>
+                        <a:t>60</a:t>
                       </a:r>
                     </a:p>
                   </a:txBody>
@@ -17627,124 +17755,7 @@
                           </a:solidFill>
                           <a:latin typeface="Calibri"/>
                         </a:rPr>
-                        <a:t>nnU-Net-style [33]</a:t>
-                      </a:r>
-                    </a:p>
-                  </a:txBody>
-                  <a:tcPr marL="64008" marR="64008" marT="27432" marB="27432" anchor="ctr">
-                    <a:solidFill>
-                      <a:srgbClr val="F3F5F8"/>
-                    </a:solidFill>
-                  </a:tcPr>
-                </a:tc>
-                <a:tc>
-                  <a:txBody>
-                    <a:bodyPr wrap="square"/>
-                    <a:lstStyle/>
-                    <a:p>
-                      <a:pPr algn="l"/>
-                      <a:r>
-                        <a:rPr sz="1000" b="0" i="0">
-                          <a:solidFill>
-                            <a:srgbClr val="1E2430"/>
-                          </a:solidFill>
-                          <a:latin typeface="Calibri"/>
-                        </a:rPr>
-                        <a:t>CNN</a:t>
-                      </a:r>
-                    </a:p>
-                  </a:txBody>
-                  <a:tcPr marL="64008" marR="64008" marT="27432" marB="27432" anchor="ctr">
-                    <a:solidFill>
-                      <a:srgbClr val="F3F5F8"/>
-                    </a:solidFill>
-                  </a:tcPr>
-                </a:tc>
-                <a:tc>
-                  <a:txBody>
-                    <a:bodyPr wrap="square"/>
-                    <a:lstStyle/>
-                    <a:p>
-                      <a:pPr algn="l"/>
-                      <a:r>
-                        <a:rPr sz="1000" b="0" i="0">
-                          <a:solidFill>
-                            <a:srgbClr val="1E2430"/>
-                          </a:solidFill>
-                          <a:latin typeface="Calibri"/>
-                        </a:rPr>
-                        <a:t>Five stages, 32 to 320 channels</a:t>
-                      </a:r>
-                    </a:p>
-                  </a:txBody>
-                  <a:tcPr marL="64008" marR="64008" marT="27432" marB="27432" anchor="ctr">
-                    <a:solidFill>
-                      <a:srgbClr val="F3F5F8"/>
-                    </a:solidFill>
-                  </a:tcPr>
-                </a:tc>
-                <a:tc>
-                  <a:txBody>
-                    <a:bodyPr wrap="square"/>
-                    <a:lstStyle/>
-                    <a:p>
-                      <a:pPr algn="ctr"/>
-                      <a:r>
-                        <a:rPr sz="1000" b="0" i="0">
-                          <a:solidFill>
-                            <a:srgbClr val="1E2430"/>
-                          </a:solidFill>
-                          <a:latin typeface="Calibri"/>
-                        </a:rPr>
-                        <a:t>16.55</a:t>
-                      </a:r>
-                    </a:p>
-                  </a:txBody>
-                  <a:tcPr marL="64008" marR="64008" marT="27432" marB="27432" anchor="ctr">
-                    <a:solidFill>
-                      <a:srgbClr val="F3F5F8"/>
-                    </a:solidFill>
-                  </a:tcPr>
-                </a:tc>
-                <a:tc>
-                  <a:txBody>
-                    <a:bodyPr wrap="square"/>
-                    <a:lstStyle/>
-                    <a:p>
-                      <a:pPr algn="ctr"/>
-                      <a:r>
-                        <a:rPr sz="1000" b="0" i="0">
-                          <a:solidFill>
-                            <a:srgbClr val="1E2430"/>
-                          </a:solidFill>
-                          <a:latin typeface="Calibri"/>
-                        </a:rPr>
-                        <a:t>956.3</a:t>
-                      </a:r>
-                    </a:p>
-                  </a:txBody>
-                  <a:tcPr marL="64008" marR="64008" marT="27432" marB="27432" anchor="ctr">
-                    <a:solidFill>
-                      <a:srgbClr val="F3F5F8"/>
-                    </a:solidFill>
-                  </a:tcPr>
-                </a:tc>
-              </a:tr>
-              <a:tr h="384048">
-                <a:tc>
-                  <a:txBody>
-                    <a:bodyPr wrap="square"/>
-                    <a:lstStyle/>
-                    <a:p>
-                      <a:pPr algn="l"/>
-                      <a:r>
-                        <a:rPr sz="1000" b="0" i="0">
-                          <a:solidFill>
-                            <a:srgbClr val="1E2430"/>
-                          </a:solidFill>
-                          <a:latin typeface="Calibri"/>
-                        </a:rPr>
-                        <a:t>VNet [32]</a:t>
+                        <a:t>SegResNet [11]</a:t>
                       </a:r>
                     </a:p>
                   </a:txBody>
@@ -17790,7 +17801,7 @@
                           </a:solidFill>
                           <a:latin typeface="Calibri"/>
                         </a:rPr>
-                        <a:t>Residual blocks, 16 to 128 channels, PReLU</a:t>
+                        <a:t>SegResNetDS, 32 filters, blocks 1-2-2-4</a:t>
                       </a:r>
                     </a:p>
                   </a:txBody>
@@ -17813,7 +17824,7 @@
                           </a:solidFill>
                           <a:latin typeface="Calibri"/>
                         </a:rPr>
-                        <a:t>1.40</a:t>
+                        <a:t>19.92</a:t>
                       </a:r>
                     </a:p>
                   </a:txBody>
@@ -17836,7 +17847,7 @@
                           </a:solidFill>
                           <a:latin typeface="Calibri"/>
                         </a:rPr>
-                        <a:t>149.9</a:t>
+                        <a:t>60</a:t>
                       </a:r>
                     </a:p>
                   </a:txBody>
@@ -17861,124 +17872,7 @@
                           </a:solidFill>
                           <a:latin typeface="Calibri"/>
                         </a:rPr>
-                        <a:t>UNETR [34]</a:t>
-                      </a:r>
-                    </a:p>
-                  </a:txBody>
-                  <a:tcPr marL="64008" marR="64008" marT="27432" marB="27432" anchor="ctr">
-                    <a:solidFill>
-                      <a:srgbClr val="F3F5F8"/>
-                    </a:solidFill>
-                  </a:tcPr>
-                </a:tc>
-                <a:tc>
-                  <a:txBody>
-                    <a:bodyPr wrap="square"/>
-                    <a:lstStyle/>
-                    <a:p>
-                      <a:pPr algn="l"/>
-                      <a:r>
-                        <a:rPr sz="1000" b="0" i="0">
-                          <a:solidFill>
-                            <a:srgbClr val="1E2430"/>
-                          </a:solidFill>
-                          <a:latin typeface="Calibri"/>
-                        </a:rPr>
-                        <a:t>Transformer</a:t>
-                      </a:r>
-                    </a:p>
-                  </a:txBody>
-                  <a:tcPr marL="64008" marR="64008" marT="27432" marB="27432" anchor="ctr">
-                    <a:solidFill>
-                      <a:srgbClr val="F3F5F8"/>
-                    </a:solidFill>
-                  </a:tcPr>
-                </a:tc>
-                <a:tc>
-                  <a:txBody>
-                    <a:bodyPr wrap="square"/>
-                    <a:lstStyle/>
-                    <a:p>
-                      <a:pPr algn="l"/>
-                      <a:r>
-                        <a:rPr sz="1000" b="0" i="0">
-                          <a:solidFill>
-                            <a:srgbClr val="1E2430"/>
-                          </a:solidFill>
-                          <a:latin typeface="Calibri"/>
-                        </a:rPr>
-                        <a:t>ViT-Base on 16³ patches: 512 tokens</a:t>
-                      </a:r>
-                    </a:p>
-                  </a:txBody>
-                  <a:tcPr marL="64008" marR="64008" marT="27432" marB="27432" anchor="ctr">
-                    <a:solidFill>
-                      <a:srgbClr val="F3F5F8"/>
-                    </a:solidFill>
-                  </a:tcPr>
-                </a:tc>
-                <a:tc>
-                  <a:txBody>
-                    <a:bodyPr wrap="square"/>
-                    <a:lstStyle/>
-                    <a:p>
-                      <a:pPr algn="ctr"/>
-                      <a:r>
-                        <a:rPr sz="1000" b="0" i="0">
-                          <a:solidFill>
-                            <a:srgbClr val="1E2430"/>
-                          </a:solidFill>
-                          <a:latin typeface="Calibri"/>
-                        </a:rPr>
-                        <a:t>137.60</a:t>
-                      </a:r>
-                    </a:p>
-                  </a:txBody>
-                  <a:tcPr marL="64008" marR="64008" marT="27432" marB="27432" anchor="ctr">
-                    <a:solidFill>
-                      <a:srgbClr val="F3F5F8"/>
-                    </a:solidFill>
-                  </a:tcPr>
-                </a:tc>
-                <a:tc>
-                  <a:txBody>
-                    <a:bodyPr wrap="square"/>
-                    <a:lstStyle/>
-                    <a:p>
-                      <a:pPr algn="ctr"/>
-                      <a:r>
-                        <a:rPr sz="1000" b="0" i="0">
-                          <a:solidFill>
-                            <a:srgbClr val="1E2430"/>
-                          </a:solidFill>
-                          <a:latin typeface="Calibri"/>
-                        </a:rPr>
-                        <a:t>1,761.7</a:t>
-                      </a:r>
-                    </a:p>
-                  </a:txBody>
-                  <a:tcPr marL="64008" marR="64008" marT="27432" marB="27432" anchor="ctr">
-                    <a:solidFill>
-                      <a:srgbClr val="F3F5F8"/>
-                    </a:solidFill>
-                  </a:tcPr>
-                </a:tc>
-              </a:tr>
-              <a:tr h="384048">
-                <a:tc>
-                  <a:txBody>
-                    <a:bodyPr wrap="square"/>
-                    <a:lstStyle/>
-                    <a:p>
-                      <a:pPr algn="l"/>
-                      <a:r>
-                        <a:rPr sz="1000" b="0" i="0">
-                          <a:solidFill>
-                            <a:srgbClr val="1E2430"/>
-                          </a:solidFill>
-                          <a:latin typeface="Calibri"/>
-                        </a:rPr>
-                        <a:t>Swin UNETR [35]</a:t>
+                        <a:t>Swin UNETR-v2 [12, 37]</a:t>
                       </a:r>
                     </a:p>
                   </a:txBody>
@@ -18024,7 +17918,7 @@
                           </a:solidFill>
                           <a:latin typeface="Calibri"/>
                         </a:rPr>
-                        <a:t>Swin encoder, 2³ patches, 7³ windows</a:t>
+                        <a:t>Swin encoder, feature size 48</a:t>
                       </a:r>
                     </a:p>
                   </a:txBody>
@@ -18047,7 +17941,7 @@
                           </a:solidFill>
                           <a:latin typeface="Calibri"/>
                         </a:rPr>
-                        <a:t>10.52</a:t>
+                        <a:t>72.77</a:t>
                       </a:r>
                     </a:p>
                   </a:txBody>
@@ -18070,7 +17964,7 @@
                           </a:solidFill>
                           <a:latin typeface="Calibri"/>
                         </a:rPr>
-                        <a:t>797.1</a:t>
+                        <a:t>30</a:t>
                       </a:r>
                     </a:p>
                   </a:txBody>
@@ -18081,123 +17975,6 @@
                   </a:tcPr>
                 </a:tc>
               </a:tr>
-              <a:tr h="384048">
-                <a:tc>
-                  <a:txBody>
-                    <a:bodyPr wrap="square"/>
-                    <a:lstStyle/>
-                    <a:p>
-                      <a:pPr algn="l"/>
-                      <a:r>
-                        <a:rPr sz="1000" b="0" i="0">
-                          <a:solidFill>
-                            <a:srgbClr val="1E2430"/>
-                          </a:solidFill>
-                          <a:latin typeface="Calibri"/>
-                        </a:rPr>
-                        <a:t>TransBTS [36]</a:t>
-                      </a:r>
-                    </a:p>
-                  </a:txBody>
-                  <a:tcPr marL="64008" marR="64008" marT="27432" marB="27432" anchor="ctr">
-                    <a:solidFill>
-                      <a:srgbClr val="F3F5F8"/>
-                    </a:solidFill>
-                  </a:tcPr>
-                </a:tc>
-                <a:tc>
-                  <a:txBody>
-                    <a:bodyPr wrap="square"/>
-                    <a:lstStyle/>
-                    <a:p>
-                      <a:pPr algn="l"/>
-                      <a:r>
-                        <a:rPr sz="1000" b="0" i="0">
-                          <a:solidFill>
-                            <a:srgbClr val="1E2430"/>
-                          </a:solidFill>
-                          <a:latin typeface="Calibri"/>
-                        </a:rPr>
-                        <a:t>Hybrid</a:t>
-                      </a:r>
-                    </a:p>
-                  </a:txBody>
-                  <a:tcPr marL="64008" marR="64008" marT="27432" marB="27432" anchor="ctr">
-                    <a:solidFill>
-                      <a:srgbClr val="F3F5F8"/>
-                    </a:solidFill>
-                  </a:tcPr>
-                </a:tc>
-                <a:tc>
-                  <a:txBody>
-                    <a:bodyPr wrap="square"/>
-                    <a:lstStyle/>
-                    <a:p>
-                      <a:pPr algn="l"/>
-                      <a:r>
-                        <a:rPr sz="1000" b="0" i="0">
-                          <a:solidFill>
-                            <a:srgbClr val="1E2430"/>
-                          </a:solidFill>
-                          <a:latin typeface="Calibri"/>
-                        </a:rPr>
-                        <a:t>CNN encoder, 4 transformer layers on 8³ tokens</a:t>
-                      </a:r>
-                    </a:p>
-                  </a:txBody>
-                  <a:tcPr marL="64008" marR="64008" marT="27432" marB="27432" anchor="ctr">
-                    <a:solidFill>
-                      <a:srgbClr val="F3F5F8"/>
-                    </a:solidFill>
-                  </a:tcPr>
-                </a:tc>
-                <a:tc>
-                  <a:txBody>
-                    <a:bodyPr wrap="square"/>
-                    <a:lstStyle/>
-                    <a:p>
-                      <a:pPr algn="ctr"/>
-                      <a:r>
-                        <a:rPr sz="1000" b="0" i="0">
-                          <a:solidFill>
-                            <a:srgbClr val="1E2430"/>
-                          </a:solidFill>
-                          <a:latin typeface="Calibri"/>
-                        </a:rPr>
-                        <a:t>35.81</a:t>
-                      </a:r>
-                    </a:p>
-                  </a:txBody>
-                  <a:tcPr marL="64008" marR="64008" marT="27432" marB="27432" anchor="ctr">
-                    <a:solidFill>
-                      <a:srgbClr val="F3F5F8"/>
-                    </a:solidFill>
-                  </a:tcPr>
-                </a:tc>
-                <a:tc>
-                  <a:txBody>
-                    <a:bodyPr wrap="square"/>
-                    <a:lstStyle/>
-                    <a:p>
-                      <a:pPr algn="ctr"/>
-                      <a:r>
-                        <a:rPr sz="1000" b="0" i="0">
-                          <a:solidFill>
-                            <a:srgbClr val="1E2430"/>
-                          </a:solidFill>
-                          <a:latin typeface="Calibri"/>
-                        </a:rPr>
-                        <a:t>996.2</a:t>
-                      </a:r>
-                    </a:p>
-                  </a:txBody>
-                  <a:tcPr marL="64008" marR="64008" marT="27432" marB="27432" anchor="ctr">
-                    <a:solidFill>
-                      <a:srgbClr val="F3F5F8"/>
-                    </a:solidFill>
-                  </a:tcPr>
-                </a:tc>
-              </a:tr>
             </a:tbl>
           </a:graphicData>
         </a:graphic>
@@ -18210,8 +17987,8 @@
         </p:nvSpPr>
         <p:spPr>
           <a:xfrm>
-            <a:off x="5120640" y="4151376"/>
-            <a:ext cx="6519672" cy="1863343"/>
+            <a:off x="5120640" y="2999232"/>
+            <a:ext cx="6519672" cy="1644903"/>
           </a:xfrm>
           <a:prstGeom prst="rect">
             <a:avLst/>
@@ -18254,8 +18031,8 @@
         </p:nvSpPr>
         <p:spPr>
           <a:xfrm>
-            <a:off x="5285231" y="4315968"/>
-            <a:ext cx="6190488" cy="1534159"/>
+            <a:off x="5285231" y="3163824"/>
+            <a:ext cx="6190488" cy="1315719"/>
           </a:xfrm>
           <a:prstGeom prst="rect">
             <a:avLst/>
@@ -18283,7 +18060,7 @@
                 </a:solidFill>
                 <a:latin typeface="Calibri"/>
               </a:rPr>
-              <a:t>Identical budget: 50 epochs, effective batch 4, 3,250 optimiser steps</a:t>
+              <a:t>Region-adaptive hybrid ensemble</a:t>
             </a:r>
           </a:p>
           <a:p>
@@ -18307,7 +18084,7 @@
                 </a:solidFill>
                 <a:latin typeface="Calibri"/>
               </a:rPr>
-              <a:t>Loss per region: soft Dice plus binary cross-entropy, with deep supervision in UNet, nnU-Net-style, VNet and TransBTS</a:t>
+              <a:t>For each region, a convex weight vector over the three networks (0.1 grid) and a threshold (0.3 to 0.7) maximise validation Dice</a:t>
             </a:r>
           </a:p>
           <a:p>
@@ -18331,7 +18108,7 @@
                 </a:solidFill>
                 <a:latin typeface="Calibri"/>
               </a:rPr>
-              <a:t>CNNs: SGD with Nesterov momentum 0.99, learning rate 0.01, polynomial decay (power 0.9)</a:t>
+              <a:t>Selected: WT 0.4 nnU-Net + 0.6 SegResNet (threshold 0.4); TC 0.4 / 0.5 / 0.1 Swin (0.3); ET 0.5 / 0.5 (0.4)</a:t>
             </a:r>
           </a:p>
           <a:p>
@@ -18355,7 +18132,7 @@
                 </a:solidFill>
                 <a:latin typeface="Calibri"/>
               </a:rPr>
-              <a:t>Transformer-based models: AdamW, learning rate 10⁻⁴, three-epoch warm-up, cosine decay</a:t>
+              <a:t>Ablations: each network, mean of all, mean of the CNNs, the weights at threshold 0.5</a:t>
             </a:r>
           </a:p>
           <a:p>
@@ -18379,31 +18156,7 @@
                 </a:solidFill>
                 <a:latin typeface="Calibri"/>
               </a:rPr>
-              <a:t>Half precision, clipping at 1.0; gradient checkpointing for UNETR and Swin UNETR</a:t>
-            </a:r>
-          </a:p>
-          <a:p>
-            <a:pPr algn="l" marL="180594" indent="-180594">
-              <a:lnSpc>
-                <a:spcPct val="100000"/>
-              </a:lnSpc>
-              <a:spcAft>
-                <a:spcPts val="400"/>
-              </a:spcAft>
-              <a:buClr>
-                <a:srgbClr val="1F3A68"/>
-              </a:buClr>
-              <a:buFont typeface="Arial"/>
-              <a:buChar char="•"/>
-            </a:pPr>
-            <a:r>
-              <a:rPr sz="1100" b="0" i="0">
-                <a:solidFill>
-                  <a:srgbClr val="1E2430"/>
-                </a:solidFill>
-                <a:latin typeface="Calibri"/>
-              </a:rPr>
-              <a:t>Checkpoint at the best validation mean Dice; 515 minutes of training on two Tesla T4 GPUs</a:t>
+              <a:t>Soft Dice plus cross-entropy with deep supervision; 528 minutes of training on two Tesla T4 GPUs</a:t>
             </a:r>
           </a:p>
         </p:txBody>
@@ -18465,7 +18218,7 @@
                 </a:solidFill>
                 <a:latin typeface="Times New Roman"/>
               </a:rPr>
-              <a:t>3D Segmentation Test Results</a:t>
+              <a:t>Internal and External Results</a:t>
             </a:r>
           </a:p>
         </p:txBody>
@@ -18641,14 +18394,12 @@
                 <a:tableStyleId>{5C22544A-7EE6-4342-B048-85BDC9FD1C3A}</a:tableStyleId>
               </a:tblPr>
               <a:tblGrid>
-                <a:gridCol w="1234440"/>
-                <a:gridCol w="914400"/>
+                <a:gridCol w="1371600"/>
                 <a:gridCol w="1783080"/>
                 <a:gridCol w="603504"/>
                 <a:gridCol w="603504"/>
                 <a:gridCol w="603504"/>
-                <a:gridCol w="978408"/>
-                <a:gridCol w="731520"/>
+                <a:gridCol w="2487168"/>
               </a:tblGrid>
               <a:tr h="301752">
                 <a:tc>
@@ -18679,29 +18430,6 @@
                     <a:bodyPr wrap="square"/>
                     <a:lstStyle/>
                     <a:p>
-                      <a:pPr algn="l"/>
-                      <a:r>
-                        <a:rPr sz="1050" b="1" i="0">
-                          <a:solidFill>
-                            <a:srgbClr val="FFFFFF"/>
-                          </a:solidFill>
-                          <a:latin typeface="Calibri"/>
-                        </a:rPr>
-                        <a:t>Type</a:t>
-                      </a:r>
-                    </a:p>
-                  </a:txBody>
-                  <a:tcPr marL="64008" marR="64008" marT="27432" marB="27432" anchor="ctr">
-                    <a:solidFill>
-                      <a:srgbClr val="1F3A68"/>
-                    </a:solidFill>
-                  </a:tcPr>
-                </a:tc>
-                <a:tc>
-                  <a:txBody>
-                    <a:bodyPr wrap="square"/>
-                    <a:lstStyle/>
-                    <a:p>
                       <a:pPr algn="ctr"/>
                       <a:r>
                         <a:rPr sz="1050" b="1" i="0">
@@ -18710,7 +18438,7 @@
                           </a:solidFill>
                           <a:latin typeface="Calibri"/>
                         </a:rPr>
-                        <a:t>Mean Dice [95% CI]</a:t>
+                        <a:t>Internal mean Dice [95% CI]</a:t>
                       </a:r>
                     </a:p>
                   </a:txBody>
@@ -18802,30 +18530,7 @@
                           </a:solidFill>
                           <a:latin typeface="Calibri"/>
                         </a:rPr>
-                        <a:t>HD95 TC (mm)</a:t>
-                      </a:r>
-                    </a:p>
-                  </a:txBody>
-                  <a:tcPr marL="64008" marR="64008" marT="27432" marB="27432" anchor="ctr">
-                    <a:solidFill>
-                      <a:srgbClr val="1F3A68"/>
-                    </a:solidFill>
-                  </a:tcPr>
-                </a:tc>
-                <a:tc>
-                  <a:txBody>
-                    <a:bodyPr wrap="square"/>
-                    <a:lstStyle/>
-                    <a:p>
-                      <a:pPr algn="ctr"/>
-                      <a:r>
-                        <a:rPr sz="1050" b="1" i="0">
-                          <a:solidFill>
-                            <a:srgbClr val="FFFFFF"/>
-                          </a:solidFill>
-                          <a:latin typeface="Calibri"/>
-                        </a:rPr>
-                        <a:t>ET sens.</a:t>
+                        <a:t>External mean Dice [95% CI]</a:t>
                       </a:r>
                     </a:p>
                   </a:txBody>
@@ -18844,36 +18549,13 @@
                     <a:p>
                       <a:pPr algn="l"/>
                       <a:r>
-                        <a:rPr sz="1050" b="1" i="0">
+                        <a:rPr sz="1050" b="0" i="0">
                           <a:solidFill>
                             <a:srgbClr val="1E2430"/>
                           </a:solidFill>
                           <a:latin typeface="Calibri"/>
                         </a:rPr>
-                        <a:t>UNet</a:t>
-                      </a:r>
-                    </a:p>
-                  </a:txBody>
-                  <a:tcPr marL="64008" marR="64008" marT="27432" marB="27432" anchor="ctr">
-                    <a:solidFill>
-                      <a:srgbClr val="FFFFFF"/>
-                    </a:solidFill>
-                  </a:tcPr>
-                </a:tc>
-                <a:tc>
-                  <a:txBody>
-                    <a:bodyPr wrap="square"/>
-                    <a:lstStyle/>
-                    <a:p>
-                      <a:pPr algn="l"/>
-                      <a:r>
-                        <a:rPr sz="1050" b="1" i="0">
-                          <a:solidFill>
-                            <a:srgbClr val="1E2430"/>
-                          </a:solidFill>
-                          <a:latin typeface="Calibri"/>
-                        </a:rPr>
-                        <a:t>CNN</a:t>
+                        <a:t>nnU-Net</a:t>
                       </a:r>
                     </a:p>
                   </a:txBody>
@@ -18890,13 +18572,13 @@
                     <a:p>
                       <a:pPr algn="ctr"/>
                       <a:r>
-                        <a:rPr sz="1050" b="1" i="0">
+                        <a:rPr sz="1050" b="0" i="0">
                           <a:solidFill>
                             <a:srgbClr val="1E2430"/>
                           </a:solidFill>
                           <a:latin typeface="Calibri"/>
                         </a:rPr>
-                        <a:t>0.8199 [0.7826, 0.8533]</a:t>
+                        <a:t>0.8404 [0.8008, 0.8760]</a:t>
                       </a:r>
                     </a:p>
                   </a:txBody>
@@ -18913,13 +18595,13 @@
                     <a:p>
                       <a:pPr algn="ctr"/>
                       <a:r>
-                        <a:rPr sz="1050" b="1" i="0">
+                        <a:rPr sz="1050" b="0" i="0">
                           <a:solidFill>
                             <a:srgbClr val="1E2430"/>
                           </a:solidFill>
                           <a:latin typeface="Calibri"/>
                         </a:rPr>
-                        <a:t>0.9012</a:t>
+                        <a:t>0.9139</a:t>
                       </a:r>
                     </a:p>
                   </a:txBody>
@@ -18936,13 +18618,13 @@
                     <a:p>
                       <a:pPr algn="ctr"/>
                       <a:r>
-                        <a:rPr sz="1050" b="1" i="0">
+                        <a:rPr sz="1050" b="0" i="0">
                           <a:solidFill>
                             <a:srgbClr val="1E2430"/>
                           </a:solidFill>
                           <a:latin typeface="Calibri"/>
                         </a:rPr>
-                        <a:t>0.8300</a:t>
+                        <a:t>0.8493</a:t>
                       </a:r>
                     </a:p>
                   </a:txBody>
@@ -18959,13 +18641,13 @@
                     <a:p>
                       <a:pPr algn="ctr"/>
                       <a:r>
-                        <a:rPr sz="1050" b="1" i="0">
+                        <a:rPr sz="1050" b="0" i="0">
                           <a:solidFill>
                             <a:srgbClr val="1E2430"/>
                           </a:solidFill>
                           <a:latin typeface="Calibri"/>
                         </a:rPr>
-                        <a:t>0.7286</a:t>
+                        <a:t>0.7580</a:t>
                       </a:r>
                     </a:p>
                   </a:txBody>
@@ -18982,13 +18664,178 @@
                     <a:p>
                       <a:pPr algn="ctr"/>
                       <a:r>
+                        <a:rPr sz="1050" b="0" i="0">
+                          <a:solidFill>
+                            <a:srgbClr val="1E2430"/>
+                          </a:solidFill>
+                          <a:latin typeface="Calibri"/>
+                        </a:rPr>
+                        <a:t>0.7765 [0.7224, 0.8203]</a:t>
+                      </a:r>
+                    </a:p>
+                  </a:txBody>
+                  <a:tcPr marL="64008" marR="64008" marT="27432" marB="27432" anchor="ctr">
+                    <a:solidFill>
+                      <a:srgbClr val="FFFFFF"/>
+                    </a:solidFill>
+                  </a:tcPr>
+                </a:tc>
+              </a:tr>
+              <a:tr h="301752">
+                <a:tc>
+                  <a:txBody>
+                    <a:bodyPr wrap="square"/>
+                    <a:lstStyle/>
+                    <a:p>
+                      <a:pPr algn="l"/>
+                      <a:r>
                         <a:rPr sz="1050" b="1" i="0">
                           <a:solidFill>
                             <a:srgbClr val="1E2430"/>
                           </a:solidFill>
                           <a:latin typeface="Calibri"/>
                         </a:rPr>
-                        <a:t>3.24</a:t>
+                        <a:t>SegResNet</a:t>
+                      </a:r>
+                    </a:p>
+                  </a:txBody>
+                  <a:tcPr marL="64008" marR="64008" marT="27432" marB="27432" anchor="ctr">
+                    <a:solidFill>
+                      <a:srgbClr val="F3F5F8"/>
+                    </a:solidFill>
+                  </a:tcPr>
+                </a:tc>
+                <a:tc>
+                  <a:txBody>
+                    <a:bodyPr wrap="square"/>
+                    <a:lstStyle/>
+                    <a:p>
+                      <a:pPr algn="ctr"/>
+                      <a:r>
+                        <a:rPr sz="1050" b="1" i="0">
+                          <a:solidFill>
+                            <a:srgbClr val="1E2430"/>
+                          </a:solidFill>
+                          <a:latin typeface="Calibri"/>
+                        </a:rPr>
+                        <a:t>0.8717 [0.8389, 0.8987]</a:t>
+                      </a:r>
+                    </a:p>
+                  </a:txBody>
+                  <a:tcPr marL="64008" marR="64008" marT="27432" marB="27432" anchor="ctr">
+                    <a:solidFill>
+                      <a:srgbClr val="F3F5F8"/>
+                    </a:solidFill>
+                  </a:tcPr>
+                </a:tc>
+                <a:tc>
+                  <a:txBody>
+                    <a:bodyPr wrap="square"/>
+                    <a:lstStyle/>
+                    <a:p>
+                      <a:pPr algn="ctr"/>
+                      <a:r>
+                        <a:rPr sz="1050" b="1" i="0">
+                          <a:solidFill>
+                            <a:srgbClr val="1E2430"/>
+                          </a:solidFill>
+                          <a:latin typeface="Calibri"/>
+                        </a:rPr>
+                        <a:t>0.9264</a:t>
+                      </a:r>
+                    </a:p>
+                  </a:txBody>
+                  <a:tcPr marL="64008" marR="64008" marT="27432" marB="27432" anchor="ctr">
+                    <a:solidFill>
+                      <a:srgbClr val="F3F5F8"/>
+                    </a:solidFill>
+                  </a:tcPr>
+                </a:tc>
+                <a:tc>
+                  <a:txBody>
+                    <a:bodyPr wrap="square"/>
+                    <a:lstStyle/>
+                    <a:p>
+                      <a:pPr algn="ctr"/>
+                      <a:r>
+                        <a:rPr sz="1050" b="1" i="0">
+                          <a:solidFill>
+                            <a:srgbClr val="1E2430"/>
+                          </a:solidFill>
+                          <a:latin typeface="Calibri"/>
+                        </a:rPr>
+                        <a:t>0.8791</a:t>
+                      </a:r>
+                    </a:p>
+                  </a:txBody>
+                  <a:tcPr marL="64008" marR="64008" marT="27432" marB="27432" anchor="ctr">
+                    <a:solidFill>
+                      <a:srgbClr val="F3F5F8"/>
+                    </a:solidFill>
+                  </a:tcPr>
+                </a:tc>
+                <a:tc>
+                  <a:txBody>
+                    <a:bodyPr wrap="square"/>
+                    <a:lstStyle/>
+                    <a:p>
+                      <a:pPr algn="ctr"/>
+                      <a:r>
+                        <a:rPr sz="1050" b="1" i="0">
+                          <a:solidFill>
+                            <a:srgbClr val="1E2430"/>
+                          </a:solidFill>
+                          <a:latin typeface="Calibri"/>
+                        </a:rPr>
+                        <a:t>0.8095</a:t>
+                      </a:r>
+                    </a:p>
+                  </a:txBody>
+                  <a:tcPr marL="64008" marR="64008" marT="27432" marB="27432" anchor="ctr">
+                    <a:solidFill>
+                      <a:srgbClr val="F3F5F8"/>
+                    </a:solidFill>
+                  </a:tcPr>
+                </a:tc>
+                <a:tc>
+                  <a:txBody>
+                    <a:bodyPr wrap="square"/>
+                    <a:lstStyle/>
+                    <a:p>
+                      <a:pPr algn="ctr"/>
+                      <a:r>
+                        <a:rPr sz="1050" b="1" i="0">
+                          <a:solidFill>
+                            <a:srgbClr val="1E2430"/>
+                          </a:solidFill>
+                          <a:latin typeface="Calibri"/>
+                        </a:rPr>
+                        <a:t>0.7967 [0.7417, 0.8400]</a:t>
+                      </a:r>
+                    </a:p>
+                  </a:txBody>
+                  <a:tcPr marL="64008" marR="64008" marT="27432" marB="27432" anchor="ctr">
+                    <a:solidFill>
+                      <a:srgbClr val="F3F5F8"/>
+                    </a:solidFill>
+                  </a:tcPr>
+                </a:tc>
+              </a:tr>
+              <a:tr h="301752">
+                <a:tc>
+                  <a:txBody>
+                    <a:bodyPr wrap="square"/>
+                    <a:lstStyle/>
+                    <a:p>
+                      <a:pPr algn="l"/>
+                      <a:r>
+                        <a:rPr sz="1050" b="0" i="0">
+                          <a:solidFill>
+                            <a:srgbClr val="1E2430"/>
+                          </a:solidFill>
+                          <a:latin typeface="Calibri"/>
+                        </a:rPr>
+                        <a:t>Swin UNETR-v2</a:t>
                       </a:r>
                     </a:p>
                   </a:txBody>
@@ -19005,13 +18852,105 @@
                     <a:p>
                       <a:pPr algn="ctr"/>
                       <a:r>
-                        <a:rPr sz="1050" b="1" i="0">
+                        <a:rPr sz="1050" b="0" i="0">
                           <a:solidFill>
                             <a:srgbClr val="1E2430"/>
                           </a:solidFill>
                           <a:latin typeface="Calibri"/>
                         </a:rPr>
-                        <a:t>0.8486</a:t>
+                        <a:t>0.8360 [0.7923, 0.8742]</a:t>
+                      </a:r>
+                    </a:p>
+                  </a:txBody>
+                  <a:tcPr marL="64008" marR="64008" marT="27432" marB="27432" anchor="ctr">
+                    <a:solidFill>
+                      <a:srgbClr val="FFFFFF"/>
+                    </a:solidFill>
+                  </a:tcPr>
+                </a:tc>
+                <a:tc>
+                  <a:txBody>
+                    <a:bodyPr wrap="square"/>
+                    <a:lstStyle/>
+                    <a:p>
+                      <a:pPr algn="ctr"/>
+                      <a:r>
+                        <a:rPr sz="1050" b="0" i="0">
+                          <a:solidFill>
+                            <a:srgbClr val="1E2430"/>
+                          </a:solidFill>
+                          <a:latin typeface="Calibri"/>
+                        </a:rPr>
+                        <a:t>0.9162</a:t>
+                      </a:r>
+                    </a:p>
+                  </a:txBody>
+                  <a:tcPr marL="64008" marR="64008" marT="27432" marB="27432" anchor="ctr">
+                    <a:solidFill>
+                      <a:srgbClr val="FFFFFF"/>
+                    </a:solidFill>
+                  </a:tcPr>
+                </a:tc>
+                <a:tc>
+                  <a:txBody>
+                    <a:bodyPr wrap="square"/>
+                    <a:lstStyle/>
+                    <a:p>
+                      <a:pPr algn="ctr"/>
+                      <a:r>
+                        <a:rPr sz="1050" b="0" i="0">
+                          <a:solidFill>
+                            <a:srgbClr val="1E2430"/>
+                          </a:solidFill>
+                          <a:latin typeface="Calibri"/>
+                        </a:rPr>
+                        <a:t>0.8427</a:t>
+                      </a:r>
+                    </a:p>
+                  </a:txBody>
+                  <a:tcPr marL="64008" marR="64008" marT="27432" marB="27432" anchor="ctr">
+                    <a:solidFill>
+                      <a:srgbClr val="FFFFFF"/>
+                    </a:solidFill>
+                  </a:tcPr>
+                </a:tc>
+                <a:tc>
+                  <a:txBody>
+                    <a:bodyPr wrap="square"/>
+                    <a:lstStyle/>
+                    <a:p>
+                      <a:pPr algn="ctr"/>
+                      <a:r>
+                        <a:rPr sz="1050" b="0" i="0">
+                          <a:solidFill>
+                            <a:srgbClr val="1E2430"/>
+                          </a:solidFill>
+                          <a:latin typeface="Calibri"/>
+                        </a:rPr>
+                        <a:t>0.7490</a:t>
+                      </a:r>
+                    </a:p>
+                  </a:txBody>
+                  <a:tcPr marL="64008" marR="64008" marT="27432" marB="27432" anchor="ctr">
+                    <a:solidFill>
+                      <a:srgbClr val="FFFFFF"/>
+                    </a:solidFill>
+                  </a:tcPr>
+                </a:tc>
+                <a:tc>
+                  <a:txBody>
+                    <a:bodyPr wrap="square"/>
+                    <a:lstStyle/>
+                    <a:p>
+                      <a:pPr algn="ctr"/>
+                      <a:r>
+                        <a:rPr sz="1050" b="0" i="0">
+                          <a:solidFill>
+                            <a:srgbClr val="1E2430"/>
+                          </a:solidFill>
+                          <a:latin typeface="Calibri"/>
+                        </a:rPr>
+                        <a:t>0.7888 [0.7355, 0.8325]</a:t>
                       </a:r>
                     </a:p>
                   </a:txBody>
@@ -19036,30 +18975,7 @@
                           </a:solidFill>
                           <a:latin typeface="Calibri"/>
                         </a:rPr>
-                        <a:t>nnU-Net-style</a:t>
-                      </a:r>
-                    </a:p>
-                  </a:txBody>
-                  <a:tcPr marL="64008" marR="64008" marT="27432" marB="27432" anchor="ctr">
-                    <a:solidFill>
-                      <a:srgbClr val="F3F5F8"/>
-                    </a:solidFill>
-                  </a:tcPr>
-                </a:tc>
-                <a:tc>
-                  <a:txBody>
-                    <a:bodyPr wrap="square"/>
-                    <a:lstStyle/>
-                    <a:p>
-                      <a:pPr algn="l"/>
-                      <a:r>
-                        <a:rPr sz="1050" b="0" i="0">
-                          <a:solidFill>
-                            <a:srgbClr val="1E2430"/>
-                          </a:solidFill>
-                          <a:latin typeface="Calibri"/>
-                        </a:rPr>
-                        <a:t>CNN</a:t>
+                        <a:t>CNN mean</a:t>
                       </a:r>
                     </a:p>
                   </a:txBody>
@@ -19082,7 +18998,7 @@
                           </a:solidFill>
                           <a:latin typeface="Calibri"/>
                         </a:rPr>
-                        <a:t>0.8192 [0.7837, 0.8511]</a:t>
+                        <a:t>0.8512 [0.8150, 0.8838]</a:t>
                       </a:r>
                     </a:p>
                   </a:txBody>
@@ -19105,7 +19021,7 @@
                           </a:solidFill>
                           <a:latin typeface="Calibri"/>
                         </a:rPr>
-                        <a:t>0.9002</a:t>
+                        <a:t>0.9225</a:t>
                       </a:r>
                     </a:p>
                   </a:txBody>
@@ -19128,7 +19044,7 @@
                           </a:solidFill>
                           <a:latin typeface="Calibri"/>
                         </a:rPr>
-                        <a:t>0.8309</a:t>
+                        <a:t>0.8630</a:t>
                       </a:r>
                     </a:p>
                   </a:txBody>
@@ -19151,7 +19067,7 @@
                           </a:solidFill>
                           <a:latin typeface="Calibri"/>
                         </a:rPr>
-                        <a:t>0.7264</a:t>
+                        <a:t>0.7680</a:t>
                       </a:r>
                     </a:p>
                   </a:txBody>
@@ -19174,30 +19090,7 @@
                           </a:solidFill>
                           <a:latin typeface="Calibri"/>
                         </a:rPr>
-                        <a:t>3.46</a:t>
-                      </a:r>
-                    </a:p>
-                  </a:txBody>
-                  <a:tcPr marL="64008" marR="64008" marT="27432" marB="27432" anchor="ctr">
-                    <a:solidFill>
-                      <a:srgbClr val="F3F5F8"/>
-                    </a:solidFill>
-                  </a:tcPr>
-                </a:tc>
-                <a:tc>
-                  <a:txBody>
-                    <a:bodyPr wrap="square"/>
-                    <a:lstStyle/>
-                    <a:p>
-                      <a:pPr algn="ctr"/>
-                      <a:r>
-                        <a:rPr sz="1050" b="0" i="0">
-                          <a:solidFill>
-                            <a:srgbClr val="1E2430"/>
-                          </a:solidFill>
-                          <a:latin typeface="Calibri"/>
-                        </a:rPr>
-                        <a:t>0.8538</a:t>
+                        <a:t>0.8005 [0.7484, 0.8419]</a:t>
                       </a:r>
                     </a:p>
                   </a:txBody>
@@ -19222,30 +19115,7 @@
                           </a:solidFill>
                           <a:latin typeface="Calibri"/>
                         </a:rPr>
-                        <a:t>VNet</a:t>
-                      </a:r>
-                    </a:p>
-                  </a:txBody>
-                  <a:tcPr marL="64008" marR="64008" marT="27432" marB="27432" anchor="ctr">
-                    <a:solidFill>
-                      <a:srgbClr val="FFFFFF"/>
-                    </a:solidFill>
-                  </a:tcPr>
-                </a:tc>
-                <a:tc>
-                  <a:txBody>
-                    <a:bodyPr wrap="square"/>
-                    <a:lstStyle/>
-                    <a:p>
-                      <a:pPr algn="l"/>
-                      <a:r>
-                        <a:rPr sz="1050" b="0" i="0">
-                          <a:solidFill>
-                            <a:srgbClr val="1E2430"/>
-                          </a:solidFill>
-                          <a:latin typeface="Calibri"/>
-                        </a:rPr>
-                        <a:t>CNN</a:t>
+                        <a:t>Mean of all three</a:t>
                       </a:r>
                     </a:p>
                   </a:txBody>
@@ -19268,7 +19138,7 @@
                           </a:solidFill>
                           <a:latin typeface="Calibri"/>
                         </a:rPr>
-                        <a:t>0.7965 [0.7497, 0.8340]</a:t>
+                        <a:t>0.8494 [0.8115, 0.8834]</a:t>
                       </a:r>
                     </a:p>
                   </a:txBody>
@@ -19291,7 +19161,7 @@
                           </a:solidFill>
                           <a:latin typeface="Calibri"/>
                         </a:rPr>
-                        <a:t>0.8865</a:t>
+                        <a:t>0.9213</a:t>
                       </a:r>
                     </a:p>
                   </a:txBody>
@@ -19314,7 +19184,7 @@
                           </a:solidFill>
                           <a:latin typeface="Calibri"/>
                         </a:rPr>
-                        <a:t>0.7972</a:t>
+                        <a:t>0.8601</a:t>
                       </a:r>
                     </a:p>
                   </a:txBody>
@@ -19337,7 +19207,7 @@
                           </a:solidFill>
                           <a:latin typeface="Calibri"/>
                         </a:rPr>
-                        <a:t>0.7058</a:t>
+                        <a:t>0.7669</a:t>
                       </a:r>
                     </a:p>
                   </a:txBody>
@@ -19360,30 +19230,7 @@
                           </a:solidFill>
                           <a:latin typeface="Calibri"/>
                         </a:rPr>
-                        <a:t>4.18</a:t>
-                      </a:r>
-                    </a:p>
-                  </a:txBody>
-                  <a:tcPr marL="64008" marR="64008" marT="27432" marB="27432" anchor="ctr">
-                    <a:solidFill>
-                      <a:srgbClr val="FFFFFF"/>
-                    </a:solidFill>
-                  </a:tcPr>
-                </a:tc>
-                <a:tc>
-                  <a:txBody>
-                    <a:bodyPr wrap="square"/>
-                    <a:lstStyle/>
-                    <a:p>
-                      <a:pPr algn="ctr"/>
-                      <a:r>
-                        <a:rPr sz="1050" b="0" i="0">
-                          <a:solidFill>
-                            <a:srgbClr val="1E2430"/>
-                          </a:solidFill>
-                          <a:latin typeface="Calibri"/>
-                        </a:rPr>
-                        <a:t>0.8278</a:t>
+                        <a:t>0.7971 [0.7456, 0.8400]</a:t>
                       </a:r>
                     </a:p>
                   </a:txBody>
@@ -19408,30 +19255,7 @@
                           </a:solidFill>
                           <a:latin typeface="Calibri"/>
                         </a:rPr>
-                        <a:t>Swin UNETR</a:t>
-                      </a:r>
-                    </a:p>
-                  </a:txBody>
-                  <a:tcPr marL="64008" marR="64008" marT="27432" marB="27432" anchor="ctr">
-                    <a:solidFill>
-                      <a:srgbClr val="F3F5F8"/>
-                    </a:solidFill>
-                  </a:tcPr>
-                </a:tc>
-                <a:tc>
-                  <a:txBody>
-                    <a:bodyPr wrap="square"/>
-                    <a:lstStyle/>
-                    <a:p>
-                      <a:pPr algn="l"/>
-                      <a:r>
-                        <a:rPr sz="1050" b="0" i="0">
-                          <a:solidFill>
-                            <a:srgbClr val="1E2430"/>
-                          </a:solidFill>
-                          <a:latin typeface="Calibri"/>
-                        </a:rPr>
-                        <a:t>Transformer</a:t>
+                        <a:t>Proposed ensemble</a:t>
                       </a:r>
                     </a:p>
                   </a:txBody>
@@ -19454,7 +19278,7 @@
                           </a:solidFill>
                           <a:latin typeface="Calibri"/>
                         </a:rPr>
-                        <a:t>0.7462 [0.7134, 0.7772]</a:t>
+                        <a:t>0.8530 [0.8204, 0.8836]</a:t>
                       </a:r>
                     </a:p>
                   </a:txBody>
@@ -19477,7 +19301,7 @@
                           </a:solidFill>
                           <a:latin typeface="Calibri"/>
                         </a:rPr>
-                        <a:t>0.8714</a:t>
+                        <a:t>0.9256</a:t>
                       </a:r>
                     </a:p>
                   </a:txBody>
@@ -19500,7 +19324,7 @@
                           </a:solidFill>
                           <a:latin typeface="Calibri"/>
                         </a:rPr>
-                        <a:t>0.7495</a:t>
+                        <a:t>0.8639</a:t>
                       </a:r>
                     </a:p>
                   </a:txBody>
@@ -19523,7 +19347,7 @@
                           </a:solidFill>
                           <a:latin typeface="Calibri"/>
                         </a:rPr>
-                        <a:t>0.6176</a:t>
+                        <a:t>0.7694</a:t>
                       </a:r>
                     </a:p>
                   </a:txBody>
@@ -19546,402 +19370,7 @@
                           </a:solidFill>
                           <a:latin typeface="Calibri"/>
                         </a:rPr>
-                        <a:t>6.70</a:t>
-                      </a:r>
-                    </a:p>
-                  </a:txBody>
-                  <a:tcPr marL="64008" marR="64008" marT="27432" marB="27432" anchor="ctr">
-                    <a:solidFill>
-                      <a:srgbClr val="F3F5F8"/>
-                    </a:solidFill>
-                  </a:tcPr>
-                </a:tc>
-                <a:tc>
-                  <a:txBody>
-                    <a:bodyPr wrap="square"/>
-                    <a:lstStyle/>
-                    <a:p>
-                      <a:pPr algn="ctr"/>
-                      <a:r>
-                        <a:rPr sz="1050" b="0" i="0">
-                          <a:solidFill>
-                            <a:srgbClr val="1E2430"/>
-                          </a:solidFill>
-                          <a:latin typeface="Calibri"/>
-                        </a:rPr>
-                        <a:t>0.9407</a:t>
-                      </a:r>
-                    </a:p>
-                  </a:txBody>
-                  <a:tcPr marL="64008" marR="64008" marT="27432" marB="27432" anchor="ctr">
-                    <a:solidFill>
-                      <a:srgbClr val="F3F5F8"/>
-                    </a:solidFill>
-                  </a:tcPr>
-                </a:tc>
-              </a:tr>
-              <a:tr h="301752">
-                <a:tc>
-                  <a:txBody>
-                    <a:bodyPr wrap="square"/>
-                    <a:lstStyle/>
-                    <a:p>
-                      <a:pPr algn="l"/>
-                      <a:r>
-                        <a:rPr sz="1050" b="0" i="0">
-                          <a:solidFill>
-                            <a:srgbClr val="1E2430"/>
-                          </a:solidFill>
-                          <a:latin typeface="Calibri"/>
-                        </a:rPr>
-                        <a:t>TransBTS</a:t>
-                      </a:r>
-                    </a:p>
-                  </a:txBody>
-                  <a:tcPr marL="64008" marR="64008" marT="27432" marB="27432" anchor="ctr">
-                    <a:solidFill>
-                      <a:srgbClr val="FFFFFF"/>
-                    </a:solidFill>
-                  </a:tcPr>
-                </a:tc>
-                <a:tc>
-                  <a:txBody>
-                    <a:bodyPr wrap="square"/>
-                    <a:lstStyle/>
-                    <a:p>
-                      <a:pPr algn="l"/>
-                      <a:r>
-                        <a:rPr sz="1050" b="0" i="0">
-                          <a:solidFill>
-                            <a:srgbClr val="1E2430"/>
-                          </a:solidFill>
-                          <a:latin typeface="Calibri"/>
-                        </a:rPr>
-                        <a:t>Hybrid</a:t>
-                      </a:r>
-                    </a:p>
-                  </a:txBody>
-                  <a:tcPr marL="64008" marR="64008" marT="27432" marB="27432" anchor="ctr">
-                    <a:solidFill>
-                      <a:srgbClr val="FFFFFF"/>
-                    </a:solidFill>
-                  </a:tcPr>
-                </a:tc>
-                <a:tc>
-                  <a:txBody>
-                    <a:bodyPr wrap="square"/>
-                    <a:lstStyle/>
-                    <a:p>
-                      <a:pPr algn="ctr"/>
-                      <a:r>
-                        <a:rPr sz="1050" b="0" i="0">
-                          <a:solidFill>
-                            <a:srgbClr val="1E2430"/>
-                          </a:solidFill>
-                          <a:latin typeface="Calibri"/>
-                        </a:rPr>
-                        <a:t>0.7291 [0.6876, 0.7661]</a:t>
-                      </a:r>
-                    </a:p>
-                  </a:txBody>
-                  <a:tcPr marL="64008" marR="64008" marT="27432" marB="27432" anchor="ctr">
-                    <a:solidFill>
-                      <a:srgbClr val="FFFFFF"/>
-                    </a:solidFill>
-                  </a:tcPr>
-                </a:tc>
-                <a:tc>
-                  <a:txBody>
-                    <a:bodyPr wrap="square"/>
-                    <a:lstStyle/>
-                    <a:p>
-                      <a:pPr algn="ctr"/>
-                      <a:r>
-                        <a:rPr sz="1050" b="0" i="0">
-                          <a:solidFill>
-                            <a:srgbClr val="1E2430"/>
-                          </a:solidFill>
-                          <a:latin typeface="Calibri"/>
-                        </a:rPr>
-                        <a:t>0.8743</a:t>
-                      </a:r>
-                    </a:p>
-                  </a:txBody>
-                  <a:tcPr marL="64008" marR="64008" marT="27432" marB="27432" anchor="ctr">
-                    <a:solidFill>
-                      <a:srgbClr val="FFFFFF"/>
-                    </a:solidFill>
-                  </a:tcPr>
-                </a:tc>
-                <a:tc>
-                  <a:txBody>
-                    <a:bodyPr wrap="square"/>
-                    <a:lstStyle/>
-                    <a:p>
-                      <a:pPr algn="ctr"/>
-                      <a:r>
-                        <a:rPr sz="1050" b="0" i="0">
-                          <a:solidFill>
-                            <a:srgbClr val="1E2430"/>
-                          </a:solidFill>
-                          <a:latin typeface="Calibri"/>
-                        </a:rPr>
-                        <a:t>0.7488</a:t>
-                      </a:r>
-                    </a:p>
-                  </a:txBody>
-                  <a:tcPr marL="64008" marR="64008" marT="27432" marB="27432" anchor="ctr">
-                    <a:solidFill>
-                      <a:srgbClr val="FFFFFF"/>
-                    </a:solidFill>
-                  </a:tcPr>
-                </a:tc>
-                <a:tc>
-                  <a:txBody>
-                    <a:bodyPr wrap="square"/>
-                    <a:lstStyle/>
-                    <a:p>
-                      <a:pPr algn="ctr"/>
-                      <a:r>
-                        <a:rPr sz="1050" b="0" i="0">
-                          <a:solidFill>
-                            <a:srgbClr val="1E2430"/>
-                          </a:solidFill>
-                          <a:latin typeface="Calibri"/>
-                        </a:rPr>
-                        <a:t>0.5642</a:t>
-                      </a:r>
-                    </a:p>
-                  </a:txBody>
-                  <a:tcPr marL="64008" marR="64008" marT="27432" marB="27432" anchor="ctr">
-                    <a:solidFill>
-                      <a:srgbClr val="FFFFFF"/>
-                    </a:solidFill>
-                  </a:tcPr>
-                </a:tc>
-                <a:tc>
-                  <a:txBody>
-                    <a:bodyPr wrap="square"/>
-                    <a:lstStyle/>
-                    <a:p>
-                      <a:pPr algn="ctr"/>
-                      <a:r>
-                        <a:rPr sz="1050" b="0" i="0">
-                          <a:solidFill>
-                            <a:srgbClr val="1E2430"/>
-                          </a:solidFill>
-                          <a:latin typeface="Calibri"/>
-                        </a:rPr>
-                        <a:t>6.58</a:t>
-                      </a:r>
-                    </a:p>
-                  </a:txBody>
-                  <a:tcPr marL="64008" marR="64008" marT="27432" marB="27432" anchor="ctr">
-                    <a:solidFill>
-                      <a:srgbClr val="FFFFFF"/>
-                    </a:solidFill>
-                  </a:tcPr>
-                </a:tc>
-                <a:tc>
-                  <a:txBody>
-                    <a:bodyPr wrap="square"/>
-                    <a:lstStyle/>
-                    <a:p>
-                      <a:pPr algn="ctr"/>
-                      <a:r>
-                        <a:rPr sz="1050" b="0" i="0">
-                          <a:solidFill>
-                            <a:srgbClr val="1E2430"/>
-                          </a:solidFill>
-                          <a:latin typeface="Calibri"/>
-                        </a:rPr>
-                        <a:t>0.9475</a:t>
-                      </a:r>
-                    </a:p>
-                  </a:txBody>
-                  <a:tcPr marL="64008" marR="64008" marT="27432" marB="27432" anchor="ctr">
-                    <a:solidFill>
-                      <a:srgbClr val="FFFFFF"/>
-                    </a:solidFill>
-                  </a:tcPr>
-                </a:tc>
-              </a:tr>
-              <a:tr h="301752">
-                <a:tc>
-                  <a:txBody>
-                    <a:bodyPr wrap="square"/>
-                    <a:lstStyle/>
-                    <a:p>
-                      <a:pPr algn="l"/>
-                      <a:r>
-                        <a:rPr sz="1050" b="0" i="0">
-                          <a:solidFill>
-                            <a:srgbClr val="1E2430"/>
-                          </a:solidFill>
-                          <a:latin typeface="Calibri"/>
-                        </a:rPr>
-                        <a:t>UNETR</a:t>
-                      </a:r>
-                    </a:p>
-                  </a:txBody>
-                  <a:tcPr marL="64008" marR="64008" marT="27432" marB="27432" anchor="ctr">
-                    <a:solidFill>
-                      <a:srgbClr val="F3F5F8"/>
-                    </a:solidFill>
-                  </a:tcPr>
-                </a:tc>
-                <a:tc>
-                  <a:txBody>
-                    <a:bodyPr wrap="square"/>
-                    <a:lstStyle/>
-                    <a:p>
-                      <a:pPr algn="l"/>
-                      <a:r>
-                        <a:rPr sz="1050" b="0" i="0">
-                          <a:solidFill>
-                            <a:srgbClr val="1E2430"/>
-                          </a:solidFill>
-                          <a:latin typeface="Calibri"/>
-                        </a:rPr>
-                        <a:t>Transformer</a:t>
-                      </a:r>
-                    </a:p>
-                  </a:txBody>
-                  <a:tcPr marL="64008" marR="64008" marT="27432" marB="27432" anchor="ctr">
-                    <a:solidFill>
-                      <a:srgbClr val="F3F5F8"/>
-                    </a:solidFill>
-                  </a:tcPr>
-                </a:tc>
-                <a:tc>
-                  <a:txBody>
-                    <a:bodyPr wrap="square"/>
-                    <a:lstStyle/>
-                    <a:p>
-                      <a:pPr algn="ctr"/>
-                      <a:r>
-                        <a:rPr sz="1050" b="0" i="0">
-                          <a:solidFill>
-                            <a:srgbClr val="1E2430"/>
-                          </a:solidFill>
-                          <a:latin typeface="Calibri"/>
-                        </a:rPr>
-                        <a:t>0.7056 [0.6700, 0.7384]</a:t>
-                      </a:r>
-                    </a:p>
-                  </a:txBody>
-                  <a:tcPr marL="64008" marR="64008" marT="27432" marB="27432" anchor="ctr">
-                    <a:solidFill>
-                      <a:srgbClr val="F3F5F8"/>
-                    </a:solidFill>
-                  </a:tcPr>
-                </a:tc>
-                <a:tc>
-                  <a:txBody>
-                    <a:bodyPr wrap="square"/>
-                    <a:lstStyle/>
-                    <a:p>
-                      <a:pPr algn="ctr"/>
-                      <a:r>
-                        <a:rPr sz="1050" b="0" i="0">
-                          <a:solidFill>
-                            <a:srgbClr val="1E2430"/>
-                          </a:solidFill>
-                          <a:latin typeface="Calibri"/>
-                        </a:rPr>
-                        <a:t>0.8758</a:t>
-                      </a:r>
-                    </a:p>
-                  </a:txBody>
-                  <a:tcPr marL="64008" marR="64008" marT="27432" marB="27432" anchor="ctr">
-                    <a:solidFill>
-                      <a:srgbClr val="F3F5F8"/>
-                    </a:solidFill>
-                  </a:tcPr>
-                </a:tc>
-                <a:tc>
-                  <a:txBody>
-                    <a:bodyPr wrap="square"/>
-                    <a:lstStyle/>
-                    <a:p>
-                      <a:pPr algn="ctr"/>
-                      <a:r>
-                        <a:rPr sz="1050" b="0" i="0">
-                          <a:solidFill>
-                            <a:srgbClr val="1E2430"/>
-                          </a:solidFill>
-                          <a:latin typeface="Calibri"/>
-                        </a:rPr>
-                        <a:t>0.6692</a:t>
-                      </a:r>
-                    </a:p>
-                  </a:txBody>
-                  <a:tcPr marL="64008" marR="64008" marT="27432" marB="27432" anchor="ctr">
-                    <a:solidFill>
-                      <a:srgbClr val="F3F5F8"/>
-                    </a:solidFill>
-                  </a:tcPr>
-                </a:tc>
-                <a:tc>
-                  <a:txBody>
-                    <a:bodyPr wrap="square"/>
-                    <a:lstStyle/>
-                    <a:p>
-                      <a:pPr algn="ctr"/>
-                      <a:r>
-                        <a:rPr sz="1050" b="0" i="0">
-                          <a:solidFill>
-                            <a:srgbClr val="1E2430"/>
-                          </a:solidFill>
-                          <a:latin typeface="Calibri"/>
-                        </a:rPr>
-                        <a:t>0.5720</a:t>
-                      </a:r>
-                    </a:p>
-                  </a:txBody>
-                  <a:tcPr marL="64008" marR="64008" marT="27432" marB="27432" anchor="ctr">
-                    <a:solidFill>
-                      <a:srgbClr val="F3F5F8"/>
-                    </a:solidFill>
-                  </a:tcPr>
-                </a:tc>
-                <a:tc>
-                  <a:txBody>
-                    <a:bodyPr wrap="square"/>
-                    <a:lstStyle/>
-                    <a:p>
-                      <a:pPr algn="ctr"/>
-                      <a:r>
-                        <a:rPr sz="1050" b="0" i="0">
-                          <a:solidFill>
-                            <a:srgbClr val="1E2430"/>
-                          </a:solidFill>
-                          <a:latin typeface="Calibri"/>
-                        </a:rPr>
-                        <a:t>11.29</a:t>
-                      </a:r>
-                    </a:p>
-                  </a:txBody>
-                  <a:tcPr marL="64008" marR="64008" marT="27432" marB="27432" anchor="ctr">
-                    <a:solidFill>
-                      <a:srgbClr val="F3F5F8"/>
-                    </a:solidFill>
-                  </a:tcPr>
-                </a:tc>
-                <a:tc>
-                  <a:txBody>
-                    <a:bodyPr wrap="square"/>
-                    <a:lstStyle/>
-                    <a:p>
-                      <a:pPr algn="ctr"/>
-                      <a:r>
-                        <a:rPr sz="1050" b="0" i="0">
-                          <a:solidFill>
-                            <a:srgbClr val="1E2430"/>
-                          </a:solidFill>
-                          <a:latin typeface="Calibri"/>
-                        </a:rPr>
-                        <a:t>0.9520</a:t>
+                        <a:t>0.7966 [0.7430, 0.8391]</a:t>
                       </a:r>
                     </a:p>
                   </a:txBody>
@@ -19993,7 +19422,7 @@
                 </a:solidFill>
                 <a:latin typeface="Calibri"/>
               </a:rPr>
-              <a:t>56 test cases at native resolution with eight-flip TTA and validation-tuned ET filtering; HD95 is the median over cases.</a:t>
+              <a:t>56 internal BraTS 2020 and 60 external BraTS-Africa test cases, eight-flip TTA; bootstrap CIs [82].</a:t>
             </a:r>
           </a:p>
         </p:txBody>
@@ -20007,7 +19436,7 @@
         <p:spPr>
           <a:xfrm>
             <a:off x="8229600" y="1234440"/>
-            <a:ext cx="3410712" cy="2218944"/>
+            <a:ext cx="3410712" cy="2036064"/>
           </a:xfrm>
           <a:prstGeom prst="rect">
             <a:avLst/>
@@ -20051,7 +19480,7 @@
         <p:spPr>
           <a:xfrm>
             <a:off x="8394192" y="1399032"/>
-            <a:ext cx="3081528" cy="1889760"/>
+            <a:ext cx="3081528" cy="1706880"/>
           </a:xfrm>
           <a:prstGeom prst="rect">
             <a:avLst/>
@@ -20079,7 +19508,7 @@
                 </a:solidFill>
                 <a:latin typeface="Calibri"/>
               </a:rPr>
-              <a:t>What decides the ranking</a:t>
+              <a:t>Statistical comparison</a:t>
             </a:r>
           </a:p>
           <a:p>
@@ -20103,7 +19532,7 @@
                 </a:solidFill>
                 <a:latin typeface="Calibri"/>
               </a:rPr>
-              <a:t>WT is easy for every model (Dice 0.8714 to 0.9012); TC and ET separate them</a:t>
+              <a:t>Wilcoxon tests with Holm correction [84, 90]: the ensemble beats nnU-Net (p = 0.0001) and Swin UNETR (p = 0.007) internally</a:t>
             </a:r>
           </a:p>
           <a:p>
@@ -20121,13 +19550,13 @@
               <a:buChar char="•"/>
             </a:pPr>
             <a:r>
-              <a:rPr sz="1200" b="0" i="0">
-                <a:solidFill>
-                  <a:srgbClr val="1E2430"/>
-                </a:solidFill>
-                <a:latin typeface="Calibri"/>
-              </a:rPr>
-              <a:t>Transformer-based models are more sensitive but over-segment; specificity exceeds 0.997 for all</a:t>
+              <a:rPr sz="1200" b="1" i="0">
+                <a:solidFill>
+                  <a:srgbClr val="1E2430"/>
+                </a:solidFill>
+                <a:latin typeface="Calibri"/>
+              </a:rPr>
+              <a:t>SegResNet alone beats the ensemble internally (p = 0.018) and equals it externally</a:t>
             </a:r>
           </a:p>
           <a:p>
@@ -20151,14 +19580,14 @@
                 </a:solidFill>
                 <a:latin typeface="Calibri"/>
               </a:rPr>
-              <a:t>All 15 Wilcoxon pairs are significant after Holm; UNet and nnU-Net-style differ by a median 0.0023 (p = 0.042)</a:t>
+              <a:t>Every model loses 0.047 to 0.075 Dice externally, mostly in TC</a:t>
             </a:r>
           </a:p>
         </p:txBody>
       </p:sp>
       <p:pic>
         <p:nvPicPr>
-          <p:cNvPr id="12" name="Picture 11" descr="08_qualitative_comparison.png"/>
+          <p:cNvPr id="12" name="Picture 11" descr="11_qualitative_comparison.png"/>
           <p:cNvPicPr>
             <a:picLocks noChangeAspect="1"/>
           </p:cNvPicPr>
@@ -20173,7 +19602,7 @@
         <p:spPr>
           <a:xfrm>
             <a:off x="548640" y="3803904"/>
-            <a:ext cx="7452360" cy="2356729"/>
+            <a:ext cx="2596445" cy="2368296"/>
           </a:xfrm>
           <a:prstGeom prst="rect">
             <a:avLst/>
@@ -20188,8 +19617,8 @@
         </p:nvSpPr>
         <p:spPr>
           <a:xfrm>
-            <a:off x="8229600" y="3803904"/>
-            <a:ext cx="3410712" cy="2356729"/>
+            <a:off x="3373685" y="3803904"/>
+            <a:ext cx="8266626" cy="2368296"/>
           </a:xfrm>
           <a:prstGeom prst="rect">
             <a:avLst/>
@@ -20232,8 +19661,8 @@
         </p:nvSpPr>
         <p:spPr>
           <a:xfrm>
-            <a:off x="8394192" y="3968496"/>
-            <a:ext cx="3081528" cy="2027545"/>
+            <a:off x="3538277" y="3968496"/>
+            <a:ext cx="7937442" cy="2039112"/>
           </a:xfrm>
           <a:prstGeom prst="rect">
             <a:avLst/>
@@ -20285,7 +19714,7 @@
                 </a:solidFill>
                 <a:latin typeface="Calibri"/>
               </a:rPr>
-              <a:t>Top: median HGG case; every model recovers the tumour (mean Dice 0.790 to 0.869)</a:t>
+              <a:t>Rows: median and lowest internal case, median and lowest external case</a:t>
             </a:r>
           </a:p>
           <a:p>
@@ -20309,7 +19738,31 @@
                 </a:solidFill>
                 <a:latin typeface="Calibri"/>
               </a:rPr>
-              <a:t>Bottom: hardest LGG case, whose reference has no enhancing tumour; the transformer-based models add ET and fall to mean Dice 0.329 to 0.347</a:t>
+              <a:t>Lowest internal case: SegResNet 0.878, the other models 0.542 to 0.569</a:t>
+            </a:r>
+          </a:p>
+          <a:p>
+            <a:pPr algn="l" marL="182880" indent="-182880">
+              <a:lnSpc>
+                <a:spcPct val="100000"/>
+              </a:lnSpc>
+              <a:spcAft>
+                <a:spcPts val="400"/>
+              </a:spcAft>
+              <a:buClr>
+                <a:srgbClr val="1F3A68"/>
+              </a:buClr>
+              <a:buFont typeface="Arial"/>
+              <a:buChar char="•"/>
+            </a:pPr>
+            <a:r>
+              <a:rPr sz="1200" b="0" i="0">
+                <a:solidFill>
+                  <a:srgbClr val="1E2430"/>
+                </a:solidFill>
+                <a:latin typeface="Calibri"/>
+              </a:rPr>
+              <a:t>Lowest external case: a small tumour that every model misses (Dice 0)</a:t>
             </a:r>
           </a:p>
           <a:p>
@@ -20649,7 +20102,7 @@
                 </a:solidFill>
                 <a:latin typeface="Times New Roman"/>
               </a:rPr>
-              <a:t>Tumour Grade, Ensembles and Efficiency</a:t>
+              <a:t>Tumour Grade, Quality Control and Efficiency</a:t>
             </a:r>
           </a:p>
         </p:txBody>
@@ -20816,7 +20269,7 @@
         </p:nvGraphicFramePr>
         <p:xfrm>
           <a:off x="548640" y="1234440"/>
-          <a:ext cx="5394960" cy="3165856"/>
+          <a:ext cx="5394960" cy="3115056"/>
         </p:xfrm>
         <a:graphic>
           <a:graphicData uri="http://schemas.openxmlformats.org/drawingml/2006/chart">
@@ -20834,7 +20287,7 @@
         </p:nvGraphicFramePr>
         <p:xfrm>
           <a:off x="6172200" y="1234440"/>
-          <a:ext cx="5468112" cy="3165856"/>
+          <a:ext cx="5468112" cy="3115056"/>
         </p:xfrm>
         <a:graphic>
           <a:graphicData uri="http://schemas.openxmlformats.org/drawingml/2006/chart">
@@ -20850,8 +20303,8 @@
         </p:nvSpPr>
         <p:spPr>
           <a:xfrm>
-            <a:off x="548640" y="4628896"/>
-            <a:ext cx="3544824" cy="1543303"/>
+            <a:off x="548640" y="4578096"/>
+            <a:ext cx="3544824" cy="1594103"/>
           </a:xfrm>
           <a:prstGeom prst="rect">
             <a:avLst/>
@@ -20894,8 +20347,8 @@
         </p:nvSpPr>
         <p:spPr>
           <a:xfrm>
-            <a:off x="713232" y="4793488"/>
-            <a:ext cx="3215640" cy="1214119"/>
+            <a:off x="713232" y="4742688"/>
+            <a:ext cx="3215640" cy="1264920"/>
           </a:xfrm>
           <a:prstGeom prst="rect">
             <a:avLst/>
@@ -20923,7 +20376,7 @@
                 </a:solidFill>
                 <a:latin typeface="Calibri"/>
               </a:rPr>
-              <a:t>Tumour grade</a:t>
+              <a:t>Disagreement flags failures</a:t>
             </a:r>
           </a:p>
           <a:p>
@@ -20947,7 +20400,7 @@
                 </a:solidFill>
                 <a:latin typeface="Calibri"/>
               </a:rPr>
-              <a:t>LGG mean Dice 0.5616 to 0.6624 vs HGG 0.7434 to 0.8632; WT Dice is slightly higher on LGG</a:t>
+              <a:t>1 minus the mean pairwise Dice of the three networks' masks; failure: mean Dice below 0.80</a:t>
             </a:r>
           </a:p>
           <a:p>
@@ -20971,7 +20424,31 @@
                 </a:solidFill>
                 <a:latin typeface="Calibri"/>
               </a:rPr>
-              <a:t>One false-positive ET voxel on a case without ET gives that case an ET Dice of 0</a:t>
+              <a:t>AUC 0.993 internal, 0.870 external [77]; Spearman −0.80 and −0.82 [91]</a:t>
+            </a:r>
+          </a:p>
+          <a:p>
+            <a:pPr algn="l" marL="180594" indent="-180594">
+              <a:lnSpc>
+                <a:spcPct val="100000"/>
+              </a:lnSpc>
+              <a:spcAft>
+                <a:spcPts val="400"/>
+              </a:spcAft>
+              <a:buClr>
+                <a:srgbClr val="1F3A68"/>
+              </a:buClr>
+              <a:buFont typeface="Arial"/>
+              <a:buChar char="•"/>
+            </a:pPr>
+            <a:r>
+              <a:rPr sz="1100" b="0" i="0">
+                <a:solidFill>
+                  <a:srgbClr val="1E2430"/>
+                </a:solidFill>
+                <a:latin typeface="Calibri"/>
+              </a:rPr>
+              <a:t>TTA spread: AUC 0.716 and 0.791 [92–94]</a:t>
             </a:r>
           </a:p>
         </p:txBody>
@@ -20984,8 +20461,8 @@
         </p:nvSpPr>
         <p:spPr>
           <a:xfrm>
-            <a:off x="4322064" y="4628896"/>
-            <a:ext cx="3544824" cy="1543303"/>
+            <a:off x="4322064" y="4578096"/>
+            <a:ext cx="3544824" cy="1594103"/>
           </a:xfrm>
           <a:prstGeom prst="rect">
             <a:avLst/>
@@ -21028,8 +20505,8 @@
         </p:nvSpPr>
         <p:spPr>
           <a:xfrm>
-            <a:off x="4486656" y="4793488"/>
-            <a:ext cx="3215640" cy="1214119"/>
+            <a:off x="4486656" y="4742688"/>
+            <a:ext cx="3215640" cy="1264920"/>
           </a:xfrm>
           <a:prstGeom prst="rect">
             <a:avLst/>
@@ -21057,7 +20534,7 @@
                 </a:solidFill>
                 <a:latin typeface="Calibri"/>
               </a:rPr>
-              <a:t>Ensembles and uncertainty</a:t>
+              <a:t>Explanations, scored</a:t>
             </a:r>
           </a:p>
           <a:p>
@@ -21081,7 +20558,7 @@
                 </a:solidFill>
                 <a:latin typeface="Calibri"/>
               </a:rPr>
-              <a:t>CNN ensemble 0.8178 and six-model ensemble 0.7991: neither beats UNet alone</a:t>
+              <a:t>Seg-Grad-CAM [85, 95]: CNN maps 4 to 23 times enriched in the tumour; Swin UNETR 1.1 to 1.7 times</a:t>
             </a:r>
           </a:p>
           <a:p>
@@ -21105,7 +20582,31 @@
                 </a:solidFill>
                 <a:latin typeface="Calibri"/>
               </a:rPr>
-              <a:t>TTA uncertainty vs Dice: Spearman −0.30 to −0.40 (p ≤ 0.023) for CNNs; not significant for the transformer-based models</a:t>
+              <a:t>Dropping FLAIR hurts WT, dropping T1CE hurts TC and ET, for every network</a:t>
+            </a:r>
+          </a:p>
+          <a:p>
+            <a:pPr algn="l" marL="180594" indent="-180594">
+              <a:lnSpc>
+                <a:spcPct val="100000"/>
+              </a:lnSpc>
+              <a:spcAft>
+                <a:spcPts val="400"/>
+              </a:spcAft>
+              <a:buClr>
+                <a:srgbClr val="1F3A68"/>
+              </a:buClr>
+              <a:buFont typeface="Arial"/>
+              <a:buChar char="•"/>
+            </a:pPr>
+            <a:r>
+              <a:rPr sz="1100" b="0" i="0">
+                <a:solidFill>
+                  <a:srgbClr val="1E2430"/>
+                </a:solidFill>
+                <a:latin typeface="Calibri"/>
+              </a:rPr>
+              <a:t>Slice-wise Dice differs from per-patient 3D Dice [96]</a:t>
             </a:r>
           </a:p>
         </p:txBody>
@@ -21118,8 +20619,8 @@
         </p:nvSpPr>
         <p:spPr>
           <a:xfrm>
-            <a:off x="8095488" y="4628896"/>
-            <a:ext cx="3544824" cy="1543303"/>
+            <a:off x="8095488" y="4578096"/>
+            <a:ext cx="3544824" cy="1594103"/>
           </a:xfrm>
           <a:prstGeom prst="rect">
             <a:avLst/>
@@ -21162,8 +20663,8 @@
         </p:nvSpPr>
         <p:spPr>
           <a:xfrm>
-            <a:off x="8260080" y="4793488"/>
-            <a:ext cx="3215640" cy="1214119"/>
+            <a:off x="8260080" y="4742688"/>
+            <a:ext cx="3215640" cy="1264920"/>
           </a:xfrm>
           <a:prstGeom prst="rect">
             <a:avLst/>
@@ -21191,7 +20692,7 @@
                 </a:solidFill>
                 <a:latin typeface="Calibri"/>
               </a:rPr>
-              <a:t>VNet: the efficiency choice</a:t>
+              <a:t>SegResNet: the efficiency choice</a:t>
             </a:r>
           </a:p>
           <a:p>
@@ -21215,7 +20716,7 @@
                 </a:solidFill>
                 <a:latin typeface="Calibri"/>
               </a:rPr>
-              <a:t>97% of the UNet Dice with 1.40 M parameters, 149.9 GFLOPs and 0.53 training hours</a:t>
+              <a:t>Smallest network (19.92 M) and fastest: 1.01 s per case, 8.08 s with TTA on a T4</a:t>
             </a:r>
           </a:p>
           <a:p>
@@ -21239,7 +20740,7 @@
                 </a:solidFill>
                 <a:latin typeface="Calibri"/>
               </a:rPr>
-              <a:t>0.0375 s per volume (UNet 0.1076 s) and 0.98 GB at inference; best Dice per parameter (0.5694) and per training hour (1.4939)</a:t>
+              <a:t>The ensemble needs all three networks: 124.11 M parameters, 48.20 s with TTA, six times SegResNet, for a lower internal Dice</a:t>
             </a:r>
           </a:p>
         </p:txBody>
@@ -21444,7 +20945,7 @@
                 </a:solidFill>
                 <a:latin typeface="Calibri"/>
               </a:rPr>
-              <a:t>[43]	</a:t>
+              <a:t>[48]	</a:t>
             </a:r>
             <a:r>
               <a:rPr sz="780" i="0">
@@ -21453,7 +20954,7 @@
                 </a:solidFill>
                 <a:latin typeface="Calibri"/>
               </a:rPr>
-              <a:t>J. R. Zech, M. A. Badgeley, M. Liu, A. B. Costa, J. J. Titano, and E. K. Oermann, “Variable generalization performance of a deep learning model to detect pneumonia in chest radiographs: A cross-sectional study,” </a:t>
+              <a:t>S. Suzuki and K. Abe, “Topological structural analysis of digitized binary images by border following,” </a:t>
             </a:r>
             <a:r>
               <a:rPr sz="780" i="1">
@@ -21462,7 +20963,7 @@
                 </a:solidFill>
                 <a:latin typeface="Calibri"/>
               </a:rPr>
-              <a:t>PLOS Medicine</a:t>
+              <a:t>Computer Vision, Graphics, and Image Processing</a:t>
             </a:r>
             <a:r>
               <a:rPr sz="780" i="0">
@@ -21471,7 +20972,7 @@
                 </a:solidFill>
                 <a:latin typeface="Calibri"/>
               </a:rPr>
-              <a:t>, vol. 15, no. 11, Art. no. e1002683, 2018.</a:t>
+              <a:t>, vol. 30, no. 1, pp. 32–46, 1985.</a:t>
             </a:r>
           </a:p>
           <a:p>
@@ -21487,7 +20988,7 @@
                 </a:solidFill>
                 <a:latin typeface="Calibri"/>
               </a:rPr>
-              <a:t>[44]	</a:t>
+              <a:t>[49]	</a:t>
             </a:r>
             <a:r>
               <a:rPr sz="780" i="0">
@@ -21496,7 +20997,7 @@
                 </a:solidFill>
                 <a:latin typeface="Calibri"/>
               </a:rPr>
-              <a:t>A. J. DeGrave, J. D. Janizek, and S.-I. Lee, “AI for radiographic COVID-19 detection selects shortcuts over signal,” </a:t>
+              <a:t>V. Monga and B. L. Evans, “Perceptual image hashing via feature points: Performance evaluation and tradeoffs,” </a:t>
             </a:r>
             <a:r>
               <a:rPr sz="780" i="1">
@@ -21505,7 +21006,7 @@
                 </a:solidFill>
                 <a:latin typeface="Calibri"/>
               </a:rPr>
-              <a:t>Nature Machine Intelligence</a:t>
+              <a:t>IEEE Transactions on Image Processing</a:t>
             </a:r>
             <a:r>
               <a:rPr sz="780" i="0">
@@ -21514,7 +21015,7 @@
                 </a:solidFill>
                 <a:latin typeface="Calibri"/>
               </a:rPr>
-              <a:t>, vol. 3, no. 7, pp. 610–619, 2021.</a:t>
+              <a:t>, vol. 15, no. 11, pp. 3452–3465, 2006.</a:t>
             </a:r>
           </a:p>
           <a:p>
@@ -21530,7 +21031,7 @@
                 </a:solidFill>
                 <a:latin typeface="Calibri"/>
               </a:rPr>
-              <a:t>[45]	</a:t>
+              <a:t>[50]	</a:t>
             </a:r>
             <a:r>
               <a:rPr sz="780" i="0">
@@ -21539,7 +21040,7 @@
                 </a:solidFill>
                 <a:latin typeface="Calibri"/>
               </a:rPr>
-              <a:t>J. M. J. Valanarasu, P. Oza, I. Hacihaliloglu, and V. M. Patel, “Medical transformer: Gated axial-attention for medical image segmentation,” in </a:t>
+              <a:t>R. W. Hamming, “Error detecting and error correcting codes,” </a:t>
             </a:r>
             <a:r>
               <a:rPr sz="780" i="1">
@@ -21548,7 +21049,7 @@
                 </a:solidFill>
                 <a:latin typeface="Calibri"/>
               </a:rPr>
-              <a:t>Medical Image Computing and Computer Assisted Intervention (MICCAI 2021)</a:t>
+              <a:t>Bell System Technical Journal</a:t>
             </a:r>
             <a:r>
               <a:rPr sz="780" i="0">
@@ -21557,7 +21058,7 @@
                 </a:solidFill>
                 <a:latin typeface="Calibri"/>
               </a:rPr>
-              <a:t>, 2021, pp. 36–46.</a:t>
+              <a:t>, vol. 29, no. 2, pp. 147–160, 1950.</a:t>
             </a:r>
           </a:p>
           <a:p>
@@ -21573,7 +21074,7 @@
                 </a:solidFill>
                 <a:latin typeface="Calibri"/>
               </a:rPr>
-              <a:t>[46]	</a:t>
+              <a:t>[51]	</a:t>
             </a:r>
             <a:r>
               <a:rPr sz="780" i="0">
@@ -21582,7 +21083,7 @@
                 </a:solidFill>
                 <a:latin typeface="Calibri"/>
               </a:rPr>
-              <a:t>H. Cao et al., “Swin-Unet: Unet-like pure transformer for medical image segmentation,” in </a:t>
+              <a:t>B. Zitová and J. Flusser, “Image registration methods: A survey,” </a:t>
             </a:r>
             <a:r>
               <a:rPr sz="780" i="1">
@@ -21591,7 +21092,7 @@
                 </a:solidFill>
                 <a:latin typeface="Calibri"/>
               </a:rPr>
-              <a:t>Computer Vision – ECCV 2022 Workshops</a:t>
+              <a:t>Image and Vision Computing</a:t>
             </a:r>
             <a:r>
               <a:rPr sz="780" i="0">
@@ -21600,7 +21101,7 @@
                 </a:solidFill>
                 <a:latin typeface="Calibri"/>
               </a:rPr>
-              <a:t>, 2023, pp. 205–218.</a:t>
+              <a:t>, vol. 21, no. 11, pp. 977–1000, 2003.</a:t>
             </a:r>
           </a:p>
           <a:p>
@@ -21616,7 +21117,7 @@
                 </a:solidFill>
                 <a:latin typeface="Calibri"/>
               </a:rPr>
-              <a:t>[47]	</a:t>
+              <a:t>[52]	</a:t>
             </a:r>
             <a:r>
               <a:rPr sz="780" i="0">
@@ -21625,7 +21126,7 @@
                 </a:solidFill>
                 <a:latin typeface="Calibri"/>
               </a:rPr>
-              <a:t>S. Suzuki and K. Abe, “Topological structural analysis of digitized binary images by border following,” </a:t>
+              <a:t>F. Pedregosa et al., “Scikit-learn: Machine learning in Python,” </a:t>
             </a:r>
             <a:r>
               <a:rPr sz="780" i="1">
@@ -21634,7 +21135,7 @@
                 </a:solidFill>
                 <a:latin typeface="Calibri"/>
               </a:rPr>
-              <a:t>Computer Vision, Graphics, and Image Processing</a:t>
+              <a:t>Journal of Machine Learning Research</a:t>
             </a:r>
             <a:r>
               <a:rPr sz="780" i="0">
@@ -21643,7 +21144,7 @@
                 </a:solidFill>
                 <a:latin typeface="Calibri"/>
               </a:rPr>
-              <a:t>, vol. 30, no. 1, pp. 32–46, 1985.</a:t>
+              <a:t>, vol. 12, no. 85, pp. 2825–2830, 2011.</a:t>
             </a:r>
           </a:p>
           <a:p>
@@ -21659,7 +21160,7 @@
                 </a:solidFill>
                 <a:latin typeface="Calibri"/>
               </a:rPr>
-              <a:t>[48]	</a:t>
+              <a:t>[53]	</a:t>
             </a:r>
             <a:r>
               <a:rPr sz="780" i="0">
@@ -21668,7 +21169,7 @@
                 </a:solidFill>
                 <a:latin typeface="Calibri"/>
               </a:rPr>
-              <a:t>V. Monga and B. L. Evans, “Perceptual image hashing via feature points: Performance evaluation and tradeoffs,” </a:t>
+              <a:t>M. Stone, “Cross-validatory choice and assessment of statistical predictions,” </a:t>
             </a:r>
             <a:r>
               <a:rPr sz="780" i="1">
@@ -21677,7 +21178,7 @@
                 </a:solidFill>
                 <a:latin typeface="Calibri"/>
               </a:rPr>
-              <a:t>IEEE Transactions on Image Processing</a:t>
+              <a:t>Journal of the Royal Statistical Society: Series B (Methodological)</a:t>
             </a:r>
             <a:r>
               <a:rPr sz="780" i="0">
@@ -21686,7 +21187,7 @@
                 </a:solidFill>
                 <a:latin typeface="Calibri"/>
               </a:rPr>
-              <a:t>, vol. 15, no. 11, pp. 3452–3465, 2006.</a:t>
+              <a:t>, vol. 36, no. 2, pp. 111–133, 1974.</a:t>
             </a:r>
           </a:p>
           <a:p>
@@ -21702,7 +21203,7 @@
                 </a:solidFill>
                 <a:latin typeface="Calibri"/>
               </a:rPr>
-              <a:t>[49]	</a:t>
+              <a:t>[54]	</a:t>
             </a:r>
             <a:r>
               <a:rPr sz="780" i="0">
@@ -21711,25 +21212,7 @@
                 </a:solidFill>
                 <a:latin typeface="Calibri"/>
               </a:rPr>
-              <a:t>R. W. Hamming, “Error detecting and error correcting codes,” </a:t>
-            </a:r>
-            <a:r>
-              <a:rPr sz="780" i="1">
-                <a:solidFill>
-                  <a:srgbClr val="1E2430"/>
-                </a:solidFill>
-                <a:latin typeface="Calibri"/>
-              </a:rPr>
-              <a:t>Bell System Technical Journal</a:t>
-            </a:r>
-            <a:r>
-              <a:rPr sz="780" i="0">
-                <a:solidFill>
-                  <a:srgbClr val="1E2430"/>
-                </a:solidFill>
-                <a:latin typeface="Calibri"/>
-              </a:rPr>
-              <a:t>, vol. 29, no. 2, pp. 147–160, 1950.</a:t>
+              <a:t>A. Hamada, “Br35H :: Brain tumor detection 2020,” IEEE DataPort, also available at https://www.kaggle.com/datasets/ahmedhamada0/brain-tumor-detection, 2025.</a:t>
             </a:r>
           </a:p>
           <a:p>
@@ -21745,7 +21228,7 @@
                 </a:solidFill>
                 <a:latin typeface="Calibri"/>
               </a:rPr>
-              <a:t>[50]	</a:t>
+              <a:t>[55]	</a:t>
             </a:r>
             <a:r>
               <a:rPr sz="780" i="0">
@@ -21754,25 +21237,7 @@
                 </a:solidFill>
                 <a:latin typeface="Calibri"/>
               </a:rPr>
-              <a:t>B. Zitová and J. Flusser, “Image registration methods: A survey,” </a:t>
-            </a:r>
-            <a:r>
-              <a:rPr sz="780" i="1">
-                <a:solidFill>
-                  <a:srgbClr val="1E2430"/>
-                </a:solidFill>
-                <a:latin typeface="Calibri"/>
-              </a:rPr>
-              <a:t>Image and Vision Computing</a:t>
-            </a:r>
-            <a:r>
-              <a:rPr sz="780" i="0">
-                <a:solidFill>
-                  <a:srgbClr val="1E2430"/>
-                </a:solidFill>
-                <a:latin typeface="Calibri"/>
-              </a:rPr>
-              <a:t>, vol. 21, no. 11, pp. 977–1000, 2003.</a:t>
+              <a:t>N. Chakrabarty, “Brain MRI images for brain tumor detection,” Kaggle dataset, version 1, 2019.</a:t>
             </a:r>
           </a:p>
           <a:p>
@@ -21788,7 +21253,7 @@
                 </a:solidFill>
                 <a:latin typeface="Calibri"/>
               </a:rPr>
-              <a:t>[51]	</a:t>
+              <a:t>[56]	</a:t>
             </a:r>
             <a:r>
               <a:rPr sz="780" i="0">
@@ -21797,25 +21262,7 @@
                 </a:solidFill>
                 <a:latin typeface="Calibri"/>
               </a:rPr>
-              <a:t>F. Pedregosa et al., “Scikit-learn: Machine learning in Python,” </a:t>
-            </a:r>
-            <a:r>
-              <a:rPr sz="780" i="1">
-                <a:solidFill>
-                  <a:srgbClr val="1E2430"/>
-                </a:solidFill>
-                <a:latin typeface="Calibri"/>
-              </a:rPr>
-              <a:t>Journal of Machine Learning Research</a:t>
-            </a:r>
-            <a:r>
-              <a:rPr sz="780" i="0">
-                <a:solidFill>
-                  <a:srgbClr val="1E2430"/>
-                </a:solidFill>
-                <a:latin typeface="Calibri"/>
-              </a:rPr>
-              <a:t>, vol. 12, no. 85, pp. 2825–2830, 2011.</a:t>
+              <a:t>S. Bhuvaji, A. Kadam, P. Bhumkar, S. Dedge, and S. Kanchan, “Brain tumor classification (MRI),” Kaggle dataset, 2020.</a:t>
             </a:r>
           </a:p>
           <a:p>
@@ -21831,7 +21278,7 @@
                 </a:solidFill>
                 <a:latin typeface="Calibri"/>
               </a:rPr>
-              <a:t>[52]	</a:t>
+              <a:t>[57]	</a:t>
             </a:r>
             <a:r>
               <a:rPr sz="780" i="0">
@@ -21840,25 +21287,7 @@
                 </a:solidFill>
                 <a:latin typeface="Calibri"/>
               </a:rPr>
-              <a:t>M. Stone, “Cross-validatory choice and assessment of statistical predictions,” </a:t>
-            </a:r>
-            <a:r>
-              <a:rPr sz="780" i="1">
-                <a:solidFill>
-                  <a:srgbClr val="1E2430"/>
-                </a:solidFill>
-                <a:latin typeface="Calibri"/>
-              </a:rPr>
-              <a:t>Journal of the Royal Statistical Society: Series B (Methodological)</a:t>
-            </a:r>
-            <a:r>
-              <a:rPr sz="780" i="0">
-                <a:solidFill>
-                  <a:srgbClr val="1E2430"/>
-                </a:solidFill>
-                <a:latin typeface="Calibri"/>
-              </a:rPr>
-              <a:t>, vol. 36, no. 2, pp. 111–133, 1974.</a:t>
+              <a:t>J. Cheng, “Brain tumor dataset,” figshare, version 5, 2017.</a:t>
             </a:r>
           </a:p>
           <a:p>
@@ -21874,7 +21303,7 @@
                 </a:solidFill>
                 <a:latin typeface="Calibri"/>
               </a:rPr>
-              <a:t>[53]	</a:t>
+              <a:t>[58]	</a:t>
             </a:r>
             <a:r>
               <a:rPr sz="780" i="0">
@@ -21883,7 +21312,7 @@
                 </a:solidFill>
                 <a:latin typeface="Calibri"/>
               </a:rPr>
-              <a:t>A. Hamada, “Br35H :: Brain tumor detection 2020,” IEEE DataPort, 2025.</a:t>
+              <a:t>MoundirB, “Jun Cheng brain tumor MRI dataset JPG,” Kaggle dataset, version 1, 2025.</a:t>
             </a:r>
           </a:p>
           <a:p>
@@ -21899,7 +21328,7 @@
                 </a:solidFill>
                 <a:latin typeface="Calibri"/>
               </a:rPr>
-              <a:t>[54]	</a:t>
+              <a:t>[59]	</a:t>
             </a:r>
             <a:r>
               <a:rPr sz="780" i="0">
@@ -21908,7 +21337,25 @@
                 </a:solidFill>
                 <a:latin typeface="Calibri"/>
               </a:rPr>
-              <a:t>N. Chakrabarty, “Brain MRI images for brain tumor detection,” Kaggle dataset, version 1, 2019.</a:t>
+              <a:t>M. Norouzi, A. Punjani, and D. J. Fleet, “Fast exact search in Hamming space with multi-index hashing,” </a:t>
+            </a:r>
+            <a:r>
+              <a:rPr sz="780" i="1">
+                <a:solidFill>
+                  <a:srgbClr val="1E2430"/>
+                </a:solidFill>
+                <a:latin typeface="Calibri"/>
+              </a:rPr>
+              <a:t>IEEE Transactions on Pattern Analysis and Machine Intelligence</a:t>
+            </a:r>
+            <a:r>
+              <a:rPr sz="780" i="0">
+                <a:solidFill>
+                  <a:srgbClr val="1E2430"/>
+                </a:solidFill>
+                <a:latin typeface="Calibri"/>
+              </a:rPr>
+              <a:t>, vol. 36, no. 6, pp. 1107–1119, 2014.</a:t>
             </a:r>
           </a:p>
           <a:p>
@@ -21924,7 +21371,7 @@
                 </a:solidFill>
                 <a:latin typeface="Calibri"/>
               </a:rPr>
-              <a:t>[55]	</a:t>
+              <a:t>[60]	</a:t>
             </a:r>
             <a:r>
               <a:rPr sz="780" i="0">
@@ -21933,7 +21380,25 @@
                 </a:solidFill>
                 <a:latin typeface="Calibri"/>
               </a:rPr>
-              <a:t>S. Bhuvaji, A. Kadam, P. Bhumkar, S. Dedge, and S. Kanchan, “Brain tumor classification (MRI),” Kaggle dataset, 2020.</a:t>
+              <a:t>M. Tan and Q. Le, “EfficientNet: Rethinking model scaling for convolutional neural networks,” in </a:t>
+            </a:r>
+            <a:r>
+              <a:rPr sz="780" i="1">
+                <a:solidFill>
+                  <a:srgbClr val="1E2430"/>
+                </a:solidFill>
+                <a:latin typeface="Calibri"/>
+              </a:rPr>
+              <a:t>Proc. 36th International Conference on Machine Learning (ICML)</a:t>
+            </a:r>
+            <a:r>
+              <a:rPr sz="780" i="0">
+                <a:solidFill>
+                  <a:srgbClr val="1E2430"/>
+                </a:solidFill>
+                <a:latin typeface="Calibri"/>
+              </a:rPr>
+              <a:t>, 2019, pp. 6105–6114.</a:t>
             </a:r>
           </a:p>
           <a:p>
@@ -21949,7 +21414,7 @@
                 </a:solidFill>
                 <a:latin typeface="Calibri"/>
               </a:rPr>
-              <a:t>[56]	</a:t>
+              <a:t>[61]	</a:t>
             </a:r>
             <a:r>
               <a:rPr sz="780" i="0">
@@ -21958,7 +21423,25 @@
                 </a:solidFill>
                 <a:latin typeface="Calibri"/>
               </a:rPr>
-              <a:t>J. Cheng, “Brain tumor dataset,” figshare, version 5, 2017.</a:t>
+              <a:t>A. Howard et al., “Searching for MobileNetV3,” in </a:t>
+            </a:r>
+            <a:r>
+              <a:rPr sz="780" i="1">
+                <a:solidFill>
+                  <a:srgbClr val="1E2430"/>
+                </a:solidFill>
+                <a:latin typeface="Calibri"/>
+              </a:rPr>
+              <a:t>Proc. IEEE/CVF International Conference on Computer Vision (ICCV)</a:t>
+            </a:r>
+            <a:r>
+              <a:rPr sz="780" i="0">
+                <a:solidFill>
+                  <a:srgbClr val="1E2430"/>
+                </a:solidFill>
+                <a:latin typeface="Calibri"/>
+              </a:rPr>
+              <a:t>, 2019, pp. 1314–1324.</a:t>
             </a:r>
           </a:p>
           <a:p>
@@ -21974,7 +21457,7 @@
                 </a:solidFill>
                 <a:latin typeface="Calibri"/>
               </a:rPr>
-              <a:t>[57]	</a:t>
+              <a:t>[62]	</a:t>
             </a:r>
             <a:r>
               <a:rPr sz="780" i="0">
@@ -21983,7 +21466,25 @@
                 </a:solidFill>
                 <a:latin typeface="Calibri"/>
               </a:rPr>
-              <a:t>MoundirB, “Jun Cheng brain tumor MRI dataset JPG,” Kaggle dataset, version 1, 2025.</a:t>
+              <a:t>M. Sandler, A. Howard, M. Zhu, A. Zhmoginov, and L.-C. Chen, “MobileNetV2: Inverted residuals and linear bottlenecks,” in </a:t>
+            </a:r>
+            <a:r>
+              <a:rPr sz="780" i="1">
+                <a:solidFill>
+                  <a:srgbClr val="1E2430"/>
+                </a:solidFill>
+                <a:latin typeface="Calibri"/>
+              </a:rPr>
+              <a:t>Proc. IEEE/CVF Conference on Computer Vision and Pattern Recognition (CVPR)</a:t>
+            </a:r>
+            <a:r>
+              <a:rPr sz="780" i="0">
+                <a:solidFill>
+                  <a:srgbClr val="1E2430"/>
+                </a:solidFill>
+                <a:latin typeface="Calibri"/>
+              </a:rPr>
+              <a:t>, 2018, pp. 4510–4520.</a:t>
             </a:r>
           </a:p>
           <a:p>
@@ -21999,7 +21500,7 @@
                 </a:solidFill>
                 <a:latin typeface="Calibri"/>
               </a:rPr>
-              <a:t>[58]	</a:t>
+              <a:t>[63]	</a:t>
             </a:r>
             <a:r>
               <a:rPr sz="780" i="0">
@@ -22008,7 +21509,7 @@
                 </a:solidFill>
                 <a:latin typeface="Calibri"/>
               </a:rPr>
-              <a:t>M. Tan and Q. Le, “EfficientNet: Rethinking model scaling for convolutional neural networks,” in </a:t>
+              <a:t>A. Vaswani et al., “Attention is all you need,” in </a:t>
             </a:r>
             <a:r>
               <a:rPr sz="780" i="1">
@@ -22017,7 +21518,7 @@
                 </a:solidFill>
                 <a:latin typeface="Calibri"/>
               </a:rPr>
-              <a:t>Proc. 36th International Conference on Machine Learning (ICML)</a:t>
+              <a:t>Advances in Neural Information Processing Systems (NeurIPS) 30</a:t>
             </a:r>
             <a:r>
               <a:rPr sz="780" i="0">
@@ -22026,7 +21527,7 @@
                 </a:solidFill>
                 <a:latin typeface="Calibri"/>
               </a:rPr>
-              <a:t>, 2019, pp. 6105–6114.</a:t>
+              <a:t>, 2017.</a:t>
             </a:r>
           </a:p>
           <a:p>
@@ -22042,7 +21543,7 @@
                 </a:solidFill>
                 <a:latin typeface="Calibri"/>
               </a:rPr>
-              <a:t>[59]	</a:t>
+              <a:t>[64]	</a:t>
             </a:r>
             <a:r>
               <a:rPr sz="780" i="0">
@@ -22051,7 +21552,7 @@
                 </a:solidFill>
                 <a:latin typeface="Calibri"/>
               </a:rPr>
-              <a:t>A. Howard et al., “Searching for MobileNetV3,” in </a:t>
+              <a:t>Z. Dai, H. Liu, Q. V. Le, and M. Tan, “CoAtNet: Marrying convolution and attention for all data sizes,” in </a:t>
             </a:r>
             <a:r>
               <a:rPr sz="780" i="1">
@@ -22060,7 +21561,7 @@
                 </a:solidFill>
                 <a:latin typeface="Calibri"/>
               </a:rPr>
-              <a:t>Proc. IEEE/CVF International Conference on Computer Vision (ICCV)</a:t>
+              <a:t>Advances in Neural Information Processing Systems (NeurIPS)</a:t>
             </a:r>
             <a:r>
               <a:rPr sz="780" i="0">
@@ -22069,7 +21570,7 @@
                 </a:solidFill>
                 <a:latin typeface="Calibri"/>
               </a:rPr>
-              <a:t>, 2019, pp. 1314–1324.</a:t>
+              <a:t>, 2021, pp. 3965–3977.</a:t>
             </a:r>
           </a:p>
           <a:p>
@@ -22085,7 +21586,7 @@
                 </a:solidFill>
                 <a:latin typeface="Calibri"/>
               </a:rPr>
-              <a:t>[60]	</a:t>
+              <a:t>[65]	</a:t>
             </a:r>
             <a:r>
               <a:rPr sz="780" i="0">
@@ -22094,7 +21595,7 @@
                 </a:solidFill>
                 <a:latin typeface="Calibri"/>
               </a:rPr>
-              <a:t>M. Sandler, A. Howard, M. Zhu, A. Zhmoginov, and L.-C. Chen, “MobileNetV2: Inverted residuals and linear bottlenecks,” in </a:t>
+              <a:t>Y. LeCun, L. Bottou, Y. Bengio, and P. Haffner, “Gradient-based learning applied to document recognition,” </a:t>
             </a:r>
             <a:r>
               <a:rPr sz="780" i="1">
@@ -22103,7 +21604,7 @@
                 </a:solidFill>
                 <a:latin typeface="Calibri"/>
               </a:rPr>
-              <a:t>Proc. IEEE/CVF Conference on Computer Vision and Pattern Recognition (CVPR)</a:t>
+              <a:t>Proceedings of the IEEE</a:t>
             </a:r>
             <a:r>
               <a:rPr sz="780" i="0">
@@ -22112,7 +21613,7 @@
                 </a:solidFill>
                 <a:latin typeface="Calibri"/>
               </a:rPr>
-              <a:t>, 2018, pp. 4510–4520.</a:t>
+              <a:t>, vol. 86, no. 11, pp. 2278–2324, 1998.</a:t>
             </a:r>
           </a:p>
           <a:p>
@@ -22128,7 +21629,7 @@
                 </a:solidFill>
                 <a:latin typeface="Calibri"/>
               </a:rPr>
-              <a:t>[61]	</a:t>
+              <a:t>[66]	</a:t>
             </a:r>
             <a:r>
               <a:rPr sz="780" i="0">
@@ -22137,7 +21638,7 @@
                 </a:solidFill>
                 <a:latin typeface="Calibri"/>
               </a:rPr>
-              <a:t>A. Vaswani et al., “Attention is all you need,” in </a:t>
+              <a:t>Y. LeCun, Y. Bengio, and G. Hinton, “Deep learning,” </a:t>
             </a:r>
             <a:r>
               <a:rPr sz="780" i="1">
@@ -22146,7 +21647,7 @@
                 </a:solidFill>
                 <a:latin typeface="Calibri"/>
               </a:rPr>
-              <a:t>Advances in Neural Information Processing Systems (NeurIPS) 30</a:t>
+              <a:t>Nature</a:t>
             </a:r>
             <a:r>
               <a:rPr sz="780" i="0">
@@ -22155,7 +21656,7 @@
                 </a:solidFill>
                 <a:latin typeface="Calibri"/>
               </a:rPr>
-              <a:t>, 2017.</a:t>
+              <a:t>, vol. 521, no. 7553, pp. 436–444, 2015.</a:t>
             </a:r>
           </a:p>
           <a:p>
@@ -22171,7 +21672,7 @@
                 </a:solidFill>
                 <a:latin typeface="Calibri"/>
               </a:rPr>
-              <a:t>[62]	</a:t>
+              <a:t>[67]	</a:t>
             </a:r>
             <a:r>
               <a:rPr sz="780" i="0">
@@ -22180,7 +21681,7 @@
                 </a:solidFill>
                 <a:latin typeface="Calibri"/>
               </a:rPr>
-              <a:t>Z. Dai, H. Liu, Q. V. Le, and M. Tan, “CoAtNet: Marrying convolution and attention for all data sizes,” in </a:t>
+              <a:t>J. Deng, W. Dong, R. Socher, L.-J. Li, K. Li, and L. Fei-Fei, “ImageNet: A large-scale hierarchical image database,” in </a:t>
             </a:r>
             <a:r>
               <a:rPr sz="780" i="1">
@@ -22189,7 +21690,7 @@
                 </a:solidFill>
                 <a:latin typeface="Calibri"/>
               </a:rPr>
-              <a:t>Advances in Neural Information Processing Systems (NeurIPS)</a:t>
+              <a:t>Proc. IEEE Conference on Computer Vision and Pattern Recognition (CVPR)</a:t>
             </a:r>
             <a:r>
               <a:rPr sz="780" i="0">
@@ -22198,7 +21699,7 @@
                 </a:solidFill>
                 <a:latin typeface="Calibri"/>
               </a:rPr>
-              <a:t>, 2021, pp. 3965–3977.</a:t>
+              <a:t>, 2009, pp. 248–255.</a:t>
             </a:r>
           </a:p>
           <a:p>
@@ -22214,7 +21715,7 @@
                 </a:solidFill>
                 <a:latin typeface="Calibri"/>
               </a:rPr>
-              <a:t>[63]	</a:t>
+              <a:t>[68]	</a:t>
             </a:r>
             <a:r>
               <a:rPr sz="780" i="0">
@@ -22223,7 +21724,7 @@
                 </a:solidFill>
                 <a:latin typeface="Calibri"/>
               </a:rPr>
-              <a:t>Y. LeCun, L. Bottou, Y. Bengio, and P. Haffner, “Gradient-based learning applied to document recognition,” </a:t>
+              <a:t>O. Russakovsky et al., “ImageNet large scale visual recognition challenge,” </a:t>
             </a:r>
             <a:r>
               <a:rPr sz="780" i="1">
@@ -22232,7 +21733,7 @@
                 </a:solidFill>
                 <a:latin typeface="Calibri"/>
               </a:rPr>
-              <a:t>Proceedings of the IEEE</a:t>
+              <a:t>International Journal of Computer Vision</a:t>
             </a:r>
             <a:r>
               <a:rPr sz="780" i="0">
@@ -22241,7 +21742,7 @@
                 </a:solidFill>
                 <a:latin typeface="Calibri"/>
               </a:rPr>
-              <a:t>, vol. 86, no. 11, pp. 2278–2324, 1998.</a:t>
+              <a:t>, vol. 115, no. 3, pp. 211–252, 2015.</a:t>
             </a:r>
           </a:p>
           <a:p>
@@ -22257,7 +21758,7 @@
                 </a:solidFill>
                 <a:latin typeface="Calibri"/>
               </a:rPr>
-              <a:t>[64]	</a:t>
+              <a:t>[69]	</a:t>
             </a:r>
             <a:r>
               <a:rPr sz="780" i="0">
@@ -22266,7 +21767,7 @@
                 </a:solidFill>
                 <a:latin typeface="Calibri"/>
               </a:rPr>
-              <a:t>Y. LeCun, Y. Bengio, and G. Hinton, “Deep learning,” </a:t>
+              <a:t>A. Paszke et al., “PyTorch: An imperative style, high-performance deep learning library,” in </a:t>
             </a:r>
             <a:r>
               <a:rPr sz="780" i="1">
@@ -22275,7 +21776,7 @@
                 </a:solidFill>
                 <a:latin typeface="Calibri"/>
               </a:rPr>
-              <a:t>Nature</a:t>
+              <a:t>Advances in Neural Information Processing Systems (NeurIPS) 32</a:t>
             </a:r>
             <a:r>
               <a:rPr sz="780" i="0">
@@ -22284,7 +21785,7 @@
                 </a:solidFill>
                 <a:latin typeface="Calibri"/>
               </a:rPr>
-              <a:t>, vol. 521, no. 7553, pp. 436–444, 2015.</a:t>
+              <a:t>, 2019.</a:t>
             </a:r>
           </a:p>
           <a:p>
@@ -22300,7 +21801,7 @@
                 </a:solidFill>
                 <a:latin typeface="Calibri"/>
               </a:rPr>
-              <a:t>[65]	</a:t>
+              <a:t>[70]	</a:t>
             </a:r>
             <a:r>
               <a:rPr sz="780" i="0">
@@ -22309,7 +21810,7 @@
                 </a:solidFill>
                 <a:latin typeface="Calibri"/>
               </a:rPr>
-              <a:t>J. Deng, W. Dong, R. Socher, L.-J. Li, K. Li, and L. Fei-Fei, “ImageNet: A large-scale hierarchical image database,” in </a:t>
+              <a:t>I. Loshchilov and F. Hutter, “Decoupled weight decay regularization,” in </a:t>
             </a:r>
             <a:r>
               <a:rPr sz="780" i="1">
@@ -22318,7 +21819,7 @@
                 </a:solidFill>
                 <a:latin typeface="Calibri"/>
               </a:rPr>
-              <a:t>Proc. IEEE Conference on Computer Vision and Pattern Recognition (CVPR)</a:t>
+              <a:t>Proc. International Conference on Learning Representations (ICLR)</a:t>
             </a:r>
             <a:r>
               <a:rPr sz="780" i="0">
@@ -22327,7 +21828,7 @@
                 </a:solidFill>
                 <a:latin typeface="Calibri"/>
               </a:rPr>
-              <a:t>, 2009, pp. 248–255.</a:t>
+              <a:t>, 2019.</a:t>
             </a:r>
           </a:p>
           <a:p>
@@ -22343,7 +21844,7 @@
                 </a:solidFill>
                 <a:latin typeface="Calibri"/>
               </a:rPr>
-              <a:t>[66]	</a:t>
+              <a:t>[71]	</a:t>
             </a:r>
             <a:r>
               <a:rPr sz="780" i="0">
@@ -22352,7 +21853,7 @@
                 </a:solidFill>
                 <a:latin typeface="Calibri"/>
               </a:rPr>
-              <a:t>O. Russakovsky et al., “ImageNet large scale visual recognition challenge,” </a:t>
+              <a:t>I. Loshchilov and F. Hutter, “SGDR: Stochastic gradient descent with warm restarts,” in </a:t>
             </a:r>
             <a:r>
               <a:rPr sz="780" i="1">
@@ -22361,7 +21862,7 @@
                 </a:solidFill>
                 <a:latin typeface="Calibri"/>
               </a:rPr>
-              <a:t>International Journal of Computer Vision</a:t>
+              <a:t>Proc. International Conference on Learning Representations (ICLR)</a:t>
             </a:r>
             <a:r>
               <a:rPr sz="780" i="0">
@@ -22370,7 +21871,93 @@
                 </a:solidFill>
                 <a:latin typeface="Calibri"/>
               </a:rPr>
-              <a:t>, vol. 115, no. 3, pp. 211–252, 2015.</a:t>
+              <a:t>, 2017.</a:t>
+            </a:r>
+          </a:p>
+          <a:p>
+            <a:pPr marL="274320" indent="-274320">
+              <a:spcAft>
+                <a:spcPts val="100"/>
+              </a:spcAft>
+            </a:pPr>
+            <a:r>
+              <a:rPr sz="780" i="0">
+                <a:solidFill>
+                  <a:srgbClr val="1E2430"/>
+                </a:solidFill>
+                <a:latin typeface="Calibri"/>
+              </a:rPr>
+              <a:t>[72]	</a:t>
+            </a:r>
+            <a:r>
+              <a:rPr sz="780" i="0">
+                <a:solidFill>
+                  <a:srgbClr val="1E2430"/>
+                </a:solidFill>
+                <a:latin typeface="Calibri"/>
+              </a:rPr>
+              <a:t>P. Micikevicius et al., “Mixed precision training,” in </a:t>
+            </a:r>
+            <a:r>
+              <a:rPr sz="780" i="1">
+                <a:solidFill>
+                  <a:srgbClr val="1E2430"/>
+                </a:solidFill>
+                <a:latin typeface="Calibri"/>
+              </a:rPr>
+              <a:t>Proc. International Conference on Learning Representations (ICLR)</a:t>
+            </a:r>
+            <a:r>
+              <a:rPr sz="780" i="0">
+                <a:solidFill>
+                  <a:srgbClr val="1E2430"/>
+                </a:solidFill>
+                <a:latin typeface="Calibri"/>
+              </a:rPr>
+              <a:t>, 2018.</a:t>
+            </a:r>
+          </a:p>
+          <a:p>
+            <a:pPr marL="274320" indent="-274320">
+              <a:spcAft>
+                <a:spcPts val="100"/>
+              </a:spcAft>
+            </a:pPr>
+            <a:r>
+              <a:rPr sz="780" i="0">
+                <a:solidFill>
+                  <a:srgbClr val="1E2430"/>
+                </a:solidFill>
+                <a:latin typeface="Calibri"/>
+              </a:rPr>
+              <a:t>[73]	</a:t>
+            </a:r>
+            <a:r>
+              <a:rPr sz="780" i="0">
+                <a:solidFill>
+                  <a:srgbClr val="1E2430"/>
+                </a:solidFill>
+                <a:latin typeface="Calibri"/>
+              </a:rPr>
+              <a:t>R. Pascanu, T. Mikolov, and Y. Bengio, “On the difficulty of training recurrent neural networks,” in </a:t>
+            </a:r>
+            <a:r>
+              <a:rPr sz="780" i="1">
+                <a:solidFill>
+                  <a:srgbClr val="1E2430"/>
+                </a:solidFill>
+                <a:latin typeface="Calibri"/>
+              </a:rPr>
+              <a:t>Proc. 30th International Conference on Machine Learning (ICML)</a:t>
+            </a:r>
+            <a:r>
+              <a:rPr sz="780" i="0">
+                <a:solidFill>
+                  <a:srgbClr val="1E2430"/>
+                </a:solidFill>
+                <a:latin typeface="Calibri"/>
+              </a:rPr>
+              <a:t>, 2013, pp. 1310–1318.</a:t>
             </a:r>
           </a:p>
         </p:txBody>
@@ -22409,7 +21996,7 @@
                 </a:solidFill>
                 <a:latin typeface="Calibri"/>
               </a:rPr>
-              <a:t>[67]	</a:t>
+              <a:t>[74]	</a:t>
             </a:r>
             <a:r>
               <a:rPr sz="780" i="0">
@@ -22418,7 +22005,7 @@
                 </a:solidFill>
                 <a:latin typeface="Calibri"/>
               </a:rPr>
-              <a:t>A. Paszke et al., “PyTorch: An imperative style, high-performance deep learning library,” in </a:t>
+              <a:t>T. Gneiting and A. E. Raftery, “Strictly proper scoring rules, prediction, and estimation,” </a:t>
             </a:r>
             <a:r>
               <a:rPr sz="780" i="1">
@@ -22427,7 +22014,7 @@
                 </a:solidFill>
                 <a:latin typeface="Calibri"/>
               </a:rPr>
-              <a:t>Advances in Neural Information Processing Systems (NeurIPS) 32</a:t>
+              <a:t>Journal of the American Statistical Association</a:t>
             </a:r>
             <a:r>
               <a:rPr sz="780" i="0">
@@ -22436,7 +22023,7 @@
                 </a:solidFill>
                 <a:latin typeface="Calibri"/>
               </a:rPr>
-              <a:t>, 2019.</a:t>
+              <a:t>, vol. 102, no. 477, pp. 359–378, 2007.</a:t>
             </a:r>
           </a:p>
           <a:p>
@@ -22452,7 +22039,7 @@
                 </a:solidFill>
                 <a:latin typeface="Calibri"/>
               </a:rPr>
-              <a:t>[68]	</a:t>
+              <a:t>[75]	</a:t>
             </a:r>
             <a:r>
               <a:rPr sz="780" i="0">
@@ -22461,7 +22048,7 @@
                 </a:solidFill>
                 <a:latin typeface="Calibri"/>
               </a:rPr>
-              <a:t>I. Loshchilov and F. Hutter, “Decoupled weight decay regularization,” in </a:t>
+              <a:t>C. Guo, G. Pleiss, Y. Sun, and K. Q. Weinberger, “On calibration of modern neural networks,” in </a:t>
             </a:r>
             <a:r>
               <a:rPr sz="780" i="1">
@@ -22470,7 +22057,7 @@
                 </a:solidFill>
                 <a:latin typeface="Calibri"/>
               </a:rPr>
-              <a:t>Proc. International Conference on Learning Representations (ICLR)</a:t>
+              <a:t>Proc. 34th International Conference on Machine Learning (ICML)</a:t>
             </a:r>
             <a:r>
               <a:rPr sz="780" i="0">
@@ -22479,7 +22066,7 @@
                 </a:solidFill>
                 <a:latin typeface="Calibri"/>
               </a:rPr>
-              <a:t>, 2019.</a:t>
+              <a:t>, 2017, pp. 1321–1330.</a:t>
             </a:r>
           </a:p>
           <a:p>
@@ -22495,7 +22082,7 @@
                 </a:solidFill>
                 <a:latin typeface="Calibri"/>
               </a:rPr>
-              <a:t>[69]	</a:t>
+              <a:t>[76]	</a:t>
             </a:r>
             <a:r>
               <a:rPr sz="780" i="0">
@@ -22504,7 +22091,7 @@
                 </a:solidFill>
                 <a:latin typeface="Calibri"/>
               </a:rPr>
-              <a:t>I. Loshchilov and F. Hutter, “SGDR: Stochastic gradient descent with warm restarts,” in </a:t>
+              <a:t>W. J. Youden, “Index for rating diagnostic tests,” </a:t>
             </a:r>
             <a:r>
               <a:rPr sz="780" i="1">
@@ -22513,7 +22100,7 @@
                 </a:solidFill>
                 <a:latin typeface="Calibri"/>
               </a:rPr>
-              <a:t>Proc. International Conference on Learning Representations (ICLR)</a:t>
+              <a:t>Cancer</a:t>
             </a:r>
             <a:r>
               <a:rPr sz="780" i="0">
@@ -22522,7 +22109,7 @@
                 </a:solidFill>
                 <a:latin typeface="Calibri"/>
               </a:rPr>
-              <a:t>, 2017.</a:t>
+              <a:t>, vol. 3, no. 1, pp. 32–35, 1950.</a:t>
             </a:r>
           </a:p>
           <a:p>
@@ -22538,7 +22125,7 @@
                 </a:solidFill>
                 <a:latin typeface="Calibri"/>
               </a:rPr>
-              <a:t>[70]	</a:t>
+              <a:t>[77]	</a:t>
             </a:r>
             <a:r>
               <a:rPr sz="780" i="0">
@@ -22547,7 +22134,7 @@
                 </a:solidFill>
                 <a:latin typeface="Calibri"/>
               </a:rPr>
-              <a:t>P. Micikevicius et al., “Mixed precision training,” in </a:t>
+              <a:t>J. A. Hanley and B. J. McNeil, “The meaning and use of the area under a receiver operating characteristic (ROC) curve,” </a:t>
             </a:r>
             <a:r>
               <a:rPr sz="780" i="1">
@@ -22556,7 +22143,7 @@
                 </a:solidFill>
                 <a:latin typeface="Calibri"/>
               </a:rPr>
-              <a:t>Proc. International Conference on Learning Representations (ICLR)</a:t>
+              <a:t>Radiology</a:t>
             </a:r>
             <a:r>
               <a:rPr sz="780" i="0">
@@ -22565,7 +22152,7 @@
                 </a:solidFill>
                 <a:latin typeface="Calibri"/>
               </a:rPr>
-              <a:t>, 2018.</a:t>
+              <a:t>, vol. 143, no. 1, pp. 29–36, 1982.</a:t>
             </a:r>
           </a:p>
           <a:p>
@@ -22581,7 +22168,7 @@
                 </a:solidFill>
                 <a:latin typeface="Calibri"/>
               </a:rPr>
-              <a:t>[71]	</a:t>
+              <a:t>[78]	</a:t>
             </a:r>
             <a:r>
               <a:rPr sz="780" i="0">
@@ -22590,7 +22177,7 @@
                 </a:solidFill>
                 <a:latin typeface="Calibri"/>
               </a:rPr>
-              <a:t>R. Pascanu, T. Mikolov, and Y. Bengio, “On the difficulty of training recurrent neural networks,” in </a:t>
+              <a:t>T. Fawcett, “An introduction to ROC analysis,” </a:t>
             </a:r>
             <a:r>
               <a:rPr sz="780" i="1">
@@ -22599,7 +22186,7 @@
                 </a:solidFill>
                 <a:latin typeface="Calibri"/>
               </a:rPr>
-              <a:t>Proc. 30th International Conference on Machine Learning (ICML)</a:t>
+              <a:t>Pattern Recognition Letters</a:t>
             </a:r>
             <a:r>
               <a:rPr sz="780" i="0">
@@ -22608,7 +22195,7 @@
                 </a:solidFill>
                 <a:latin typeface="Calibri"/>
               </a:rPr>
-              <a:t>, 2013, pp. 1310–1318.</a:t>
+              <a:t>, vol. 27, no. 8, pp. 861–874, 2006.</a:t>
             </a:r>
           </a:p>
           <a:p>
@@ -22624,7 +22211,7 @@
                 </a:solidFill>
                 <a:latin typeface="Calibri"/>
               </a:rPr>
-              <a:t>[72]	</a:t>
+              <a:t>[79]	</a:t>
             </a:r>
             <a:r>
               <a:rPr sz="780" i="0">
@@ -22633,7 +22220,7 @@
                 </a:solidFill>
                 <a:latin typeface="Calibri"/>
               </a:rPr>
-              <a:t>T. Gneiting and A. E. Raftery, “Strictly proper scoring rules, prediction, and estimation,” </a:t>
+              <a:t>B. W. Matthews, “Comparison of the predicted and observed secondary structure of T4 phage lysozyme,” </a:t>
             </a:r>
             <a:r>
               <a:rPr sz="780" i="1">
@@ -22642,7 +22229,7 @@
                 </a:solidFill>
                 <a:latin typeface="Calibri"/>
               </a:rPr>
-              <a:t>Journal of the American Statistical Association</a:t>
+              <a:t>Biochimica et Biophysica Acta (BBA) – Protein Structure</a:t>
             </a:r>
             <a:r>
               <a:rPr sz="780" i="0">
@@ -22651,7 +22238,7 @@
                 </a:solidFill>
                 <a:latin typeface="Calibri"/>
               </a:rPr>
-              <a:t>, vol. 102, no. 477, pp. 359–378, 2007.</a:t>
+              <a:t>, vol. 405, no. 2, pp. 442–451, 1975.</a:t>
             </a:r>
           </a:p>
           <a:p>
@@ -22667,7 +22254,7 @@
                 </a:solidFill>
                 <a:latin typeface="Calibri"/>
               </a:rPr>
-              <a:t>[73]	</a:t>
+              <a:t>[80]	</a:t>
             </a:r>
             <a:r>
               <a:rPr sz="780" i="0">
@@ -22676,7 +22263,7 @@
                 </a:solidFill>
                 <a:latin typeface="Calibri"/>
               </a:rPr>
-              <a:t>C. Guo, G. Pleiss, Y. Sun, and K. Q. Weinberger, “On calibration of modern neural networks,” in </a:t>
+              <a:t>D. Chicco and G. Jurman, “The advantages of the Matthews correlation coefficient (MCC) over F1 score and accuracy in binary classification evaluation,” </a:t>
             </a:r>
             <a:r>
               <a:rPr sz="780" i="1">
@@ -22685,7 +22272,7 @@
                 </a:solidFill>
                 <a:latin typeface="Calibri"/>
               </a:rPr>
-              <a:t>Proc. 34th International Conference on Machine Learning (ICML)</a:t>
+              <a:t>BMC Genomics</a:t>
             </a:r>
             <a:r>
               <a:rPr sz="780" i="0">
@@ -22694,7 +22281,7 @@
                 </a:solidFill>
                 <a:latin typeface="Calibri"/>
               </a:rPr>
-              <a:t>, 2017, pp. 1321–1330.</a:t>
+              <a:t>, vol. 21, Art. no. 6, 2020.</a:t>
             </a:r>
           </a:p>
           <a:p>
@@ -22710,7 +22297,7 @@
                 </a:solidFill>
                 <a:latin typeface="Calibri"/>
               </a:rPr>
-              <a:t>[74]	</a:t>
+              <a:t>[81]	</a:t>
             </a:r>
             <a:r>
               <a:rPr sz="780" i="0">
@@ -22719,7 +22306,7 @@
                 </a:solidFill>
                 <a:latin typeface="Calibri"/>
               </a:rPr>
-              <a:t>W. J. Youden, “Index for rating diagnostic tests,” </a:t>
+              <a:t>M. Pakdaman Naeini, G. Cooper, and M. Hauskrecht, “Obtaining well calibrated probabilities using Bayesian binning,” in </a:t>
             </a:r>
             <a:r>
               <a:rPr sz="780" i="1">
@@ -22728,7 +22315,7 @@
                 </a:solidFill>
                 <a:latin typeface="Calibri"/>
               </a:rPr>
-              <a:t>Cancer</a:t>
+              <a:t>Proc. AAAI Conference on Artificial Intelligence 29(1)</a:t>
             </a:r>
             <a:r>
               <a:rPr sz="780" i="0">
@@ -22737,7 +22324,7 @@
                 </a:solidFill>
                 <a:latin typeface="Calibri"/>
               </a:rPr>
-              <a:t>, vol. 3, no. 1, pp. 32–35, 1950.</a:t>
+              <a:t>, 2015.</a:t>
             </a:r>
           </a:p>
           <a:p>
@@ -22753,7 +22340,7 @@
                 </a:solidFill>
                 <a:latin typeface="Calibri"/>
               </a:rPr>
-              <a:t>[75]	</a:t>
+              <a:t>[82]	</a:t>
             </a:r>
             <a:r>
               <a:rPr sz="780" i="0">
@@ -22762,7 +22349,7 @@
                 </a:solidFill>
                 <a:latin typeface="Calibri"/>
               </a:rPr>
-              <a:t>J. A. Hanley and B. J. McNeil, “The meaning and use of the area under a receiver operating characteristic (ROC) curve,” </a:t>
+              <a:t>B. Efron, “Bootstrap methods: Another look at the jackknife,” </a:t>
             </a:r>
             <a:r>
               <a:rPr sz="780" i="1">
@@ -22771,7 +22358,7 @@
                 </a:solidFill>
                 <a:latin typeface="Calibri"/>
               </a:rPr>
-              <a:t>Radiology</a:t>
+              <a:t>The Annals of Statistics</a:t>
             </a:r>
             <a:r>
               <a:rPr sz="780" i="0">
@@ -22780,7 +22367,7 @@
                 </a:solidFill>
                 <a:latin typeface="Calibri"/>
               </a:rPr>
-              <a:t>, vol. 143, no. 1, pp. 29–36, 1982.</a:t>
+              <a:t>, vol. 7, no. 1, pp. 1–26, 1979.</a:t>
             </a:r>
           </a:p>
           <a:p>
@@ -22796,7 +22383,7 @@
                 </a:solidFill>
                 <a:latin typeface="Calibri"/>
               </a:rPr>
-              <a:t>[76]	</a:t>
+              <a:t>[83]	</a:t>
             </a:r>
             <a:r>
               <a:rPr sz="780" i="0">
@@ -22805,7 +22392,7 @@
                 </a:solidFill>
                 <a:latin typeface="Calibri"/>
               </a:rPr>
-              <a:t>T. Fawcett, “An introduction to ROC analysis,” </a:t>
+              <a:t>Q. McNemar, “Note on the sampling error of the difference between correlated proportions or percentages,” </a:t>
             </a:r>
             <a:r>
               <a:rPr sz="780" i="1">
@@ -22814,7 +22401,7 @@
                 </a:solidFill>
                 <a:latin typeface="Calibri"/>
               </a:rPr>
-              <a:t>Pattern Recognition Letters</a:t>
+              <a:t>Psychometrika</a:t>
             </a:r>
             <a:r>
               <a:rPr sz="780" i="0">
@@ -22823,7 +22410,7 @@
                 </a:solidFill>
                 <a:latin typeface="Calibri"/>
               </a:rPr>
-              <a:t>, vol. 27, no. 8, pp. 861–874, 2006.</a:t>
+              <a:t>, vol. 12, no. 2, pp. 153–157, 1947.</a:t>
             </a:r>
           </a:p>
           <a:p>
@@ -22839,7 +22426,7 @@
                 </a:solidFill>
                 <a:latin typeface="Calibri"/>
               </a:rPr>
-              <a:t>[77]	</a:t>
+              <a:t>[84]	</a:t>
             </a:r>
             <a:r>
               <a:rPr sz="780" i="0">
@@ -22848,7 +22435,7 @@
                 </a:solidFill>
                 <a:latin typeface="Calibri"/>
               </a:rPr>
-              <a:t>B. W. Matthews, “Comparison of the predicted and observed secondary structure of T4 phage lysozyme,” </a:t>
+              <a:t>S. Holm, “A simple sequentially rejective multiple test procedure,” </a:t>
             </a:r>
             <a:r>
               <a:rPr sz="780" i="1">
@@ -22857,7 +22444,7 @@
                 </a:solidFill>
                 <a:latin typeface="Calibri"/>
               </a:rPr>
-              <a:t>Biochimica et Biophysica Acta (BBA) – Protein Structure</a:t>
+              <a:t>Scandinavian Journal of Statistics</a:t>
             </a:r>
             <a:r>
               <a:rPr sz="780" i="0">
@@ -22866,7 +22453,7 @@
                 </a:solidFill>
                 <a:latin typeface="Calibri"/>
               </a:rPr>
-              <a:t>, vol. 405, no. 2, pp. 442–451, 1975.</a:t>
+              <a:t>, vol. 6, no. 2, pp. 65–70, 1979.</a:t>
             </a:r>
           </a:p>
           <a:p>
@@ -22882,7 +22469,7 @@
                 </a:solidFill>
                 <a:latin typeface="Calibri"/>
               </a:rPr>
-              <a:t>[78]	</a:t>
+              <a:t>[85]	</a:t>
             </a:r>
             <a:r>
               <a:rPr sz="780" i="0">
@@ -22891,7 +22478,7 @@
                 </a:solidFill>
                 <a:latin typeface="Calibri"/>
               </a:rPr>
-              <a:t>D. Chicco and G. Jurman, “The advantages of the Matthews correlation coefficient (MCC) over F1 score and accuracy in binary classification evaluation,” </a:t>
+              <a:t>R. R. Selvaraju, M. Cogswell, A. Das, R. Vedantam, D. Parikh, and D. Batra, “Grad-CAM: Visual explanations from deep networks via gradient-based localization,” in </a:t>
             </a:r>
             <a:r>
               <a:rPr sz="780" i="1">
@@ -22900,7 +22487,7 @@
                 </a:solidFill>
                 <a:latin typeface="Calibri"/>
               </a:rPr>
-              <a:t>BMC Genomics</a:t>
+              <a:t>Proc. IEEE International Conference on Computer Vision (ICCV)</a:t>
             </a:r>
             <a:r>
               <a:rPr sz="780" i="0">
@@ -22909,7 +22496,7 @@
                 </a:solidFill>
                 <a:latin typeface="Calibri"/>
               </a:rPr>
-              <a:t>, vol. 21, Art. no. 6, 2020.</a:t>
+              <a:t>, 2017, pp. 618–626.</a:t>
             </a:r>
           </a:p>
           <a:p>
@@ -22925,7 +22512,7 @@
                 </a:solidFill>
                 <a:latin typeface="Calibri"/>
               </a:rPr>
-              <a:t>[79]	</a:t>
+              <a:t>[86]	</a:t>
             </a:r>
             <a:r>
               <a:rPr sz="780" i="0">
@@ -22934,7 +22521,7 @@
                 </a:solidFill>
                 <a:latin typeface="Calibri"/>
               </a:rPr>
-              <a:t>M. Pakdaman Naeini, G. Cooper, and M. Hauskrecht, “Obtaining well calibrated probabilities using Bayesian binning,” in </a:t>
+              <a:t>S. Abnar and W. Zuidema, “Quantifying attention flow in transformers,” in </a:t>
             </a:r>
             <a:r>
               <a:rPr sz="780" i="1">
@@ -22943,7 +22530,7 @@
                 </a:solidFill>
                 <a:latin typeface="Calibri"/>
               </a:rPr>
-              <a:t>Proc. AAAI Conference on Artificial Intelligence 29(1)</a:t>
+              <a:t>Proc. 58th Annual Meeting of the Association for Computational Linguistics (ACL)</a:t>
             </a:r>
             <a:r>
               <a:rPr sz="780" i="0">
@@ -22952,7 +22539,7 @@
                 </a:solidFill>
                 <a:latin typeface="Calibri"/>
               </a:rPr>
-              <a:t>, 2015.</a:t>
+              <a:t>, 2020, pp. 4190–4197.</a:t>
             </a:r>
           </a:p>
           <a:p>
@@ -22968,7 +22555,7 @@
                 </a:solidFill>
                 <a:latin typeface="Calibri"/>
               </a:rPr>
-              <a:t>[80]	</a:t>
+              <a:t>[87]	</a:t>
             </a:r>
             <a:r>
               <a:rPr sz="780" i="0">
@@ -22977,7 +22564,7 @@
                 </a:solidFill>
                 <a:latin typeface="Calibri"/>
               </a:rPr>
-              <a:t>B. Efron, “Bootstrap methods: Another look at the jackknife,” </a:t>
+              <a:t>M. D. Zeiler and R. Fergus, “Visualizing and understanding convolutional networks,” in </a:t>
             </a:r>
             <a:r>
               <a:rPr sz="780" i="1">
@@ -22986,7 +22573,7 @@
                 </a:solidFill>
                 <a:latin typeface="Calibri"/>
               </a:rPr>
-              <a:t>The Annals of Statistics</a:t>
+              <a:t>Computer Vision – ECCV 2014</a:t>
             </a:r>
             <a:r>
               <a:rPr sz="780" i="0">
@@ -22995,7 +22582,7 @@
                 </a:solidFill>
                 <a:latin typeface="Calibri"/>
               </a:rPr>
-              <a:t>, vol. 7, no. 1, pp. 1–26, 1979.</a:t>
+              <a:t>, 2014, pp. 818–833.</a:t>
             </a:r>
           </a:p>
           <a:p>
@@ -23011,7 +22598,7 @@
                 </a:solidFill>
                 <a:latin typeface="Calibri"/>
               </a:rPr>
-              <a:t>[81]	</a:t>
+              <a:t>[88]	</a:t>
             </a:r>
             <a:r>
               <a:rPr sz="780" i="0">
@@ -23020,7 +22607,7 @@
                 </a:solidFill>
                 <a:latin typeface="Calibri"/>
               </a:rPr>
-              <a:t>Q. McNemar, “Note on the sampling error of the difference between correlated proportions or percentages,” </a:t>
+              <a:t>N. Otsu, “A threshold selection method from gray-level histograms,” </a:t>
             </a:r>
             <a:r>
               <a:rPr sz="780" i="1">
@@ -23029,7 +22616,7 @@
                 </a:solidFill>
                 <a:latin typeface="Calibri"/>
               </a:rPr>
-              <a:t>Psychometrika</a:t>
+              <a:t>IEEE Transactions on Systems, Man, and Cybernetics</a:t>
             </a:r>
             <a:r>
               <a:rPr sz="780" i="0">
@@ -23038,7 +22625,7 @@
                 </a:solidFill>
                 <a:latin typeface="Calibri"/>
               </a:rPr>
-              <a:t>, vol. 12, no. 2, pp. 153–157, 1947.</a:t>
+              <a:t>, vol. 9, no. 1, pp. 62–66, 1979.</a:t>
             </a:r>
           </a:p>
           <a:p>
@@ -23054,7 +22641,7 @@
                 </a:solidFill>
                 <a:latin typeface="Calibri"/>
               </a:rPr>
-              <a:t>[82]	</a:t>
+              <a:t>[89]	</a:t>
             </a:r>
             <a:r>
               <a:rPr sz="780" i="0">
@@ -23063,7 +22650,7 @@
                 </a:solidFill>
                 <a:latin typeface="Calibri"/>
               </a:rPr>
-              <a:t>S. Holm, “A simple sequentially rejective multiple test procedure,” </a:t>
+              <a:t>B. H. Menze et al., “The multimodal brain tumor image segmentation benchmark (BRATS),” </a:t>
             </a:r>
             <a:r>
               <a:rPr sz="780" i="1">
@@ -23072,7 +22659,7 @@
                 </a:solidFill>
                 <a:latin typeface="Calibri"/>
               </a:rPr>
-              <a:t>Scandinavian Journal of Statistics</a:t>
+              <a:t>IEEE Transactions on Medical Imaging</a:t>
             </a:r>
             <a:r>
               <a:rPr sz="780" i="0">
@@ -23081,7 +22668,7 @@
                 </a:solidFill>
                 <a:latin typeface="Calibri"/>
               </a:rPr>
-              <a:t>, vol. 6, no. 2, pp. 65–70, 1979.</a:t>
+              <a:t>, vol. 34, no. 10, pp. 1993–2024, 2015.</a:t>
             </a:r>
           </a:p>
           <a:p>
@@ -23097,7 +22684,7 @@
                 </a:solidFill>
                 <a:latin typeface="Calibri"/>
               </a:rPr>
-              <a:t>[83]	</a:t>
+              <a:t>[90]	</a:t>
             </a:r>
             <a:r>
               <a:rPr sz="780" i="0">
@@ -23106,7 +22693,7 @@
                 </a:solidFill>
                 <a:latin typeface="Calibri"/>
               </a:rPr>
-              <a:t>R. R. Selvaraju, M. Cogswell, A. Das, R. Vedantam, D. Parikh, and D. Batra, “Grad-CAM: Visual explanations from deep networks via gradient-based localization,” in </a:t>
+              <a:t>F. Wilcoxon, “Individual comparisons by ranking methods,” </a:t>
             </a:r>
             <a:r>
               <a:rPr sz="780" i="1">
@@ -23115,7 +22702,7 @@
                 </a:solidFill>
                 <a:latin typeface="Calibri"/>
               </a:rPr>
-              <a:t>Proc. IEEE International Conference on Computer Vision (ICCV)</a:t>
+              <a:t>Biometrics Bulletin</a:t>
             </a:r>
             <a:r>
               <a:rPr sz="780" i="0">
@@ -23124,7 +22711,7 @@
                 </a:solidFill>
                 <a:latin typeface="Calibri"/>
               </a:rPr>
-              <a:t>, 2017, pp. 618–626.</a:t>
+              <a:t>, vol. 1, no. 6, pp. 80–83, 1945.</a:t>
             </a:r>
           </a:p>
           <a:p>
@@ -23140,7 +22727,7 @@
                 </a:solidFill>
                 <a:latin typeface="Calibri"/>
               </a:rPr>
-              <a:t>[84]	</a:t>
+              <a:t>[91]	</a:t>
             </a:r>
             <a:r>
               <a:rPr sz="780" i="0">
@@ -23149,7 +22736,7 @@
                 </a:solidFill>
                 <a:latin typeface="Calibri"/>
               </a:rPr>
-              <a:t>S. Abnar and W. Zuidema, “Quantifying attention flow in transformers,” in </a:t>
+              <a:t>C. Spearman, “The proof and measurement of association between two things,” </a:t>
             </a:r>
             <a:r>
               <a:rPr sz="780" i="1">
@@ -23158,7 +22745,7 @@
                 </a:solidFill>
                 <a:latin typeface="Calibri"/>
               </a:rPr>
-              <a:t>Proc. 58th Annual Meeting of the Association for Computational Linguistics (ACL)</a:t>
+              <a:t>The American Journal of Psychology</a:t>
             </a:r>
             <a:r>
               <a:rPr sz="780" i="0">
@@ -23167,7 +22754,7 @@
                 </a:solidFill>
                 <a:latin typeface="Calibri"/>
               </a:rPr>
-              <a:t>, 2020, pp. 4190–4197.</a:t>
+              <a:t>, vol. 15, no. 1, pp. 72–101, 1904.</a:t>
             </a:r>
           </a:p>
           <a:p>
@@ -23183,7 +22770,7 @@
                 </a:solidFill>
                 <a:latin typeface="Calibri"/>
               </a:rPr>
-              <a:t>[85]	</a:t>
+              <a:t>[92]	</a:t>
             </a:r>
             <a:r>
               <a:rPr sz="780" i="0">
@@ -23192,7 +22779,7 @@
                 </a:solidFill>
                 <a:latin typeface="Calibri"/>
               </a:rPr>
-              <a:t>M. D. Zeiler and R. Fergus, “Visualizing and understanding convolutional networks,” in </a:t>
+              <a:t>G. Wang, W. Li, M. Aertsen, J. Deprest, S. Ourselin, and T. Vercauteren, “Aleatoric uncertainty estimation with test-time augmentation for medical image segmentation with convolutional neural networks,” </a:t>
             </a:r>
             <a:r>
               <a:rPr sz="780" i="1">
@@ -23201,7 +22788,7 @@
                 </a:solidFill>
                 <a:latin typeface="Calibri"/>
               </a:rPr>
-              <a:t>Computer Vision – ECCV 2014</a:t>
+              <a:t>Neurocomputing</a:t>
             </a:r>
             <a:r>
               <a:rPr sz="780" i="0">
@@ -23210,7 +22797,7 @@
                 </a:solidFill>
                 <a:latin typeface="Calibri"/>
               </a:rPr>
-              <a:t>, 2014, pp. 818–833.</a:t>
+              <a:t>, vol. 338, pp. 34–45, 2019.</a:t>
             </a:r>
           </a:p>
           <a:p>
@@ -23226,7 +22813,7 @@
                 </a:solidFill>
                 <a:latin typeface="Calibri"/>
               </a:rPr>
-              <a:t>[86]	</a:t>
+              <a:t>[93]	</a:t>
             </a:r>
             <a:r>
               <a:rPr sz="780" i="0">
@@ -23235,7 +22822,7 @@
                 </a:solidFill>
                 <a:latin typeface="Calibri"/>
               </a:rPr>
-              <a:t>N. Otsu, “A threshold selection method from gray-level histograms,” </a:t>
+              <a:t>A. G. Roy, S. Conjeti, N. Navab, and C. Wachinger, “Bayesian QuickNAT: Model uncertainty in deep whole-brain segmentation for structure-wise quality control,” </a:t>
             </a:r>
             <a:r>
               <a:rPr sz="780" i="1">
@@ -23244,7 +22831,7 @@
                 </a:solidFill>
                 <a:latin typeface="Calibri"/>
               </a:rPr>
-              <a:t>IEEE Transactions on Systems, Man, and Cybernetics</a:t>
+              <a:t>NeuroImage</a:t>
             </a:r>
             <a:r>
               <a:rPr sz="780" i="0">
@@ -23253,7 +22840,7 @@
                 </a:solidFill>
                 <a:latin typeface="Calibri"/>
               </a:rPr>
-              <a:t>, vol. 9, no. 1, pp. 62–66, 1979.</a:t>
+              <a:t>, vol. 195, pp. 11–22, 2019.</a:t>
             </a:r>
           </a:p>
           <a:p>
@@ -23269,7 +22856,7 @@
                 </a:solidFill>
                 <a:latin typeface="Calibri"/>
               </a:rPr>
-              <a:t>[87]	</a:t>
+              <a:t>[94]	</a:t>
             </a:r>
             <a:r>
               <a:rPr sz="780" i="0">
@@ -23278,7 +22865,7 @@
                 </a:solidFill>
                 <a:latin typeface="Calibri"/>
               </a:rPr>
-              <a:t>B. H. Menze et al., “The multimodal brain tumor image segmentation benchmark (BRATS),” </a:t>
+              <a:t>A. Mehrtash, W. M. Wells, C. M. Tempany, P. Abolmaesumi, and T. Kapur, “Confidence calibration and predictive uncertainty estimation for deep medical image segmentation,” </a:t>
             </a:r>
             <a:r>
               <a:rPr sz="780" i="1">
@@ -23296,7 +22883,7 @@
                 </a:solidFill>
                 <a:latin typeface="Calibri"/>
               </a:rPr>
-              <a:t>, vol. 34, no. 10, pp. 1993–2024, 2015.</a:t>
+              <a:t>, vol. 39, no. 12, pp. 3868–3878, 2020.</a:t>
             </a:r>
           </a:p>
           <a:p>
@@ -23312,7 +22899,7 @@
                 </a:solidFill>
                 <a:latin typeface="Calibri"/>
               </a:rPr>
-              <a:t>[88]	</a:t>
+              <a:t>[95]	</a:t>
             </a:r>
             <a:r>
               <a:rPr sz="780" i="0">
@@ -23321,7 +22908,68 @@
                 </a:solidFill>
                 <a:latin typeface="Calibri"/>
               </a:rPr>
-              <a:t>S. Bakas et al., “Identifying the best machine learning algorithms for brain tumor segmentation, progression assessment, and overall survival prediction in the BRATS challenge,” arXiv:1811.02629, 2018.</a:t>
+              <a:t>K. Vinogradova, A. Dibrov, and G. Myers, “Towards interpretable semantic segmentation via gradient-weighted class activation mapping (student abstract),” </a:t>
+            </a:r>
+            <a:r>
+              <a:rPr sz="780" i="1">
+                <a:solidFill>
+                  <a:srgbClr val="1E2430"/>
+                </a:solidFill>
+                <a:latin typeface="Calibri"/>
+              </a:rPr>
+              <a:t>Proceedings of the AAAI Conference on Artificial Intelligence</a:t>
+            </a:r>
+            <a:r>
+              <a:rPr sz="780" i="0">
+                <a:solidFill>
+                  <a:srgbClr val="1E2430"/>
+                </a:solidFill>
+                <a:latin typeface="Calibri"/>
+              </a:rPr>
+              <a:t>, vol. 34, no. 10, pp. 13943–13944, 2020.</a:t>
+            </a:r>
+          </a:p>
+          <a:p>
+            <a:pPr marL="274320" indent="-274320">
+              <a:spcAft>
+                <a:spcPts val="100"/>
+              </a:spcAft>
+            </a:pPr>
+            <a:r>
+              <a:rPr sz="780" i="0">
+                <a:solidFill>
+                  <a:srgbClr val="1E2430"/>
+                </a:solidFill>
+                <a:latin typeface="Calibri"/>
+              </a:rPr>
+              <a:t>[96]	</a:t>
+            </a:r>
+            <a:r>
+              <a:rPr sz="780" i="0">
+                <a:solidFill>
+                  <a:srgbClr val="1E2430"/>
+                </a:solidFill>
+                <a:latin typeface="Calibri"/>
+              </a:rPr>
+              <a:t>L. Maier-Hein et al., “Metrics reloaded: Recommendations for image analysis validation,” </a:t>
+            </a:r>
+            <a:r>
+              <a:rPr sz="780" i="1">
+                <a:solidFill>
+                  <a:srgbClr val="1E2430"/>
+                </a:solidFill>
+                <a:latin typeface="Calibri"/>
+              </a:rPr>
+              <a:t>Nature Methods</a:t>
+            </a:r>
+            <a:r>
+              <a:rPr sz="780" i="0">
+                <a:solidFill>
+                  <a:srgbClr val="1E2430"/>
+                </a:solidFill>
+                <a:latin typeface="Calibri"/>
+              </a:rPr>
+              <a:t>, vol. 21, no. 2, pp. 195–212, 2024.</a:t>
             </a:r>
           </a:p>
         </p:txBody>
@@ -24184,7 +23832,7 @@
                 </a:solidFill>
                 <a:latin typeface="Calibri"/>
               </a:rPr>
-              <a:t>Benchmark six 3D architectures for whole tumour, tumour core and enhancing tumour segmentation on BraTS 2020 under one training budget (Paper 2).</a:t>
+              <a:t>Fuse two 3D CNNs and a transformer per tumour region for whole tumour, tumour core and enhancing tumour, and test them on BraTS 2020 and on external BraTS-Africa cases (Paper 2).</a:t>
             </a:r>
           </a:p>
         </p:txBody>
@@ -24289,7 +23937,7 @@
                 </a:solidFill>
                 <a:latin typeface="Calibri"/>
               </a:rPr>
-              <a:t>Serve the most efficient models, EfficientNetB0 and VNet, in a secure web application with a linked multi-planar and 3D viewer and PDF and CSV reports.</a:t>
+              <a:t>Serve the most efficient models, EfficientNetB0 and SegResNet, in a secure web application with a linked multi-planar and 3D viewer and PDF and CSV reports.</a:t>
             </a:r>
           </a:p>
         </p:txBody>
@@ -24933,7 +24581,7 @@
                 </a:solidFill>
                 <a:latin typeface="Calibri"/>
               </a:rPr>
-              <a:t>Paper 2: 3D segmentation on BraTS 2020</a:t>
+              <a:t>Paper 2: 3D segmentation with external validation</a:t>
             </a:r>
           </a:p>
         </p:txBody>
@@ -24980,7 +24628,7 @@
                 </a:solidFill>
                 <a:latin typeface="Calibri"/>
               </a:rPr>
-              <a:t>Six networks implemented from scratch: UNet, nnU-Net-style, VNet, UNETR, Swin UNETR and TransBTS</a:t>
+              <a:t>nnU-Net and SegResNet (CNNs) and Swin UNETR-v2 (transformer) at native 1 mm resolution [10–12]</a:t>
             </a:r>
           </a:p>
           <a:p>
@@ -25004,7 +24652,7 @@
                 </a:solidFill>
                 <a:latin typeface="Calibri"/>
               </a:rPr>
-              <a:t>369 cases in a grade-stratified 257 / 56 / 56 split; 50 epochs and 3,250 optimiser steps per model</a:t>
+              <a:t>Region-adaptive ensemble: one weight vector and threshold per region, chosen on 56 validation cases</a:t>
             </a:r>
           </a:p>
           <a:p>
@@ -25028,7 +24676,7 @@
                 </a:solidFill>
                 <a:latin typeface="Calibri"/>
               </a:rPr>
-              <a:t>Native-resolution evaluation with eight-flip test-time augmentation, bootstrap CIs, Wilcoxon tests with Holm correction and results by tumour grade</a:t>
+              <a:t>56 internal BraTS 2020 test cases and 60 external BraTS-Africa cases [13]; member disagreement tested as a quality-control signal</a:t>
             </a:r>
           </a:p>
         </p:txBody>
@@ -25070,7 +24718,7 @@
                 </a:solidFill>
                 <a:latin typeface="Calibri"/>
               </a:rPr>
-              <a:t>0.8199</a:t>
+              <a:t>0.993</a:t>
             </a:r>
           </a:p>
         </p:txBody>
@@ -25112,7 +24760,7 @@
                 </a:solidFill>
                 <a:latin typeface="Calibri"/>
               </a:rPr>
-              <a:t>mean Dice of UNet (95% CI 0.7826 to 0.8533); VNet 0.7965 with 1.40 M parameters; transformer-based models 0.7056 to 0.7462; every pairwise difference significant</a:t>
+              <a:t>AUC of member disagreement for flagging failed cases internally (0.870 externally); the ensemble (Dice 0.8530) beats two members but not SegResNet alone (0.8717)</a:t>
             </a:r>
           </a:p>
         </p:txBody>
@@ -25126,7 +24774,7 @@
         <p:spPr>
           <a:xfrm>
             <a:off x="548640" y="5110480"/>
-            <a:ext cx="11091672" cy="251968"/>
+            <a:ext cx="11091672" cy="434847"/>
           </a:xfrm>
           <a:prstGeom prst="rect">
             <a:avLst/>
@@ -25163,7 +24811,7 @@
                 </a:solidFill>
                 <a:latin typeface="Calibri"/>
               </a:rPr>
-              <a:t> EfficientNetB0 (detection and classification) and VNet (segmentation) run in a FastAPI and React application; 61 backend and 39 frontend automated tests pass.</a:t>
+              <a:t> EfficientNetB0 (detection and classification) and SegResNet (segmentation) run in a FastAPI and React application; 64 backend and 39 frontend automated tests pass.</a:t>
             </a:r>
           </a:p>
         </p:txBody>
@@ -25515,7 +25163,7 @@
                           </a:solidFill>
                           <a:latin typeface="Calibri"/>
                         </a:rPr>
-                        <a:t>Zacharaki et al., 2009 [10]</a:t>
+                        <a:t>Zacharaki et al., 2009 [14]</a:t>
                       </a:r>
                     </a:p>
                   </a:txBody>
@@ -25607,7 +25255,7 @@
                           </a:solidFill>
                           <a:latin typeface="Calibri"/>
                         </a:rPr>
-                        <a:t>Hand-crafted features transfer poorly [11, 12]</a:t>
+                        <a:t>Hand-crafted features transfer poorly [15, 16]</a:t>
                       </a:r>
                     </a:p>
                   </a:txBody>
@@ -25632,7 +25280,7 @@
                           </a:solidFill>
                           <a:latin typeface="Calibri"/>
                         </a:rPr>
-                        <a:t>Cheng et al., 2015 [13]</a:t>
+                        <a:t>Cheng et al., 2015 [17]</a:t>
                       </a:r>
                     </a:p>
                   </a:txBody>
@@ -25749,7 +25397,7 @@
                           </a:solidFill>
                           <a:latin typeface="Calibri"/>
                         </a:rPr>
-                        <a:t>Seetha and Raja, 2018 [14]</a:t>
+                        <a:t>Seetha and Raja, 2018 [18]</a:t>
                       </a:r>
                     </a:p>
                   </a:txBody>
@@ -25866,7 +25514,7 @@
                           </a:solidFill>
                           <a:latin typeface="Calibri"/>
                         </a:rPr>
-                        <a:t>Talo et al., 2019 [15]</a:t>
+                        <a:t>Talo et al., 2019 [19]</a:t>
                       </a:r>
                     </a:p>
                   </a:txBody>
@@ -25912,7 +25560,7 @@
                           </a:solidFill>
                           <a:latin typeface="Calibri"/>
                         </a:rPr>
-                        <a:t>ResNet34 transfer learning [16, 17]</a:t>
+                        <a:t>ResNet34 transfer learning [20, 21]</a:t>
                       </a:r>
                     </a:p>
                   </a:txBody>
@@ -25983,7 +25631,7 @@
                           </a:solidFill>
                           <a:latin typeface="Calibri"/>
                         </a:rPr>
-                        <a:t>Deepak and Ameer, 2019 [18]; Ghassemi et al., 2020 [19]</a:t>
+                        <a:t>Deepak and Ameer, 2019 [22]; Ghassemi et al., 2020 [23]</a:t>
                       </a:r>
                     </a:p>
                   </a:txBody>
@@ -26100,7 +25748,7 @@
                           </a:solidFill>
                           <a:latin typeface="Calibri"/>
                         </a:rPr>
-                        <a:t>Rehman et al., 2020 [20]; Noreen et al., 2020 [21]</a:t>
+                        <a:t>Rehman et al., 2020 [24]; Noreen et al., 2020 [25]</a:t>
                       </a:r>
                     </a:p>
                   </a:txBody>
@@ -26146,7 +25794,7 @@
                           </a:solidFill>
                           <a:latin typeface="Calibri"/>
                         </a:rPr>
-                        <a:t>Fine-tuned VGG16 [22]; Inception-v3 [23] and DenseNet201 [24] features</a:t>
+                        <a:t>Fine-tuned VGG16 [26]; Inception-v3 [27] and DenseNet201 [28] features</a:t>
                       </a:r>
                     </a:p>
                   </a:txBody>
@@ -26217,7 +25865,7 @@
                           </a:solidFill>
                           <a:latin typeface="Calibri"/>
                         </a:rPr>
-                        <a:t>Khan et al., 2020 [25]</a:t>
+                        <a:t>Khan et al., 2020 [29]</a:t>
                       </a:r>
                     </a:p>
                   </a:txBody>
@@ -26334,7 +25982,7 @@
                           </a:solidFill>
                           <a:latin typeface="Calibri"/>
                         </a:rPr>
-                        <a:t>Tummala et al., 2022 [26]; Asiri et al., 2024 [27]</a:t>
+                        <a:t>Tummala et al., 2022 [30]; Asiri et al., 2024 [31]</a:t>
                       </a:r>
                     </a:p>
                   </a:txBody>
@@ -26380,7 +26028,7 @@
                           </a:solidFill>
                           <a:latin typeface="Calibri"/>
                         </a:rPr>
-                        <a:t>ViT ensemble [28]; Swin Transformer [29]</a:t>
+                        <a:t>ViT ensemble [32]; Swin Transformer [33]</a:t>
                       </a:r>
                     </a:p>
                   </a:txBody>
@@ -26451,7 +26099,7 @@
                           </a:solidFill>
                           <a:latin typeface="Calibri"/>
                         </a:rPr>
-                        <a:t>3D CNNs [30–33]</a:t>
+                        <a:t>3D CNNs [10, 11, 34, 35]</a:t>
                       </a:r>
                     </a:p>
                   </a:txBody>
@@ -26497,7 +26145,7 @@
                           </a:solidFill>
                           <a:latin typeface="Calibri"/>
                         </a:rPr>
-                        <a:t>U-Net, 3D U-Net, V-Net, self-configuring nnU-Net</a:t>
+                        <a:t>U-Net, 3D U-Net, SegResNet, self-configuring nnU-Net</a:t>
                       </a:r>
                     </a:p>
                   </a:txBody>
@@ -26543,7 +26191,7 @@
                           </a:solidFill>
                           <a:latin typeface="Calibri"/>
                         </a:rPr>
-                        <a:t>Compared under different pipelines</a:t>
+                        <a:t>Mostly tested on internal splits</a:t>
                       </a:r>
                     </a:p>
                   </a:txBody>
@@ -26568,7 +26216,7 @@
                           </a:solidFill>
                           <a:latin typeface="Calibri"/>
                         </a:rPr>
-                        <a:t>3D transformers [34–37]</a:t>
+                        <a:t>3D transformers [12, 36–39]</a:t>
                       </a:r>
                     </a:p>
                   </a:txBody>
@@ -26614,7 +26262,7 @@
                           </a:solidFill>
                           <a:latin typeface="Calibri"/>
                         </a:rPr>
-                        <a:t>UNETR, Swin UNETR, TransBTS, TransUNet</a:t>
+                        <a:t>UNETR, Swin UNETR (v2), TransBTS, TransUNet</a:t>
                       </a:r>
                     </a:p>
                   </a:txBody>
@@ -26660,7 +26308,7 @@
                           </a:solidFill>
                           <a:latin typeface="Calibri"/>
                         </a:rPr>
-                        <a:t>Data-hungry from scratch [38]</a:t>
+                        <a:t>Fused with CNNs by plain averaging [40]</a:t>
                       </a:r>
                     </a:p>
                   </a:txBody>
@@ -26685,7 +26333,7 @@
                           </a:solidFill>
                           <a:latin typeface="Calibri"/>
                         </a:rPr>
-                        <a:t>Kapoor and Narayanan, 2023 [8]; Fateh et al., 2026 [39]</a:t>
+                        <a:t>Kapoor and Narayanan, 2023 [8]; Fateh et al., 2026 [41]</a:t>
                       </a:r>
                     </a:p>
                   </a:txBody>
@@ -27192,7 +26840,7 @@
                 </a:solidFill>
                 <a:latin typeface="Calibri"/>
               </a:rPr>
-              <a:t> Most studies test two or three models with their own data, splits and budgets [40, 41].</a:t>
+              <a:t> Most studies test two or three models with their own data, splits and budgets [42, 43].</a:t>
             </a:r>
           </a:p>
         </p:txBody>
@@ -27314,7 +26962,7 @@
                 </a:solidFill>
                 <a:latin typeface="Calibri"/>
               </a:rPr>
-              <a:t>Nine backbones and six 3D networks, one code path, identical splits, equal optimiser steps</a:t>
+              <a:t>Nine 2D backbones and three 3D networks, each set under one code path and identical splits</a:t>
             </a:r>
           </a:p>
         </p:txBody>
@@ -27451,7 +27099,7 @@
                 </a:solidFill>
                 <a:latin typeface="Calibri"/>
               </a:rPr>
-              <a:t> Combined public collections hold exact and near-duplicate images that are rarely removed before splitting [8, 9, 39].</a:t>
+              <a:t> Combined public collections hold exact and near-duplicate images that are rarely removed before splitting [8, 9, 41].</a:t>
             </a:r>
           </a:p>
         </p:txBody>
@@ -27969,7 +27617,7 @@
                 </a:solidFill>
                 <a:latin typeface="Calibri"/>
               </a:rPr>
-              <a:t> Models can exploit borders, hospital markers or scanner cues instead of pathology [42–44].</a:t>
+              <a:t> Models can exploit borders, hospital markers or scanner cues instead of pathology [44–46].</a:t>
             </a:r>
           </a:p>
         </p:txBody>
@@ -28219,7 +27867,7 @@
                 </a:solidFill>
                 <a:latin typeface="Calibri"/>
               </a:rPr>
-              <a:t>Transformer cost in 3D.</a:t>
+              <a:t>No external check in 3D.</a:t>
             </a:r>
             <a:r>
               <a:rPr sz="1100" b="0" i="0">
@@ -28228,7 +27876,7 @@
                 </a:solidFill>
                 <a:latin typeface="Calibri"/>
               </a:rPr>
-              <a:t> Transformers need large data, distillation or modified attention [38, 45, 46], and their cost is rarely reported.</a:t>
+              <a:t> 3D results are mostly internal, models degrade on new populations and scanners [45], and per-model uncertainty is a weak error signal [47].</a:t>
             </a:r>
           </a:p>
         </p:txBody>
@@ -28350,7 +27998,7 @@
                 </a:solidFill>
                 <a:latin typeface="Calibri"/>
               </a:rPr>
-              <a:t>Parameters, GFLOPs, latency, training time and memory measured for every model</a:t>
+              <a:t>External BraTS-Africa test set, per-region fusion, and member disagreement as a quality check</a:t>
             </a:r>
           </a:p>
         </p:txBody>
@@ -29167,7 +28815,7 @@
         <p:spPr>
           <a:xfrm>
             <a:off x="960120" y="3855720"/>
-            <a:ext cx="5623559" cy="441960"/>
+            <a:ext cx="5623559" cy="640080"/>
           </a:xfrm>
           <a:prstGeom prst="rect">
             <a:avLst/>
@@ -29195,7 +28843,7 @@
                 </a:solidFill>
                 <a:latin typeface="Calibri"/>
               </a:rPr>
-              <a:t>Implement six 3D segmentation networks from scratch and compare them on BraTS 2020 per case, region, tumour grade and computational cost.</a:t>
+              <a:t>Fuse two 3D CNNs and a transformer per tumour region on BraTS 2020, and test every model internally, externally on BraTS-Africa, for failure detection and for cost.</a:t>
             </a:r>
           </a:p>
         </p:txBody>
@@ -29208,7 +28856,7 @@
         </p:nvSpPr>
         <p:spPr>
           <a:xfrm>
-            <a:off x="548640" y="4626864"/>
+            <a:off x="548640" y="4824984"/>
             <a:ext cx="365760" cy="365760"/>
           </a:xfrm>
           <a:prstGeom prst="rect">
@@ -29250,7 +28898,7 @@
         </p:nvSpPr>
         <p:spPr>
           <a:xfrm>
-            <a:off x="960120" y="4663440"/>
+            <a:off x="960120" y="4861560"/>
             <a:ext cx="5623559" cy="441960"/>
           </a:xfrm>
           <a:prstGeom prst="rect">
@@ -30429,7 +30077,7 @@
                 </a:solidFill>
                 <a:latin typeface="Calibri"/>
               </a:rPr>
-              <a:t>BraTS 2020</a:t>
+              <a:t>BraTS 2020 + Africa</a:t>
             </a:r>
           </a:p>
           <a:p>
@@ -30445,7 +30093,7 @@
                 </a:solidFill>
                 <a:latin typeface="Calibri"/>
               </a:rPr>
-              <a:t>369 cases, four sequences</a:t>
+              <a:t>369 + 60 cases, four sequences</a:t>
             </a:r>
           </a:p>
         </p:txBody>
@@ -30514,7 +30162,7 @@
                 </a:solidFill>
                 <a:latin typeface="Calibri"/>
               </a:rPr>
-              <a:t>foreground z-score, 128³ resampling</a:t>
+              <a:t>brain crop, z-score, native 1 mm</a:t>
             </a:r>
           </a:p>
         </p:txBody>
@@ -30603,7 +30251,7 @@
                 </a:solidFill>
                 <a:latin typeface="Calibri"/>
               </a:rPr>
-              <a:t>Stratified split</a:t>
+              <a:t>Split</a:t>
             </a:r>
           </a:p>
           <a:p>
@@ -30619,7 +30267,7 @@
                 </a:solidFill>
                 <a:latin typeface="Calibri"/>
               </a:rPr>
-              <a:t>257 / 56 / 56 by grade</a:t>
+              <a:t>257 / 56 / 56 by grade; 60 external</a:t>
             </a:r>
           </a:p>
         </p:txBody>
@@ -30708,7 +30356,7 @@
                 </a:solidFill>
                 <a:latin typeface="Calibri"/>
               </a:rPr>
-              <a:t>6 3D networks</a:t>
+              <a:t>3 networks + fusion</a:t>
             </a:r>
           </a:p>
           <a:p>
@@ -30724,7 +30372,7 @@
                 </a:solidFill>
                 <a:latin typeface="Calibri"/>
               </a:rPr>
-              <a:t>3,250 optimiser steps each</a:t>
+              <a:t>weights and threshold per region</a:t>
             </a:r>
           </a:p>
         </p:txBody>
@@ -30829,7 +30477,7 @@
                 </a:solidFill>
                 <a:latin typeface="Calibri"/>
               </a:rPr>
-              <a:t>native grid, eight-flip TTA, Wilcoxon</a:t>
+              <a:t>internal, external, Wilcoxon, QC</a:t>
             </a:r>
           </a:p>
         </p:txBody>
@@ -30934,7 +30582,7 @@
                 </a:solidFill>
                 <a:latin typeface="Calibri"/>
               </a:rPr>
-              <a:t>EfficientNetB0 for detection and classification; VNet for segmentation</a:t>
+              <a:t>EfficientNetB0 for detection and classification; SegResNet for segmentation</a:t>
             </a:r>
           </a:p>
         </p:txBody>
@@ -31725,7 +31373,7 @@
                 </a:solidFill>
                 <a:latin typeface="Calibri"/>
               </a:rPr>
-              <a:t>VNet on FLAIR, T1, T1CE, T2 at 128³: WT, TC, ET</a:t>
+              <a:t>SegResNet on FLAIR, T1, T1CE, T2, 128³ windows: WT, TC, ET</a:t>
             </a:r>
           </a:p>
         </p:txBody>
@@ -32715,7 +32363,7 @@
                 </a:solidFill>
                 <a:latin typeface="Calibri"/>
               </a:rPr>
-              <a:t>3D benchmark:</a:t>
+              <a:t>3D study:</a:t>
             </a:r>
             <a:r>
               <a:rPr sz="1200" b="0" i="0">
@@ -32724,7 +32372,7 @@
                 </a:solidFill>
                 <a:latin typeface="Calibri"/>
               </a:rPr>
-              <a:t> six networks, 3,250 steps each, eight-flip TTA, Dice, HD95, Wilcoxon</a:t>
+              <a:t> three networks, per-region fusion, internal and external tests, disagreement QC</a:t>
             </a:r>
           </a:p>
           <a:p>

--- a/Materials/Presentation.pptx
+++ b/Materials/Presentation.pptx
@@ -28,6 +28,7 @@
     <p:sldId id="269" r:id="rId14"/>
     <p:sldId id="262" r:id="rId15"/>
     <p:sldId id="276" r:id="rId28"/>
+    <p:sldId id="277" r:id="rId29"/>
   </p:sldIdLst>
   <p:sldSz cx="12192000" cy="6858000"/>
   <p:notesSz cx="6858000" cy="9144000"/>
@@ -10758,7 +10759,7 @@
                 </a:solidFill>
                 <a:latin typeface="Times New Roman"/>
               </a:rPr>
-              <a:t>References (1/2)</a:t>
+              <a:t>References (1/3)</a:t>
             </a:r>
           </a:p>
         </p:txBody>
@@ -10895,7 +10896,7 @@
               </a:spcAft>
             </a:pPr>
             <a:r>
-              <a:rPr sz="780" i="0">
+              <a:rPr sz="860" i="0">
                 <a:solidFill>
                   <a:srgbClr val="1E2430"/>
                 </a:solidFill>
@@ -10904,7 +10905,7 @@
               <a:t>[1]	</a:t>
             </a:r>
             <a:r>
-              <a:rPr sz="780" i="0">
+              <a:rPr sz="860" i="0">
                 <a:solidFill>
                   <a:srgbClr val="1E2430"/>
                 </a:solidFill>
@@ -10913,7 +10914,7 @@
               <a:t>Q. T. Ostrom et al., “CBTRUS statistical report: Primary brain and other central nervous system tumors diagnosed in the United States in 2016–2020,” </a:t>
             </a:r>
             <a:r>
-              <a:rPr sz="780" i="1">
+              <a:rPr sz="860" i="1">
                 <a:solidFill>
                   <a:srgbClr val="1E2430"/>
                 </a:solidFill>
@@ -10922,7 +10923,7 @@
               <a:t>Neuro-Oncology</a:t>
             </a:r>
             <a:r>
-              <a:rPr sz="780" i="0">
+              <a:rPr sz="860" i="0">
                 <a:solidFill>
                   <a:srgbClr val="1E2430"/>
                 </a:solidFill>
@@ -10938,7 +10939,7 @@
               </a:spcAft>
             </a:pPr>
             <a:r>
-              <a:rPr sz="780" i="0">
+              <a:rPr sz="860" i="0">
                 <a:solidFill>
                   <a:srgbClr val="1E2430"/>
                 </a:solidFill>
@@ -10947,7 +10948,7 @@
               <a:t>[2]	</a:t>
             </a:r>
             <a:r>
-              <a:rPr sz="780" i="0">
+              <a:rPr sz="860" i="0">
                 <a:solidFill>
                   <a:srgbClr val="1E2430"/>
                 </a:solidFill>
@@ -10956,7 +10957,7 @@
               <a:t>S. Bakas et al., “Advancing The Cancer Genome Atlas glioma MRI collections with expert segmentation labels and radiomic features,” </a:t>
             </a:r>
             <a:r>
-              <a:rPr sz="780" i="1">
+              <a:rPr sz="860" i="1">
                 <a:solidFill>
                   <a:srgbClr val="1E2430"/>
                 </a:solidFill>
@@ -10965,7 +10966,7 @@
               <a:t>Scientific Data</a:t>
             </a:r>
             <a:r>
-              <a:rPr sz="780" i="0">
+              <a:rPr sz="860" i="0">
                 <a:solidFill>
                   <a:srgbClr val="1E2430"/>
                 </a:solidFill>
@@ -10981,7 +10982,7 @@
               </a:spcAft>
             </a:pPr>
             <a:r>
-              <a:rPr sz="780" i="0">
+              <a:rPr sz="860" i="0">
                 <a:solidFill>
                   <a:srgbClr val="1E2430"/>
                 </a:solidFill>
@@ -10990,7 +10991,7 @@
               <a:t>[3]	</a:t>
             </a:r>
             <a:r>
-              <a:rPr sz="780" i="0">
+              <a:rPr sz="860" i="0">
                 <a:solidFill>
                   <a:srgbClr val="1E2430"/>
                 </a:solidFill>
@@ -10999,7 +11000,7 @@
               <a:t>J. E. Villanueva-Meyer, M. C. Mabray, and S. Cha, “Current clinical brain tumor imaging,” </a:t>
             </a:r>
             <a:r>
-              <a:rPr sz="780" i="1">
+              <a:rPr sz="860" i="1">
                 <a:solidFill>
                   <a:srgbClr val="1E2430"/>
                 </a:solidFill>
@@ -11008,7 +11009,7 @@
               <a:t>Neurosurgery</a:t>
             </a:r>
             <a:r>
-              <a:rPr sz="780" i="0">
+              <a:rPr sz="860" i="0">
                 <a:solidFill>
                   <a:srgbClr val="1E2430"/>
                 </a:solidFill>
@@ -11024,7 +11025,7 @@
               </a:spcAft>
             </a:pPr>
             <a:r>
-              <a:rPr sz="780" i="0">
+              <a:rPr sz="860" i="0">
                 <a:solidFill>
                   <a:srgbClr val="1E2430"/>
                 </a:solidFill>
@@ -11033,7 +11034,7 @@
               <a:t>[4]	</a:t>
             </a:r>
             <a:r>
-              <a:rPr sz="780" i="0">
+              <a:rPr sz="860" i="0">
                 <a:solidFill>
                   <a:srgbClr val="1E2430"/>
                 </a:solidFill>
@@ -11042,7 +11043,7 @@
               <a:t>D. N. Louis et al., “The 2021 WHO classification of tumors of the central nervous system: A summary,” </a:t>
             </a:r>
             <a:r>
-              <a:rPr sz="780" i="1">
+              <a:rPr sz="860" i="1">
                 <a:solidFill>
                   <a:srgbClr val="1E2430"/>
                 </a:solidFill>
@@ -11051,7 +11052,7 @@
               <a:t>Neuro-Oncology</a:t>
             </a:r>
             <a:r>
-              <a:rPr sz="780" i="0">
+              <a:rPr sz="860" i="0">
                 <a:solidFill>
                   <a:srgbClr val="1E2430"/>
                 </a:solidFill>
@@ -11067,7 +11068,7 @@
               </a:spcAft>
             </a:pPr>
             <a:r>
-              <a:rPr sz="780" i="0">
+              <a:rPr sz="860" i="0">
                 <a:solidFill>
                   <a:srgbClr val="1E2430"/>
                 </a:solidFill>
@@ -11076,7 +11077,7 @@
               <a:t>[5]	</a:t>
             </a:r>
             <a:r>
-              <a:rPr sz="780" i="0">
+              <a:rPr sz="860" i="0">
                 <a:solidFill>
                   <a:srgbClr val="1E2430"/>
                 </a:solidFill>
@@ -11085,7 +11086,7 @@
               <a:t>S. Bauer, R. Wiest, L.-P. Nolte, and M. Reyes, “A survey of MRI-based medical image analysis for brain tumor studies,” </a:t>
             </a:r>
             <a:r>
-              <a:rPr sz="780" i="1">
+              <a:rPr sz="860" i="1">
                 <a:solidFill>
                   <a:srgbClr val="1E2430"/>
                 </a:solidFill>
@@ -11094,7 +11095,7 @@
               <a:t>Physics in Medicine and Biology</a:t>
             </a:r>
             <a:r>
-              <a:rPr sz="780" i="0">
+              <a:rPr sz="860" i="0">
                 <a:solidFill>
                   <a:srgbClr val="1E2430"/>
                 </a:solidFill>
@@ -11110,7 +11111,7 @@
               </a:spcAft>
             </a:pPr>
             <a:r>
-              <a:rPr sz="780" i="0">
+              <a:rPr sz="860" i="0">
                 <a:solidFill>
                   <a:srgbClr val="1E2430"/>
                 </a:solidFill>
@@ -11119,7 +11120,7 @@
               <a:t>[6]	</a:t>
             </a:r>
             <a:r>
-              <a:rPr sz="780" i="0">
+              <a:rPr sz="860" i="0">
                 <a:solidFill>
                   <a:srgbClr val="1E2430"/>
                 </a:solidFill>
@@ -11128,7 +11129,7 @@
               <a:t>A. L. Beam and I. S. Kohane, “Big data and machine learning in health care,” </a:t>
             </a:r>
             <a:r>
-              <a:rPr sz="780" i="1">
+              <a:rPr sz="860" i="1">
                 <a:solidFill>
                   <a:srgbClr val="1E2430"/>
                 </a:solidFill>
@@ -11137,7 +11138,7 @@
               <a:t>JAMA</a:t>
             </a:r>
             <a:r>
-              <a:rPr sz="780" i="0">
+              <a:rPr sz="860" i="0">
                 <a:solidFill>
                   <a:srgbClr val="1E2430"/>
                 </a:solidFill>
@@ -11153,7 +11154,7 @@
               </a:spcAft>
             </a:pPr>
             <a:r>
-              <a:rPr sz="780" i="0">
+              <a:rPr sz="860" i="0">
                 <a:solidFill>
                   <a:srgbClr val="1E2430"/>
                 </a:solidFill>
@@ -11162,7 +11163,7 @@
               <a:t>[7]	</a:t>
             </a:r>
             <a:r>
-              <a:rPr sz="780" i="0">
+              <a:rPr sz="860" i="0">
                 <a:solidFill>
                   <a:srgbClr val="1E2430"/>
                 </a:solidFill>
@@ -11171,7 +11172,7 @@
               <a:t>J. De Fauw et al., “Clinically applicable deep learning for diagnosis and referral in retinal disease,” </a:t>
             </a:r>
             <a:r>
-              <a:rPr sz="780" i="1">
+              <a:rPr sz="860" i="1">
                 <a:solidFill>
                   <a:srgbClr val="1E2430"/>
                 </a:solidFill>
@@ -11180,7 +11181,7 @@
               <a:t>Nature Medicine</a:t>
             </a:r>
             <a:r>
-              <a:rPr sz="780" i="0">
+              <a:rPr sz="860" i="0">
                 <a:solidFill>
                   <a:srgbClr val="1E2430"/>
                 </a:solidFill>
@@ -11196,7 +11197,7 @@
               </a:spcAft>
             </a:pPr>
             <a:r>
-              <a:rPr sz="780" i="0">
+              <a:rPr sz="860" i="0">
                 <a:solidFill>
                   <a:srgbClr val="1E2430"/>
                 </a:solidFill>
@@ -11205,7 +11206,7 @@
               <a:t>[8]	</a:t>
             </a:r>
             <a:r>
-              <a:rPr sz="780" i="0">
+              <a:rPr sz="860" i="0">
                 <a:solidFill>
                   <a:srgbClr val="1E2430"/>
                 </a:solidFill>
@@ -11214,7 +11215,7 @@
               <a:t>S. Kapoor and A. Narayanan, “Leakage and the reproducibility crisis in machine-learning-based science,” </a:t>
             </a:r>
             <a:r>
-              <a:rPr sz="780" i="1">
+              <a:rPr sz="860" i="1">
                 <a:solidFill>
                   <a:srgbClr val="1E2430"/>
                 </a:solidFill>
@@ -11223,7 +11224,7 @@
               <a:t>Patterns</a:t>
             </a:r>
             <a:r>
-              <a:rPr sz="780" i="0">
+              <a:rPr sz="860" i="0">
                 <a:solidFill>
                   <a:srgbClr val="1E2430"/>
                 </a:solidFill>
@@ -11239,7 +11240,7 @@
               </a:spcAft>
             </a:pPr>
             <a:r>
-              <a:rPr sz="780" i="0">
+              <a:rPr sz="860" i="0">
                 <a:solidFill>
                   <a:srgbClr val="1E2430"/>
                 </a:solidFill>
@@ -11248,7 +11249,7 @@
               <a:t>[9]	</a:t>
             </a:r>
             <a:r>
-              <a:rPr sz="780" i="0">
+              <a:rPr sz="860" i="0">
                 <a:solidFill>
                   <a:srgbClr val="1E2430"/>
                 </a:solidFill>
@@ -11257,7 +11258,7 @@
               <a:t>M. Roberts et al., “Common pitfalls and recommendations for using machine learning to detect and prognosticate for COVID-19 using chest radiographs and CT scans,” </a:t>
             </a:r>
             <a:r>
-              <a:rPr sz="780" i="1">
+              <a:rPr sz="860" i="1">
                 <a:solidFill>
                   <a:srgbClr val="1E2430"/>
                 </a:solidFill>
@@ -11266,7 +11267,7 @@
               <a:t>Nature Machine Intelligence</a:t>
             </a:r>
             <a:r>
-              <a:rPr sz="780" i="0">
+              <a:rPr sz="860" i="0">
                 <a:solidFill>
                   <a:srgbClr val="1E2430"/>
                 </a:solidFill>
@@ -11282,7 +11283,7 @@
               </a:spcAft>
             </a:pPr>
             <a:r>
-              <a:rPr sz="780" i="0">
+              <a:rPr sz="860" i="0">
                 <a:solidFill>
                   <a:srgbClr val="1E2430"/>
                 </a:solidFill>
@@ -11291,7 +11292,7 @@
               <a:t>[10]	</a:t>
             </a:r>
             <a:r>
-              <a:rPr sz="780" i="0">
+              <a:rPr sz="860" i="0">
                 <a:solidFill>
                   <a:srgbClr val="1E2430"/>
                 </a:solidFill>
@@ -11300,7 +11301,7 @@
               <a:t>F. Isensee, P. F. Jaeger, S. A. A. Kohl, J. Petersen, and K. H. Maier-Hein, “nnU-Net: A self-configuring method for deep learning-based biomedical image segmentation,” </a:t>
             </a:r>
             <a:r>
-              <a:rPr sz="780" i="1">
+              <a:rPr sz="860" i="1">
                 <a:solidFill>
                   <a:srgbClr val="1E2430"/>
                 </a:solidFill>
@@ -11309,7 +11310,7 @@
               <a:t>Nature Methods</a:t>
             </a:r>
             <a:r>
-              <a:rPr sz="780" i="0">
+              <a:rPr sz="860" i="0">
                 <a:solidFill>
                   <a:srgbClr val="1E2430"/>
                 </a:solidFill>
@@ -11325,7 +11326,7 @@
               </a:spcAft>
             </a:pPr>
             <a:r>
-              <a:rPr sz="780" i="0">
+              <a:rPr sz="860" i="0">
                 <a:solidFill>
                   <a:srgbClr val="1E2430"/>
                 </a:solidFill>
@@ -11334,7 +11335,7 @@
               <a:t>[11]	</a:t>
             </a:r>
             <a:r>
-              <a:rPr sz="780" i="0">
+              <a:rPr sz="860" i="0">
                 <a:solidFill>
                   <a:srgbClr val="1E2430"/>
                 </a:solidFill>
@@ -11343,7 +11344,7 @@
               <a:t>A. Myronenko, “3D MRI brain tumor segmentation using autoencoder regularization,” in </a:t>
             </a:r>
             <a:r>
-              <a:rPr sz="780" i="1">
+              <a:rPr sz="860" i="1">
                 <a:solidFill>
                   <a:srgbClr val="1E2430"/>
                 </a:solidFill>
@@ -11352,7 +11353,7 @@
               <a:t>Brainlesion: Glioma, Multiple Sclerosis, Stroke and Traumatic Brain Injuries (BrainLes 2018)</a:t>
             </a:r>
             <a:r>
-              <a:rPr sz="780" i="0">
+              <a:rPr sz="860" i="0">
                 <a:solidFill>
                   <a:srgbClr val="1E2430"/>
                 </a:solidFill>
@@ -11368,7 +11369,7 @@
               </a:spcAft>
             </a:pPr>
             <a:r>
-              <a:rPr sz="780" i="0">
+              <a:rPr sz="860" i="0">
                 <a:solidFill>
                   <a:srgbClr val="1E2430"/>
                 </a:solidFill>
@@ -11377,7 +11378,7 @@
               <a:t>[12]	</a:t>
             </a:r>
             <a:r>
-              <a:rPr sz="780" i="0">
+              <a:rPr sz="860" i="0">
                 <a:solidFill>
                   <a:srgbClr val="1E2430"/>
                 </a:solidFill>
@@ -11386,7 +11387,7 @@
               <a:t>Y. He, V. Nath, D. Yang, Y. Tang, A. Myronenko, and D. Xu, “SwinUNETR-V2: Stronger Swin transformers with stagewise convolutions for 3D medical image segmentation,” in </a:t>
             </a:r>
             <a:r>
-              <a:rPr sz="780" i="1">
+              <a:rPr sz="860" i="1">
                 <a:solidFill>
                   <a:srgbClr val="1E2430"/>
                 </a:solidFill>
@@ -11395,7 +11396,7 @@
               <a:t>Medical Image Computing and Computer Assisted Intervention (MICCAI 2023)</a:t>
             </a:r>
             <a:r>
-              <a:rPr sz="780" i="0">
+              <a:rPr sz="860" i="0">
                 <a:solidFill>
                   <a:srgbClr val="1E2430"/>
                 </a:solidFill>
@@ -11411,7 +11412,7 @@
               </a:spcAft>
             </a:pPr>
             <a:r>
-              <a:rPr sz="780" i="0">
+              <a:rPr sz="860" i="0">
                 <a:solidFill>
                   <a:srgbClr val="1E2430"/>
                 </a:solidFill>
@@ -11420,7 +11421,7 @@
               <a:t>[13]	</a:t>
             </a:r>
             <a:r>
-              <a:rPr sz="780" i="0">
+              <a:rPr sz="860" i="0">
                 <a:solidFill>
                   <a:srgbClr val="1E2430"/>
                 </a:solidFill>
@@ -11429,7 +11430,7 @@
               <a:t>M. Adewole et al., “The BraTS-Africa dataset: Expanding the brain tumor segmentation data to capture African populations,” </a:t>
             </a:r>
             <a:r>
-              <a:rPr sz="780" i="1">
+              <a:rPr sz="860" i="1">
                 <a:solidFill>
                   <a:srgbClr val="1E2430"/>
                 </a:solidFill>
@@ -11438,7 +11439,7 @@
               <a:t>Radiology: Artificial Intelligence</a:t>
             </a:r>
             <a:r>
-              <a:rPr sz="780" i="0">
+              <a:rPr sz="860" i="0">
                 <a:solidFill>
                   <a:srgbClr val="1E2430"/>
                 </a:solidFill>
@@ -11454,7 +11455,7 @@
               </a:spcAft>
             </a:pPr>
             <a:r>
-              <a:rPr sz="780" i="0">
+              <a:rPr sz="860" i="0">
                 <a:solidFill>
                   <a:srgbClr val="1E2430"/>
                 </a:solidFill>
@@ -11463,7 +11464,7 @@
               <a:t>[14]	</a:t>
             </a:r>
             <a:r>
-              <a:rPr sz="780" i="0">
+              <a:rPr sz="860" i="0">
                 <a:solidFill>
                   <a:srgbClr val="1E2430"/>
                 </a:solidFill>
@@ -11472,7 +11473,7 @@
               <a:t>E. I. Zacharaki et al., “Classification of brain tumor type and grade using MRI texture and shape in a machine learning scheme,” </a:t>
             </a:r>
             <a:r>
-              <a:rPr sz="780" i="1">
+              <a:rPr sz="860" i="1">
                 <a:solidFill>
                   <a:srgbClr val="1E2430"/>
                 </a:solidFill>
@@ -11481,7 +11482,7 @@
               <a:t>Magnetic Resonance in Medicine</a:t>
             </a:r>
             <a:r>
-              <a:rPr sz="780" i="0">
+              <a:rPr sz="860" i="0">
                 <a:solidFill>
                   <a:srgbClr val="1E2430"/>
                 </a:solidFill>
@@ -11497,7 +11498,7 @@
               </a:spcAft>
             </a:pPr>
             <a:r>
-              <a:rPr sz="780" i="0">
+              <a:rPr sz="860" i="0">
                 <a:solidFill>
                   <a:srgbClr val="1E2430"/>
                 </a:solidFill>
@@ -11506,7 +11507,7 @@
               <a:t>[15]	</a:t>
             </a:r>
             <a:r>
-              <a:rPr sz="780" i="0">
+              <a:rPr sz="860" i="0">
                 <a:solidFill>
                   <a:srgbClr val="1E2430"/>
                 </a:solidFill>
@@ -11515,7 +11516,7 @@
               <a:t>N. Gordillo, E. Montseny, and P. Sobrevilla, “State of the art survey on MRI brain tumor segmentation,” </a:t>
             </a:r>
             <a:r>
-              <a:rPr sz="780" i="1">
+              <a:rPr sz="860" i="1">
                 <a:solidFill>
                   <a:srgbClr val="1E2430"/>
                 </a:solidFill>
@@ -11524,7 +11525,7 @@
               <a:t>Magnetic Resonance Imaging</a:t>
             </a:r>
             <a:r>
-              <a:rPr sz="780" i="0">
+              <a:rPr sz="860" i="0">
                 <a:solidFill>
                   <a:srgbClr val="1E2430"/>
                 </a:solidFill>
@@ -11540,7 +11541,7 @@
               </a:spcAft>
             </a:pPr>
             <a:r>
-              <a:rPr sz="780" i="0">
+              <a:rPr sz="860" i="0">
                 <a:solidFill>
                   <a:srgbClr val="1E2430"/>
                 </a:solidFill>
@@ -11549,7 +11550,7 @@
               <a:t>[16]	</a:t>
             </a:r>
             <a:r>
-              <a:rPr sz="780" i="0">
+              <a:rPr sz="860" i="0">
                 <a:solidFill>
                   <a:srgbClr val="1E2430"/>
                 </a:solidFill>
@@ -11558,7 +11559,7 @@
               <a:t>G. Litjens et al., “A survey on deep learning in medical image analysis,” </a:t>
             </a:r>
             <a:r>
-              <a:rPr sz="780" i="1">
+              <a:rPr sz="860" i="1">
                 <a:solidFill>
                   <a:srgbClr val="1E2430"/>
                 </a:solidFill>
@@ -11567,357 +11568,13 @@
               <a:t>Medical Image Analysis</a:t>
             </a:r>
             <a:r>
-              <a:rPr sz="780" i="0">
+              <a:rPr sz="860" i="0">
                 <a:solidFill>
                   <a:srgbClr val="1E2430"/>
                 </a:solidFill>
                 <a:latin typeface="Calibri"/>
               </a:rPr>
               <a:t>, vol. 42, pp. 60–88, 2017.</a:t>
-            </a:r>
-          </a:p>
-          <a:p>
-            <a:pPr marL="274320" indent="-274320">
-              <a:spcAft>
-                <a:spcPts val="100"/>
-              </a:spcAft>
-            </a:pPr>
-            <a:r>
-              <a:rPr sz="780" i="0">
-                <a:solidFill>
-                  <a:srgbClr val="1E2430"/>
-                </a:solidFill>
-                <a:latin typeface="Calibri"/>
-              </a:rPr>
-              <a:t>[17]	</a:t>
-            </a:r>
-            <a:r>
-              <a:rPr sz="780" i="0">
-                <a:solidFill>
-                  <a:srgbClr val="1E2430"/>
-                </a:solidFill>
-                <a:latin typeface="Calibri"/>
-              </a:rPr>
-              <a:t>J. Cheng et al., “Enhanced performance of brain tumor classification via tumor region augmentation and partition,” </a:t>
-            </a:r>
-            <a:r>
-              <a:rPr sz="780" i="1">
-                <a:solidFill>
-                  <a:srgbClr val="1E2430"/>
-                </a:solidFill>
-                <a:latin typeface="Calibri"/>
-              </a:rPr>
-              <a:t>PLoS ONE</a:t>
-            </a:r>
-            <a:r>
-              <a:rPr sz="780" i="0">
-                <a:solidFill>
-                  <a:srgbClr val="1E2430"/>
-                </a:solidFill>
-                <a:latin typeface="Calibri"/>
-              </a:rPr>
-              <a:t>, vol. 10, no. 10, Art. no. e0140381, 2015.</a:t>
-            </a:r>
-          </a:p>
-          <a:p>
-            <a:pPr marL="274320" indent="-274320">
-              <a:spcAft>
-                <a:spcPts val="100"/>
-              </a:spcAft>
-            </a:pPr>
-            <a:r>
-              <a:rPr sz="780" i="0">
-                <a:solidFill>
-                  <a:srgbClr val="1E2430"/>
-                </a:solidFill>
-                <a:latin typeface="Calibri"/>
-              </a:rPr>
-              <a:t>[18]	</a:t>
-            </a:r>
-            <a:r>
-              <a:rPr sz="780" i="0">
-                <a:solidFill>
-                  <a:srgbClr val="1E2430"/>
-                </a:solidFill>
-                <a:latin typeface="Calibri"/>
-              </a:rPr>
-              <a:t>J. Seetha and S. S. Raja, “Brain tumor classification using convolutional neural networks,” </a:t>
-            </a:r>
-            <a:r>
-              <a:rPr sz="780" i="1">
-                <a:solidFill>
-                  <a:srgbClr val="1E2430"/>
-                </a:solidFill>
-                <a:latin typeface="Calibri"/>
-              </a:rPr>
-              <a:t>Biomedical and Pharmacology Journal</a:t>
-            </a:r>
-            <a:r>
-              <a:rPr sz="780" i="0">
-                <a:solidFill>
-                  <a:srgbClr val="1E2430"/>
-                </a:solidFill>
-                <a:latin typeface="Calibri"/>
-              </a:rPr>
-              <a:t>, vol. 11, no. 3, pp. 1457–1461, 2018.</a:t>
-            </a:r>
-          </a:p>
-          <a:p>
-            <a:pPr marL="274320" indent="-274320">
-              <a:spcAft>
-                <a:spcPts val="100"/>
-              </a:spcAft>
-            </a:pPr>
-            <a:r>
-              <a:rPr sz="780" i="0">
-                <a:solidFill>
-                  <a:srgbClr val="1E2430"/>
-                </a:solidFill>
-                <a:latin typeface="Calibri"/>
-              </a:rPr>
-              <a:t>[19]	</a:t>
-            </a:r>
-            <a:r>
-              <a:rPr sz="780" i="0">
-                <a:solidFill>
-                  <a:srgbClr val="1E2430"/>
-                </a:solidFill>
-                <a:latin typeface="Calibri"/>
-              </a:rPr>
-              <a:t>M. Talo, U. B. Baloglu, Ö. Yıldırım, and U. R. Acharya, “Application of deep transfer learning for automated brain abnormality classification using MR images,” </a:t>
-            </a:r>
-            <a:r>
-              <a:rPr sz="780" i="1">
-                <a:solidFill>
-                  <a:srgbClr val="1E2430"/>
-                </a:solidFill>
-                <a:latin typeface="Calibri"/>
-              </a:rPr>
-              <a:t>Cognitive Systems Research</a:t>
-            </a:r>
-            <a:r>
-              <a:rPr sz="780" i="0">
-                <a:solidFill>
-                  <a:srgbClr val="1E2430"/>
-                </a:solidFill>
-                <a:latin typeface="Calibri"/>
-              </a:rPr>
-              <a:t>, vol. 54, pp. 176–188, 2019.</a:t>
-            </a:r>
-          </a:p>
-          <a:p>
-            <a:pPr marL="274320" indent="-274320">
-              <a:spcAft>
-                <a:spcPts val="100"/>
-              </a:spcAft>
-            </a:pPr>
-            <a:r>
-              <a:rPr sz="780" i="0">
-                <a:solidFill>
-                  <a:srgbClr val="1E2430"/>
-                </a:solidFill>
-                <a:latin typeface="Calibri"/>
-              </a:rPr>
-              <a:t>[20]	</a:t>
-            </a:r>
-            <a:r>
-              <a:rPr sz="780" i="0">
-                <a:solidFill>
-                  <a:srgbClr val="1E2430"/>
-                </a:solidFill>
-                <a:latin typeface="Calibri"/>
-              </a:rPr>
-              <a:t>K. He, X. Zhang, S. Ren, and J. Sun, “Deep residual learning for image recognition,” in </a:t>
-            </a:r>
-            <a:r>
-              <a:rPr sz="780" i="1">
-                <a:solidFill>
-                  <a:srgbClr val="1E2430"/>
-                </a:solidFill>
-                <a:latin typeface="Calibri"/>
-              </a:rPr>
-              <a:t>Proc. IEEE Conference on Computer Vision and Pattern Recognition (CVPR)</a:t>
-            </a:r>
-            <a:r>
-              <a:rPr sz="780" i="0">
-                <a:solidFill>
-                  <a:srgbClr val="1E2430"/>
-                </a:solidFill>
-                <a:latin typeface="Calibri"/>
-              </a:rPr>
-              <a:t>, 2016, pp. 770–778.</a:t>
-            </a:r>
-          </a:p>
-          <a:p>
-            <a:pPr marL="274320" indent="-274320">
-              <a:spcAft>
-                <a:spcPts val="100"/>
-              </a:spcAft>
-            </a:pPr>
-            <a:r>
-              <a:rPr sz="780" i="0">
-                <a:solidFill>
-                  <a:srgbClr val="1E2430"/>
-                </a:solidFill>
-                <a:latin typeface="Calibri"/>
-              </a:rPr>
-              <a:t>[21]	</a:t>
-            </a:r>
-            <a:r>
-              <a:rPr sz="780" i="0">
-                <a:solidFill>
-                  <a:srgbClr val="1E2430"/>
-                </a:solidFill>
-                <a:latin typeface="Calibri"/>
-              </a:rPr>
-              <a:t>A. Krizhevsky, I. Sutskever, and G. E. Hinton, “ImageNet classification with deep convolutional neural networks,” </a:t>
-            </a:r>
-            <a:r>
-              <a:rPr sz="780" i="1">
-                <a:solidFill>
-                  <a:srgbClr val="1E2430"/>
-                </a:solidFill>
-                <a:latin typeface="Calibri"/>
-              </a:rPr>
-              <a:t>Communications of the ACM</a:t>
-            </a:r>
-            <a:r>
-              <a:rPr sz="780" i="0">
-                <a:solidFill>
-                  <a:srgbClr val="1E2430"/>
-                </a:solidFill>
-                <a:latin typeface="Calibri"/>
-              </a:rPr>
-              <a:t>, vol. 60, no. 6, pp. 84–90, 2017.</a:t>
-            </a:r>
-          </a:p>
-          <a:p>
-            <a:pPr marL="274320" indent="-274320">
-              <a:spcAft>
-                <a:spcPts val="100"/>
-              </a:spcAft>
-            </a:pPr>
-            <a:r>
-              <a:rPr sz="780" i="0">
-                <a:solidFill>
-                  <a:srgbClr val="1E2430"/>
-                </a:solidFill>
-                <a:latin typeface="Calibri"/>
-              </a:rPr>
-              <a:t>[22]	</a:t>
-            </a:r>
-            <a:r>
-              <a:rPr sz="780" i="0">
-                <a:solidFill>
-                  <a:srgbClr val="1E2430"/>
-                </a:solidFill>
-                <a:latin typeface="Calibri"/>
-              </a:rPr>
-              <a:t>S. Deepak and P. M. Ameer, “Brain tumor classification using deep CNN features via transfer learning,” </a:t>
-            </a:r>
-            <a:r>
-              <a:rPr sz="780" i="1">
-                <a:solidFill>
-                  <a:srgbClr val="1E2430"/>
-                </a:solidFill>
-                <a:latin typeface="Calibri"/>
-              </a:rPr>
-              <a:t>Computers in Biology and Medicine</a:t>
-            </a:r>
-            <a:r>
-              <a:rPr sz="780" i="0">
-                <a:solidFill>
-                  <a:srgbClr val="1E2430"/>
-                </a:solidFill>
-                <a:latin typeface="Calibri"/>
-              </a:rPr>
-              <a:t>, vol. 111, Art. no. 103345, 2019.</a:t>
-            </a:r>
-          </a:p>
-          <a:p>
-            <a:pPr marL="274320" indent="-274320">
-              <a:spcAft>
-                <a:spcPts val="100"/>
-              </a:spcAft>
-            </a:pPr>
-            <a:r>
-              <a:rPr sz="780" i="0">
-                <a:solidFill>
-                  <a:srgbClr val="1E2430"/>
-                </a:solidFill>
-                <a:latin typeface="Calibri"/>
-              </a:rPr>
-              <a:t>[23]	</a:t>
-            </a:r>
-            <a:r>
-              <a:rPr sz="780" i="0">
-                <a:solidFill>
-                  <a:srgbClr val="1E2430"/>
-                </a:solidFill>
-                <a:latin typeface="Calibri"/>
-              </a:rPr>
-              <a:t>N. Ghassemi, A. Shoeibi, and M. Rouhani, “Deep neural network with generative adversarial networks pre-training for brain tumor classification based on MR images,” </a:t>
-            </a:r>
-            <a:r>
-              <a:rPr sz="780" i="1">
-                <a:solidFill>
-                  <a:srgbClr val="1E2430"/>
-                </a:solidFill>
-                <a:latin typeface="Calibri"/>
-              </a:rPr>
-              <a:t>Biomedical Signal Processing and Control</a:t>
-            </a:r>
-            <a:r>
-              <a:rPr sz="780" i="0">
-                <a:solidFill>
-                  <a:srgbClr val="1E2430"/>
-                </a:solidFill>
-                <a:latin typeface="Calibri"/>
-              </a:rPr>
-              <a:t>, vol. 57, Art. no. 101678, 2020.</a:t>
-            </a:r>
-          </a:p>
-          <a:p>
-            <a:pPr marL="274320" indent="-274320">
-              <a:spcAft>
-                <a:spcPts val="100"/>
-              </a:spcAft>
-            </a:pPr>
-            <a:r>
-              <a:rPr sz="780" i="0">
-                <a:solidFill>
-                  <a:srgbClr val="1E2430"/>
-                </a:solidFill>
-                <a:latin typeface="Calibri"/>
-              </a:rPr>
-              <a:t>[24]	</a:t>
-            </a:r>
-            <a:r>
-              <a:rPr sz="780" i="0">
-                <a:solidFill>
-                  <a:srgbClr val="1E2430"/>
-                </a:solidFill>
-                <a:latin typeface="Calibri"/>
-              </a:rPr>
-              <a:t>A. Rehman, S. Naz, M. I. Razzak, F. Akram, and M. Imran, “A deep learning-based framework for automatic brain tumors classification using transfer learning,” </a:t>
-            </a:r>
-            <a:r>
-              <a:rPr sz="780" i="1">
-                <a:solidFill>
-                  <a:srgbClr val="1E2430"/>
-                </a:solidFill>
-                <a:latin typeface="Calibri"/>
-              </a:rPr>
-              <a:t>Circuits, Systems, and Signal Processing</a:t>
-            </a:r>
-            <a:r>
-              <a:rPr sz="780" i="0">
-                <a:solidFill>
-                  <a:srgbClr val="1E2430"/>
-                </a:solidFill>
-                <a:latin typeface="Calibri"/>
-              </a:rPr>
-              <a:t>, vol. 39, no. 2, pp. 757–775, 2020.</a:t>
             </a:r>
           </a:p>
         </p:txBody>
@@ -11950,40 +11607,40 @@
               </a:spcAft>
             </a:pPr>
             <a:r>
-              <a:rPr sz="780" i="0">
-                <a:solidFill>
-                  <a:srgbClr val="1E2430"/>
-                </a:solidFill>
-                <a:latin typeface="Calibri"/>
-              </a:rPr>
-              <a:t>[25]	</a:t>
-            </a:r>
-            <a:r>
-              <a:rPr sz="780" i="0">
-                <a:solidFill>
-                  <a:srgbClr val="1E2430"/>
-                </a:solidFill>
-                <a:latin typeface="Calibri"/>
-              </a:rPr>
-              <a:t>N. Noreen, S. Palaniappan, A. Qayyum, I. Ahmad, M. Imran, and M. Shoaib, “A deep learning model based on concatenation approach for the diagnosis of brain tumor,” </a:t>
-            </a:r>
-            <a:r>
-              <a:rPr sz="780" i="1">
-                <a:solidFill>
-                  <a:srgbClr val="1E2430"/>
-                </a:solidFill>
-                <a:latin typeface="Calibri"/>
-              </a:rPr>
-              <a:t>IEEE Access</a:t>
-            </a:r>
-            <a:r>
-              <a:rPr sz="780" i="0">
-                <a:solidFill>
-                  <a:srgbClr val="1E2430"/>
-                </a:solidFill>
-                <a:latin typeface="Calibri"/>
-              </a:rPr>
-              <a:t>, vol. 8, pp. 55135–55144, 2020.</a:t>
+              <a:rPr sz="860" i="0">
+                <a:solidFill>
+                  <a:srgbClr val="1E2430"/>
+                </a:solidFill>
+                <a:latin typeface="Calibri"/>
+              </a:rPr>
+              <a:t>[17]	</a:t>
+            </a:r>
+            <a:r>
+              <a:rPr sz="860" i="0">
+                <a:solidFill>
+                  <a:srgbClr val="1E2430"/>
+                </a:solidFill>
+                <a:latin typeface="Calibri"/>
+              </a:rPr>
+              <a:t>J. Cheng et al., “Enhanced performance of brain tumor classification via tumor region augmentation and partition,” </a:t>
+            </a:r>
+            <a:r>
+              <a:rPr sz="860" i="1">
+                <a:solidFill>
+                  <a:srgbClr val="1E2430"/>
+                </a:solidFill>
+                <a:latin typeface="Calibri"/>
+              </a:rPr>
+              <a:t>PLoS ONE</a:t>
+            </a:r>
+            <a:r>
+              <a:rPr sz="860" i="0">
+                <a:solidFill>
+                  <a:srgbClr val="1E2430"/>
+                </a:solidFill>
+                <a:latin typeface="Calibri"/>
+              </a:rPr>
+              <a:t>, vol. 10, no. 10, Art. no. e0140381, 2015.</a:t>
             </a:r>
           </a:p>
           <a:p>
@@ -11993,40 +11650,40 @@
               </a:spcAft>
             </a:pPr>
             <a:r>
-              <a:rPr sz="780" i="0">
-                <a:solidFill>
-                  <a:srgbClr val="1E2430"/>
-                </a:solidFill>
-                <a:latin typeface="Calibri"/>
-              </a:rPr>
-              <a:t>[26]	</a:t>
-            </a:r>
-            <a:r>
-              <a:rPr sz="780" i="0">
-                <a:solidFill>
-                  <a:srgbClr val="1E2430"/>
-                </a:solidFill>
-                <a:latin typeface="Calibri"/>
-              </a:rPr>
-              <a:t>K. Simonyan and A. Zisserman, “Very deep convolutional networks for large-scale image recognition,” in </a:t>
-            </a:r>
-            <a:r>
-              <a:rPr sz="780" i="1">
-                <a:solidFill>
-                  <a:srgbClr val="1E2430"/>
-                </a:solidFill>
-                <a:latin typeface="Calibri"/>
-              </a:rPr>
-              <a:t>Proc. International Conference on Learning Representations (ICLR)</a:t>
-            </a:r>
-            <a:r>
-              <a:rPr sz="780" i="0">
-                <a:solidFill>
-                  <a:srgbClr val="1E2430"/>
-                </a:solidFill>
-                <a:latin typeface="Calibri"/>
-              </a:rPr>
-              <a:t>, 2015.</a:t>
+              <a:rPr sz="860" i="0">
+                <a:solidFill>
+                  <a:srgbClr val="1E2430"/>
+                </a:solidFill>
+                <a:latin typeface="Calibri"/>
+              </a:rPr>
+              <a:t>[18]	</a:t>
+            </a:r>
+            <a:r>
+              <a:rPr sz="860" i="0">
+                <a:solidFill>
+                  <a:srgbClr val="1E2430"/>
+                </a:solidFill>
+                <a:latin typeface="Calibri"/>
+              </a:rPr>
+              <a:t>J. Seetha and S. S. Raja, “Brain tumor classification using convolutional neural networks,” </a:t>
+            </a:r>
+            <a:r>
+              <a:rPr sz="860" i="1">
+                <a:solidFill>
+                  <a:srgbClr val="1E2430"/>
+                </a:solidFill>
+                <a:latin typeface="Calibri"/>
+              </a:rPr>
+              <a:t>Biomedical and Pharmacology Journal</a:t>
+            </a:r>
+            <a:r>
+              <a:rPr sz="860" i="0">
+                <a:solidFill>
+                  <a:srgbClr val="1E2430"/>
+                </a:solidFill>
+                <a:latin typeface="Calibri"/>
+              </a:rPr>
+              <a:t>, vol. 11, no. 3, pp. 1457–1461, 2018.</a:t>
             </a:r>
           </a:p>
           <a:p>
@@ -12036,40 +11693,40 @@
               </a:spcAft>
             </a:pPr>
             <a:r>
-              <a:rPr sz="780" i="0">
-                <a:solidFill>
-                  <a:srgbClr val="1E2430"/>
-                </a:solidFill>
-                <a:latin typeface="Calibri"/>
-              </a:rPr>
-              <a:t>[27]	</a:t>
-            </a:r>
-            <a:r>
-              <a:rPr sz="780" i="0">
-                <a:solidFill>
-                  <a:srgbClr val="1E2430"/>
-                </a:solidFill>
-                <a:latin typeface="Calibri"/>
-              </a:rPr>
-              <a:t>C. Szegedy, V. Vanhoucke, S. Ioffe, J. Shlens, and Z. Wojna, “Rethinking the inception architecture for computer vision,” in </a:t>
-            </a:r>
-            <a:r>
-              <a:rPr sz="780" i="1">
-                <a:solidFill>
-                  <a:srgbClr val="1E2430"/>
-                </a:solidFill>
-                <a:latin typeface="Calibri"/>
-              </a:rPr>
-              <a:t>Proc. IEEE Conference on Computer Vision and Pattern Recognition (CVPR)</a:t>
-            </a:r>
-            <a:r>
-              <a:rPr sz="780" i="0">
-                <a:solidFill>
-                  <a:srgbClr val="1E2430"/>
-                </a:solidFill>
-                <a:latin typeface="Calibri"/>
-              </a:rPr>
-              <a:t>, 2016, pp. 2818–2826.</a:t>
+              <a:rPr sz="860" i="0">
+                <a:solidFill>
+                  <a:srgbClr val="1E2430"/>
+                </a:solidFill>
+                <a:latin typeface="Calibri"/>
+              </a:rPr>
+              <a:t>[19]	</a:t>
+            </a:r>
+            <a:r>
+              <a:rPr sz="860" i="0">
+                <a:solidFill>
+                  <a:srgbClr val="1E2430"/>
+                </a:solidFill>
+                <a:latin typeface="Calibri"/>
+              </a:rPr>
+              <a:t>M. Talo, U. B. Baloglu, Ö. Yıldırım, and U. R. Acharya, “Application of deep transfer learning for automated brain abnormality classification using MR images,” </a:t>
+            </a:r>
+            <a:r>
+              <a:rPr sz="860" i="1">
+                <a:solidFill>
+                  <a:srgbClr val="1E2430"/>
+                </a:solidFill>
+                <a:latin typeface="Calibri"/>
+              </a:rPr>
+              <a:t>Cognitive Systems Research</a:t>
+            </a:r>
+            <a:r>
+              <a:rPr sz="860" i="0">
+                <a:solidFill>
+                  <a:srgbClr val="1E2430"/>
+                </a:solidFill>
+                <a:latin typeface="Calibri"/>
+              </a:rPr>
+              <a:t>, vol. 54, pp. 176–188, 2019.</a:t>
             </a:r>
           </a:p>
           <a:p>
@@ -12079,25 +11736,25 @@
               </a:spcAft>
             </a:pPr>
             <a:r>
-              <a:rPr sz="780" i="0">
-                <a:solidFill>
-                  <a:srgbClr val="1E2430"/>
-                </a:solidFill>
-                <a:latin typeface="Calibri"/>
-              </a:rPr>
-              <a:t>[28]	</a:t>
-            </a:r>
-            <a:r>
-              <a:rPr sz="780" i="0">
-                <a:solidFill>
-                  <a:srgbClr val="1E2430"/>
-                </a:solidFill>
-                <a:latin typeface="Calibri"/>
-              </a:rPr>
-              <a:t>G. Huang, Z. Liu, L. van der Maaten, and K. Q. Weinberger, “Densely connected convolutional networks,” in </a:t>
-            </a:r>
-            <a:r>
-              <a:rPr sz="780" i="1">
+              <a:rPr sz="860" i="0">
+                <a:solidFill>
+                  <a:srgbClr val="1E2430"/>
+                </a:solidFill>
+                <a:latin typeface="Calibri"/>
+              </a:rPr>
+              <a:t>[20]	</a:t>
+            </a:r>
+            <a:r>
+              <a:rPr sz="860" i="0">
+                <a:solidFill>
+                  <a:srgbClr val="1E2430"/>
+                </a:solidFill>
+                <a:latin typeface="Calibri"/>
+              </a:rPr>
+              <a:t>K. He, X. Zhang, S. Ren, and J. Sun, “Deep residual learning for image recognition,” in </a:t>
+            </a:r>
+            <a:r>
+              <a:rPr sz="860" i="1">
                 <a:solidFill>
                   <a:srgbClr val="1E2430"/>
                 </a:solidFill>
@@ -12106,13 +11763,13 @@
               <a:t>Proc. IEEE Conference on Computer Vision and Pattern Recognition (CVPR)</a:t>
             </a:r>
             <a:r>
-              <a:rPr sz="780" i="0">
-                <a:solidFill>
-                  <a:srgbClr val="1E2430"/>
-                </a:solidFill>
-                <a:latin typeface="Calibri"/>
-              </a:rPr>
-              <a:t>, 2017, pp. 2261–2269.</a:t>
+              <a:rPr sz="860" i="0">
+                <a:solidFill>
+                  <a:srgbClr val="1E2430"/>
+                </a:solidFill>
+                <a:latin typeface="Calibri"/>
+              </a:rPr>
+              <a:t>, 2016, pp. 770–778.</a:t>
             </a:r>
           </a:p>
           <a:p>
@@ -12122,40 +11779,40 @@
               </a:spcAft>
             </a:pPr>
             <a:r>
-              <a:rPr sz="780" i="0">
-                <a:solidFill>
-                  <a:srgbClr val="1E2430"/>
-                </a:solidFill>
-                <a:latin typeface="Calibri"/>
-              </a:rPr>
-              <a:t>[29]	</a:t>
-            </a:r>
-            <a:r>
-              <a:rPr sz="780" i="0">
-                <a:solidFill>
-                  <a:srgbClr val="1E2430"/>
-                </a:solidFill>
-                <a:latin typeface="Calibri"/>
-              </a:rPr>
-              <a:t>M. A. Khan et al., “Multimodal brain tumor classification using deep learning and robust feature selection: A machine learning application for radiologists,” </a:t>
-            </a:r>
-            <a:r>
-              <a:rPr sz="780" i="1">
-                <a:solidFill>
-                  <a:srgbClr val="1E2430"/>
-                </a:solidFill>
-                <a:latin typeface="Calibri"/>
-              </a:rPr>
-              <a:t>Diagnostics</a:t>
-            </a:r>
-            <a:r>
-              <a:rPr sz="780" i="0">
-                <a:solidFill>
-                  <a:srgbClr val="1E2430"/>
-                </a:solidFill>
-                <a:latin typeface="Calibri"/>
-              </a:rPr>
-              <a:t>, vol. 10, no. 8, Art. no. 565, 2020.</a:t>
+              <a:rPr sz="860" i="0">
+                <a:solidFill>
+                  <a:srgbClr val="1E2430"/>
+                </a:solidFill>
+                <a:latin typeface="Calibri"/>
+              </a:rPr>
+              <a:t>[21]	</a:t>
+            </a:r>
+            <a:r>
+              <a:rPr sz="860" i="0">
+                <a:solidFill>
+                  <a:srgbClr val="1E2430"/>
+                </a:solidFill>
+                <a:latin typeface="Calibri"/>
+              </a:rPr>
+              <a:t>A. Krizhevsky, I. Sutskever, and G. E. Hinton, “ImageNet classification with deep convolutional neural networks,” </a:t>
+            </a:r>
+            <a:r>
+              <a:rPr sz="860" i="1">
+                <a:solidFill>
+                  <a:srgbClr val="1E2430"/>
+                </a:solidFill>
+                <a:latin typeface="Calibri"/>
+              </a:rPr>
+              <a:t>Communications of the ACM</a:t>
+            </a:r>
+            <a:r>
+              <a:rPr sz="860" i="0">
+                <a:solidFill>
+                  <a:srgbClr val="1E2430"/>
+                </a:solidFill>
+                <a:latin typeface="Calibri"/>
+              </a:rPr>
+              <a:t>, vol. 60, no. 6, pp. 84–90, 2017.</a:t>
             </a:r>
           </a:p>
           <a:p>
@@ -12165,40 +11822,40 @@
               </a:spcAft>
             </a:pPr>
             <a:r>
-              <a:rPr sz="780" i="0">
-                <a:solidFill>
-                  <a:srgbClr val="1E2430"/>
-                </a:solidFill>
-                <a:latin typeface="Calibri"/>
-              </a:rPr>
-              <a:t>[30]	</a:t>
-            </a:r>
-            <a:r>
-              <a:rPr sz="780" i="0">
-                <a:solidFill>
-                  <a:srgbClr val="1E2430"/>
-                </a:solidFill>
-                <a:latin typeface="Calibri"/>
-              </a:rPr>
-              <a:t>S. Tummala, S. Kadry, S. A. C. Bukhari, and H. T. Rauf, “Classification of brain tumor from magnetic resonance imaging using vision transformers ensembling,” </a:t>
-            </a:r>
-            <a:r>
-              <a:rPr sz="780" i="1">
-                <a:solidFill>
-                  <a:srgbClr val="1E2430"/>
-                </a:solidFill>
-                <a:latin typeface="Calibri"/>
-              </a:rPr>
-              <a:t>Current Oncology</a:t>
-            </a:r>
-            <a:r>
-              <a:rPr sz="780" i="0">
-                <a:solidFill>
-                  <a:srgbClr val="1E2430"/>
-                </a:solidFill>
-                <a:latin typeface="Calibri"/>
-              </a:rPr>
-              <a:t>, vol. 29, no. 10, pp. 7498–7511, 2022.</a:t>
+              <a:rPr sz="860" i="0">
+                <a:solidFill>
+                  <a:srgbClr val="1E2430"/>
+                </a:solidFill>
+                <a:latin typeface="Calibri"/>
+              </a:rPr>
+              <a:t>[22]	</a:t>
+            </a:r>
+            <a:r>
+              <a:rPr sz="860" i="0">
+                <a:solidFill>
+                  <a:srgbClr val="1E2430"/>
+                </a:solidFill>
+                <a:latin typeface="Calibri"/>
+              </a:rPr>
+              <a:t>S. Deepak and P. M. Ameer, “Brain tumor classification using deep CNN features via transfer learning,” </a:t>
+            </a:r>
+            <a:r>
+              <a:rPr sz="860" i="1">
+                <a:solidFill>
+                  <a:srgbClr val="1E2430"/>
+                </a:solidFill>
+                <a:latin typeface="Calibri"/>
+              </a:rPr>
+              <a:t>Computers in Biology and Medicine</a:t>
+            </a:r>
+            <a:r>
+              <a:rPr sz="860" i="0">
+                <a:solidFill>
+                  <a:srgbClr val="1E2430"/>
+                </a:solidFill>
+                <a:latin typeface="Calibri"/>
+              </a:rPr>
+              <a:t>, vol. 111, Art. no. 103345, 2019.</a:t>
             </a:r>
           </a:p>
           <a:p>
@@ -12208,40 +11865,40 @@
               </a:spcAft>
             </a:pPr>
             <a:r>
-              <a:rPr sz="780" i="0">
-                <a:solidFill>
-                  <a:srgbClr val="1E2430"/>
-                </a:solidFill>
-                <a:latin typeface="Calibri"/>
-              </a:rPr>
-              <a:t>[31]	</a:t>
-            </a:r>
-            <a:r>
-              <a:rPr sz="780" i="0">
-                <a:solidFill>
-                  <a:srgbClr val="1E2430"/>
-                </a:solidFill>
-                <a:latin typeface="Calibri"/>
-              </a:rPr>
-              <a:t>A. A. Asiri et al., “Advancing brain tumor detection: Harnessing the Swin Transformer's power for accurate classification and performance analysis,” </a:t>
-            </a:r>
-            <a:r>
-              <a:rPr sz="780" i="1">
-                <a:solidFill>
-                  <a:srgbClr val="1E2430"/>
-                </a:solidFill>
-                <a:latin typeface="Calibri"/>
-              </a:rPr>
-              <a:t>PeerJ Computer Science</a:t>
-            </a:r>
-            <a:r>
-              <a:rPr sz="780" i="0">
-                <a:solidFill>
-                  <a:srgbClr val="1E2430"/>
-                </a:solidFill>
-                <a:latin typeface="Calibri"/>
-              </a:rPr>
-              <a:t>, vol. 10, Art. no. e1867, 2024.</a:t>
+              <a:rPr sz="860" i="0">
+                <a:solidFill>
+                  <a:srgbClr val="1E2430"/>
+                </a:solidFill>
+                <a:latin typeface="Calibri"/>
+              </a:rPr>
+              <a:t>[23]	</a:t>
+            </a:r>
+            <a:r>
+              <a:rPr sz="860" i="0">
+                <a:solidFill>
+                  <a:srgbClr val="1E2430"/>
+                </a:solidFill>
+                <a:latin typeface="Calibri"/>
+              </a:rPr>
+              <a:t>N. Ghassemi, A. Shoeibi, and M. Rouhani, “Deep neural network with generative adversarial networks pre-training for brain tumor classification based on MR images,” </a:t>
+            </a:r>
+            <a:r>
+              <a:rPr sz="860" i="1">
+                <a:solidFill>
+                  <a:srgbClr val="1E2430"/>
+                </a:solidFill>
+                <a:latin typeface="Calibri"/>
+              </a:rPr>
+              <a:t>Biomedical Signal Processing and Control</a:t>
+            </a:r>
+            <a:r>
+              <a:rPr sz="860" i="0">
+                <a:solidFill>
+                  <a:srgbClr val="1E2430"/>
+                </a:solidFill>
+                <a:latin typeface="Calibri"/>
+              </a:rPr>
+              <a:t>, vol. 57, Art. no. 101678, 2020.</a:t>
             </a:r>
           </a:p>
           <a:p>
@@ -12251,40 +11908,40 @@
               </a:spcAft>
             </a:pPr>
             <a:r>
-              <a:rPr sz="780" i="0">
-                <a:solidFill>
-                  <a:srgbClr val="1E2430"/>
-                </a:solidFill>
-                <a:latin typeface="Calibri"/>
-              </a:rPr>
-              <a:t>[32]	</a:t>
-            </a:r>
-            <a:r>
-              <a:rPr sz="780" i="0">
-                <a:solidFill>
-                  <a:srgbClr val="1E2430"/>
-                </a:solidFill>
-                <a:latin typeface="Calibri"/>
-              </a:rPr>
-              <a:t>A. Dosovitskiy et al., “An image is worth 16x16 words: Transformers for image recognition at scale,” in </a:t>
-            </a:r>
-            <a:r>
-              <a:rPr sz="780" i="1">
-                <a:solidFill>
-                  <a:srgbClr val="1E2430"/>
-                </a:solidFill>
-                <a:latin typeface="Calibri"/>
-              </a:rPr>
-              <a:t>Proc. International Conference on Learning Representations (ICLR)</a:t>
-            </a:r>
-            <a:r>
-              <a:rPr sz="780" i="0">
-                <a:solidFill>
-                  <a:srgbClr val="1E2430"/>
-                </a:solidFill>
-                <a:latin typeface="Calibri"/>
-              </a:rPr>
-              <a:t>, 2021.</a:t>
+              <a:rPr sz="860" i="0">
+                <a:solidFill>
+                  <a:srgbClr val="1E2430"/>
+                </a:solidFill>
+                <a:latin typeface="Calibri"/>
+              </a:rPr>
+              <a:t>[24]	</a:t>
+            </a:r>
+            <a:r>
+              <a:rPr sz="860" i="0">
+                <a:solidFill>
+                  <a:srgbClr val="1E2430"/>
+                </a:solidFill>
+                <a:latin typeface="Calibri"/>
+              </a:rPr>
+              <a:t>A. Rehman, S. Naz, M. I. Razzak, F. Akram, and M. Imran, “A deep learning-based framework for automatic brain tumors classification using transfer learning,” </a:t>
+            </a:r>
+            <a:r>
+              <a:rPr sz="860" i="1">
+                <a:solidFill>
+                  <a:srgbClr val="1E2430"/>
+                </a:solidFill>
+                <a:latin typeface="Calibri"/>
+              </a:rPr>
+              <a:t>Circuits, Systems, and Signal Processing</a:t>
+            </a:r>
+            <a:r>
+              <a:rPr sz="860" i="0">
+                <a:solidFill>
+                  <a:srgbClr val="1E2430"/>
+                </a:solidFill>
+                <a:latin typeface="Calibri"/>
+              </a:rPr>
+              <a:t>, vol. 39, no. 2, pp. 757–775, 2020.</a:t>
             </a:r>
           </a:p>
           <a:p>
@@ -12294,40 +11951,40 @@
               </a:spcAft>
             </a:pPr>
             <a:r>
-              <a:rPr sz="780" i="0">
-                <a:solidFill>
-                  <a:srgbClr val="1E2430"/>
-                </a:solidFill>
-                <a:latin typeface="Calibri"/>
-              </a:rPr>
-              <a:t>[33]	</a:t>
-            </a:r>
-            <a:r>
-              <a:rPr sz="780" i="0">
-                <a:solidFill>
-                  <a:srgbClr val="1E2430"/>
-                </a:solidFill>
-                <a:latin typeface="Calibri"/>
-              </a:rPr>
-              <a:t>Z. Liu et al., “Swin transformer: Hierarchical vision transformer using shifted windows,” in </a:t>
-            </a:r>
-            <a:r>
-              <a:rPr sz="780" i="1">
-                <a:solidFill>
-                  <a:srgbClr val="1E2430"/>
-                </a:solidFill>
-                <a:latin typeface="Calibri"/>
-              </a:rPr>
-              <a:t>Proc. IEEE/CVF International Conference on Computer Vision (ICCV)</a:t>
-            </a:r>
-            <a:r>
-              <a:rPr sz="780" i="0">
-                <a:solidFill>
-                  <a:srgbClr val="1E2430"/>
-                </a:solidFill>
-                <a:latin typeface="Calibri"/>
-              </a:rPr>
-              <a:t>, 2021, pp. 9992–10002.</a:t>
+              <a:rPr sz="860" i="0">
+                <a:solidFill>
+                  <a:srgbClr val="1E2430"/>
+                </a:solidFill>
+                <a:latin typeface="Calibri"/>
+              </a:rPr>
+              <a:t>[25]	</a:t>
+            </a:r>
+            <a:r>
+              <a:rPr sz="860" i="0">
+                <a:solidFill>
+                  <a:srgbClr val="1E2430"/>
+                </a:solidFill>
+                <a:latin typeface="Calibri"/>
+              </a:rPr>
+              <a:t>N. Noreen, S. Palaniappan, A. Qayyum, I. Ahmad, M. Imran, and M. Shoaib, “A deep learning model based on concatenation approach for the diagnosis of brain tumor,” </a:t>
+            </a:r>
+            <a:r>
+              <a:rPr sz="860" i="1">
+                <a:solidFill>
+                  <a:srgbClr val="1E2430"/>
+                </a:solidFill>
+                <a:latin typeface="Calibri"/>
+              </a:rPr>
+              <a:t>IEEE Access</a:t>
+            </a:r>
+            <a:r>
+              <a:rPr sz="860" i="0">
+                <a:solidFill>
+                  <a:srgbClr val="1E2430"/>
+                </a:solidFill>
+                <a:latin typeface="Calibri"/>
+              </a:rPr>
+              <a:t>, vol. 8, pp. 55135–55144, 2020.</a:t>
             </a:r>
           </a:p>
           <a:p>
@@ -12337,40 +11994,40 @@
               </a:spcAft>
             </a:pPr>
             <a:r>
-              <a:rPr sz="780" i="0">
-                <a:solidFill>
-                  <a:srgbClr val="1E2430"/>
-                </a:solidFill>
-                <a:latin typeface="Calibri"/>
-              </a:rPr>
-              <a:t>[34]	</a:t>
-            </a:r>
-            <a:r>
-              <a:rPr sz="780" i="0">
-                <a:solidFill>
-                  <a:srgbClr val="1E2430"/>
-                </a:solidFill>
-                <a:latin typeface="Calibri"/>
-              </a:rPr>
-              <a:t>O. Ronneberger, P. Fischer, and T. Brox, “U-Net: Convolutional networks for biomedical image segmentation,” in </a:t>
-            </a:r>
-            <a:r>
-              <a:rPr sz="780" i="1">
-                <a:solidFill>
-                  <a:srgbClr val="1E2430"/>
-                </a:solidFill>
-                <a:latin typeface="Calibri"/>
-              </a:rPr>
-              <a:t>Medical Image Computing and Computer-Assisted Intervention (MICCAI 2015)</a:t>
-            </a:r>
-            <a:r>
-              <a:rPr sz="780" i="0">
-                <a:solidFill>
-                  <a:srgbClr val="1E2430"/>
-                </a:solidFill>
-                <a:latin typeface="Calibri"/>
-              </a:rPr>
-              <a:t>, 2015, pp. 234–241.</a:t>
+              <a:rPr sz="860" i="0">
+                <a:solidFill>
+                  <a:srgbClr val="1E2430"/>
+                </a:solidFill>
+                <a:latin typeface="Calibri"/>
+              </a:rPr>
+              <a:t>[26]	</a:t>
+            </a:r>
+            <a:r>
+              <a:rPr sz="860" i="0">
+                <a:solidFill>
+                  <a:srgbClr val="1E2430"/>
+                </a:solidFill>
+                <a:latin typeface="Calibri"/>
+              </a:rPr>
+              <a:t>K. Simonyan and A. Zisserman, “Very deep convolutional networks for large-scale image recognition,” in </a:t>
+            </a:r>
+            <a:r>
+              <a:rPr sz="860" i="1">
+                <a:solidFill>
+                  <a:srgbClr val="1E2430"/>
+                </a:solidFill>
+                <a:latin typeface="Calibri"/>
+              </a:rPr>
+              <a:t>Proc. International Conference on Learning Representations (ICLR)</a:t>
+            </a:r>
+            <a:r>
+              <a:rPr sz="860" i="0">
+                <a:solidFill>
+                  <a:srgbClr val="1E2430"/>
+                </a:solidFill>
+                <a:latin typeface="Calibri"/>
+              </a:rPr>
+              <a:t>, 2015.</a:t>
             </a:r>
           </a:p>
           <a:p>
@@ -12380,40 +12037,40 @@
               </a:spcAft>
             </a:pPr>
             <a:r>
-              <a:rPr sz="780" i="0">
-                <a:solidFill>
-                  <a:srgbClr val="1E2430"/>
-                </a:solidFill>
-                <a:latin typeface="Calibri"/>
-              </a:rPr>
-              <a:t>[35]	</a:t>
-            </a:r>
-            <a:r>
-              <a:rPr sz="780" i="0">
-                <a:solidFill>
-                  <a:srgbClr val="1E2430"/>
-                </a:solidFill>
-                <a:latin typeface="Calibri"/>
-              </a:rPr>
-              <a:t>Ö. Çiçek, A. Abdulkadir, S. S. Lienkamp, T. Brox, and O. Ronneberger, “3D U-Net: Learning dense volumetric segmentation from sparse annotation,” in </a:t>
-            </a:r>
-            <a:r>
-              <a:rPr sz="780" i="1">
-                <a:solidFill>
-                  <a:srgbClr val="1E2430"/>
-                </a:solidFill>
-                <a:latin typeface="Calibri"/>
-              </a:rPr>
-              <a:t>Medical Image Computing and Computer-Assisted Intervention (MICCAI 2016)</a:t>
-            </a:r>
-            <a:r>
-              <a:rPr sz="780" i="0">
-                <a:solidFill>
-                  <a:srgbClr val="1E2430"/>
-                </a:solidFill>
-                <a:latin typeface="Calibri"/>
-              </a:rPr>
-              <a:t>, 2016, pp. 424–432.</a:t>
+              <a:rPr sz="860" i="0">
+                <a:solidFill>
+                  <a:srgbClr val="1E2430"/>
+                </a:solidFill>
+                <a:latin typeface="Calibri"/>
+              </a:rPr>
+              <a:t>[27]	</a:t>
+            </a:r>
+            <a:r>
+              <a:rPr sz="860" i="0">
+                <a:solidFill>
+                  <a:srgbClr val="1E2430"/>
+                </a:solidFill>
+                <a:latin typeface="Calibri"/>
+              </a:rPr>
+              <a:t>C. Szegedy, V. Vanhoucke, S. Ioffe, J. Shlens, and Z. Wojna, “Rethinking the inception architecture for computer vision,” in </a:t>
+            </a:r>
+            <a:r>
+              <a:rPr sz="860" i="1">
+                <a:solidFill>
+                  <a:srgbClr val="1E2430"/>
+                </a:solidFill>
+                <a:latin typeface="Calibri"/>
+              </a:rPr>
+              <a:t>Proc. IEEE Conference on Computer Vision and Pattern Recognition (CVPR)</a:t>
+            </a:r>
+            <a:r>
+              <a:rPr sz="860" i="0">
+                <a:solidFill>
+                  <a:srgbClr val="1E2430"/>
+                </a:solidFill>
+                <a:latin typeface="Calibri"/>
+              </a:rPr>
+              <a:t>, 2016, pp. 2818–2826.</a:t>
             </a:r>
           </a:p>
           <a:p>
@@ -12423,40 +12080,40 @@
               </a:spcAft>
             </a:pPr>
             <a:r>
-              <a:rPr sz="780" i="0">
-                <a:solidFill>
-                  <a:srgbClr val="1E2430"/>
-                </a:solidFill>
-                <a:latin typeface="Calibri"/>
-              </a:rPr>
-              <a:t>[36]	</a:t>
-            </a:r>
-            <a:r>
-              <a:rPr sz="780" i="0">
-                <a:solidFill>
-                  <a:srgbClr val="1E2430"/>
-                </a:solidFill>
-                <a:latin typeface="Calibri"/>
-              </a:rPr>
-              <a:t>A. Hatamizadeh et al., “UNETR: Transformers for 3D medical image segmentation,” in </a:t>
-            </a:r>
-            <a:r>
-              <a:rPr sz="780" i="1">
-                <a:solidFill>
-                  <a:srgbClr val="1E2430"/>
-                </a:solidFill>
-                <a:latin typeface="Calibri"/>
-              </a:rPr>
-              <a:t>Proc. IEEE/CVF Winter Conference on Applications of Computer Vision (WACV)</a:t>
-            </a:r>
-            <a:r>
-              <a:rPr sz="780" i="0">
-                <a:solidFill>
-                  <a:srgbClr val="1E2430"/>
-                </a:solidFill>
-                <a:latin typeface="Calibri"/>
-              </a:rPr>
-              <a:t>, 2022, pp. 1748–1758.</a:t>
+              <a:rPr sz="860" i="0">
+                <a:solidFill>
+                  <a:srgbClr val="1E2430"/>
+                </a:solidFill>
+                <a:latin typeface="Calibri"/>
+              </a:rPr>
+              <a:t>[28]	</a:t>
+            </a:r>
+            <a:r>
+              <a:rPr sz="860" i="0">
+                <a:solidFill>
+                  <a:srgbClr val="1E2430"/>
+                </a:solidFill>
+                <a:latin typeface="Calibri"/>
+              </a:rPr>
+              <a:t>G. Huang, Z. Liu, L. van der Maaten, and K. Q. Weinberger, “Densely connected convolutional networks,” in </a:t>
+            </a:r>
+            <a:r>
+              <a:rPr sz="860" i="1">
+                <a:solidFill>
+                  <a:srgbClr val="1E2430"/>
+                </a:solidFill>
+                <a:latin typeface="Calibri"/>
+              </a:rPr>
+              <a:t>Proc. IEEE Conference on Computer Vision and Pattern Recognition (CVPR)</a:t>
+            </a:r>
+            <a:r>
+              <a:rPr sz="860" i="0">
+                <a:solidFill>
+                  <a:srgbClr val="1E2430"/>
+                </a:solidFill>
+                <a:latin typeface="Calibri"/>
+              </a:rPr>
+              <a:t>, 2017, pp. 2261–2269.</a:t>
             </a:r>
           </a:p>
           <a:p>
@@ -12466,40 +12123,40 @@
               </a:spcAft>
             </a:pPr>
             <a:r>
-              <a:rPr sz="780" i="0">
-                <a:solidFill>
-                  <a:srgbClr val="1E2430"/>
-                </a:solidFill>
-                <a:latin typeface="Calibri"/>
-              </a:rPr>
-              <a:t>[37]	</a:t>
-            </a:r>
-            <a:r>
-              <a:rPr sz="780" i="0">
-                <a:solidFill>
-                  <a:srgbClr val="1E2430"/>
-                </a:solidFill>
-                <a:latin typeface="Calibri"/>
-              </a:rPr>
-              <a:t>A. Hatamizadeh, V. Nath, Y. Tang, D. Yang, H. R. Roth, and D. Xu, “Swin UNETR: Swin transformers for semantic segmentation of brain tumors in MRI images,” in </a:t>
-            </a:r>
-            <a:r>
-              <a:rPr sz="780" i="1">
-                <a:solidFill>
-                  <a:srgbClr val="1E2430"/>
-                </a:solidFill>
-                <a:latin typeface="Calibri"/>
-              </a:rPr>
-              <a:t>Brainlesion: Glioma, Multiple Sclerosis, Stroke and Traumatic Brain Injuries (BrainLes 2021)</a:t>
-            </a:r>
-            <a:r>
-              <a:rPr sz="780" i="0">
-                <a:solidFill>
-                  <a:srgbClr val="1E2430"/>
-                </a:solidFill>
-                <a:latin typeface="Calibri"/>
-              </a:rPr>
-              <a:t>, 2022, pp. 272–284.</a:t>
+              <a:rPr sz="860" i="0">
+                <a:solidFill>
+                  <a:srgbClr val="1E2430"/>
+                </a:solidFill>
+                <a:latin typeface="Calibri"/>
+              </a:rPr>
+              <a:t>[29]	</a:t>
+            </a:r>
+            <a:r>
+              <a:rPr sz="860" i="0">
+                <a:solidFill>
+                  <a:srgbClr val="1E2430"/>
+                </a:solidFill>
+                <a:latin typeface="Calibri"/>
+              </a:rPr>
+              <a:t>M. A. Khan et al., “Multimodal brain tumor classification using deep learning and robust feature selection: A machine learning application for radiologists,” </a:t>
+            </a:r>
+            <a:r>
+              <a:rPr sz="860" i="1">
+                <a:solidFill>
+                  <a:srgbClr val="1E2430"/>
+                </a:solidFill>
+                <a:latin typeface="Calibri"/>
+              </a:rPr>
+              <a:t>Diagnostics</a:t>
+            </a:r>
+            <a:r>
+              <a:rPr sz="860" i="0">
+                <a:solidFill>
+                  <a:srgbClr val="1E2430"/>
+                </a:solidFill>
+                <a:latin typeface="Calibri"/>
+              </a:rPr>
+              <a:t>, vol. 10, no. 8, Art. no. 565, 2020.</a:t>
             </a:r>
           </a:p>
           <a:p>
@@ -12509,40 +12166,40 @@
               </a:spcAft>
             </a:pPr>
             <a:r>
-              <a:rPr sz="780" i="0">
-                <a:solidFill>
-                  <a:srgbClr val="1E2430"/>
-                </a:solidFill>
-                <a:latin typeface="Calibri"/>
-              </a:rPr>
-              <a:t>[38]	</a:t>
-            </a:r>
-            <a:r>
-              <a:rPr sz="780" i="0">
-                <a:solidFill>
-                  <a:srgbClr val="1E2430"/>
-                </a:solidFill>
-                <a:latin typeface="Calibri"/>
-              </a:rPr>
-              <a:t>W. Wang, C. Chen, M. Ding, H. Yu, S. Zha, and J. Li, “TransBTS: Multimodal brain tumor segmentation using transformer,” in </a:t>
-            </a:r>
-            <a:r>
-              <a:rPr sz="780" i="1">
-                <a:solidFill>
-                  <a:srgbClr val="1E2430"/>
-                </a:solidFill>
-                <a:latin typeface="Calibri"/>
-              </a:rPr>
-              <a:t>Medical Image Computing and Computer Assisted Intervention (MICCAI 2021)</a:t>
-            </a:r>
-            <a:r>
-              <a:rPr sz="780" i="0">
-                <a:solidFill>
-                  <a:srgbClr val="1E2430"/>
-                </a:solidFill>
-                <a:latin typeface="Calibri"/>
-              </a:rPr>
-              <a:t>, 2021, pp. 109–119.</a:t>
+              <a:rPr sz="860" i="0">
+                <a:solidFill>
+                  <a:srgbClr val="1E2430"/>
+                </a:solidFill>
+                <a:latin typeface="Calibri"/>
+              </a:rPr>
+              <a:t>[30]	</a:t>
+            </a:r>
+            <a:r>
+              <a:rPr sz="860" i="0">
+                <a:solidFill>
+                  <a:srgbClr val="1E2430"/>
+                </a:solidFill>
+                <a:latin typeface="Calibri"/>
+              </a:rPr>
+              <a:t>S. Tummala, S. Kadry, S. A. C. Bukhari, and H. T. Rauf, “Classification of brain tumor from magnetic resonance imaging using vision transformers ensembling,” </a:t>
+            </a:r>
+            <a:r>
+              <a:rPr sz="860" i="1">
+                <a:solidFill>
+                  <a:srgbClr val="1E2430"/>
+                </a:solidFill>
+                <a:latin typeface="Calibri"/>
+              </a:rPr>
+              <a:t>Current Oncology</a:t>
+            </a:r>
+            <a:r>
+              <a:rPr sz="860" i="0">
+                <a:solidFill>
+                  <a:srgbClr val="1E2430"/>
+                </a:solidFill>
+                <a:latin typeface="Calibri"/>
+              </a:rPr>
+              <a:t>, vol. 29, no. 10, pp. 7498–7511, 2022.</a:t>
             </a:r>
           </a:p>
           <a:p>
@@ -12552,40 +12209,40 @@
               </a:spcAft>
             </a:pPr>
             <a:r>
-              <a:rPr sz="780" i="0">
-                <a:solidFill>
-                  <a:srgbClr val="1E2430"/>
-                </a:solidFill>
-                <a:latin typeface="Calibri"/>
-              </a:rPr>
-              <a:t>[39]	</a:t>
-            </a:r>
-            <a:r>
-              <a:rPr sz="780" i="0">
-                <a:solidFill>
-                  <a:srgbClr val="1E2430"/>
-                </a:solidFill>
-                <a:latin typeface="Calibri"/>
-              </a:rPr>
-              <a:t>J. Chen et al., “TransUNet: Rethinking the U-Net architecture design for medical image segmentation through the lens of transformers,” </a:t>
-            </a:r>
-            <a:r>
-              <a:rPr sz="780" i="1">
-                <a:solidFill>
-                  <a:srgbClr val="1E2430"/>
-                </a:solidFill>
-                <a:latin typeface="Calibri"/>
-              </a:rPr>
-              <a:t>Medical Image Analysis</a:t>
-            </a:r>
-            <a:r>
-              <a:rPr sz="780" i="0">
-                <a:solidFill>
-                  <a:srgbClr val="1E2430"/>
-                </a:solidFill>
-                <a:latin typeface="Calibri"/>
-              </a:rPr>
-              <a:t>, vol. 97, Art. no. 103280, 2024.</a:t>
+              <a:rPr sz="860" i="0">
+                <a:solidFill>
+                  <a:srgbClr val="1E2430"/>
+                </a:solidFill>
+                <a:latin typeface="Calibri"/>
+              </a:rPr>
+              <a:t>[31]	</a:t>
+            </a:r>
+            <a:r>
+              <a:rPr sz="860" i="0">
+                <a:solidFill>
+                  <a:srgbClr val="1E2430"/>
+                </a:solidFill>
+                <a:latin typeface="Calibri"/>
+              </a:rPr>
+              <a:t>A. A. Asiri et al., “Advancing brain tumor detection: Harnessing the Swin Transformer's power for accurate classification and performance analysis,” </a:t>
+            </a:r>
+            <a:r>
+              <a:rPr sz="860" i="1">
+                <a:solidFill>
+                  <a:srgbClr val="1E2430"/>
+                </a:solidFill>
+                <a:latin typeface="Calibri"/>
+              </a:rPr>
+              <a:t>PeerJ Computer Science</a:t>
+            </a:r>
+            <a:r>
+              <a:rPr sz="860" i="0">
+                <a:solidFill>
+                  <a:srgbClr val="1E2430"/>
+                </a:solidFill>
+                <a:latin typeface="Calibri"/>
+              </a:rPr>
+              <a:t>, vol. 10, Art. no. e1867, 2024.</a:t>
             </a:r>
           </a:p>
           <a:p>
@@ -12595,341 +12252,40 @@
               </a:spcAft>
             </a:pPr>
             <a:r>
-              <a:rPr sz="780" i="0">
-                <a:solidFill>
-                  <a:srgbClr val="1E2430"/>
-                </a:solidFill>
-                <a:latin typeface="Calibri"/>
-              </a:rPr>
-              <a:t>[40]	</a:t>
-            </a:r>
-            <a:r>
-              <a:rPr sz="780" i="0">
-                <a:solidFill>
-                  <a:srgbClr val="1E2430"/>
-                </a:solidFill>
-                <a:latin typeface="Calibri"/>
-              </a:rPr>
-              <a:t>K. Kamnitsas et al., “Ensembles of multiple models and architectures for robust brain tumour segmentation,” in </a:t>
-            </a:r>
-            <a:r>
-              <a:rPr sz="780" i="1">
-                <a:solidFill>
-                  <a:srgbClr val="1E2430"/>
-                </a:solidFill>
-                <a:latin typeface="Calibri"/>
-              </a:rPr>
-              <a:t>Brainlesion: Glioma, Multiple Sclerosis, Stroke and Traumatic Brain Injuries (BrainLes 2017)</a:t>
-            </a:r>
-            <a:r>
-              <a:rPr sz="780" i="0">
-                <a:solidFill>
-                  <a:srgbClr val="1E2430"/>
-                </a:solidFill>
-                <a:latin typeface="Calibri"/>
-              </a:rPr>
-              <a:t>, 2018, pp. 450–462.</a:t>
-            </a:r>
-          </a:p>
-          <a:p>
-            <a:pPr marL="274320" indent="-274320">
-              <a:spcAft>
-                <a:spcPts val="100"/>
-              </a:spcAft>
-            </a:pPr>
-            <a:r>
-              <a:rPr sz="780" i="0">
-                <a:solidFill>
-                  <a:srgbClr val="1E2430"/>
-                </a:solidFill>
-                <a:latin typeface="Calibri"/>
-              </a:rPr>
-              <a:t>[41]	</a:t>
-            </a:r>
-            <a:r>
-              <a:rPr sz="780" i="0">
-                <a:solidFill>
-                  <a:srgbClr val="1E2430"/>
-                </a:solidFill>
-                <a:latin typeface="Calibri"/>
-              </a:rPr>
-              <a:t>A. Fateh et al., “BRISC: Annotated dataset for brain tumor segmentation and classification,” </a:t>
-            </a:r>
-            <a:r>
-              <a:rPr sz="780" i="1">
-                <a:solidFill>
-                  <a:srgbClr val="1E2430"/>
-                </a:solidFill>
-                <a:latin typeface="Calibri"/>
-              </a:rPr>
-              <a:t>Scientific Data</a:t>
-            </a:r>
-            <a:r>
-              <a:rPr sz="780" i="0">
-                <a:solidFill>
-                  <a:srgbClr val="1E2430"/>
-                </a:solidFill>
-                <a:latin typeface="Calibri"/>
-              </a:rPr>
-              <a:t>, vol. 13, Art. no. 361, 2026.</a:t>
-            </a:r>
-          </a:p>
-          <a:p>
-            <a:pPr marL="274320" indent="-274320">
-              <a:spcAft>
-                <a:spcPts val="100"/>
-              </a:spcAft>
-            </a:pPr>
-            <a:r>
-              <a:rPr sz="780" i="0">
-                <a:solidFill>
-                  <a:srgbClr val="1E2430"/>
-                </a:solidFill>
-                <a:latin typeface="Calibri"/>
-              </a:rPr>
-              <a:t>[42]	</a:t>
-            </a:r>
-            <a:r>
-              <a:rPr sz="780" i="0">
-                <a:solidFill>
-                  <a:srgbClr val="1E2430"/>
-                </a:solidFill>
-                <a:latin typeface="Calibri"/>
-              </a:rPr>
-              <a:t>S. Khan, M. Naseer, M. Hayat, S. W. Zamir, F. S. Khan, and M. Shah, “Transformers in vision: A survey,” </a:t>
-            </a:r>
-            <a:r>
-              <a:rPr sz="780" i="1">
-                <a:solidFill>
-                  <a:srgbClr val="1E2430"/>
-                </a:solidFill>
-                <a:latin typeface="Calibri"/>
-              </a:rPr>
-              <a:t>ACM Computing Surveys</a:t>
-            </a:r>
-            <a:r>
-              <a:rPr sz="780" i="0">
-                <a:solidFill>
-                  <a:srgbClr val="1E2430"/>
-                </a:solidFill>
-                <a:latin typeface="Calibri"/>
-              </a:rPr>
-              <a:t>, vol. 54, no. 10s, pp. 1–41, 2022.</a:t>
-            </a:r>
-          </a:p>
-          <a:p>
-            <a:pPr marL="274320" indent="-274320">
-              <a:spcAft>
-                <a:spcPts val="100"/>
-              </a:spcAft>
-            </a:pPr>
-            <a:r>
-              <a:rPr sz="780" i="0">
-                <a:solidFill>
-                  <a:srgbClr val="1E2430"/>
-                </a:solidFill>
-                <a:latin typeface="Calibri"/>
-              </a:rPr>
-              <a:t>[43]	</a:t>
-            </a:r>
-            <a:r>
-              <a:rPr sz="780" i="0">
-                <a:solidFill>
-                  <a:srgbClr val="1E2430"/>
-                </a:solidFill>
-                <a:latin typeface="Calibri"/>
-              </a:rPr>
-              <a:t>F. Shamshad et al., “Transformers in medical imaging: A survey,” </a:t>
-            </a:r>
-            <a:r>
-              <a:rPr sz="780" i="1">
-                <a:solidFill>
-                  <a:srgbClr val="1E2430"/>
-                </a:solidFill>
-                <a:latin typeface="Calibri"/>
-              </a:rPr>
-              <a:t>Medical Image Analysis</a:t>
-            </a:r>
-            <a:r>
-              <a:rPr sz="780" i="0">
-                <a:solidFill>
-                  <a:srgbClr val="1E2430"/>
-                </a:solidFill>
-                <a:latin typeface="Calibri"/>
-              </a:rPr>
-              <a:t>, vol. 88, Art. no. 102802, 2023.</a:t>
-            </a:r>
-          </a:p>
-          <a:p>
-            <a:pPr marL="274320" indent="-274320">
-              <a:spcAft>
-                <a:spcPts val="100"/>
-              </a:spcAft>
-            </a:pPr>
-            <a:r>
-              <a:rPr sz="780" i="0">
-                <a:solidFill>
-                  <a:srgbClr val="1E2430"/>
-                </a:solidFill>
-                <a:latin typeface="Calibri"/>
-              </a:rPr>
-              <a:t>[44]	</a:t>
-            </a:r>
-            <a:r>
-              <a:rPr sz="780" i="0">
-                <a:solidFill>
-                  <a:srgbClr val="1E2430"/>
-                </a:solidFill>
-                <a:latin typeface="Calibri"/>
-              </a:rPr>
-              <a:t>R. Geirhos et al., “Shortcut learning in deep neural networks,” </a:t>
-            </a:r>
-            <a:r>
-              <a:rPr sz="780" i="1">
-                <a:solidFill>
-                  <a:srgbClr val="1E2430"/>
-                </a:solidFill>
-                <a:latin typeface="Calibri"/>
-              </a:rPr>
-              <a:t>Nature Machine Intelligence</a:t>
-            </a:r>
-            <a:r>
-              <a:rPr sz="780" i="0">
-                <a:solidFill>
-                  <a:srgbClr val="1E2430"/>
-                </a:solidFill>
-                <a:latin typeface="Calibri"/>
-              </a:rPr>
-              <a:t>, vol. 2, no. 11, pp. 665–673, 2020.</a:t>
-            </a:r>
-          </a:p>
-          <a:p>
-            <a:pPr marL="274320" indent="-274320">
-              <a:spcAft>
-                <a:spcPts val="100"/>
-              </a:spcAft>
-            </a:pPr>
-            <a:r>
-              <a:rPr sz="780" i="0">
-                <a:solidFill>
-                  <a:srgbClr val="1E2430"/>
-                </a:solidFill>
-                <a:latin typeface="Calibri"/>
-              </a:rPr>
-              <a:t>[45]	</a:t>
-            </a:r>
-            <a:r>
-              <a:rPr sz="780" i="0">
-                <a:solidFill>
-                  <a:srgbClr val="1E2430"/>
-                </a:solidFill>
-                <a:latin typeface="Calibri"/>
-              </a:rPr>
-              <a:t>J. R. Zech, M. A. Badgeley, M. Liu, A. B. Costa, J. J. Titano, and E. K. Oermann, “Variable generalization performance of a deep learning model to detect pneumonia in chest radiographs: A cross-sectional study,” </a:t>
-            </a:r>
-            <a:r>
-              <a:rPr sz="780" i="1">
-                <a:solidFill>
-                  <a:srgbClr val="1E2430"/>
-                </a:solidFill>
-                <a:latin typeface="Calibri"/>
-              </a:rPr>
-              <a:t>PLOS Medicine</a:t>
-            </a:r>
-            <a:r>
-              <a:rPr sz="780" i="0">
-                <a:solidFill>
-                  <a:srgbClr val="1E2430"/>
-                </a:solidFill>
-                <a:latin typeface="Calibri"/>
-              </a:rPr>
-              <a:t>, vol. 15, no. 11, Art. no. e1002683, 2018.</a:t>
-            </a:r>
-          </a:p>
-          <a:p>
-            <a:pPr marL="274320" indent="-274320">
-              <a:spcAft>
-                <a:spcPts val="100"/>
-              </a:spcAft>
-            </a:pPr>
-            <a:r>
-              <a:rPr sz="780" i="0">
-                <a:solidFill>
-                  <a:srgbClr val="1E2430"/>
-                </a:solidFill>
-                <a:latin typeface="Calibri"/>
-              </a:rPr>
-              <a:t>[46]	</a:t>
-            </a:r>
-            <a:r>
-              <a:rPr sz="780" i="0">
-                <a:solidFill>
-                  <a:srgbClr val="1E2430"/>
-                </a:solidFill>
-                <a:latin typeface="Calibri"/>
-              </a:rPr>
-              <a:t>A. J. DeGrave, J. D. Janizek, and S.-I. Lee, “AI for radiographic COVID-19 detection selects shortcuts over signal,” </a:t>
-            </a:r>
-            <a:r>
-              <a:rPr sz="780" i="1">
-                <a:solidFill>
-                  <a:srgbClr val="1E2430"/>
-                </a:solidFill>
-                <a:latin typeface="Calibri"/>
-              </a:rPr>
-              <a:t>Nature Machine Intelligence</a:t>
-            </a:r>
-            <a:r>
-              <a:rPr sz="780" i="0">
-                <a:solidFill>
-                  <a:srgbClr val="1E2430"/>
-                </a:solidFill>
-                <a:latin typeface="Calibri"/>
-              </a:rPr>
-              <a:t>, vol. 3, no. 7, pp. 610–619, 2021.</a:t>
-            </a:r>
-          </a:p>
-          <a:p>
-            <a:pPr marL="274320" indent="-274320">
-              <a:spcAft>
-                <a:spcPts val="100"/>
-              </a:spcAft>
-            </a:pPr>
-            <a:r>
-              <a:rPr sz="780" i="0">
-                <a:solidFill>
-                  <a:srgbClr val="1E2430"/>
-                </a:solidFill>
-                <a:latin typeface="Calibri"/>
-              </a:rPr>
-              <a:t>[47]	</a:t>
-            </a:r>
-            <a:r>
-              <a:rPr sz="780" i="0">
-                <a:solidFill>
-                  <a:srgbClr val="1E2430"/>
-                </a:solidFill>
-                <a:latin typeface="Calibri"/>
-              </a:rPr>
-              <a:t>A. Jungo and M. Reyes, “Assessing reliability and challenges of uncertainty estimations for medical image segmentation,” in </a:t>
-            </a:r>
-            <a:r>
-              <a:rPr sz="780" i="1">
-                <a:solidFill>
-                  <a:srgbClr val="1E2430"/>
-                </a:solidFill>
-                <a:latin typeface="Calibri"/>
-              </a:rPr>
-              <a:t>Medical Image Computing and Computer Assisted Intervention (MICCAI 2019)</a:t>
-            </a:r>
-            <a:r>
-              <a:rPr sz="780" i="0">
-                <a:solidFill>
-                  <a:srgbClr val="1E2430"/>
-                </a:solidFill>
-                <a:latin typeface="Calibri"/>
-              </a:rPr>
-              <a:t>, 2019, pp. 48–56.</a:t>
+              <a:rPr sz="860" i="0">
+                <a:solidFill>
+                  <a:srgbClr val="1E2430"/>
+                </a:solidFill>
+                <a:latin typeface="Calibri"/>
+              </a:rPr>
+              <a:t>[32]	</a:t>
+            </a:r>
+            <a:r>
+              <a:rPr sz="860" i="0">
+                <a:solidFill>
+                  <a:srgbClr val="1E2430"/>
+                </a:solidFill>
+                <a:latin typeface="Calibri"/>
+              </a:rPr>
+              <a:t>A. Dosovitskiy et al., “An image is worth 16x16 words: Transformers for image recognition at scale,” in </a:t>
+            </a:r>
+            <a:r>
+              <a:rPr sz="860" i="1">
+                <a:solidFill>
+                  <a:srgbClr val="1E2430"/>
+                </a:solidFill>
+                <a:latin typeface="Calibri"/>
+              </a:rPr>
+              <a:t>Proc. International Conference on Learning Representations (ICLR)</a:t>
+            </a:r>
+            <a:r>
+              <a:rPr sz="860" i="0">
+                <a:solidFill>
+                  <a:srgbClr val="1E2430"/>
+                </a:solidFill>
+                <a:latin typeface="Calibri"/>
+              </a:rPr>
+              <a:t>, 2021.</a:t>
             </a:r>
           </a:p>
         </p:txBody>
@@ -20802,7 +20158,7 @@
                 </a:solidFill>
                 <a:latin typeface="Times New Roman"/>
               </a:rPr>
-              <a:t>References (2/2)</a:t>
+              <a:t>References (2/3)</a:t>
             </a:r>
           </a:p>
         </p:txBody>
@@ -20939,40 +20295,40 @@
               </a:spcAft>
             </a:pPr>
             <a:r>
-              <a:rPr sz="780" i="0">
-                <a:solidFill>
-                  <a:srgbClr val="1E2430"/>
-                </a:solidFill>
-                <a:latin typeface="Calibri"/>
-              </a:rPr>
-              <a:t>[48]	</a:t>
-            </a:r>
-            <a:r>
-              <a:rPr sz="780" i="0">
-                <a:solidFill>
-                  <a:srgbClr val="1E2430"/>
-                </a:solidFill>
-                <a:latin typeface="Calibri"/>
-              </a:rPr>
-              <a:t>S. Suzuki and K. Abe, “Topological structural analysis of digitized binary images by border following,” </a:t>
-            </a:r>
-            <a:r>
-              <a:rPr sz="780" i="1">
-                <a:solidFill>
-                  <a:srgbClr val="1E2430"/>
-                </a:solidFill>
-                <a:latin typeface="Calibri"/>
-              </a:rPr>
-              <a:t>Computer Vision, Graphics, and Image Processing</a:t>
-            </a:r>
-            <a:r>
-              <a:rPr sz="780" i="0">
-                <a:solidFill>
-                  <a:srgbClr val="1E2430"/>
-                </a:solidFill>
-                <a:latin typeface="Calibri"/>
-              </a:rPr>
-              <a:t>, vol. 30, no. 1, pp. 32–46, 1985.</a:t>
+              <a:rPr sz="860" i="0">
+                <a:solidFill>
+                  <a:srgbClr val="1E2430"/>
+                </a:solidFill>
+                <a:latin typeface="Calibri"/>
+              </a:rPr>
+              <a:t>[33]	</a:t>
+            </a:r>
+            <a:r>
+              <a:rPr sz="860" i="0">
+                <a:solidFill>
+                  <a:srgbClr val="1E2430"/>
+                </a:solidFill>
+                <a:latin typeface="Calibri"/>
+              </a:rPr>
+              <a:t>Z. Liu et al., “Swin transformer: Hierarchical vision transformer using shifted windows,” in </a:t>
+            </a:r>
+            <a:r>
+              <a:rPr sz="860" i="1">
+                <a:solidFill>
+                  <a:srgbClr val="1E2430"/>
+                </a:solidFill>
+                <a:latin typeface="Calibri"/>
+              </a:rPr>
+              <a:t>Proc. IEEE/CVF International Conference on Computer Vision (ICCV)</a:t>
+            </a:r>
+            <a:r>
+              <a:rPr sz="860" i="0">
+                <a:solidFill>
+                  <a:srgbClr val="1E2430"/>
+                </a:solidFill>
+                <a:latin typeface="Calibri"/>
+              </a:rPr>
+              <a:t>, 2021, pp. 9992–10002.</a:t>
             </a:r>
           </a:p>
           <a:p>
@@ -20982,40 +20338,40 @@
               </a:spcAft>
             </a:pPr>
             <a:r>
-              <a:rPr sz="780" i="0">
-                <a:solidFill>
-                  <a:srgbClr val="1E2430"/>
-                </a:solidFill>
-                <a:latin typeface="Calibri"/>
-              </a:rPr>
-              <a:t>[49]	</a:t>
-            </a:r>
-            <a:r>
-              <a:rPr sz="780" i="0">
-                <a:solidFill>
-                  <a:srgbClr val="1E2430"/>
-                </a:solidFill>
-                <a:latin typeface="Calibri"/>
-              </a:rPr>
-              <a:t>V. Monga and B. L. Evans, “Perceptual image hashing via feature points: Performance evaluation and tradeoffs,” </a:t>
-            </a:r>
-            <a:r>
-              <a:rPr sz="780" i="1">
-                <a:solidFill>
-                  <a:srgbClr val="1E2430"/>
-                </a:solidFill>
-                <a:latin typeface="Calibri"/>
-              </a:rPr>
-              <a:t>IEEE Transactions on Image Processing</a:t>
-            </a:r>
-            <a:r>
-              <a:rPr sz="780" i="0">
-                <a:solidFill>
-                  <a:srgbClr val="1E2430"/>
-                </a:solidFill>
-                <a:latin typeface="Calibri"/>
-              </a:rPr>
-              <a:t>, vol. 15, no. 11, pp. 3452–3465, 2006.</a:t>
+              <a:rPr sz="860" i="0">
+                <a:solidFill>
+                  <a:srgbClr val="1E2430"/>
+                </a:solidFill>
+                <a:latin typeface="Calibri"/>
+              </a:rPr>
+              <a:t>[34]	</a:t>
+            </a:r>
+            <a:r>
+              <a:rPr sz="860" i="0">
+                <a:solidFill>
+                  <a:srgbClr val="1E2430"/>
+                </a:solidFill>
+                <a:latin typeface="Calibri"/>
+              </a:rPr>
+              <a:t>O. Ronneberger, P. Fischer, and T. Brox, “U-Net: Convolutional networks for biomedical image segmentation,” in </a:t>
+            </a:r>
+            <a:r>
+              <a:rPr sz="860" i="1">
+                <a:solidFill>
+                  <a:srgbClr val="1E2430"/>
+                </a:solidFill>
+                <a:latin typeface="Calibri"/>
+              </a:rPr>
+              <a:t>Medical Image Computing and Computer-Assisted Intervention (MICCAI 2015)</a:t>
+            </a:r>
+            <a:r>
+              <a:rPr sz="860" i="0">
+                <a:solidFill>
+                  <a:srgbClr val="1E2430"/>
+                </a:solidFill>
+                <a:latin typeface="Calibri"/>
+              </a:rPr>
+              <a:t>, 2015, pp. 234–241.</a:t>
             </a:r>
           </a:p>
           <a:p>
@@ -21025,40 +20381,40 @@
               </a:spcAft>
             </a:pPr>
             <a:r>
-              <a:rPr sz="780" i="0">
-                <a:solidFill>
-                  <a:srgbClr val="1E2430"/>
-                </a:solidFill>
-                <a:latin typeface="Calibri"/>
-              </a:rPr>
-              <a:t>[50]	</a:t>
-            </a:r>
-            <a:r>
-              <a:rPr sz="780" i="0">
-                <a:solidFill>
-                  <a:srgbClr val="1E2430"/>
-                </a:solidFill>
-                <a:latin typeface="Calibri"/>
-              </a:rPr>
-              <a:t>R. W. Hamming, “Error detecting and error correcting codes,” </a:t>
-            </a:r>
-            <a:r>
-              <a:rPr sz="780" i="1">
-                <a:solidFill>
-                  <a:srgbClr val="1E2430"/>
-                </a:solidFill>
-                <a:latin typeface="Calibri"/>
-              </a:rPr>
-              <a:t>Bell System Technical Journal</a:t>
-            </a:r>
-            <a:r>
-              <a:rPr sz="780" i="0">
-                <a:solidFill>
-                  <a:srgbClr val="1E2430"/>
-                </a:solidFill>
-                <a:latin typeface="Calibri"/>
-              </a:rPr>
-              <a:t>, vol. 29, no. 2, pp. 147–160, 1950.</a:t>
+              <a:rPr sz="860" i="0">
+                <a:solidFill>
+                  <a:srgbClr val="1E2430"/>
+                </a:solidFill>
+                <a:latin typeface="Calibri"/>
+              </a:rPr>
+              <a:t>[35]	</a:t>
+            </a:r>
+            <a:r>
+              <a:rPr sz="860" i="0">
+                <a:solidFill>
+                  <a:srgbClr val="1E2430"/>
+                </a:solidFill>
+                <a:latin typeface="Calibri"/>
+              </a:rPr>
+              <a:t>Ö. Çiçek, A. Abdulkadir, S. S. Lienkamp, T. Brox, and O. Ronneberger, “3D U-Net: Learning dense volumetric segmentation from sparse annotation,” in </a:t>
+            </a:r>
+            <a:r>
+              <a:rPr sz="860" i="1">
+                <a:solidFill>
+                  <a:srgbClr val="1E2430"/>
+                </a:solidFill>
+                <a:latin typeface="Calibri"/>
+              </a:rPr>
+              <a:t>Medical Image Computing and Computer-Assisted Intervention (MICCAI 2016)</a:t>
+            </a:r>
+            <a:r>
+              <a:rPr sz="860" i="0">
+                <a:solidFill>
+                  <a:srgbClr val="1E2430"/>
+                </a:solidFill>
+                <a:latin typeface="Calibri"/>
+              </a:rPr>
+              <a:t>, 2016, pp. 424–432.</a:t>
             </a:r>
           </a:p>
           <a:p>
@@ -21068,40 +20424,40 @@
               </a:spcAft>
             </a:pPr>
             <a:r>
-              <a:rPr sz="780" i="0">
-                <a:solidFill>
-                  <a:srgbClr val="1E2430"/>
-                </a:solidFill>
-                <a:latin typeface="Calibri"/>
-              </a:rPr>
-              <a:t>[51]	</a:t>
-            </a:r>
-            <a:r>
-              <a:rPr sz="780" i="0">
-                <a:solidFill>
-                  <a:srgbClr val="1E2430"/>
-                </a:solidFill>
-                <a:latin typeface="Calibri"/>
-              </a:rPr>
-              <a:t>B. Zitová and J. Flusser, “Image registration methods: A survey,” </a:t>
-            </a:r>
-            <a:r>
-              <a:rPr sz="780" i="1">
-                <a:solidFill>
-                  <a:srgbClr val="1E2430"/>
-                </a:solidFill>
-                <a:latin typeface="Calibri"/>
-              </a:rPr>
-              <a:t>Image and Vision Computing</a:t>
-            </a:r>
-            <a:r>
-              <a:rPr sz="780" i="0">
-                <a:solidFill>
-                  <a:srgbClr val="1E2430"/>
-                </a:solidFill>
-                <a:latin typeface="Calibri"/>
-              </a:rPr>
-              <a:t>, vol. 21, no. 11, pp. 977–1000, 2003.</a:t>
+              <a:rPr sz="860" i="0">
+                <a:solidFill>
+                  <a:srgbClr val="1E2430"/>
+                </a:solidFill>
+                <a:latin typeface="Calibri"/>
+              </a:rPr>
+              <a:t>[36]	</a:t>
+            </a:r>
+            <a:r>
+              <a:rPr sz="860" i="0">
+                <a:solidFill>
+                  <a:srgbClr val="1E2430"/>
+                </a:solidFill>
+                <a:latin typeface="Calibri"/>
+              </a:rPr>
+              <a:t>A. Hatamizadeh et al., “UNETR: Transformers for 3D medical image segmentation,” in </a:t>
+            </a:r>
+            <a:r>
+              <a:rPr sz="860" i="1">
+                <a:solidFill>
+                  <a:srgbClr val="1E2430"/>
+                </a:solidFill>
+                <a:latin typeface="Calibri"/>
+              </a:rPr>
+              <a:t>Proc. IEEE/CVF Winter Conference on Applications of Computer Vision (WACV)</a:t>
+            </a:r>
+            <a:r>
+              <a:rPr sz="860" i="0">
+                <a:solidFill>
+                  <a:srgbClr val="1E2430"/>
+                </a:solidFill>
+                <a:latin typeface="Calibri"/>
+              </a:rPr>
+              <a:t>, 2022, pp. 1748–1758.</a:t>
             </a:r>
           </a:p>
           <a:p>
@@ -21111,40 +20467,40 @@
               </a:spcAft>
             </a:pPr>
             <a:r>
-              <a:rPr sz="780" i="0">
-                <a:solidFill>
-                  <a:srgbClr val="1E2430"/>
-                </a:solidFill>
-                <a:latin typeface="Calibri"/>
-              </a:rPr>
-              <a:t>[52]	</a:t>
-            </a:r>
-            <a:r>
-              <a:rPr sz="780" i="0">
-                <a:solidFill>
-                  <a:srgbClr val="1E2430"/>
-                </a:solidFill>
-                <a:latin typeface="Calibri"/>
-              </a:rPr>
-              <a:t>F. Pedregosa et al., “Scikit-learn: Machine learning in Python,” </a:t>
-            </a:r>
-            <a:r>
-              <a:rPr sz="780" i="1">
-                <a:solidFill>
-                  <a:srgbClr val="1E2430"/>
-                </a:solidFill>
-                <a:latin typeface="Calibri"/>
-              </a:rPr>
-              <a:t>Journal of Machine Learning Research</a:t>
-            </a:r>
-            <a:r>
-              <a:rPr sz="780" i="0">
-                <a:solidFill>
-                  <a:srgbClr val="1E2430"/>
-                </a:solidFill>
-                <a:latin typeface="Calibri"/>
-              </a:rPr>
-              <a:t>, vol. 12, no. 85, pp. 2825–2830, 2011.</a:t>
+              <a:rPr sz="860" i="0">
+                <a:solidFill>
+                  <a:srgbClr val="1E2430"/>
+                </a:solidFill>
+                <a:latin typeface="Calibri"/>
+              </a:rPr>
+              <a:t>[37]	</a:t>
+            </a:r>
+            <a:r>
+              <a:rPr sz="860" i="0">
+                <a:solidFill>
+                  <a:srgbClr val="1E2430"/>
+                </a:solidFill>
+                <a:latin typeface="Calibri"/>
+              </a:rPr>
+              <a:t>A. Hatamizadeh, V. Nath, Y. Tang, D. Yang, H. R. Roth, and D. Xu, “Swin UNETR: Swin transformers for semantic segmentation of brain tumors in MRI images,” in </a:t>
+            </a:r>
+            <a:r>
+              <a:rPr sz="860" i="1">
+                <a:solidFill>
+                  <a:srgbClr val="1E2430"/>
+                </a:solidFill>
+                <a:latin typeface="Calibri"/>
+              </a:rPr>
+              <a:t>Brainlesion: Glioma, Multiple Sclerosis, Stroke and Traumatic Brain Injuries (BrainLes 2021)</a:t>
+            </a:r>
+            <a:r>
+              <a:rPr sz="860" i="0">
+                <a:solidFill>
+                  <a:srgbClr val="1E2430"/>
+                </a:solidFill>
+                <a:latin typeface="Calibri"/>
+              </a:rPr>
+              <a:t>, 2022, pp. 272–284.</a:t>
             </a:r>
           </a:p>
           <a:p>
@@ -21154,40 +20510,40 @@
               </a:spcAft>
             </a:pPr>
             <a:r>
-              <a:rPr sz="780" i="0">
-                <a:solidFill>
-                  <a:srgbClr val="1E2430"/>
-                </a:solidFill>
-                <a:latin typeface="Calibri"/>
-              </a:rPr>
-              <a:t>[53]	</a:t>
-            </a:r>
-            <a:r>
-              <a:rPr sz="780" i="0">
-                <a:solidFill>
-                  <a:srgbClr val="1E2430"/>
-                </a:solidFill>
-                <a:latin typeface="Calibri"/>
-              </a:rPr>
-              <a:t>M. Stone, “Cross-validatory choice and assessment of statistical predictions,” </a:t>
-            </a:r>
-            <a:r>
-              <a:rPr sz="780" i="1">
-                <a:solidFill>
-                  <a:srgbClr val="1E2430"/>
-                </a:solidFill>
-                <a:latin typeface="Calibri"/>
-              </a:rPr>
-              <a:t>Journal of the Royal Statistical Society: Series B (Methodological)</a:t>
-            </a:r>
-            <a:r>
-              <a:rPr sz="780" i="0">
-                <a:solidFill>
-                  <a:srgbClr val="1E2430"/>
-                </a:solidFill>
-                <a:latin typeface="Calibri"/>
-              </a:rPr>
-              <a:t>, vol. 36, no. 2, pp. 111–133, 1974.</a:t>
+              <a:rPr sz="860" i="0">
+                <a:solidFill>
+                  <a:srgbClr val="1E2430"/>
+                </a:solidFill>
+                <a:latin typeface="Calibri"/>
+              </a:rPr>
+              <a:t>[38]	</a:t>
+            </a:r>
+            <a:r>
+              <a:rPr sz="860" i="0">
+                <a:solidFill>
+                  <a:srgbClr val="1E2430"/>
+                </a:solidFill>
+                <a:latin typeface="Calibri"/>
+              </a:rPr>
+              <a:t>W. Wang, C. Chen, M. Ding, H. Yu, S. Zha, and J. Li, “TransBTS: Multimodal brain tumor segmentation using transformer,” in </a:t>
+            </a:r>
+            <a:r>
+              <a:rPr sz="860" i="1">
+                <a:solidFill>
+                  <a:srgbClr val="1E2430"/>
+                </a:solidFill>
+                <a:latin typeface="Calibri"/>
+              </a:rPr>
+              <a:t>Medical Image Computing and Computer Assisted Intervention (MICCAI 2021)</a:t>
+            </a:r>
+            <a:r>
+              <a:rPr sz="860" i="0">
+                <a:solidFill>
+                  <a:srgbClr val="1E2430"/>
+                </a:solidFill>
+                <a:latin typeface="Calibri"/>
+              </a:rPr>
+              <a:t>, 2021, pp. 109–119.</a:t>
             </a:r>
           </a:p>
           <a:p>
@@ -21197,22 +20553,40 @@
               </a:spcAft>
             </a:pPr>
             <a:r>
-              <a:rPr sz="780" i="0">
-                <a:solidFill>
-                  <a:srgbClr val="1E2430"/>
-                </a:solidFill>
-                <a:latin typeface="Calibri"/>
-              </a:rPr>
-              <a:t>[54]	</a:t>
-            </a:r>
-            <a:r>
-              <a:rPr sz="780" i="0">
-                <a:solidFill>
-                  <a:srgbClr val="1E2430"/>
-                </a:solidFill>
-                <a:latin typeface="Calibri"/>
-              </a:rPr>
-              <a:t>A. Hamada, “Br35H :: Brain tumor detection 2020,” IEEE DataPort, also available at https://www.kaggle.com/datasets/ahmedhamada0/brain-tumor-detection, 2025.</a:t>
+              <a:rPr sz="860" i="0">
+                <a:solidFill>
+                  <a:srgbClr val="1E2430"/>
+                </a:solidFill>
+                <a:latin typeface="Calibri"/>
+              </a:rPr>
+              <a:t>[39]	</a:t>
+            </a:r>
+            <a:r>
+              <a:rPr sz="860" i="0">
+                <a:solidFill>
+                  <a:srgbClr val="1E2430"/>
+                </a:solidFill>
+                <a:latin typeface="Calibri"/>
+              </a:rPr>
+              <a:t>J. Chen et al., “TransUNet: Rethinking the U-Net architecture design for medical image segmentation through the lens of transformers,” </a:t>
+            </a:r>
+            <a:r>
+              <a:rPr sz="860" i="1">
+                <a:solidFill>
+                  <a:srgbClr val="1E2430"/>
+                </a:solidFill>
+                <a:latin typeface="Calibri"/>
+              </a:rPr>
+              <a:t>Medical Image Analysis</a:t>
+            </a:r>
+            <a:r>
+              <a:rPr sz="860" i="0">
+                <a:solidFill>
+                  <a:srgbClr val="1E2430"/>
+                </a:solidFill>
+                <a:latin typeface="Calibri"/>
+              </a:rPr>
+              <a:t>, vol. 97, Art. no. 103280, 2024.</a:t>
             </a:r>
           </a:p>
           <a:p>
@@ -21222,22 +20596,40 @@
               </a:spcAft>
             </a:pPr>
             <a:r>
-              <a:rPr sz="780" i="0">
-                <a:solidFill>
-                  <a:srgbClr val="1E2430"/>
-                </a:solidFill>
-                <a:latin typeface="Calibri"/>
-              </a:rPr>
-              <a:t>[55]	</a:t>
-            </a:r>
-            <a:r>
-              <a:rPr sz="780" i="0">
-                <a:solidFill>
-                  <a:srgbClr val="1E2430"/>
-                </a:solidFill>
-                <a:latin typeface="Calibri"/>
-              </a:rPr>
-              <a:t>N. Chakrabarty, “Brain MRI images for brain tumor detection,” Kaggle dataset, version 1, 2019.</a:t>
+              <a:rPr sz="860" i="0">
+                <a:solidFill>
+                  <a:srgbClr val="1E2430"/>
+                </a:solidFill>
+                <a:latin typeface="Calibri"/>
+              </a:rPr>
+              <a:t>[40]	</a:t>
+            </a:r>
+            <a:r>
+              <a:rPr sz="860" i="0">
+                <a:solidFill>
+                  <a:srgbClr val="1E2430"/>
+                </a:solidFill>
+                <a:latin typeface="Calibri"/>
+              </a:rPr>
+              <a:t>K. Kamnitsas et al., “Ensembles of multiple models and architectures for robust brain tumour segmentation,” in </a:t>
+            </a:r>
+            <a:r>
+              <a:rPr sz="860" i="1">
+                <a:solidFill>
+                  <a:srgbClr val="1E2430"/>
+                </a:solidFill>
+                <a:latin typeface="Calibri"/>
+              </a:rPr>
+              <a:t>Brainlesion: Glioma, Multiple Sclerosis, Stroke and Traumatic Brain Injuries (BrainLes 2017)</a:t>
+            </a:r>
+            <a:r>
+              <a:rPr sz="860" i="0">
+                <a:solidFill>
+                  <a:srgbClr val="1E2430"/>
+                </a:solidFill>
+                <a:latin typeface="Calibri"/>
+              </a:rPr>
+              <a:t>, 2018, pp. 450–462.</a:t>
             </a:r>
           </a:p>
           <a:p>
@@ -21247,22 +20639,40 @@
               </a:spcAft>
             </a:pPr>
             <a:r>
-              <a:rPr sz="780" i="0">
-                <a:solidFill>
-                  <a:srgbClr val="1E2430"/>
-                </a:solidFill>
-                <a:latin typeface="Calibri"/>
-              </a:rPr>
-              <a:t>[56]	</a:t>
-            </a:r>
-            <a:r>
-              <a:rPr sz="780" i="0">
-                <a:solidFill>
-                  <a:srgbClr val="1E2430"/>
-                </a:solidFill>
-                <a:latin typeface="Calibri"/>
-              </a:rPr>
-              <a:t>S. Bhuvaji, A. Kadam, P. Bhumkar, S. Dedge, and S. Kanchan, “Brain tumor classification (MRI),” Kaggle dataset, 2020.</a:t>
+              <a:rPr sz="860" i="0">
+                <a:solidFill>
+                  <a:srgbClr val="1E2430"/>
+                </a:solidFill>
+                <a:latin typeface="Calibri"/>
+              </a:rPr>
+              <a:t>[41]	</a:t>
+            </a:r>
+            <a:r>
+              <a:rPr sz="860" i="0">
+                <a:solidFill>
+                  <a:srgbClr val="1E2430"/>
+                </a:solidFill>
+                <a:latin typeface="Calibri"/>
+              </a:rPr>
+              <a:t>A. Fateh et al., “BRISC: Annotated dataset for brain tumor segmentation and classification,” </a:t>
+            </a:r>
+            <a:r>
+              <a:rPr sz="860" i="1">
+                <a:solidFill>
+                  <a:srgbClr val="1E2430"/>
+                </a:solidFill>
+                <a:latin typeface="Calibri"/>
+              </a:rPr>
+              <a:t>Scientific Data</a:t>
+            </a:r>
+            <a:r>
+              <a:rPr sz="860" i="0">
+                <a:solidFill>
+                  <a:srgbClr val="1E2430"/>
+                </a:solidFill>
+                <a:latin typeface="Calibri"/>
+              </a:rPr>
+              <a:t>, vol. 13, Art. no. 361, 2026.</a:t>
             </a:r>
           </a:p>
           <a:p>
@@ -21272,22 +20682,40 @@
               </a:spcAft>
             </a:pPr>
             <a:r>
-              <a:rPr sz="780" i="0">
-                <a:solidFill>
-                  <a:srgbClr val="1E2430"/>
-                </a:solidFill>
-                <a:latin typeface="Calibri"/>
-              </a:rPr>
-              <a:t>[57]	</a:t>
-            </a:r>
-            <a:r>
-              <a:rPr sz="780" i="0">
-                <a:solidFill>
-                  <a:srgbClr val="1E2430"/>
-                </a:solidFill>
-                <a:latin typeface="Calibri"/>
-              </a:rPr>
-              <a:t>J. Cheng, “Brain tumor dataset,” figshare, version 5, 2017.</a:t>
+              <a:rPr sz="860" i="0">
+                <a:solidFill>
+                  <a:srgbClr val="1E2430"/>
+                </a:solidFill>
+                <a:latin typeface="Calibri"/>
+              </a:rPr>
+              <a:t>[42]	</a:t>
+            </a:r>
+            <a:r>
+              <a:rPr sz="860" i="0">
+                <a:solidFill>
+                  <a:srgbClr val="1E2430"/>
+                </a:solidFill>
+                <a:latin typeface="Calibri"/>
+              </a:rPr>
+              <a:t>S. Khan, M. Naseer, M. Hayat, S. W. Zamir, F. S. Khan, and M. Shah, “Transformers in vision: A survey,” </a:t>
+            </a:r>
+            <a:r>
+              <a:rPr sz="860" i="1">
+                <a:solidFill>
+                  <a:srgbClr val="1E2430"/>
+                </a:solidFill>
+                <a:latin typeface="Calibri"/>
+              </a:rPr>
+              <a:t>ACM Computing Surveys</a:t>
+            </a:r>
+            <a:r>
+              <a:rPr sz="860" i="0">
+                <a:solidFill>
+                  <a:srgbClr val="1E2430"/>
+                </a:solidFill>
+                <a:latin typeface="Calibri"/>
+              </a:rPr>
+              <a:t>, vol. 54, no. 10s, pp. 1–41, 2022.</a:t>
             </a:r>
           </a:p>
           <a:p>
@@ -21297,22 +20725,40 @@
               </a:spcAft>
             </a:pPr>
             <a:r>
-              <a:rPr sz="780" i="0">
-                <a:solidFill>
-                  <a:srgbClr val="1E2430"/>
-                </a:solidFill>
-                <a:latin typeface="Calibri"/>
-              </a:rPr>
-              <a:t>[58]	</a:t>
-            </a:r>
-            <a:r>
-              <a:rPr sz="780" i="0">
-                <a:solidFill>
-                  <a:srgbClr val="1E2430"/>
-                </a:solidFill>
-                <a:latin typeface="Calibri"/>
-              </a:rPr>
-              <a:t>MoundirB, “Jun Cheng brain tumor MRI dataset JPG,” Kaggle dataset, version 1, 2025.</a:t>
+              <a:rPr sz="860" i="0">
+                <a:solidFill>
+                  <a:srgbClr val="1E2430"/>
+                </a:solidFill>
+                <a:latin typeface="Calibri"/>
+              </a:rPr>
+              <a:t>[43]	</a:t>
+            </a:r>
+            <a:r>
+              <a:rPr sz="860" i="0">
+                <a:solidFill>
+                  <a:srgbClr val="1E2430"/>
+                </a:solidFill>
+                <a:latin typeface="Calibri"/>
+              </a:rPr>
+              <a:t>F. Shamshad et al., “Transformers in medical imaging: A survey,” </a:t>
+            </a:r>
+            <a:r>
+              <a:rPr sz="860" i="1">
+                <a:solidFill>
+                  <a:srgbClr val="1E2430"/>
+                </a:solidFill>
+                <a:latin typeface="Calibri"/>
+              </a:rPr>
+              <a:t>Medical Image Analysis</a:t>
+            </a:r>
+            <a:r>
+              <a:rPr sz="860" i="0">
+                <a:solidFill>
+                  <a:srgbClr val="1E2430"/>
+                </a:solidFill>
+                <a:latin typeface="Calibri"/>
+              </a:rPr>
+              <a:t>, vol. 88, Art. no. 102802, 2023.</a:t>
             </a:r>
           </a:p>
           <a:p>
@@ -21322,40 +20768,40 @@
               </a:spcAft>
             </a:pPr>
             <a:r>
-              <a:rPr sz="780" i="0">
-                <a:solidFill>
-                  <a:srgbClr val="1E2430"/>
-                </a:solidFill>
-                <a:latin typeface="Calibri"/>
-              </a:rPr>
-              <a:t>[59]	</a:t>
-            </a:r>
-            <a:r>
-              <a:rPr sz="780" i="0">
-                <a:solidFill>
-                  <a:srgbClr val="1E2430"/>
-                </a:solidFill>
-                <a:latin typeface="Calibri"/>
-              </a:rPr>
-              <a:t>M. Norouzi, A. Punjani, and D. J. Fleet, “Fast exact search in Hamming space with multi-index hashing,” </a:t>
-            </a:r>
-            <a:r>
-              <a:rPr sz="780" i="1">
-                <a:solidFill>
-                  <a:srgbClr val="1E2430"/>
-                </a:solidFill>
-                <a:latin typeface="Calibri"/>
-              </a:rPr>
-              <a:t>IEEE Transactions on Pattern Analysis and Machine Intelligence</a:t>
-            </a:r>
-            <a:r>
-              <a:rPr sz="780" i="0">
-                <a:solidFill>
-                  <a:srgbClr val="1E2430"/>
-                </a:solidFill>
-                <a:latin typeface="Calibri"/>
-              </a:rPr>
-              <a:t>, vol. 36, no. 6, pp. 1107–1119, 2014.</a:t>
+              <a:rPr sz="860" i="0">
+                <a:solidFill>
+                  <a:srgbClr val="1E2430"/>
+                </a:solidFill>
+                <a:latin typeface="Calibri"/>
+              </a:rPr>
+              <a:t>[44]	</a:t>
+            </a:r>
+            <a:r>
+              <a:rPr sz="860" i="0">
+                <a:solidFill>
+                  <a:srgbClr val="1E2430"/>
+                </a:solidFill>
+                <a:latin typeface="Calibri"/>
+              </a:rPr>
+              <a:t>R. Geirhos et al., “Shortcut learning in deep neural networks,” </a:t>
+            </a:r>
+            <a:r>
+              <a:rPr sz="860" i="1">
+                <a:solidFill>
+                  <a:srgbClr val="1E2430"/>
+                </a:solidFill>
+                <a:latin typeface="Calibri"/>
+              </a:rPr>
+              <a:t>Nature Machine Intelligence</a:t>
+            </a:r>
+            <a:r>
+              <a:rPr sz="860" i="0">
+                <a:solidFill>
+                  <a:srgbClr val="1E2430"/>
+                </a:solidFill>
+                <a:latin typeface="Calibri"/>
+              </a:rPr>
+              <a:t>, vol. 2, no. 11, pp. 665–673, 2020.</a:t>
             </a:r>
           </a:p>
           <a:p>
@@ -21365,40 +20811,40 @@
               </a:spcAft>
             </a:pPr>
             <a:r>
-              <a:rPr sz="780" i="0">
-                <a:solidFill>
-                  <a:srgbClr val="1E2430"/>
-                </a:solidFill>
-                <a:latin typeface="Calibri"/>
-              </a:rPr>
-              <a:t>[60]	</a:t>
-            </a:r>
-            <a:r>
-              <a:rPr sz="780" i="0">
-                <a:solidFill>
-                  <a:srgbClr val="1E2430"/>
-                </a:solidFill>
-                <a:latin typeface="Calibri"/>
-              </a:rPr>
-              <a:t>M. Tan and Q. Le, “EfficientNet: Rethinking model scaling for convolutional neural networks,” in </a:t>
-            </a:r>
-            <a:r>
-              <a:rPr sz="780" i="1">
-                <a:solidFill>
-                  <a:srgbClr val="1E2430"/>
-                </a:solidFill>
-                <a:latin typeface="Calibri"/>
-              </a:rPr>
-              <a:t>Proc. 36th International Conference on Machine Learning (ICML)</a:t>
-            </a:r>
-            <a:r>
-              <a:rPr sz="780" i="0">
-                <a:solidFill>
-                  <a:srgbClr val="1E2430"/>
-                </a:solidFill>
-                <a:latin typeface="Calibri"/>
-              </a:rPr>
-              <a:t>, 2019, pp. 6105–6114.</a:t>
+              <a:rPr sz="860" i="0">
+                <a:solidFill>
+                  <a:srgbClr val="1E2430"/>
+                </a:solidFill>
+                <a:latin typeface="Calibri"/>
+              </a:rPr>
+              <a:t>[45]	</a:t>
+            </a:r>
+            <a:r>
+              <a:rPr sz="860" i="0">
+                <a:solidFill>
+                  <a:srgbClr val="1E2430"/>
+                </a:solidFill>
+                <a:latin typeface="Calibri"/>
+              </a:rPr>
+              <a:t>J. R. Zech, M. A. Badgeley, M. Liu, A. B. Costa, J. J. Titano, and E. K. Oermann, “Variable generalization performance of a deep learning model to detect pneumonia in chest radiographs: A cross-sectional study,” </a:t>
+            </a:r>
+            <a:r>
+              <a:rPr sz="860" i="1">
+                <a:solidFill>
+                  <a:srgbClr val="1E2430"/>
+                </a:solidFill>
+                <a:latin typeface="Calibri"/>
+              </a:rPr>
+              <a:t>PLOS Medicine</a:t>
+            </a:r>
+            <a:r>
+              <a:rPr sz="860" i="0">
+                <a:solidFill>
+                  <a:srgbClr val="1E2430"/>
+                </a:solidFill>
+                <a:latin typeface="Calibri"/>
+              </a:rPr>
+              <a:t>, vol. 15, no. 11, Art. no. e1002683, 2018.</a:t>
             </a:r>
           </a:p>
           <a:p>
@@ -21408,40 +20854,40 @@
               </a:spcAft>
             </a:pPr>
             <a:r>
-              <a:rPr sz="780" i="0">
-                <a:solidFill>
-                  <a:srgbClr val="1E2430"/>
-                </a:solidFill>
-                <a:latin typeface="Calibri"/>
-              </a:rPr>
-              <a:t>[61]	</a:t>
-            </a:r>
-            <a:r>
-              <a:rPr sz="780" i="0">
-                <a:solidFill>
-                  <a:srgbClr val="1E2430"/>
-                </a:solidFill>
-                <a:latin typeface="Calibri"/>
-              </a:rPr>
-              <a:t>A. Howard et al., “Searching for MobileNetV3,” in </a:t>
-            </a:r>
-            <a:r>
-              <a:rPr sz="780" i="1">
-                <a:solidFill>
-                  <a:srgbClr val="1E2430"/>
-                </a:solidFill>
-                <a:latin typeface="Calibri"/>
-              </a:rPr>
-              <a:t>Proc. IEEE/CVF International Conference on Computer Vision (ICCV)</a:t>
-            </a:r>
-            <a:r>
-              <a:rPr sz="780" i="0">
-                <a:solidFill>
-                  <a:srgbClr val="1E2430"/>
-                </a:solidFill>
-                <a:latin typeface="Calibri"/>
-              </a:rPr>
-              <a:t>, 2019, pp. 1314–1324.</a:t>
+              <a:rPr sz="860" i="0">
+                <a:solidFill>
+                  <a:srgbClr val="1E2430"/>
+                </a:solidFill>
+                <a:latin typeface="Calibri"/>
+              </a:rPr>
+              <a:t>[46]	</a:t>
+            </a:r>
+            <a:r>
+              <a:rPr sz="860" i="0">
+                <a:solidFill>
+                  <a:srgbClr val="1E2430"/>
+                </a:solidFill>
+                <a:latin typeface="Calibri"/>
+              </a:rPr>
+              <a:t>A. J. DeGrave, J. D. Janizek, and S.-I. Lee, “AI for radiographic COVID-19 detection selects shortcuts over signal,” </a:t>
+            </a:r>
+            <a:r>
+              <a:rPr sz="860" i="1">
+                <a:solidFill>
+                  <a:srgbClr val="1E2430"/>
+                </a:solidFill>
+                <a:latin typeface="Calibri"/>
+              </a:rPr>
+              <a:t>Nature Machine Intelligence</a:t>
+            </a:r>
+            <a:r>
+              <a:rPr sz="860" i="0">
+                <a:solidFill>
+                  <a:srgbClr val="1E2430"/>
+                </a:solidFill>
+                <a:latin typeface="Calibri"/>
+              </a:rPr>
+              <a:t>, vol. 3, no. 7, pp. 610–619, 2021.</a:t>
             </a:r>
           </a:p>
           <a:p>
@@ -21451,40 +20897,40 @@
               </a:spcAft>
             </a:pPr>
             <a:r>
-              <a:rPr sz="780" i="0">
-                <a:solidFill>
-                  <a:srgbClr val="1E2430"/>
-                </a:solidFill>
-                <a:latin typeface="Calibri"/>
-              </a:rPr>
-              <a:t>[62]	</a:t>
-            </a:r>
-            <a:r>
-              <a:rPr sz="780" i="0">
-                <a:solidFill>
-                  <a:srgbClr val="1E2430"/>
-                </a:solidFill>
-                <a:latin typeface="Calibri"/>
-              </a:rPr>
-              <a:t>M. Sandler, A. Howard, M. Zhu, A. Zhmoginov, and L.-C. Chen, “MobileNetV2: Inverted residuals and linear bottlenecks,” in </a:t>
-            </a:r>
-            <a:r>
-              <a:rPr sz="780" i="1">
-                <a:solidFill>
-                  <a:srgbClr val="1E2430"/>
-                </a:solidFill>
-                <a:latin typeface="Calibri"/>
-              </a:rPr>
-              <a:t>Proc. IEEE/CVF Conference on Computer Vision and Pattern Recognition (CVPR)</a:t>
-            </a:r>
-            <a:r>
-              <a:rPr sz="780" i="0">
-                <a:solidFill>
-                  <a:srgbClr val="1E2430"/>
-                </a:solidFill>
-                <a:latin typeface="Calibri"/>
-              </a:rPr>
-              <a:t>, 2018, pp. 4510–4520.</a:t>
+              <a:rPr sz="860" i="0">
+                <a:solidFill>
+                  <a:srgbClr val="1E2430"/>
+                </a:solidFill>
+                <a:latin typeface="Calibri"/>
+              </a:rPr>
+              <a:t>[47]	</a:t>
+            </a:r>
+            <a:r>
+              <a:rPr sz="860" i="0">
+                <a:solidFill>
+                  <a:srgbClr val="1E2430"/>
+                </a:solidFill>
+                <a:latin typeface="Calibri"/>
+              </a:rPr>
+              <a:t>A. Jungo and M. Reyes, “Assessing reliability and challenges of uncertainty estimations for medical image segmentation,” in </a:t>
+            </a:r>
+            <a:r>
+              <a:rPr sz="860" i="1">
+                <a:solidFill>
+                  <a:srgbClr val="1E2430"/>
+                </a:solidFill>
+                <a:latin typeface="Calibri"/>
+              </a:rPr>
+              <a:t>Medical Image Computing and Computer Assisted Intervention (MICCAI 2019)</a:t>
+            </a:r>
+            <a:r>
+              <a:rPr sz="860" i="0">
+                <a:solidFill>
+                  <a:srgbClr val="1E2430"/>
+                </a:solidFill>
+                <a:latin typeface="Calibri"/>
+              </a:rPr>
+              <a:t>, 2019, pp. 48–56.</a:t>
             </a:r>
           </a:p>
           <a:p>
@@ -21494,470 +20940,40 @@
               </a:spcAft>
             </a:pPr>
             <a:r>
-              <a:rPr sz="780" i="0">
-                <a:solidFill>
-                  <a:srgbClr val="1E2430"/>
-                </a:solidFill>
-                <a:latin typeface="Calibri"/>
-              </a:rPr>
-              <a:t>[63]	</a:t>
-            </a:r>
-            <a:r>
-              <a:rPr sz="780" i="0">
-                <a:solidFill>
-                  <a:srgbClr val="1E2430"/>
-                </a:solidFill>
-                <a:latin typeface="Calibri"/>
-              </a:rPr>
-              <a:t>A. Vaswani et al., “Attention is all you need,” in </a:t>
-            </a:r>
-            <a:r>
-              <a:rPr sz="780" i="1">
-                <a:solidFill>
-                  <a:srgbClr val="1E2430"/>
-                </a:solidFill>
-                <a:latin typeface="Calibri"/>
-              </a:rPr>
-              <a:t>Advances in Neural Information Processing Systems (NeurIPS) 30</a:t>
-            </a:r>
-            <a:r>
-              <a:rPr sz="780" i="0">
-                <a:solidFill>
-                  <a:srgbClr val="1E2430"/>
-                </a:solidFill>
-                <a:latin typeface="Calibri"/>
-              </a:rPr>
-              <a:t>, 2017.</a:t>
-            </a:r>
-          </a:p>
-          <a:p>
-            <a:pPr marL="274320" indent="-274320">
-              <a:spcAft>
-                <a:spcPts val="100"/>
-              </a:spcAft>
-            </a:pPr>
-            <a:r>
-              <a:rPr sz="780" i="0">
-                <a:solidFill>
-                  <a:srgbClr val="1E2430"/>
-                </a:solidFill>
-                <a:latin typeface="Calibri"/>
-              </a:rPr>
-              <a:t>[64]	</a:t>
-            </a:r>
-            <a:r>
-              <a:rPr sz="780" i="0">
-                <a:solidFill>
-                  <a:srgbClr val="1E2430"/>
-                </a:solidFill>
-                <a:latin typeface="Calibri"/>
-              </a:rPr>
-              <a:t>Z. Dai, H. Liu, Q. V. Le, and M. Tan, “CoAtNet: Marrying convolution and attention for all data sizes,” in </a:t>
-            </a:r>
-            <a:r>
-              <a:rPr sz="780" i="1">
-                <a:solidFill>
-                  <a:srgbClr val="1E2430"/>
-                </a:solidFill>
-                <a:latin typeface="Calibri"/>
-              </a:rPr>
-              <a:t>Advances in Neural Information Processing Systems (NeurIPS)</a:t>
-            </a:r>
-            <a:r>
-              <a:rPr sz="780" i="0">
-                <a:solidFill>
-                  <a:srgbClr val="1E2430"/>
-                </a:solidFill>
-                <a:latin typeface="Calibri"/>
-              </a:rPr>
-              <a:t>, 2021, pp. 3965–3977.</a:t>
-            </a:r>
-          </a:p>
-          <a:p>
-            <a:pPr marL="274320" indent="-274320">
-              <a:spcAft>
-                <a:spcPts val="100"/>
-              </a:spcAft>
-            </a:pPr>
-            <a:r>
-              <a:rPr sz="780" i="0">
-                <a:solidFill>
-                  <a:srgbClr val="1E2430"/>
-                </a:solidFill>
-                <a:latin typeface="Calibri"/>
-              </a:rPr>
-              <a:t>[65]	</a:t>
-            </a:r>
-            <a:r>
-              <a:rPr sz="780" i="0">
-                <a:solidFill>
-                  <a:srgbClr val="1E2430"/>
-                </a:solidFill>
-                <a:latin typeface="Calibri"/>
-              </a:rPr>
-              <a:t>Y. LeCun, L. Bottou, Y. Bengio, and P. Haffner, “Gradient-based learning applied to document recognition,” </a:t>
-            </a:r>
-            <a:r>
-              <a:rPr sz="780" i="1">
-                <a:solidFill>
-                  <a:srgbClr val="1E2430"/>
-                </a:solidFill>
-                <a:latin typeface="Calibri"/>
-              </a:rPr>
-              <a:t>Proceedings of the IEEE</a:t>
-            </a:r>
-            <a:r>
-              <a:rPr sz="780" i="0">
-                <a:solidFill>
-                  <a:srgbClr val="1E2430"/>
-                </a:solidFill>
-                <a:latin typeface="Calibri"/>
-              </a:rPr>
-              <a:t>, vol. 86, no. 11, pp. 2278–2324, 1998.</a:t>
-            </a:r>
-          </a:p>
-          <a:p>
-            <a:pPr marL="274320" indent="-274320">
-              <a:spcAft>
-                <a:spcPts val="100"/>
-              </a:spcAft>
-            </a:pPr>
-            <a:r>
-              <a:rPr sz="780" i="0">
-                <a:solidFill>
-                  <a:srgbClr val="1E2430"/>
-                </a:solidFill>
-                <a:latin typeface="Calibri"/>
-              </a:rPr>
-              <a:t>[66]	</a:t>
-            </a:r>
-            <a:r>
-              <a:rPr sz="780" i="0">
-                <a:solidFill>
-                  <a:srgbClr val="1E2430"/>
-                </a:solidFill>
-                <a:latin typeface="Calibri"/>
-              </a:rPr>
-              <a:t>Y. LeCun, Y. Bengio, and G. Hinton, “Deep learning,” </a:t>
-            </a:r>
-            <a:r>
-              <a:rPr sz="780" i="1">
-                <a:solidFill>
-                  <a:srgbClr val="1E2430"/>
-                </a:solidFill>
-                <a:latin typeface="Calibri"/>
-              </a:rPr>
-              <a:t>Nature</a:t>
-            </a:r>
-            <a:r>
-              <a:rPr sz="780" i="0">
-                <a:solidFill>
-                  <a:srgbClr val="1E2430"/>
-                </a:solidFill>
-                <a:latin typeface="Calibri"/>
-              </a:rPr>
-              <a:t>, vol. 521, no. 7553, pp. 436–444, 2015.</a:t>
-            </a:r>
-          </a:p>
-          <a:p>
-            <a:pPr marL="274320" indent="-274320">
-              <a:spcAft>
-                <a:spcPts val="100"/>
-              </a:spcAft>
-            </a:pPr>
-            <a:r>
-              <a:rPr sz="780" i="0">
-                <a:solidFill>
-                  <a:srgbClr val="1E2430"/>
-                </a:solidFill>
-                <a:latin typeface="Calibri"/>
-              </a:rPr>
-              <a:t>[67]	</a:t>
-            </a:r>
-            <a:r>
-              <a:rPr sz="780" i="0">
-                <a:solidFill>
-                  <a:srgbClr val="1E2430"/>
-                </a:solidFill>
-                <a:latin typeface="Calibri"/>
-              </a:rPr>
-              <a:t>J. Deng, W. Dong, R. Socher, L.-J. Li, K. Li, and L. Fei-Fei, “ImageNet: A large-scale hierarchical image database,” in </a:t>
-            </a:r>
-            <a:r>
-              <a:rPr sz="780" i="1">
-                <a:solidFill>
-                  <a:srgbClr val="1E2430"/>
-                </a:solidFill>
-                <a:latin typeface="Calibri"/>
-              </a:rPr>
-              <a:t>Proc. IEEE Conference on Computer Vision and Pattern Recognition (CVPR)</a:t>
-            </a:r>
-            <a:r>
-              <a:rPr sz="780" i="0">
-                <a:solidFill>
-                  <a:srgbClr val="1E2430"/>
-                </a:solidFill>
-                <a:latin typeface="Calibri"/>
-              </a:rPr>
-              <a:t>, 2009, pp. 248–255.</a:t>
-            </a:r>
-          </a:p>
-          <a:p>
-            <a:pPr marL="274320" indent="-274320">
-              <a:spcAft>
-                <a:spcPts val="100"/>
-              </a:spcAft>
-            </a:pPr>
-            <a:r>
-              <a:rPr sz="780" i="0">
-                <a:solidFill>
-                  <a:srgbClr val="1E2430"/>
-                </a:solidFill>
-                <a:latin typeface="Calibri"/>
-              </a:rPr>
-              <a:t>[68]	</a:t>
-            </a:r>
-            <a:r>
-              <a:rPr sz="780" i="0">
-                <a:solidFill>
-                  <a:srgbClr val="1E2430"/>
-                </a:solidFill>
-                <a:latin typeface="Calibri"/>
-              </a:rPr>
-              <a:t>O. Russakovsky et al., “ImageNet large scale visual recognition challenge,” </a:t>
-            </a:r>
-            <a:r>
-              <a:rPr sz="780" i="1">
-                <a:solidFill>
-                  <a:srgbClr val="1E2430"/>
-                </a:solidFill>
-                <a:latin typeface="Calibri"/>
-              </a:rPr>
-              <a:t>International Journal of Computer Vision</a:t>
-            </a:r>
-            <a:r>
-              <a:rPr sz="780" i="0">
-                <a:solidFill>
-                  <a:srgbClr val="1E2430"/>
-                </a:solidFill>
-                <a:latin typeface="Calibri"/>
-              </a:rPr>
-              <a:t>, vol. 115, no. 3, pp. 211–252, 2015.</a:t>
-            </a:r>
-          </a:p>
-          <a:p>
-            <a:pPr marL="274320" indent="-274320">
-              <a:spcAft>
-                <a:spcPts val="100"/>
-              </a:spcAft>
-            </a:pPr>
-            <a:r>
-              <a:rPr sz="780" i="0">
-                <a:solidFill>
-                  <a:srgbClr val="1E2430"/>
-                </a:solidFill>
-                <a:latin typeface="Calibri"/>
-              </a:rPr>
-              <a:t>[69]	</a:t>
-            </a:r>
-            <a:r>
-              <a:rPr sz="780" i="0">
-                <a:solidFill>
-                  <a:srgbClr val="1E2430"/>
-                </a:solidFill>
-                <a:latin typeface="Calibri"/>
-              </a:rPr>
-              <a:t>A. Paszke et al., “PyTorch: An imperative style, high-performance deep learning library,” in </a:t>
-            </a:r>
-            <a:r>
-              <a:rPr sz="780" i="1">
-                <a:solidFill>
-                  <a:srgbClr val="1E2430"/>
-                </a:solidFill>
-                <a:latin typeface="Calibri"/>
-              </a:rPr>
-              <a:t>Advances in Neural Information Processing Systems (NeurIPS) 32</a:t>
-            </a:r>
-            <a:r>
-              <a:rPr sz="780" i="0">
-                <a:solidFill>
-                  <a:srgbClr val="1E2430"/>
-                </a:solidFill>
-                <a:latin typeface="Calibri"/>
-              </a:rPr>
-              <a:t>, 2019.</a:t>
-            </a:r>
-          </a:p>
-          <a:p>
-            <a:pPr marL="274320" indent="-274320">
-              <a:spcAft>
-                <a:spcPts val="100"/>
-              </a:spcAft>
-            </a:pPr>
-            <a:r>
-              <a:rPr sz="780" i="0">
-                <a:solidFill>
-                  <a:srgbClr val="1E2430"/>
-                </a:solidFill>
-                <a:latin typeface="Calibri"/>
-              </a:rPr>
-              <a:t>[70]	</a:t>
-            </a:r>
-            <a:r>
-              <a:rPr sz="780" i="0">
-                <a:solidFill>
-                  <a:srgbClr val="1E2430"/>
-                </a:solidFill>
-                <a:latin typeface="Calibri"/>
-              </a:rPr>
-              <a:t>I. Loshchilov and F. Hutter, “Decoupled weight decay regularization,” in </a:t>
-            </a:r>
-            <a:r>
-              <a:rPr sz="780" i="1">
-                <a:solidFill>
-                  <a:srgbClr val="1E2430"/>
-                </a:solidFill>
-                <a:latin typeface="Calibri"/>
-              </a:rPr>
-              <a:t>Proc. International Conference on Learning Representations (ICLR)</a:t>
-            </a:r>
-            <a:r>
-              <a:rPr sz="780" i="0">
-                <a:solidFill>
-                  <a:srgbClr val="1E2430"/>
-                </a:solidFill>
-                <a:latin typeface="Calibri"/>
-              </a:rPr>
-              <a:t>, 2019.</a:t>
-            </a:r>
-          </a:p>
-          <a:p>
-            <a:pPr marL="274320" indent="-274320">
-              <a:spcAft>
-                <a:spcPts val="100"/>
-              </a:spcAft>
-            </a:pPr>
-            <a:r>
-              <a:rPr sz="780" i="0">
-                <a:solidFill>
-                  <a:srgbClr val="1E2430"/>
-                </a:solidFill>
-                <a:latin typeface="Calibri"/>
-              </a:rPr>
-              <a:t>[71]	</a:t>
-            </a:r>
-            <a:r>
-              <a:rPr sz="780" i="0">
-                <a:solidFill>
-                  <a:srgbClr val="1E2430"/>
-                </a:solidFill>
-                <a:latin typeface="Calibri"/>
-              </a:rPr>
-              <a:t>I. Loshchilov and F. Hutter, “SGDR: Stochastic gradient descent with warm restarts,” in </a:t>
-            </a:r>
-            <a:r>
-              <a:rPr sz="780" i="1">
-                <a:solidFill>
-                  <a:srgbClr val="1E2430"/>
-                </a:solidFill>
-                <a:latin typeface="Calibri"/>
-              </a:rPr>
-              <a:t>Proc. International Conference on Learning Representations (ICLR)</a:t>
-            </a:r>
-            <a:r>
-              <a:rPr sz="780" i="0">
-                <a:solidFill>
-                  <a:srgbClr val="1E2430"/>
-                </a:solidFill>
-                <a:latin typeface="Calibri"/>
-              </a:rPr>
-              <a:t>, 2017.</a:t>
-            </a:r>
-          </a:p>
-          <a:p>
-            <a:pPr marL="274320" indent="-274320">
-              <a:spcAft>
-                <a:spcPts val="100"/>
-              </a:spcAft>
-            </a:pPr>
-            <a:r>
-              <a:rPr sz="780" i="0">
-                <a:solidFill>
-                  <a:srgbClr val="1E2430"/>
-                </a:solidFill>
-                <a:latin typeface="Calibri"/>
-              </a:rPr>
-              <a:t>[72]	</a:t>
-            </a:r>
-            <a:r>
-              <a:rPr sz="780" i="0">
-                <a:solidFill>
-                  <a:srgbClr val="1E2430"/>
-                </a:solidFill>
-                <a:latin typeface="Calibri"/>
-              </a:rPr>
-              <a:t>P. Micikevicius et al., “Mixed precision training,” in </a:t>
-            </a:r>
-            <a:r>
-              <a:rPr sz="780" i="1">
-                <a:solidFill>
-                  <a:srgbClr val="1E2430"/>
-                </a:solidFill>
-                <a:latin typeface="Calibri"/>
-              </a:rPr>
-              <a:t>Proc. International Conference on Learning Representations (ICLR)</a:t>
-            </a:r>
-            <a:r>
-              <a:rPr sz="780" i="0">
-                <a:solidFill>
-                  <a:srgbClr val="1E2430"/>
-                </a:solidFill>
-                <a:latin typeface="Calibri"/>
-              </a:rPr>
-              <a:t>, 2018.</a:t>
-            </a:r>
-          </a:p>
-          <a:p>
-            <a:pPr marL="274320" indent="-274320">
-              <a:spcAft>
-                <a:spcPts val="100"/>
-              </a:spcAft>
-            </a:pPr>
-            <a:r>
-              <a:rPr sz="780" i="0">
-                <a:solidFill>
-                  <a:srgbClr val="1E2430"/>
-                </a:solidFill>
-                <a:latin typeface="Calibri"/>
-              </a:rPr>
-              <a:t>[73]	</a:t>
-            </a:r>
-            <a:r>
-              <a:rPr sz="780" i="0">
-                <a:solidFill>
-                  <a:srgbClr val="1E2430"/>
-                </a:solidFill>
-                <a:latin typeface="Calibri"/>
-              </a:rPr>
-              <a:t>R. Pascanu, T. Mikolov, and Y. Bengio, “On the difficulty of training recurrent neural networks,” in </a:t>
-            </a:r>
-            <a:r>
-              <a:rPr sz="780" i="1">
-                <a:solidFill>
-                  <a:srgbClr val="1E2430"/>
-                </a:solidFill>
-                <a:latin typeface="Calibri"/>
-              </a:rPr>
-              <a:t>Proc. 30th International Conference on Machine Learning (ICML)</a:t>
-            </a:r>
-            <a:r>
-              <a:rPr sz="780" i="0">
-                <a:solidFill>
-                  <a:srgbClr val="1E2430"/>
-                </a:solidFill>
-                <a:latin typeface="Calibri"/>
-              </a:rPr>
-              <a:t>, 2013, pp. 1310–1318.</a:t>
+              <a:rPr sz="860" i="0">
+                <a:solidFill>
+                  <a:srgbClr val="1E2430"/>
+                </a:solidFill>
+                <a:latin typeface="Calibri"/>
+              </a:rPr>
+              <a:t>[48]	</a:t>
+            </a:r>
+            <a:r>
+              <a:rPr sz="860" i="0">
+                <a:solidFill>
+                  <a:srgbClr val="1E2430"/>
+                </a:solidFill>
+                <a:latin typeface="Calibri"/>
+              </a:rPr>
+              <a:t>S. Suzuki and K. Abe, “Topological structural analysis of digitized binary images by border following,” </a:t>
+            </a:r>
+            <a:r>
+              <a:rPr sz="860" i="1">
+                <a:solidFill>
+                  <a:srgbClr val="1E2430"/>
+                </a:solidFill>
+                <a:latin typeface="Calibri"/>
+              </a:rPr>
+              <a:t>Computer Vision, Graphics, and Image Processing</a:t>
+            </a:r>
+            <a:r>
+              <a:rPr sz="860" i="0">
+                <a:solidFill>
+                  <a:srgbClr val="1E2430"/>
+                </a:solidFill>
+                <a:latin typeface="Calibri"/>
+              </a:rPr>
+              <a:t>, vol. 30, no. 1, pp. 32–46, 1985.</a:t>
             </a:r>
           </a:p>
         </p:txBody>
@@ -21990,40 +21006,40 @@
               </a:spcAft>
             </a:pPr>
             <a:r>
-              <a:rPr sz="780" i="0">
-                <a:solidFill>
-                  <a:srgbClr val="1E2430"/>
-                </a:solidFill>
-                <a:latin typeface="Calibri"/>
-              </a:rPr>
-              <a:t>[74]	</a:t>
-            </a:r>
-            <a:r>
-              <a:rPr sz="780" i="0">
-                <a:solidFill>
-                  <a:srgbClr val="1E2430"/>
-                </a:solidFill>
-                <a:latin typeface="Calibri"/>
-              </a:rPr>
-              <a:t>T. Gneiting and A. E. Raftery, “Strictly proper scoring rules, prediction, and estimation,” </a:t>
-            </a:r>
-            <a:r>
-              <a:rPr sz="780" i="1">
-                <a:solidFill>
-                  <a:srgbClr val="1E2430"/>
-                </a:solidFill>
-                <a:latin typeface="Calibri"/>
-              </a:rPr>
-              <a:t>Journal of the American Statistical Association</a:t>
-            </a:r>
-            <a:r>
-              <a:rPr sz="780" i="0">
-                <a:solidFill>
-                  <a:srgbClr val="1E2430"/>
-                </a:solidFill>
-                <a:latin typeface="Calibri"/>
-              </a:rPr>
-              <a:t>, vol. 102, no. 477, pp. 359–378, 2007.</a:t>
+              <a:rPr sz="860" i="0">
+                <a:solidFill>
+                  <a:srgbClr val="1E2430"/>
+                </a:solidFill>
+                <a:latin typeface="Calibri"/>
+              </a:rPr>
+              <a:t>[49]	</a:t>
+            </a:r>
+            <a:r>
+              <a:rPr sz="860" i="0">
+                <a:solidFill>
+                  <a:srgbClr val="1E2430"/>
+                </a:solidFill>
+                <a:latin typeface="Calibri"/>
+              </a:rPr>
+              <a:t>V. Monga and B. L. Evans, “Perceptual image hashing via feature points: Performance evaluation and tradeoffs,” </a:t>
+            </a:r>
+            <a:r>
+              <a:rPr sz="860" i="1">
+                <a:solidFill>
+                  <a:srgbClr val="1E2430"/>
+                </a:solidFill>
+                <a:latin typeface="Calibri"/>
+              </a:rPr>
+              <a:t>IEEE Transactions on Image Processing</a:t>
+            </a:r>
+            <a:r>
+              <a:rPr sz="860" i="0">
+                <a:solidFill>
+                  <a:srgbClr val="1E2430"/>
+                </a:solidFill>
+                <a:latin typeface="Calibri"/>
+              </a:rPr>
+              <a:t>, vol. 15, no. 11, pp. 3452–3465, 2006.</a:t>
             </a:r>
           </a:p>
           <a:p>
@@ -22033,40 +21049,40 @@
               </a:spcAft>
             </a:pPr>
             <a:r>
-              <a:rPr sz="780" i="0">
-                <a:solidFill>
-                  <a:srgbClr val="1E2430"/>
-                </a:solidFill>
-                <a:latin typeface="Calibri"/>
-              </a:rPr>
-              <a:t>[75]	</a:t>
-            </a:r>
-            <a:r>
-              <a:rPr sz="780" i="0">
-                <a:solidFill>
-                  <a:srgbClr val="1E2430"/>
-                </a:solidFill>
-                <a:latin typeface="Calibri"/>
-              </a:rPr>
-              <a:t>C. Guo, G. Pleiss, Y. Sun, and K. Q. Weinberger, “On calibration of modern neural networks,” in </a:t>
-            </a:r>
-            <a:r>
-              <a:rPr sz="780" i="1">
-                <a:solidFill>
-                  <a:srgbClr val="1E2430"/>
-                </a:solidFill>
-                <a:latin typeface="Calibri"/>
-              </a:rPr>
-              <a:t>Proc. 34th International Conference on Machine Learning (ICML)</a:t>
-            </a:r>
-            <a:r>
-              <a:rPr sz="780" i="0">
-                <a:solidFill>
-                  <a:srgbClr val="1E2430"/>
-                </a:solidFill>
-                <a:latin typeface="Calibri"/>
-              </a:rPr>
-              <a:t>, 2017, pp. 1321–1330.</a:t>
+              <a:rPr sz="860" i="0">
+                <a:solidFill>
+                  <a:srgbClr val="1E2430"/>
+                </a:solidFill>
+                <a:latin typeface="Calibri"/>
+              </a:rPr>
+              <a:t>[50]	</a:t>
+            </a:r>
+            <a:r>
+              <a:rPr sz="860" i="0">
+                <a:solidFill>
+                  <a:srgbClr val="1E2430"/>
+                </a:solidFill>
+                <a:latin typeface="Calibri"/>
+              </a:rPr>
+              <a:t>R. W. Hamming, “Error detecting and error correcting codes,” </a:t>
+            </a:r>
+            <a:r>
+              <a:rPr sz="860" i="1">
+                <a:solidFill>
+                  <a:srgbClr val="1E2430"/>
+                </a:solidFill>
+                <a:latin typeface="Calibri"/>
+              </a:rPr>
+              <a:t>Bell System Technical Journal</a:t>
+            </a:r>
+            <a:r>
+              <a:rPr sz="860" i="0">
+                <a:solidFill>
+                  <a:srgbClr val="1E2430"/>
+                </a:solidFill>
+                <a:latin typeface="Calibri"/>
+              </a:rPr>
+              <a:t>, vol. 29, no. 2, pp. 147–160, 1950.</a:t>
             </a:r>
           </a:p>
           <a:p>
@@ -22076,40 +21092,40 @@
               </a:spcAft>
             </a:pPr>
             <a:r>
-              <a:rPr sz="780" i="0">
-                <a:solidFill>
-                  <a:srgbClr val="1E2430"/>
-                </a:solidFill>
-                <a:latin typeface="Calibri"/>
-              </a:rPr>
-              <a:t>[76]	</a:t>
-            </a:r>
-            <a:r>
-              <a:rPr sz="780" i="0">
-                <a:solidFill>
-                  <a:srgbClr val="1E2430"/>
-                </a:solidFill>
-                <a:latin typeface="Calibri"/>
-              </a:rPr>
-              <a:t>W. J. Youden, “Index for rating diagnostic tests,” </a:t>
-            </a:r>
-            <a:r>
-              <a:rPr sz="780" i="1">
-                <a:solidFill>
-                  <a:srgbClr val="1E2430"/>
-                </a:solidFill>
-                <a:latin typeface="Calibri"/>
-              </a:rPr>
-              <a:t>Cancer</a:t>
-            </a:r>
-            <a:r>
-              <a:rPr sz="780" i="0">
-                <a:solidFill>
-                  <a:srgbClr val="1E2430"/>
-                </a:solidFill>
-                <a:latin typeface="Calibri"/>
-              </a:rPr>
-              <a:t>, vol. 3, no. 1, pp. 32–35, 1950.</a:t>
+              <a:rPr sz="860" i="0">
+                <a:solidFill>
+                  <a:srgbClr val="1E2430"/>
+                </a:solidFill>
+                <a:latin typeface="Calibri"/>
+              </a:rPr>
+              <a:t>[51]	</a:t>
+            </a:r>
+            <a:r>
+              <a:rPr sz="860" i="0">
+                <a:solidFill>
+                  <a:srgbClr val="1E2430"/>
+                </a:solidFill>
+                <a:latin typeface="Calibri"/>
+              </a:rPr>
+              <a:t>B. Zitová and J. Flusser, “Image registration methods: A survey,” </a:t>
+            </a:r>
+            <a:r>
+              <a:rPr sz="860" i="1">
+                <a:solidFill>
+                  <a:srgbClr val="1E2430"/>
+                </a:solidFill>
+                <a:latin typeface="Calibri"/>
+              </a:rPr>
+              <a:t>Image and Vision Computing</a:t>
+            </a:r>
+            <a:r>
+              <a:rPr sz="860" i="0">
+                <a:solidFill>
+                  <a:srgbClr val="1E2430"/>
+                </a:solidFill>
+                <a:latin typeface="Calibri"/>
+              </a:rPr>
+              <a:t>, vol. 21, no. 11, pp. 977–1000, 2003.</a:t>
             </a:r>
           </a:p>
           <a:p>
@@ -22119,40 +21135,40 @@
               </a:spcAft>
             </a:pPr>
             <a:r>
-              <a:rPr sz="780" i="0">
-                <a:solidFill>
-                  <a:srgbClr val="1E2430"/>
-                </a:solidFill>
-                <a:latin typeface="Calibri"/>
-              </a:rPr>
-              <a:t>[77]	</a:t>
-            </a:r>
-            <a:r>
-              <a:rPr sz="780" i="0">
-                <a:solidFill>
-                  <a:srgbClr val="1E2430"/>
-                </a:solidFill>
-                <a:latin typeface="Calibri"/>
-              </a:rPr>
-              <a:t>J. A. Hanley and B. J. McNeil, “The meaning and use of the area under a receiver operating characteristic (ROC) curve,” </a:t>
-            </a:r>
-            <a:r>
-              <a:rPr sz="780" i="1">
-                <a:solidFill>
-                  <a:srgbClr val="1E2430"/>
-                </a:solidFill>
-                <a:latin typeface="Calibri"/>
-              </a:rPr>
-              <a:t>Radiology</a:t>
-            </a:r>
-            <a:r>
-              <a:rPr sz="780" i="0">
-                <a:solidFill>
-                  <a:srgbClr val="1E2430"/>
-                </a:solidFill>
-                <a:latin typeface="Calibri"/>
-              </a:rPr>
-              <a:t>, vol. 143, no. 1, pp. 29–36, 1982.</a:t>
+              <a:rPr sz="860" i="0">
+                <a:solidFill>
+                  <a:srgbClr val="1E2430"/>
+                </a:solidFill>
+                <a:latin typeface="Calibri"/>
+              </a:rPr>
+              <a:t>[52]	</a:t>
+            </a:r>
+            <a:r>
+              <a:rPr sz="860" i="0">
+                <a:solidFill>
+                  <a:srgbClr val="1E2430"/>
+                </a:solidFill>
+                <a:latin typeface="Calibri"/>
+              </a:rPr>
+              <a:t>F. Pedregosa et al., “Scikit-learn: Machine learning in Python,” </a:t>
+            </a:r>
+            <a:r>
+              <a:rPr sz="860" i="1">
+                <a:solidFill>
+                  <a:srgbClr val="1E2430"/>
+                </a:solidFill>
+                <a:latin typeface="Calibri"/>
+              </a:rPr>
+              <a:t>Journal of Machine Learning Research</a:t>
+            </a:r>
+            <a:r>
+              <a:rPr sz="860" i="0">
+                <a:solidFill>
+                  <a:srgbClr val="1E2430"/>
+                </a:solidFill>
+                <a:latin typeface="Calibri"/>
+              </a:rPr>
+              <a:t>, vol. 12, no. 85, pp. 2825–2830, 2011.</a:t>
             </a:r>
           </a:p>
           <a:p>
@@ -22162,40 +21178,40 @@
               </a:spcAft>
             </a:pPr>
             <a:r>
-              <a:rPr sz="780" i="0">
-                <a:solidFill>
-                  <a:srgbClr val="1E2430"/>
-                </a:solidFill>
-                <a:latin typeface="Calibri"/>
-              </a:rPr>
-              <a:t>[78]	</a:t>
-            </a:r>
-            <a:r>
-              <a:rPr sz="780" i="0">
-                <a:solidFill>
-                  <a:srgbClr val="1E2430"/>
-                </a:solidFill>
-                <a:latin typeface="Calibri"/>
-              </a:rPr>
-              <a:t>T. Fawcett, “An introduction to ROC analysis,” </a:t>
-            </a:r>
-            <a:r>
-              <a:rPr sz="780" i="1">
-                <a:solidFill>
-                  <a:srgbClr val="1E2430"/>
-                </a:solidFill>
-                <a:latin typeface="Calibri"/>
-              </a:rPr>
-              <a:t>Pattern Recognition Letters</a:t>
-            </a:r>
-            <a:r>
-              <a:rPr sz="780" i="0">
-                <a:solidFill>
-                  <a:srgbClr val="1E2430"/>
-                </a:solidFill>
-                <a:latin typeface="Calibri"/>
-              </a:rPr>
-              <a:t>, vol. 27, no. 8, pp. 861–874, 2006.</a:t>
+              <a:rPr sz="860" i="0">
+                <a:solidFill>
+                  <a:srgbClr val="1E2430"/>
+                </a:solidFill>
+                <a:latin typeface="Calibri"/>
+              </a:rPr>
+              <a:t>[53]	</a:t>
+            </a:r>
+            <a:r>
+              <a:rPr sz="860" i="0">
+                <a:solidFill>
+                  <a:srgbClr val="1E2430"/>
+                </a:solidFill>
+                <a:latin typeface="Calibri"/>
+              </a:rPr>
+              <a:t>M. Stone, “Cross-validatory choice and assessment of statistical predictions,” </a:t>
+            </a:r>
+            <a:r>
+              <a:rPr sz="860" i="1">
+                <a:solidFill>
+                  <a:srgbClr val="1E2430"/>
+                </a:solidFill>
+                <a:latin typeface="Calibri"/>
+              </a:rPr>
+              <a:t>Journal of the Royal Statistical Society: Series B (Methodological)</a:t>
+            </a:r>
+            <a:r>
+              <a:rPr sz="860" i="0">
+                <a:solidFill>
+                  <a:srgbClr val="1E2430"/>
+                </a:solidFill>
+                <a:latin typeface="Calibri"/>
+              </a:rPr>
+              <a:t>, vol. 36, no. 2, pp. 111–133, 1974.</a:t>
             </a:r>
           </a:p>
           <a:p>
@@ -22205,40 +21221,22 @@
               </a:spcAft>
             </a:pPr>
             <a:r>
-              <a:rPr sz="780" i="0">
-                <a:solidFill>
-                  <a:srgbClr val="1E2430"/>
-                </a:solidFill>
-                <a:latin typeface="Calibri"/>
-              </a:rPr>
-              <a:t>[79]	</a:t>
-            </a:r>
-            <a:r>
-              <a:rPr sz="780" i="0">
-                <a:solidFill>
-                  <a:srgbClr val="1E2430"/>
-                </a:solidFill>
-                <a:latin typeface="Calibri"/>
-              </a:rPr>
-              <a:t>B. W. Matthews, “Comparison of the predicted and observed secondary structure of T4 phage lysozyme,” </a:t>
-            </a:r>
-            <a:r>
-              <a:rPr sz="780" i="1">
-                <a:solidFill>
-                  <a:srgbClr val="1E2430"/>
-                </a:solidFill>
-                <a:latin typeface="Calibri"/>
-              </a:rPr>
-              <a:t>Biochimica et Biophysica Acta (BBA) – Protein Structure</a:t>
-            </a:r>
-            <a:r>
-              <a:rPr sz="780" i="0">
-                <a:solidFill>
-                  <a:srgbClr val="1E2430"/>
-                </a:solidFill>
-                <a:latin typeface="Calibri"/>
-              </a:rPr>
-              <a:t>, vol. 405, no. 2, pp. 442–451, 1975.</a:t>
+              <a:rPr sz="860" i="0">
+                <a:solidFill>
+                  <a:srgbClr val="1E2430"/>
+                </a:solidFill>
+                <a:latin typeface="Calibri"/>
+              </a:rPr>
+              <a:t>[54]	</a:t>
+            </a:r>
+            <a:r>
+              <a:rPr sz="860" i="0">
+                <a:solidFill>
+                  <a:srgbClr val="1E2430"/>
+                </a:solidFill>
+                <a:latin typeface="Calibri"/>
+              </a:rPr>
+              <a:t>A. Hamada, “Br35H :: Brain tumor detection 2020,” IEEE DataPort, also available at https://www.kaggle.com/datasets/ahmedhamada0/brain-tumor-detection, 2025.</a:t>
             </a:r>
           </a:p>
           <a:p>
@@ -22248,40 +21246,22 @@
               </a:spcAft>
             </a:pPr>
             <a:r>
-              <a:rPr sz="780" i="0">
-                <a:solidFill>
-                  <a:srgbClr val="1E2430"/>
-                </a:solidFill>
-                <a:latin typeface="Calibri"/>
-              </a:rPr>
-              <a:t>[80]	</a:t>
-            </a:r>
-            <a:r>
-              <a:rPr sz="780" i="0">
-                <a:solidFill>
-                  <a:srgbClr val="1E2430"/>
-                </a:solidFill>
-                <a:latin typeface="Calibri"/>
-              </a:rPr>
-              <a:t>D. Chicco and G. Jurman, “The advantages of the Matthews correlation coefficient (MCC) over F1 score and accuracy in binary classification evaluation,” </a:t>
-            </a:r>
-            <a:r>
-              <a:rPr sz="780" i="1">
-                <a:solidFill>
-                  <a:srgbClr val="1E2430"/>
-                </a:solidFill>
-                <a:latin typeface="Calibri"/>
-              </a:rPr>
-              <a:t>BMC Genomics</a:t>
-            </a:r>
-            <a:r>
-              <a:rPr sz="780" i="0">
-                <a:solidFill>
-                  <a:srgbClr val="1E2430"/>
-                </a:solidFill>
-                <a:latin typeface="Calibri"/>
-              </a:rPr>
-              <a:t>, vol. 21, Art. no. 6, 2020.</a:t>
+              <a:rPr sz="860" i="0">
+                <a:solidFill>
+                  <a:srgbClr val="1E2430"/>
+                </a:solidFill>
+                <a:latin typeface="Calibri"/>
+              </a:rPr>
+              <a:t>[55]	</a:t>
+            </a:r>
+            <a:r>
+              <a:rPr sz="860" i="0">
+                <a:solidFill>
+                  <a:srgbClr val="1E2430"/>
+                </a:solidFill>
+                <a:latin typeface="Calibri"/>
+              </a:rPr>
+              <a:t>N. Chakrabarty, “Brain MRI images for brain tumor detection,” Kaggle dataset, version 1, 2019.</a:t>
             </a:r>
           </a:p>
           <a:p>
@@ -22291,40 +21271,22 @@
               </a:spcAft>
             </a:pPr>
             <a:r>
-              <a:rPr sz="780" i="0">
-                <a:solidFill>
-                  <a:srgbClr val="1E2430"/>
-                </a:solidFill>
-                <a:latin typeface="Calibri"/>
-              </a:rPr>
-              <a:t>[81]	</a:t>
-            </a:r>
-            <a:r>
-              <a:rPr sz="780" i="0">
-                <a:solidFill>
-                  <a:srgbClr val="1E2430"/>
-                </a:solidFill>
-                <a:latin typeface="Calibri"/>
-              </a:rPr>
-              <a:t>M. Pakdaman Naeini, G. Cooper, and M. Hauskrecht, “Obtaining well calibrated probabilities using Bayesian binning,” in </a:t>
-            </a:r>
-            <a:r>
-              <a:rPr sz="780" i="1">
-                <a:solidFill>
-                  <a:srgbClr val="1E2430"/>
-                </a:solidFill>
-                <a:latin typeface="Calibri"/>
-              </a:rPr>
-              <a:t>Proc. AAAI Conference on Artificial Intelligence 29(1)</a:t>
-            </a:r>
-            <a:r>
-              <a:rPr sz="780" i="0">
-                <a:solidFill>
-                  <a:srgbClr val="1E2430"/>
-                </a:solidFill>
-                <a:latin typeface="Calibri"/>
-              </a:rPr>
-              <a:t>, 2015.</a:t>
+              <a:rPr sz="860" i="0">
+                <a:solidFill>
+                  <a:srgbClr val="1E2430"/>
+                </a:solidFill>
+                <a:latin typeface="Calibri"/>
+              </a:rPr>
+              <a:t>[56]	</a:t>
+            </a:r>
+            <a:r>
+              <a:rPr sz="860" i="0">
+                <a:solidFill>
+                  <a:srgbClr val="1E2430"/>
+                </a:solidFill>
+                <a:latin typeface="Calibri"/>
+              </a:rPr>
+              <a:t>S. Bhuvaji, A. Kadam, P. Bhumkar, S. Dedge, and S. Kanchan, “Brain tumor classification (MRI),” Kaggle dataset, 2020.</a:t>
             </a:r>
           </a:p>
           <a:p>
@@ -22334,40 +21296,22 @@
               </a:spcAft>
             </a:pPr>
             <a:r>
-              <a:rPr sz="780" i="0">
-                <a:solidFill>
-                  <a:srgbClr val="1E2430"/>
-                </a:solidFill>
-                <a:latin typeface="Calibri"/>
-              </a:rPr>
-              <a:t>[82]	</a:t>
-            </a:r>
-            <a:r>
-              <a:rPr sz="780" i="0">
-                <a:solidFill>
-                  <a:srgbClr val="1E2430"/>
-                </a:solidFill>
-                <a:latin typeface="Calibri"/>
-              </a:rPr>
-              <a:t>B. Efron, “Bootstrap methods: Another look at the jackknife,” </a:t>
-            </a:r>
-            <a:r>
-              <a:rPr sz="780" i="1">
-                <a:solidFill>
-                  <a:srgbClr val="1E2430"/>
-                </a:solidFill>
-                <a:latin typeface="Calibri"/>
-              </a:rPr>
-              <a:t>The Annals of Statistics</a:t>
-            </a:r>
-            <a:r>
-              <a:rPr sz="780" i="0">
-                <a:solidFill>
-                  <a:srgbClr val="1E2430"/>
-                </a:solidFill>
-                <a:latin typeface="Calibri"/>
-              </a:rPr>
-              <a:t>, vol. 7, no. 1, pp. 1–26, 1979.</a:t>
+              <a:rPr sz="860" i="0">
+                <a:solidFill>
+                  <a:srgbClr val="1E2430"/>
+                </a:solidFill>
+                <a:latin typeface="Calibri"/>
+              </a:rPr>
+              <a:t>[57]	</a:t>
+            </a:r>
+            <a:r>
+              <a:rPr sz="860" i="0">
+                <a:solidFill>
+                  <a:srgbClr val="1E2430"/>
+                </a:solidFill>
+                <a:latin typeface="Calibri"/>
+              </a:rPr>
+              <a:t>J. Cheng, “Brain tumor dataset,” figshare, version 5, 2017.</a:t>
             </a:r>
           </a:p>
           <a:p>
@@ -22377,40 +21321,22 @@
               </a:spcAft>
             </a:pPr>
             <a:r>
-              <a:rPr sz="780" i="0">
-                <a:solidFill>
-                  <a:srgbClr val="1E2430"/>
-                </a:solidFill>
-                <a:latin typeface="Calibri"/>
-              </a:rPr>
-              <a:t>[83]	</a:t>
-            </a:r>
-            <a:r>
-              <a:rPr sz="780" i="0">
-                <a:solidFill>
-                  <a:srgbClr val="1E2430"/>
-                </a:solidFill>
-                <a:latin typeface="Calibri"/>
-              </a:rPr>
-              <a:t>Q. McNemar, “Note on the sampling error of the difference between correlated proportions or percentages,” </a:t>
-            </a:r>
-            <a:r>
-              <a:rPr sz="780" i="1">
-                <a:solidFill>
-                  <a:srgbClr val="1E2430"/>
-                </a:solidFill>
-                <a:latin typeface="Calibri"/>
-              </a:rPr>
-              <a:t>Psychometrika</a:t>
-            </a:r>
-            <a:r>
-              <a:rPr sz="780" i="0">
-                <a:solidFill>
-                  <a:srgbClr val="1E2430"/>
-                </a:solidFill>
-                <a:latin typeface="Calibri"/>
-              </a:rPr>
-              <a:t>, vol. 12, no. 2, pp. 153–157, 1947.</a:t>
+              <a:rPr sz="860" i="0">
+                <a:solidFill>
+                  <a:srgbClr val="1E2430"/>
+                </a:solidFill>
+                <a:latin typeface="Calibri"/>
+              </a:rPr>
+              <a:t>[58]	</a:t>
+            </a:r>
+            <a:r>
+              <a:rPr sz="860" i="0">
+                <a:solidFill>
+                  <a:srgbClr val="1E2430"/>
+                </a:solidFill>
+                <a:latin typeface="Calibri"/>
+              </a:rPr>
+              <a:t>MoundirB, “Jun Cheng brain tumor MRI dataset JPG,” Kaggle dataset, version 1, 2025.</a:t>
             </a:r>
           </a:p>
           <a:p>
@@ -22420,40 +21346,40 @@
               </a:spcAft>
             </a:pPr>
             <a:r>
-              <a:rPr sz="780" i="0">
-                <a:solidFill>
-                  <a:srgbClr val="1E2430"/>
-                </a:solidFill>
-                <a:latin typeface="Calibri"/>
-              </a:rPr>
-              <a:t>[84]	</a:t>
-            </a:r>
-            <a:r>
-              <a:rPr sz="780" i="0">
-                <a:solidFill>
-                  <a:srgbClr val="1E2430"/>
-                </a:solidFill>
-                <a:latin typeface="Calibri"/>
-              </a:rPr>
-              <a:t>S. Holm, “A simple sequentially rejective multiple test procedure,” </a:t>
-            </a:r>
-            <a:r>
-              <a:rPr sz="780" i="1">
-                <a:solidFill>
-                  <a:srgbClr val="1E2430"/>
-                </a:solidFill>
-                <a:latin typeface="Calibri"/>
-              </a:rPr>
-              <a:t>Scandinavian Journal of Statistics</a:t>
-            </a:r>
-            <a:r>
-              <a:rPr sz="780" i="0">
-                <a:solidFill>
-                  <a:srgbClr val="1E2430"/>
-                </a:solidFill>
-                <a:latin typeface="Calibri"/>
-              </a:rPr>
-              <a:t>, vol. 6, no. 2, pp. 65–70, 1979.</a:t>
+              <a:rPr sz="860" i="0">
+                <a:solidFill>
+                  <a:srgbClr val="1E2430"/>
+                </a:solidFill>
+                <a:latin typeface="Calibri"/>
+              </a:rPr>
+              <a:t>[59]	</a:t>
+            </a:r>
+            <a:r>
+              <a:rPr sz="860" i="0">
+                <a:solidFill>
+                  <a:srgbClr val="1E2430"/>
+                </a:solidFill>
+                <a:latin typeface="Calibri"/>
+              </a:rPr>
+              <a:t>M. Norouzi, A. Punjani, and D. J. Fleet, “Fast exact search in Hamming space with multi-index hashing,” </a:t>
+            </a:r>
+            <a:r>
+              <a:rPr sz="860" i="1">
+                <a:solidFill>
+                  <a:srgbClr val="1E2430"/>
+                </a:solidFill>
+                <a:latin typeface="Calibri"/>
+              </a:rPr>
+              <a:t>IEEE Transactions on Pattern Analysis and Machine Intelligence</a:t>
+            </a:r>
+            <a:r>
+              <a:rPr sz="860" i="0">
+                <a:solidFill>
+                  <a:srgbClr val="1E2430"/>
+                </a:solidFill>
+                <a:latin typeface="Calibri"/>
+              </a:rPr>
+              <a:t>, vol. 36, no. 6, pp. 1107–1119, 2014.</a:t>
             </a:r>
           </a:p>
           <a:p>
@@ -22463,40 +21389,40 @@
               </a:spcAft>
             </a:pPr>
             <a:r>
-              <a:rPr sz="780" i="0">
-                <a:solidFill>
-                  <a:srgbClr val="1E2430"/>
-                </a:solidFill>
-                <a:latin typeface="Calibri"/>
-              </a:rPr>
-              <a:t>[85]	</a:t>
-            </a:r>
-            <a:r>
-              <a:rPr sz="780" i="0">
-                <a:solidFill>
-                  <a:srgbClr val="1E2430"/>
-                </a:solidFill>
-                <a:latin typeface="Calibri"/>
-              </a:rPr>
-              <a:t>R. R. Selvaraju, M. Cogswell, A. Das, R. Vedantam, D. Parikh, and D. Batra, “Grad-CAM: Visual explanations from deep networks via gradient-based localization,” in </a:t>
-            </a:r>
-            <a:r>
-              <a:rPr sz="780" i="1">
-                <a:solidFill>
-                  <a:srgbClr val="1E2430"/>
-                </a:solidFill>
-                <a:latin typeface="Calibri"/>
-              </a:rPr>
-              <a:t>Proc. IEEE International Conference on Computer Vision (ICCV)</a:t>
-            </a:r>
-            <a:r>
-              <a:rPr sz="780" i="0">
-                <a:solidFill>
-                  <a:srgbClr val="1E2430"/>
-                </a:solidFill>
-                <a:latin typeface="Calibri"/>
-              </a:rPr>
-              <a:t>, 2017, pp. 618–626.</a:t>
+              <a:rPr sz="860" i="0">
+                <a:solidFill>
+                  <a:srgbClr val="1E2430"/>
+                </a:solidFill>
+                <a:latin typeface="Calibri"/>
+              </a:rPr>
+              <a:t>[60]	</a:t>
+            </a:r>
+            <a:r>
+              <a:rPr sz="860" i="0">
+                <a:solidFill>
+                  <a:srgbClr val="1E2430"/>
+                </a:solidFill>
+                <a:latin typeface="Calibri"/>
+              </a:rPr>
+              <a:t>M. Tan and Q. Le, “EfficientNet: Rethinking model scaling for convolutional neural networks,” in </a:t>
+            </a:r>
+            <a:r>
+              <a:rPr sz="860" i="1">
+                <a:solidFill>
+                  <a:srgbClr val="1E2430"/>
+                </a:solidFill>
+                <a:latin typeface="Calibri"/>
+              </a:rPr>
+              <a:t>Proc. 36th International Conference on Machine Learning (ICML)</a:t>
+            </a:r>
+            <a:r>
+              <a:rPr sz="860" i="0">
+                <a:solidFill>
+                  <a:srgbClr val="1E2430"/>
+                </a:solidFill>
+                <a:latin typeface="Calibri"/>
+              </a:rPr>
+              <a:t>, 2019, pp. 6105–6114.</a:t>
             </a:r>
           </a:p>
           <a:p>
@@ -22506,40 +21432,40 @@
               </a:spcAft>
             </a:pPr>
             <a:r>
-              <a:rPr sz="780" i="0">
-                <a:solidFill>
-                  <a:srgbClr val="1E2430"/>
-                </a:solidFill>
-                <a:latin typeface="Calibri"/>
-              </a:rPr>
-              <a:t>[86]	</a:t>
-            </a:r>
-            <a:r>
-              <a:rPr sz="780" i="0">
-                <a:solidFill>
-                  <a:srgbClr val="1E2430"/>
-                </a:solidFill>
-                <a:latin typeface="Calibri"/>
-              </a:rPr>
-              <a:t>S. Abnar and W. Zuidema, “Quantifying attention flow in transformers,” in </a:t>
-            </a:r>
-            <a:r>
-              <a:rPr sz="780" i="1">
-                <a:solidFill>
-                  <a:srgbClr val="1E2430"/>
-                </a:solidFill>
-                <a:latin typeface="Calibri"/>
-              </a:rPr>
-              <a:t>Proc. 58th Annual Meeting of the Association for Computational Linguistics (ACL)</a:t>
-            </a:r>
-            <a:r>
-              <a:rPr sz="780" i="0">
-                <a:solidFill>
-                  <a:srgbClr val="1E2430"/>
-                </a:solidFill>
-                <a:latin typeface="Calibri"/>
-              </a:rPr>
-              <a:t>, 2020, pp. 4190–4197.</a:t>
+              <a:rPr sz="860" i="0">
+                <a:solidFill>
+                  <a:srgbClr val="1E2430"/>
+                </a:solidFill>
+                <a:latin typeface="Calibri"/>
+              </a:rPr>
+              <a:t>[61]	</a:t>
+            </a:r>
+            <a:r>
+              <a:rPr sz="860" i="0">
+                <a:solidFill>
+                  <a:srgbClr val="1E2430"/>
+                </a:solidFill>
+                <a:latin typeface="Calibri"/>
+              </a:rPr>
+              <a:t>A. Howard et al., “Searching for MobileNetV3,” in </a:t>
+            </a:r>
+            <a:r>
+              <a:rPr sz="860" i="1">
+                <a:solidFill>
+                  <a:srgbClr val="1E2430"/>
+                </a:solidFill>
+                <a:latin typeface="Calibri"/>
+              </a:rPr>
+              <a:t>Proc. IEEE/CVF International Conference on Computer Vision (ICCV)</a:t>
+            </a:r>
+            <a:r>
+              <a:rPr sz="860" i="0">
+                <a:solidFill>
+                  <a:srgbClr val="1E2430"/>
+                </a:solidFill>
+                <a:latin typeface="Calibri"/>
+              </a:rPr>
+              <a:t>, 2019, pp. 1314–1324.</a:t>
             </a:r>
           </a:p>
           <a:p>
@@ -22549,40 +21475,40 @@
               </a:spcAft>
             </a:pPr>
             <a:r>
-              <a:rPr sz="780" i="0">
-                <a:solidFill>
-                  <a:srgbClr val="1E2430"/>
-                </a:solidFill>
-                <a:latin typeface="Calibri"/>
-              </a:rPr>
-              <a:t>[87]	</a:t>
-            </a:r>
-            <a:r>
-              <a:rPr sz="780" i="0">
-                <a:solidFill>
-                  <a:srgbClr val="1E2430"/>
-                </a:solidFill>
-                <a:latin typeface="Calibri"/>
-              </a:rPr>
-              <a:t>M. D. Zeiler and R. Fergus, “Visualizing and understanding convolutional networks,” in </a:t>
-            </a:r>
-            <a:r>
-              <a:rPr sz="780" i="1">
-                <a:solidFill>
-                  <a:srgbClr val="1E2430"/>
-                </a:solidFill>
-                <a:latin typeface="Calibri"/>
-              </a:rPr>
-              <a:t>Computer Vision – ECCV 2014</a:t>
-            </a:r>
-            <a:r>
-              <a:rPr sz="780" i="0">
-                <a:solidFill>
-                  <a:srgbClr val="1E2430"/>
-                </a:solidFill>
-                <a:latin typeface="Calibri"/>
-              </a:rPr>
-              <a:t>, 2014, pp. 818–833.</a:t>
+              <a:rPr sz="860" i="0">
+                <a:solidFill>
+                  <a:srgbClr val="1E2430"/>
+                </a:solidFill>
+                <a:latin typeface="Calibri"/>
+              </a:rPr>
+              <a:t>[62]	</a:t>
+            </a:r>
+            <a:r>
+              <a:rPr sz="860" i="0">
+                <a:solidFill>
+                  <a:srgbClr val="1E2430"/>
+                </a:solidFill>
+                <a:latin typeface="Calibri"/>
+              </a:rPr>
+              <a:t>M. Sandler, A. Howard, M. Zhu, A. Zhmoginov, and L.-C. Chen, “MobileNetV2: Inverted residuals and linear bottlenecks,” in </a:t>
+            </a:r>
+            <a:r>
+              <a:rPr sz="860" i="1">
+                <a:solidFill>
+                  <a:srgbClr val="1E2430"/>
+                </a:solidFill>
+                <a:latin typeface="Calibri"/>
+              </a:rPr>
+              <a:t>Proc. IEEE/CVF Conference on Computer Vision and Pattern Recognition (CVPR)</a:t>
+            </a:r>
+            <a:r>
+              <a:rPr sz="860" i="0">
+                <a:solidFill>
+                  <a:srgbClr val="1E2430"/>
+                </a:solidFill>
+                <a:latin typeface="Calibri"/>
+              </a:rPr>
+              <a:t>, 2018, pp. 4510–4520.</a:t>
             </a:r>
           </a:p>
           <a:p>
@@ -22592,40 +21518,40 @@
               </a:spcAft>
             </a:pPr>
             <a:r>
-              <a:rPr sz="780" i="0">
-                <a:solidFill>
-                  <a:srgbClr val="1E2430"/>
-                </a:solidFill>
-                <a:latin typeface="Calibri"/>
-              </a:rPr>
-              <a:t>[88]	</a:t>
-            </a:r>
-            <a:r>
-              <a:rPr sz="780" i="0">
-                <a:solidFill>
-                  <a:srgbClr val="1E2430"/>
-                </a:solidFill>
-                <a:latin typeface="Calibri"/>
-              </a:rPr>
-              <a:t>N. Otsu, “A threshold selection method from gray-level histograms,” </a:t>
-            </a:r>
-            <a:r>
-              <a:rPr sz="780" i="1">
-                <a:solidFill>
-                  <a:srgbClr val="1E2430"/>
-                </a:solidFill>
-                <a:latin typeface="Calibri"/>
-              </a:rPr>
-              <a:t>IEEE Transactions on Systems, Man, and Cybernetics</a:t>
-            </a:r>
-            <a:r>
-              <a:rPr sz="780" i="0">
-                <a:solidFill>
-                  <a:srgbClr val="1E2430"/>
-                </a:solidFill>
-                <a:latin typeface="Calibri"/>
-              </a:rPr>
-              <a:t>, vol. 9, no. 1, pp. 62–66, 1979.</a:t>
+              <a:rPr sz="860" i="0">
+                <a:solidFill>
+                  <a:srgbClr val="1E2430"/>
+                </a:solidFill>
+                <a:latin typeface="Calibri"/>
+              </a:rPr>
+              <a:t>[63]	</a:t>
+            </a:r>
+            <a:r>
+              <a:rPr sz="860" i="0">
+                <a:solidFill>
+                  <a:srgbClr val="1E2430"/>
+                </a:solidFill>
+                <a:latin typeface="Calibri"/>
+              </a:rPr>
+              <a:t>A. Vaswani et al., “Attention is all you need,” in </a:t>
+            </a:r>
+            <a:r>
+              <a:rPr sz="860" i="1">
+                <a:solidFill>
+                  <a:srgbClr val="1E2430"/>
+                </a:solidFill>
+                <a:latin typeface="Calibri"/>
+              </a:rPr>
+              <a:t>Advances in Neural Information Processing Systems (NeurIPS) 30</a:t>
+            </a:r>
+            <a:r>
+              <a:rPr sz="860" i="0">
+                <a:solidFill>
+                  <a:srgbClr val="1E2430"/>
+                </a:solidFill>
+                <a:latin typeface="Calibri"/>
+              </a:rPr>
+              <a:t>, 2017.</a:t>
             </a:r>
           </a:p>
           <a:p>
@@ -22635,42 +21561,231 @@
               </a:spcAft>
             </a:pPr>
             <a:r>
-              <a:rPr sz="780" i="0">
-                <a:solidFill>
-                  <a:srgbClr val="1E2430"/>
-                </a:solidFill>
-                <a:latin typeface="Calibri"/>
-              </a:rPr>
-              <a:t>[89]	</a:t>
-            </a:r>
-            <a:r>
-              <a:rPr sz="780" i="0">
-                <a:solidFill>
-                  <a:srgbClr val="1E2430"/>
-                </a:solidFill>
-                <a:latin typeface="Calibri"/>
-              </a:rPr>
-              <a:t>B. H. Menze et al., “The multimodal brain tumor image segmentation benchmark (BRATS),” </a:t>
-            </a:r>
-            <a:r>
-              <a:rPr sz="780" i="1">
-                <a:solidFill>
-                  <a:srgbClr val="1E2430"/>
-                </a:solidFill>
-                <a:latin typeface="Calibri"/>
-              </a:rPr>
-              <a:t>IEEE Transactions on Medical Imaging</a:t>
-            </a:r>
-            <a:r>
-              <a:rPr sz="780" i="0">
-                <a:solidFill>
-                  <a:srgbClr val="1E2430"/>
-                </a:solidFill>
-                <a:latin typeface="Calibri"/>
-              </a:rPr>
-              <a:t>, vol. 34, no. 10, pp. 1993–2024, 2015.</a:t>
-            </a:r>
-          </a:p>
+              <a:rPr sz="860" i="0">
+                <a:solidFill>
+                  <a:srgbClr val="1E2430"/>
+                </a:solidFill>
+                <a:latin typeface="Calibri"/>
+              </a:rPr>
+              <a:t>[64]	</a:t>
+            </a:r>
+            <a:r>
+              <a:rPr sz="860" i="0">
+                <a:solidFill>
+                  <a:srgbClr val="1E2430"/>
+                </a:solidFill>
+                <a:latin typeface="Calibri"/>
+              </a:rPr>
+              <a:t>Z. Dai, H. Liu, Q. V. Le, and M. Tan, “CoAtNet: Marrying convolution and attention for all data sizes,” in </a:t>
+            </a:r>
+            <a:r>
+              <a:rPr sz="860" i="1">
+                <a:solidFill>
+                  <a:srgbClr val="1E2430"/>
+                </a:solidFill>
+                <a:latin typeface="Calibri"/>
+              </a:rPr>
+              <a:t>Advances in Neural Information Processing Systems (NeurIPS)</a:t>
+            </a:r>
+            <a:r>
+              <a:rPr sz="860" i="0">
+                <a:solidFill>
+                  <a:srgbClr val="1E2430"/>
+                </a:solidFill>
+                <a:latin typeface="Calibri"/>
+              </a:rPr>
+              <a:t>, 2021, pp. 3965–3977.</a:t>
+            </a:r>
+          </a:p>
+        </p:txBody>
+      </p:sp>
+    </p:spTree>
+  </p:cSld>
+  <p:clrMapOvr>
+    <a:masterClrMapping/>
+  </p:clrMapOvr>
+</p:sld>
+</file>
+
+<file path=ppt/slides/slide22.xml><?xml version="1.0" encoding="utf-8"?>
+<p:sld xmlns:a="http://schemas.openxmlformats.org/drawingml/2006/main" xmlns:p="http://schemas.openxmlformats.org/presentationml/2006/main" xmlns:r="http://schemas.openxmlformats.org/officeDocument/2006/relationships">
+  <p:cSld>
+    <p:spTree>
+      <p:nvGrpSpPr>
+        <p:cNvPr id="1" name=""/>
+        <p:cNvGrpSpPr/>
+        <p:nvPr/>
+      </p:nvGrpSpPr>
+      <p:grpSpPr/>
+      <p:sp>
+        <p:nvSpPr>
+          <p:cNvPr id="4" name="object 2">
+            <a:extLst>
+              <a:ext uri="{FF2B5EF4-FFF2-40B4-BE49-F238E27FC236}">
+                <a16:creationId xmlns:a16="http://schemas.microsoft.com/office/drawing/2014/main" xmlns="" id="{7CFC0C65-61CC-E657-43F7-99C8E5362448}"/>
+              </a:ext>
+            </a:extLst>
+          </p:cNvPr>
+          <p:cNvSpPr txBox="1">
+            <a:spLocks noGrp="1"/>
+          </p:cNvSpPr>
+          <p:nvPr>
+            <p:ph type="title"/>
+          </p:nvPr>
+        </p:nvSpPr>
+        <p:spPr>
+          <a:xfrm>
+            <a:off x="548640" y="384048"/>
+            <a:ext cx="11091672" cy="621792"/>
+          </a:xfrm>
+          <a:prstGeom prst="rect">
+            <a:avLst/>
+          </a:prstGeom>
+        </p:spPr>
+        <p:txBody>
+          <a:bodyPr vert="horz" wrap="square" lIns="0" tIns="0" rIns="0" bIns="0" rtlCol="0" anchor="ctr">
+            <a:normAutofit/>
+          </a:bodyPr>
+          <a:lstStyle/>
+          <a:p>
+            <a:pPr algn="l"/>
+            <a:r>
+              <a:rPr sz="2800" b="1">
+                <a:solidFill>
+                  <a:srgbClr val="1E2430"/>
+                </a:solidFill>
+                <a:latin typeface="Times New Roman"/>
+              </a:rPr>
+              <a:t>References (3/3)</a:t>
+            </a:r>
+          </a:p>
+        </p:txBody>
+      </p:sp>
+      <p:sp>
+        <p:nvSpPr>
+          <p:cNvPr id="5" name="Date Placeholder 4">
+            <a:extLst>
+              <a:ext uri="{FF2B5EF4-FFF2-40B4-BE49-F238E27FC236}">
+                <a16:creationId xmlns:a16="http://schemas.microsoft.com/office/drawing/2014/main" xmlns="" id="{B732D3DB-7149-E1E5-D5F9-4FC93A788894}"/>
+              </a:ext>
+            </a:extLst>
+          </p:cNvPr>
+          <p:cNvSpPr>
+            <a:spLocks noGrp="1"/>
+          </p:cNvSpPr>
+          <p:nvPr>
+            <p:ph type="dt" sz="half" idx="10"/>
+          </p:nvPr>
+        </p:nvSpPr>
+        <p:spPr/>
+        <p:txBody>
+          <a:bodyPr/>
+          <a:lstStyle/>
+          <a:p>
+            <a:r>
+              <a:rPr lang="en-IN" sz="1000">
+                <a:solidFill>
+                  <a:srgbClr val="8A929C"/>
+                </a:solidFill>
+                <a:latin typeface="Calibri"/>
+                <a:cs typeface="Calibri"/>
+              </a:rPr>
+              <a:t>28/10/26</a:t>
+            </a:r>
+            <a:endParaRPr lang="en-IN"/>
+          </a:p>
+        </p:txBody>
+      </p:sp>
+      <p:sp>
+        <p:nvSpPr>
+          <p:cNvPr id="6" name="Footer Placeholder 5">
+            <a:extLst>
+              <a:ext uri="{FF2B5EF4-FFF2-40B4-BE49-F238E27FC236}">
+                <a16:creationId xmlns:a16="http://schemas.microsoft.com/office/drawing/2014/main" xmlns="" id="{CEBCABB1-7C63-52E3-2815-3651AE7E9F7B}"/>
+              </a:ext>
+            </a:extLst>
+          </p:cNvPr>
+          <p:cNvSpPr>
+            <a:spLocks noGrp="1"/>
+          </p:cNvSpPr>
+          <p:nvPr>
+            <p:ph type="ftr" sz="quarter" idx="11"/>
+          </p:nvPr>
+        </p:nvSpPr>
+        <p:spPr/>
+        <p:txBody>
+          <a:bodyPr/>
+          <a:lstStyle/>
+          <a:p>
+            <a:r>
+              <a:rPr lang="en-IN" sz="1000">
+                <a:solidFill>
+                  <a:srgbClr val="8A929C"/>
+                </a:solidFill>
+                <a:latin typeface="Calibri"/>
+                <a:cs typeface="Calibri"/>
+              </a:rPr>
+              <a:t>SCOPE</a:t>
+            </a:r>
+          </a:p>
+        </p:txBody>
+      </p:sp>
+      <p:sp>
+        <p:nvSpPr>
+          <p:cNvPr id="7" name="Slide Number Placeholder 6">
+            <a:extLst>
+              <a:ext uri="{FF2B5EF4-FFF2-40B4-BE49-F238E27FC236}">
+                <a16:creationId xmlns:a16="http://schemas.microsoft.com/office/drawing/2014/main" xmlns="" id="{E431EAEC-BCE3-2979-69C6-273309B9FFA7}"/>
+              </a:ext>
+            </a:extLst>
+          </p:cNvPr>
+          <p:cNvSpPr>
+            <a:spLocks noGrp="1"/>
+          </p:cNvSpPr>
+          <p:nvPr>
+            <p:ph type="sldNum" sz="quarter" idx="12"/>
+          </p:nvPr>
+        </p:nvSpPr>
+        <p:spPr/>
+        <p:txBody>
+          <a:bodyPr/>
+          <a:lstStyle/>
+          <a:p>
+            <a:fld id="{65201FD4-9D8D-4491-815B-63C7BF4F0034}" type="slidenum">
+              <a:rPr lang="en-IN" smtClean="0" sz="1000">
+                <a:solidFill>
+                  <a:srgbClr val="8A929C"/>
+                </a:solidFill>
+                <a:latin typeface="Calibri"/>
+                <a:cs typeface="Calibri"/>
+              </a:rPr>
+              <a:t>14</a:t>
+            </a:fld>
+            <a:endParaRPr lang="en-IN"/>
+          </a:p>
+        </p:txBody>
+      </p:sp>
+      <p:sp>
+        <p:nvSpPr>
+          <p:cNvPr id="8" name="TextBox 7"/>
+          <p:cNvSpPr txBox="1"/>
+          <p:nvPr/>
+        </p:nvSpPr>
+        <p:spPr>
+          <a:xfrm>
+            <a:off x="548640" y="1143000"/>
+            <a:ext cx="5431536" cy="5120640"/>
+          </a:xfrm>
+          <a:prstGeom prst="rect">
+            <a:avLst/>
+          </a:prstGeom>
+          <a:noFill/>
+        </p:spPr>
+        <p:txBody>
+          <a:bodyPr wrap="square" lIns="0" rIns="0" tIns="0" bIns="0">
+            <a:spAutoFit/>
+          </a:bodyPr>
+          <a:lstStyle/>
           <a:p>
             <a:pPr marL="274320" indent="-274320">
               <a:spcAft>
@@ -22678,40 +21793,40 @@
               </a:spcAft>
             </a:pPr>
             <a:r>
-              <a:rPr sz="780" i="0">
-                <a:solidFill>
-                  <a:srgbClr val="1E2430"/>
-                </a:solidFill>
-                <a:latin typeface="Calibri"/>
-              </a:rPr>
-              <a:t>[90]	</a:t>
-            </a:r>
-            <a:r>
-              <a:rPr sz="780" i="0">
-                <a:solidFill>
-                  <a:srgbClr val="1E2430"/>
-                </a:solidFill>
-                <a:latin typeface="Calibri"/>
-              </a:rPr>
-              <a:t>F. Wilcoxon, “Individual comparisons by ranking methods,” </a:t>
-            </a:r>
-            <a:r>
-              <a:rPr sz="780" i="1">
-                <a:solidFill>
-                  <a:srgbClr val="1E2430"/>
-                </a:solidFill>
-                <a:latin typeface="Calibri"/>
-              </a:rPr>
-              <a:t>Biometrics Bulletin</a:t>
-            </a:r>
-            <a:r>
-              <a:rPr sz="780" i="0">
-                <a:solidFill>
-                  <a:srgbClr val="1E2430"/>
-                </a:solidFill>
-                <a:latin typeface="Calibri"/>
-              </a:rPr>
-              <a:t>, vol. 1, no. 6, pp. 80–83, 1945.</a:t>
+              <a:rPr sz="860" i="0">
+                <a:solidFill>
+                  <a:srgbClr val="1E2430"/>
+                </a:solidFill>
+                <a:latin typeface="Calibri"/>
+              </a:rPr>
+              <a:t>[65]	</a:t>
+            </a:r>
+            <a:r>
+              <a:rPr sz="860" i="0">
+                <a:solidFill>
+                  <a:srgbClr val="1E2430"/>
+                </a:solidFill>
+                <a:latin typeface="Calibri"/>
+              </a:rPr>
+              <a:t>Y. LeCun, L. Bottou, Y. Bengio, and P. Haffner, “Gradient-based learning applied to document recognition,” </a:t>
+            </a:r>
+            <a:r>
+              <a:rPr sz="860" i="1">
+                <a:solidFill>
+                  <a:srgbClr val="1E2430"/>
+                </a:solidFill>
+                <a:latin typeface="Calibri"/>
+              </a:rPr>
+              <a:t>Proceedings of the IEEE</a:t>
+            </a:r>
+            <a:r>
+              <a:rPr sz="860" i="0">
+                <a:solidFill>
+                  <a:srgbClr val="1E2430"/>
+                </a:solidFill>
+                <a:latin typeface="Calibri"/>
+              </a:rPr>
+              <a:t>, vol. 86, no. 11, pp. 2278–2324, 1998.</a:t>
             </a:r>
           </a:p>
           <a:p>
@@ -22721,40 +21836,40 @@
               </a:spcAft>
             </a:pPr>
             <a:r>
-              <a:rPr sz="780" i="0">
-                <a:solidFill>
-                  <a:srgbClr val="1E2430"/>
-                </a:solidFill>
-                <a:latin typeface="Calibri"/>
-              </a:rPr>
-              <a:t>[91]	</a:t>
-            </a:r>
-            <a:r>
-              <a:rPr sz="780" i="0">
-                <a:solidFill>
-                  <a:srgbClr val="1E2430"/>
-                </a:solidFill>
-                <a:latin typeface="Calibri"/>
-              </a:rPr>
-              <a:t>C. Spearman, “The proof and measurement of association between two things,” </a:t>
-            </a:r>
-            <a:r>
-              <a:rPr sz="780" i="1">
-                <a:solidFill>
-                  <a:srgbClr val="1E2430"/>
-                </a:solidFill>
-                <a:latin typeface="Calibri"/>
-              </a:rPr>
-              <a:t>The American Journal of Psychology</a:t>
-            </a:r>
-            <a:r>
-              <a:rPr sz="780" i="0">
-                <a:solidFill>
-                  <a:srgbClr val="1E2430"/>
-                </a:solidFill>
-                <a:latin typeface="Calibri"/>
-              </a:rPr>
-              <a:t>, vol. 15, no. 1, pp. 72–101, 1904.</a:t>
+              <a:rPr sz="860" i="0">
+                <a:solidFill>
+                  <a:srgbClr val="1E2430"/>
+                </a:solidFill>
+                <a:latin typeface="Calibri"/>
+              </a:rPr>
+              <a:t>[66]	</a:t>
+            </a:r>
+            <a:r>
+              <a:rPr sz="860" i="0">
+                <a:solidFill>
+                  <a:srgbClr val="1E2430"/>
+                </a:solidFill>
+                <a:latin typeface="Calibri"/>
+              </a:rPr>
+              <a:t>Y. LeCun, Y. Bengio, and G. Hinton, “Deep learning,” </a:t>
+            </a:r>
+            <a:r>
+              <a:rPr sz="860" i="1">
+                <a:solidFill>
+                  <a:srgbClr val="1E2430"/>
+                </a:solidFill>
+                <a:latin typeface="Calibri"/>
+              </a:rPr>
+              <a:t>Nature</a:t>
+            </a:r>
+            <a:r>
+              <a:rPr sz="860" i="0">
+                <a:solidFill>
+                  <a:srgbClr val="1E2430"/>
+                </a:solidFill>
+                <a:latin typeface="Calibri"/>
+              </a:rPr>
+              <a:t>, vol. 521, no. 7553, pp. 436–444, 2015.</a:t>
             </a:r>
           </a:p>
           <a:p>
@@ -22764,40 +21879,40 @@
               </a:spcAft>
             </a:pPr>
             <a:r>
-              <a:rPr sz="780" i="0">
-                <a:solidFill>
-                  <a:srgbClr val="1E2430"/>
-                </a:solidFill>
-                <a:latin typeface="Calibri"/>
-              </a:rPr>
-              <a:t>[92]	</a:t>
-            </a:r>
-            <a:r>
-              <a:rPr sz="780" i="0">
-                <a:solidFill>
-                  <a:srgbClr val="1E2430"/>
-                </a:solidFill>
-                <a:latin typeface="Calibri"/>
-              </a:rPr>
-              <a:t>G. Wang, W. Li, M. Aertsen, J. Deprest, S. Ourselin, and T. Vercauteren, “Aleatoric uncertainty estimation with test-time augmentation for medical image segmentation with convolutional neural networks,” </a:t>
-            </a:r>
-            <a:r>
-              <a:rPr sz="780" i="1">
-                <a:solidFill>
-                  <a:srgbClr val="1E2430"/>
-                </a:solidFill>
-                <a:latin typeface="Calibri"/>
-              </a:rPr>
-              <a:t>Neurocomputing</a:t>
-            </a:r>
-            <a:r>
-              <a:rPr sz="780" i="0">
-                <a:solidFill>
-                  <a:srgbClr val="1E2430"/>
-                </a:solidFill>
-                <a:latin typeface="Calibri"/>
-              </a:rPr>
-              <a:t>, vol. 338, pp. 34–45, 2019.</a:t>
+              <a:rPr sz="860" i="0">
+                <a:solidFill>
+                  <a:srgbClr val="1E2430"/>
+                </a:solidFill>
+                <a:latin typeface="Calibri"/>
+              </a:rPr>
+              <a:t>[67]	</a:t>
+            </a:r>
+            <a:r>
+              <a:rPr sz="860" i="0">
+                <a:solidFill>
+                  <a:srgbClr val="1E2430"/>
+                </a:solidFill>
+                <a:latin typeface="Calibri"/>
+              </a:rPr>
+              <a:t>J. Deng, W. Dong, R. Socher, L.-J. Li, K. Li, and L. Fei-Fei, “ImageNet: A large-scale hierarchical image database,” in </a:t>
+            </a:r>
+            <a:r>
+              <a:rPr sz="860" i="1">
+                <a:solidFill>
+                  <a:srgbClr val="1E2430"/>
+                </a:solidFill>
+                <a:latin typeface="Calibri"/>
+              </a:rPr>
+              <a:t>Proc. IEEE Conference on Computer Vision and Pattern Recognition (CVPR)</a:t>
+            </a:r>
+            <a:r>
+              <a:rPr sz="860" i="0">
+                <a:solidFill>
+                  <a:srgbClr val="1E2430"/>
+                </a:solidFill>
+                <a:latin typeface="Calibri"/>
+              </a:rPr>
+              <a:t>, 2009, pp. 248–255.</a:t>
             </a:r>
           </a:p>
           <a:p>
@@ -22807,40 +21922,40 @@
               </a:spcAft>
             </a:pPr>
             <a:r>
-              <a:rPr sz="780" i="0">
-                <a:solidFill>
-                  <a:srgbClr val="1E2430"/>
-                </a:solidFill>
-                <a:latin typeface="Calibri"/>
-              </a:rPr>
-              <a:t>[93]	</a:t>
-            </a:r>
-            <a:r>
-              <a:rPr sz="780" i="0">
-                <a:solidFill>
-                  <a:srgbClr val="1E2430"/>
-                </a:solidFill>
-                <a:latin typeface="Calibri"/>
-              </a:rPr>
-              <a:t>A. G. Roy, S. Conjeti, N. Navab, and C. Wachinger, “Bayesian QuickNAT: Model uncertainty in deep whole-brain segmentation for structure-wise quality control,” </a:t>
-            </a:r>
-            <a:r>
-              <a:rPr sz="780" i="1">
-                <a:solidFill>
-                  <a:srgbClr val="1E2430"/>
-                </a:solidFill>
-                <a:latin typeface="Calibri"/>
-              </a:rPr>
-              <a:t>NeuroImage</a:t>
-            </a:r>
-            <a:r>
-              <a:rPr sz="780" i="0">
-                <a:solidFill>
-                  <a:srgbClr val="1E2430"/>
-                </a:solidFill>
-                <a:latin typeface="Calibri"/>
-              </a:rPr>
-              <a:t>, vol. 195, pp. 11–22, 2019.</a:t>
+              <a:rPr sz="860" i="0">
+                <a:solidFill>
+                  <a:srgbClr val="1E2430"/>
+                </a:solidFill>
+                <a:latin typeface="Calibri"/>
+              </a:rPr>
+              <a:t>[68]	</a:t>
+            </a:r>
+            <a:r>
+              <a:rPr sz="860" i="0">
+                <a:solidFill>
+                  <a:srgbClr val="1E2430"/>
+                </a:solidFill>
+                <a:latin typeface="Calibri"/>
+              </a:rPr>
+              <a:t>O. Russakovsky et al., “ImageNet large scale visual recognition challenge,” </a:t>
+            </a:r>
+            <a:r>
+              <a:rPr sz="860" i="1">
+                <a:solidFill>
+                  <a:srgbClr val="1E2430"/>
+                </a:solidFill>
+                <a:latin typeface="Calibri"/>
+              </a:rPr>
+              <a:t>International Journal of Computer Vision</a:t>
+            </a:r>
+            <a:r>
+              <a:rPr sz="860" i="0">
+                <a:solidFill>
+                  <a:srgbClr val="1E2430"/>
+                </a:solidFill>
+                <a:latin typeface="Calibri"/>
+              </a:rPr>
+              <a:t>, vol. 115, no. 3, pp. 211–252, 2015.</a:t>
             </a:r>
           </a:p>
           <a:p>
@@ -22850,40 +21965,40 @@
               </a:spcAft>
             </a:pPr>
             <a:r>
-              <a:rPr sz="780" i="0">
-                <a:solidFill>
-                  <a:srgbClr val="1E2430"/>
-                </a:solidFill>
-                <a:latin typeface="Calibri"/>
-              </a:rPr>
-              <a:t>[94]	</a:t>
-            </a:r>
-            <a:r>
-              <a:rPr sz="780" i="0">
-                <a:solidFill>
-                  <a:srgbClr val="1E2430"/>
-                </a:solidFill>
-                <a:latin typeface="Calibri"/>
-              </a:rPr>
-              <a:t>A. Mehrtash, W. M. Wells, C. M. Tempany, P. Abolmaesumi, and T. Kapur, “Confidence calibration and predictive uncertainty estimation for deep medical image segmentation,” </a:t>
-            </a:r>
-            <a:r>
-              <a:rPr sz="780" i="1">
-                <a:solidFill>
-                  <a:srgbClr val="1E2430"/>
-                </a:solidFill>
-                <a:latin typeface="Calibri"/>
-              </a:rPr>
-              <a:t>IEEE Transactions on Medical Imaging</a:t>
-            </a:r>
-            <a:r>
-              <a:rPr sz="780" i="0">
-                <a:solidFill>
-                  <a:srgbClr val="1E2430"/>
-                </a:solidFill>
-                <a:latin typeface="Calibri"/>
-              </a:rPr>
-              <a:t>, vol. 39, no. 12, pp. 3868–3878, 2020.</a:t>
+              <a:rPr sz="860" i="0">
+                <a:solidFill>
+                  <a:srgbClr val="1E2430"/>
+                </a:solidFill>
+                <a:latin typeface="Calibri"/>
+              </a:rPr>
+              <a:t>[69]	</a:t>
+            </a:r>
+            <a:r>
+              <a:rPr sz="860" i="0">
+                <a:solidFill>
+                  <a:srgbClr val="1E2430"/>
+                </a:solidFill>
+                <a:latin typeface="Calibri"/>
+              </a:rPr>
+              <a:t>A. Paszke et al., “PyTorch: An imperative style, high-performance deep learning library,” in </a:t>
+            </a:r>
+            <a:r>
+              <a:rPr sz="860" i="1">
+                <a:solidFill>
+                  <a:srgbClr val="1E2430"/>
+                </a:solidFill>
+                <a:latin typeface="Calibri"/>
+              </a:rPr>
+              <a:t>Advances in Neural Information Processing Systems (NeurIPS) 32</a:t>
+            </a:r>
+            <a:r>
+              <a:rPr sz="860" i="0">
+                <a:solidFill>
+                  <a:srgbClr val="1E2430"/>
+                </a:solidFill>
+                <a:latin typeface="Calibri"/>
+              </a:rPr>
+              <a:t>, 2019.</a:t>
             </a:r>
           </a:p>
           <a:p>
@@ -22893,40 +22008,40 @@
               </a:spcAft>
             </a:pPr>
             <a:r>
-              <a:rPr sz="780" i="0">
-                <a:solidFill>
-                  <a:srgbClr val="1E2430"/>
-                </a:solidFill>
-                <a:latin typeface="Calibri"/>
-              </a:rPr>
-              <a:t>[95]	</a:t>
-            </a:r>
-            <a:r>
-              <a:rPr sz="780" i="0">
-                <a:solidFill>
-                  <a:srgbClr val="1E2430"/>
-                </a:solidFill>
-                <a:latin typeface="Calibri"/>
-              </a:rPr>
-              <a:t>K. Vinogradova, A. Dibrov, and G. Myers, “Towards interpretable semantic segmentation via gradient-weighted class activation mapping (student abstract),” </a:t>
-            </a:r>
-            <a:r>
-              <a:rPr sz="780" i="1">
-                <a:solidFill>
-                  <a:srgbClr val="1E2430"/>
-                </a:solidFill>
-                <a:latin typeface="Calibri"/>
-              </a:rPr>
-              <a:t>Proceedings of the AAAI Conference on Artificial Intelligence</a:t>
-            </a:r>
-            <a:r>
-              <a:rPr sz="780" i="0">
-                <a:solidFill>
-                  <a:srgbClr val="1E2430"/>
-                </a:solidFill>
-                <a:latin typeface="Calibri"/>
-              </a:rPr>
-              <a:t>, vol. 34, no. 10, pp. 13943–13944, 2020.</a:t>
+              <a:rPr sz="860" i="0">
+                <a:solidFill>
+                  <a:srgbClr val="1E2430"/>
+                </a:solidFill>
+                <a:latin typeface="Calibri"/>
+              </a:rPr>
+              <a:t>[70]	</a:t>
+            </a:r>
+            <a:r>
+              <a:rPr sz="860" i="0">
+                <a:solidFill>
+                  <a:srgbClr val="1E2430"/>
+                </a:solidFill>
+                <a:latin typeface="Calibri"/>
+              </a:rPr>
+              <a:t>I. Loshchilov and F. Hutter, “Decoupled weight decay regularization,” in </a:t>
+            </a:r>
+            <a:r>
+              <a:rPr sz="860" i="1">
+                <a:solidFill>
+                  <a:srgbClr val="1E2430"/>
+                </a:solidFill>
+                <a:latin typeface="Calibri"/>
+              </a:rPr>
+              <a:t>Proc. International Conference on Learning Representations (ICLR)</a:t>
+            </a:r>
+            <a:r>
+              <a:rPr sz="860" i="0">
+                <a:solidFill>
+                  <a:srgbClr val="1E2430"/>
+                </a:solidFill>
+                <a:latin typeface="Calibri"/>
+              </a:rPr>
+              <a:t>, 2019.</a:t>
             </a:r>
           </a:p>
           <a:p>
@@ -22936,7 +22051,1105 @@
               </a:spcAft>
             </a:pPr>
             <a:r>
-              <a:rPr sz="780" i="0">
+              <a:rPr sz="860" i="0">
+                <a:solidFill>
+                  <a:srgbClr val="1E2430"/>
+                </a:solidFill>
+                <a:latin typeface="Calibri"/>
+              </a:rPr>
+              <a:t>[71]	</a:t>
+            </a:r>
+            <a:r>
+              <a:rPr sz="860" i="0">
+                <a:solidFill>
+                  <a:srgbClr val="1E2430"/>
+                </a:solidFill>
+                <a:latin typeface="Calibri"/>
+              </a:rPr>
+              <a:t>I. Loshchilov and F. Hutter, “SGDR: Stochastic gradient descent with warm restarts,” in </a:t>
+            </a:r>
+            <a:r>
+              <a:rPr sz="860" i="1">
+                <a:solidFill>
+                  <a:srgbClr val="1E2430"/>
+                </a:solidFill>
+                <a:latin typeface="Calibri"/>
+              </a:rPr>
+              <a:t>Proc. International Conference on Learning Representations (ICLR)</a:t>
+            </a:r>
+            <a:r>
+              <a:rPr sz="860" i="0">
+                <a:solidFill>
+                  <a:srgbClr val="1E2430"/>
+                </a:solidFill>
+                <a:latin typeface="Calibri"/>
+              </a:rPr>
+              <a:t>, 2017.</a:t>
+            </a:r>
+          </a:p>
+          <a:p>
+            <a:pPr marL="274320" indent="-274320">
+              <a:spcAft>
+                <a:spcPts val="100"/>
+              </a:spcAft>
+            </a:pPr>
+            <a:r>
+              <a:rPr sz="860" i="0">
+                <a:solidFill>
+                  <a:srgbClr val="1E2430"/>
+                </a:solidFill>
+                <a:latin typeface="Calibri"/>
+              </a:rPr>
+              <a:t>[72]	</a:t>
+            </a:r>
+            <a:r>
+              <a:rPr sz="860" i="0">
+                <a:solidFill>
+                  <a:srgbClr val="1E2430"/>
+                </a:solidFill>
+                <a:latin typeface="Calibri"/>
+              </a:rPr>
+              <a:t>P. Micikevicius et al., “Mixed precision training,” in </a:t>
+            </a:r>
+            <a:r>
+              <a:rPr sz="860" i="1">
+                <a:solidFill>
+                  <a:srgbClr val="1E2430"/>
+                </a:solidFill>
+                <a:latin typeface="Calibri"/>
+              </a:rPr>
+              <a:t>Proc. International Conference on Learning Representations (ICLR)</a:t>
+            </a:r>
+            <a:r>
+              <a:rPr sz="860" i="0">
+                <a:solidFill>
+                  <a:srgbClr val="1E2430"/>
+                </a:solidFill>
+                <a:latin typeface="Calibri"/>
+              </a:rPr>
+              <a:t>, 2018.</a:t>
+            </a:r>
+          </a:p>
+          <a:p>
+            <a:pPr marL="274320" indent="-274320">
+              <a:spcAft>
+                <a:spcPts val="100"/>
+              </a:spcAft>
+            </a:pPr>
+            <a:r>
+              <a:rPr sz="860" i="0">
+                <a:solidFill>
+                  <a:srgbClr val="1E2430"/>
+                </a:solidFill>
+                <a:latin typeface="Calibri"/>
+              </a:rPr>
+              <a:t>[73]	</a:t>
+            </a:r>
+            <a:r>
+              <a:rPr sz="860" i="0">
+                <a:solidFill>
+                  <a:srgbClr val="1E2430"/>
+                </a:solidFill>
+                <a:latin typeface="Calibri"/>
+              </a:rPr>
+              <a:t>R. Pascanu, T. Mikolov, and Y. Bengio, “On the difficulty of training recurrent neural networks,” in </a:t>
+            </a:r>
+            <a:r>
+              <a:rPr sz="860" i="1">
+                <a:solidFill>
+                  <a:srgbClr val="1E2430"/>
+                </a:solidFill>
+                <a:latin typeface="Calibri"/>
+              </a:rPr>
+              <a:t>Proc. 30th International Conference on Machine Learning (ICML)</a:t>
+            </a:r>
+            <a:r>
+              <a:rPr sz="860" i="0">
+                <a:solidFill>
+                  <a:srgbClr val="1E2430"/>
+                </a:solidFill>
+                <a:latin typeface="Calibri"/>
+              </a:rPr>
+              <a:t>, 2013, pp. 1310–1318.</a:t>
+            </a:r>
+          </a:p>
+          <a:p>
+            <a:pPr marL="274320" indent="-274320">
+              <a:spcAft>
+                <a:spcPts val="100"/>
+              </a:spcAft>
+            </a:pPr>
+            <a:r>
+              <a:rPr sz="860" i="0">
+                <a:solidFill>
+                  <a:srgbClr val="1E2430"/>
+                </a:solidFill>
+                <a:latin typeface="Calibri"/>
+              </a:rPr>
+              <a:t>[74]	</a:t>
+            </a:r>
+            <a:r>
+              <a:rPr sz="860" i="0">
+                <a:solidFill>
+                  <a:srgbClr val="1E2430"/>
+                </a:solidFill>
+                <a:latin typeface="Calibri"/>
+              </a:rPr>
+              <a:t>T. Gneiting and A. E. Raftery, “Strictly proper scoring rules, prediction, and estimation,” </a:t>
+            </a:r>
+            <a:r>
+              <a:rPr sz="860" i="1">
+                <a:solidFill>
+                  <a:srgbClr val="1E2430"/>
+                </a:solidFill>
+                <a:latin typeface="Calibri"/>
+              </a:rPr>
+              <a:t>Journal of the American Statistical Association</a:t>
+            </a:r>
+            <a:r>
+              <a:rPr sz="860" i="0">
+                <a:solidFill>
+                  <a:srgbClr val="1E2430"/>
+                </a:solidFill>
+                <a:latin typeface="Calibri"/>
+              </a:rPr>
+              <a:t>, vol. 102, no. 477, pp. 359–378, 2007.</a:t>
+            </a:r>
+          </a:p>
+          <a:p>
+            <a:pPr marL="274320" indent="-274320">
+              <a:spcAft>
+                <a:spcPts val="100"/>
+              </a:spcAft>
+            </a:pPr>
+            <a:r>
+              <a:rPr sz="860" i="0">
+                <a:solidFill>
+                  <a:srgbClr val="1E2430"/>
+                </a:solidFill>
+                <a:latin typeface="Calibri"/>
+              </a:rPr>
+              <a:t>[75]	</a:t>
+            </a:r>
+            <a:r>
+              <a:rPr sz="860" i="0">
+                <a:solidFill>
+                  <a:srgbClr val="1E2430"/>
+                </a:solidFill>
+                <a:latin typeface="Calibri"/>
+              </a:rPr>
+              <a:t>C. Guo, G. Pleiss, Y. Sun, and K. Q. Weinberger, “On calibration of modern neural networks,” in </a:t>
+            </a:r>
+            <a:r>
+              <a:rPr sz="860" i="1">
+                <a:solidFill>
+                  <a:srgbClr val="1E2430"/>
+                </a:solidFill>
+                <a:latin typeface="Calibri"/>
+              </a:rPr>
+              <a:t>Proc. 34th International Conference on Machine Learning (ICML)</a:t>
+            </a:r>
+            <a:r>
+              <a:rPr sz="860" i="0">
+                <a:solidFill>
+                  <a:srgbClr val="1E2430"/>
+                </a:solidFill>
+                <a:latin typeface="Calibri"/>
+              </a:rPr>
+              <a:t>, 2017, pp. 1321–1330.</a:t>
+            </a:r>
+          </a:p>
+          <a:p>
+            <a:pPr marL="274320" indent="-274320">
+              <a:spcAft>
+                <a:spcPts val="100"/>
+              </a:spcAft>
+            </a:pPr>
+            <a:r>
+              <a:rPr sz="860" i="0">
+                <a:solidFill>
+                  <a:srgbClr val="1E2430"/>
+                </a:solidFill>
+                <a:latin typeface="Calibri"/>
+              </a:rPr>
+              <a:t>[76]	</a:t>
+            </a:r>
+            <a:r>
+              <a:rPr sz="860" i="0">
+                <a:solidFill>
+                  <a:srgbClr val="1E2430"/>
+                </a:solidFill>
+                <a:latin typeface="Calibri"/>
+              </a:rPr>
+              <a:t>W. J. Youden, “Index for rating diagnostic tests,” </a:t>
+            </a:r>
+            <a:r>
+              <a:rPr sz="860" i="1">
+                <a:solidFill>
+                  <a:srgbClr val="1E2430"/>
+                </a:solidFill>
+                <a:latin typeface="Calibri"/>
+              </a:rPr>
+              <a:t>Cancer</a:t>
+            </a:r>
+            <a:r>
+              <a:rPr sz="860" i="0">
+                <a:solidFill>
+                  <a:srgbClr val="1E2430"/>
+                </a:solidFill>
+                <a:latin typeface="Calibri"/>
+              </a:rPr>
+              <a:t>, vol. 3, no. 1, pp. 32–35, 1950.</a:t>
+            </a:r>
+          </a:p>
+          <a:p>
+            <a:pPr marL="274320" indent="-274320">
+              <a:spcAft>
+                <a:spcPts val="100"/>
+              </a:spcAft>
+            </a:pPr>
+            <a:r>
+              <a:rPr sz="860" i="0">
+                <a:solidFill>
+                  <a:srgbClr val="1E2430"/>
+                </a:solidFill>
+                <a:latin typeface="Calibri"/>
+              </a:rPr>
+              <a:t>[77]	</a:t>
+            </a:r>
+            <a:r>
+              <a:rPr sz="860" i="0">
+                <a:solidFill>
+                  <a:srgbClr val="1E2430"/>
+                </a:solidFill>
+                <a:latin typeface="Calibri"/>
+              </a:rPr>
+              <a:t>J. A. Hanley and B. J. McNeil, “The meaning and use of the area under a receiver operating characteristic (ROC) curve,” </a:t>
+            </a:r>
+            <a:r>
+              <a:rPr sz="860" i="1">
+                <a:solidFill>
+                  <a:srgbClr val="1E2430"/>
+                </a:solidFill>
+                <a:latin typeface="Calibri"/>
+              </a:rPr>
+              <a:t>Radiology</a:t>
+            </a:r>
+            <a:r>
+              <a:rPr sz="860" i="0">
+                <a:solidFill>
+                  <a:srgbClr val="1E2430"/>
+                </a:solidFill>
+                <a:latin typeface="Calibri"/>
+              </a:rPr>
+              <a:t>, vol. 143, no. 1, pp. 29–36, 1982.</a:t>
+            </a:r>
+          </a:p>
+          <a:p>
+            <a:pPr marL="274320" indent="-274320">
+              <a:spcAft>
+                <a:spcPts val="100"/>
+              </a:spcAft>
+            </a:pPr>
+            <a:r>
+              <a:rPr sz="860" i="0">
+                <a:solidFill>
+                  <a:srgbClr val="1E2430"/>
+                </a:solidFill>
+                <a:latin typeface="Calibri"/>
+              </a:rPr>
+              <a:t>[78]	</a:t>
+            </a:r>
+            <a:r>
+              <a:rPr sz="860" i="0">
+                <a:solidFill>
+                  <a:srgbClr val="1E2430"/>
+                </a:solidFill>
+                <a:latin typeface="Calibri"/>
+              </a:rPr>
+              <a:t>T. Fawcett, “An introduction to ROC analysis,” </a:t>
+            </a:r>
+            <a:r>
+              <a:rPr sz="860" i="1">
+                <a:solidFill>
+                  <a:srgbClr val="1E2430"/>
+                </a:solidFill>
+                <a:latin typeface="Calibri"/>
+              </a:rPr>
+              <a:t>Pattern Recognition Letters</a:t>
+            </a:r>
+            <a:r>
+              <a:rPr sz="860" i="0">
+                <a:solidFill>
+                  <a:srgbClr val="1E2430"/>
+                </a:solidFill>
+                <a:latin typeface="Calibri"/>
+              </a:rPr>
+              <a:t>, vol. 27, no. 8, pp. 861–874, 2006.</a:t>
+            </a:r>
+          </a:p>
+          <a:p>
+            <a:pPr marL="274320" indent="-274320">
+              <a:spcAft>
+                <a:spcPts val="100"/>
+              </a:spcAft>
+            </a:pPr>
+            <a:r>
+              <a:rPr sz="860" i="0">
+                <a:solidFill>
+                  <a:srgbClr val="1E2430"/>
+                </a:solidFill>
+                <a:latin typeface="Calibri"/>
+              </a:rPr>
+              <a:t>[79]	</a:t>
+            </a:r>
+            <a:r>
+              <a:rPr sz="860" i="0">
+                <a:solidFill>
+                  <a:srgbClr val="1E2430"/>
+                </a:solidFill>
+                <a:latin typeface="Calibri"/>
+              </a:rPr>
+              <a:t>B. W. Matthews, “Comparison of the predicted and observed secondary structure of T4 phage lysozyme,” </a:t>
+            </a:r>
+            <a:r>
+              <a:rPr sz="860" i="1">
+                <a:solidFill>
+                  <a:srgbClr val="1E2430"/>
+                </a:solidFill>
+                <a:latin typeface="Calibri"/>
+              </a:rPr>
+              <a:t>Biochimica et Biophysica Acta (BBA) – Protein Structure</a:t>
+            </a:r>
+            <a:r>
+              <a:rPr sz="860" i="0">
+                <a:solidFill>
+                  <a:srgbClr val="1E2430"/>
+                </a:solidFill>
+                <a:latin typeface="Calibri"/>
+              </a:rPr>
+              <a:t>, vol. 405, no. 2, pp. 442–451, 1975.</a:t>
+            </a:r>
+          </a:p>
+          <a:p>
+            <a:pPr marL="274320" indent="-274320">
+              <a:spcAft>
+                <a:spcPts val="100"/>
+              </a:spcAft>
+            </a:pPr>
+            <a:r>
+              <a:rPr sz="860" i="0">
+                <a:solidFill>
+                  <a:srgbClr val="1E2430"/>
+                </a:solidFill>
+                <a:latin typeface="Calibri"/>
+              </a:rPr>
+              <a:t>[80]	</a:t>
+            </a:r>
+            <a:r>
+              <a:rPr sz="860" i="0">
+                <a:solidFill>
+                  <a:srgbClr val="1E2430"/>
+                </a:solidFill>
+                <a:latin typeface="Calibri"/>
+              </a:rPr>
+              <a:t>D. Chicco and G. Jurman, “The advantages of the Matthews correlation coefficient (MCC) over F1 score and accuracy in binary classification evaluation,” </a:t>
+            </a:r>
+            <a:r>
+              <a:rPr sz="860" i="1">
+                <a:solidFill>
+                  <a:srgbClr val="1E2430"/>
+                </a:solidFill>
+                <a:latin typeface="Calibri"/>
+              </a:rPr>
+              <a:t>BMC Genomics</a:t>
+            </a:r>
+            <a:r>
+              <a:rPr sz="860" i="0">
+                <a:solidFill>
+                  <a:srgbClr val="1E2430"/>
+                </a:solidFill>
+                <a:latin typeface="Calibri"/>
+              </a:rPr>
+              <a:t>, vol. 21, Art. no. 6, 2020.</a:t>
+            </a:r>
+          </a:p>
+        </p:txBody>
+      </p:sp>
+      <p:sp>
+        <p:nvSpPr>
+          <p:cNvPr id="9" name="TextBox 8"/>
+          <p:cNvSpPr txBox="1"/>
+          <p:nvPr/>
+        </p:nvSpPr>
+        <p:spPr>
+          <a:xfrm>
+            <a:off x="6208776" y="1143000"/>
+            <a:ext cx="5431536" cy="5120640"/>
+          </a:xfrm>
+          <a:prstGeom prst="rect">
+            <a:avLst/>
+          </a:prstGeom>
+          <a:noFill/>
+        </p:spPr>
+        <p:txBody>
+          <a:bodyPr wrap="square" lIns="0" rIns="0" tIns="0" bIns="0">
+            <a:spAutoFit/>
+          </a:bodyPr>
+          <a:lstStyle/>
+          <a:p>
+            <a:pPr marL="274320" indent="-274320">
+              <a:spcAft>
+                <a:spcPts val="100"/>
+              </a:spcAft>
+            </a:pPr>
+            <a:r>
+              <a:rPr sz="860" i="0">
+                <a:solidFill>
+                  <a:srgbClr val="1E2430"/>
+                </a:solidFill>
+                <a:latin typeface="Calibri"/>
+              </a:rPr>
+              <a:t>[81]	</a:t>
+            </a:r>
+            <a:r>
+              <a:rPr sz="860" i="0">
+                <a:solidFill>
+                  <a:srgbClr val="1E2430"/>
+                </a:solidFill>
+                <a:latin typeface="Calibri"/>
+              </a:rPr>
+              <a:t>M. Pakdaman Naeini, G. Cooper, and M. Hauskrecht, “Obtaining well calibrated probabilities using Bayesian binning,” in </a:t>
+            </a:r>
+            <a:r>
+              <a:rPr sz="860" i="1">
+                <a:solidFill>
+                  <a:srgbClr val="1E2430"/>
+                </a:solidFill>
+                <a:latin typeface="Calibri"/>
+              </a:rPr>
+              <a:t>Proc. AAAI Conference on Artificial Intelligence 29(1)</a:t>
+            </a:r>
+            <a:r>
+              <a:rPr sz="860" i="0">
+                <a:solidFill>
+                  <a:srgbClr val="1E2430"/>
+                </a:solidFill>
+                <a:latin typeface="Calibri"/>
+              </a:rPr>
+              <a:t>, 2015.</a:t>
+            </a:r>
+          </a:p>
+          <a:p>
+            <a:pPr marL="274320" indent="-274320">
+              <a:spcAft>
+                <a:spcPts val="100"/>
+              </a:spcAft>
+            </a:pPr>
+            <a:r>
+              <a:rPr sz="860" i="0">
+                <a:solidFill>
+                  <a:srgbClr val="1E2430"/>
+                </a:solidFill>
+                <a:latin typeface="Calibri"/>
+              </a:rPr>
+              <a:t>[82]	</a:t>
+            </a:r>
+            <a:r>
+              <a:rPr sz="860" i="0">
+                <a:solidFill>
+                  <a:srgbClr val="1E2430"/>
+                </a:solidFill>
+                <a:latin typeface="Calibri"/>
+              </a:rPr>
+              <a:t>B. Efron, “Bootstrap methods: Another look at the jackknife,” </a:t>
+            </a:r>
+            <a:r>
+              <a:rPr sz="860" i="1">
+                <a:solidFill>
+                  <a:srgbClr val="1E2430"/>
+                </a:solidFill>
+                <a:latin typeface="Calibri"/>
+              </a:rPr>
+              <a:t>The Annals of Statistics</a:t>
+            </a:r>
+            <a:r>
+              <a:rPr sz="860" i="0">
+                <a:solidFill>
+                  <a:srgbClr val="1E2430"/>
+                </a:solidFill>
+                <a:latin typeface="Calibri"/>
+              </a:rPr>
+              <a:t>, vol. 7, no. 1, pp. 1–26, 1979.</a:t>
+            </a:r>
+          </a:p>
+          <a:p>
+            <a:pPr marL="274320" indent="-274320">
+              <a:spcAft>
+                <a:spcPts val="100"/>
+              </a:spcAft>
+            </a:pPr>
+            <a:r>
+              <a:rPr sz="860" i="0">
+                <a:solidFill>
+                  <a:srgbClr val="1E2430"/>
+                </a:solidFill>
+                <a:latin typeface="Calibri"/>
+              </a:rPr>
+              <a:t>[83]	</a:t>
+            </a:r>
+            <a:r>
+              <a:rPr sz="860" i="0">
+                <a:solidFill>
+                  <a:srgbClr val="1E2430"/>
+                </a:solidFill>
+                <a:latin typeface="Calibri"/>
+              </a:rPr>
+              <a:t>Q. McNemar, “Note on the sampling error of the difference between correlated proportions or percentages,” </a:t>
+            </a:r>
+            <a:r>
+              <a:rPr sz="860" i="1">
+                <a:solidFill>
+                  <a:srgbClr val="1E2430"/>
+                </a:solidFill>
+                <a:latin typeface="Calibri"/>
+              </a:rPr>
+              <a:t>Psychometrika</a:t>
+            </a:r>
+            <a:r>
+              <a:rPr sz="860" i="0">
+                <a:solidFill>
+                  <a:srgbClr val="1E2430"/>
+                </a:solidFill>
+                <a:latin typeface="Calibri"/>
+              </a:rPr>
+              <a:t>, vol. 12, no. 2, pp. 153–157, 1947.</a:t>
+            </a:r>
+          </a:p>
+          <a:p>
+            <a:pPr marL="274320" indent="-274320">
+              <a:spcAft>
+                <a:spcPts val="100"/>
+              </a:spcAft>
+            </a:pPr>
+            <a:r>
+              <a:rPr sz="860" i="0">
+                <a:solidFill>
+                  <a:srgbClr val="1E2430"/>
+                </a:solidFill>
+                <a:latin typeface="Calibri"/>
+              </a:rPr>
+              <a:t>[84]	</a:t>
+            </a:r>
+            <a:r>
+              <a:rPr sz="860" i="0">
+                <a:solidFill>
+                  <a:srgbClr val="1E2430"/>
+                </a:solidFill>
+                <a:latin typeface="Calibri"/>
+              </a:rPr>
+              <a:t>S. Holm, “A simple sequentially rejective multiple test procedure,” </a:t>
+            </a:r>
+            <a:r>
+              <a:rPr sz="860" i="1">
+                <a:solidFill>
+                  <a:srgbClr val="1E2430"/>
+                </a:solidFill>
+                <a:latin typeface="Calibri"/>
+              </a:rPr>
+              <a:t>Scandinavian Journal of Statistics</a:t>
+            </a:r>
+            <a:r>
+              <a:rPr sz="860" i="0">
+                <a:solidFill>
+                  <a:srgbClr val="1E2430"/>
+                </a:solidFill>
+                <a:latin typeface="Calibri"/>
+              </a:rPr>
+              <a:t>, vol. 6, no. 2, pp. 65–70, 1979.</a:t>
+            </a:r>
+          </a:p>
+          <a:p>
+            <a:pPr marL="274320" indent="-274320">
+              <a:spcAft>
+                <a:spcPts val="100"/>
+              </a:spcAft>
+            </a:pPr>
+            <a:r>
+              <a:rPr sz="860" i="0">
+                <a:solidFill>
+                  <a:srgbClr val="1E2430"/>
+                </a:solidFill>
+                <a:latin typeface="Calibri"/>
+              </a:rPr>
+              <a:t>[85]	</a:t>
+            </a:r>
+            <a:r>
+              <a:rPr sz="860" i="0">
+                <a:solidFill>
+                  <a:srgbClr val="1E2430"/>
+                </a:solidFill>
+                <a:latin typeface="Calibri"/>
+              </a:rPr>
+              <a:t>R. R. Selvaraju, M. Cogswell, A. Das, R. Vedantam, D. Parikh, and D. Batra, “Grad-CAM: Visual explanations from deep networks via gradient-based localization,” in </a:t>
+            </a:r>
+            <a:r>
+              <a:rPr sz="860" i="1">
+                <a:solidFill>
+                  <a:srgbClr val="1E2430"/>
+                </a:solidFill>
+                <a:latin typeface="Calibri"/>
+              </a:rPr>
+              <a:t>Proc. IEEE International Conference on Computer Vision (ICCV)</a:t>
+            </a:r>
+            <a:r>
+              <a:rPr sz="860" i="0">
+                <a:solidFill>
+                  <a:srgbClr val="1E2430"/>
+                </a:solidFill>
+                <a:latin typeface="Calibri"/>
+              </a:rPr>
+              <a:t>, 2017, pp. 618–626.</a:t>
+            </a:r>
+          </a:p>
+          <a:p>
+            <a:pPr marL="274320" indent="-274320">
+              <a:spcAft>
+                <a:spcPts val="100"/>
+              </a:spcAft>
+            </a:pPr>
+            <a:r>
+              <a:rPr sz="860" i="0">
+                <a:solidFill>
+                  <a:srgbClr val="1E2430"/>
+                </a:solidFill>
+                <a:latin typeface="Calibri"/>
+              </a:rPr>
+              <a:t>[86]	</a:t>
+            </a:r>
+            <a:r>
+              <a:rPr sz="860" i="0">
+                <a:solidFill>
+                  <a:srgbClr val="1E2430"/>
+                </a:solidFill>
+                <a:latin typeface="Calibri"/>
+              </a:rPr>
+              <a:t>S. Abnar and W. Zuidema, “Quantifying attention flow in transformers,” in </a:t>
+            </a:r>
+            <a:r>
+              <a:rPr sz="860" i="1">
+                <a:solidFill>
+                  <a:srgbClr val="1E2430"/>
+                </a:solidFill>
+                <a:latin typeface="Calibri"/>
+              </a:rPr>
+              <a:t>Proc. 58th Annual Meeting of the Association for Computational Linguistics (ACL)</a:t>
+            </a:r>
+            <a:r>
+              <a:rPr sz="860" i="0">
+                <a:solidFill>
+                  <a:srgbClr val="1E2430"/>
+                </a:solidFill>
+                <a:latin typeface="Calibri"/>
+              </a:rPr>
+              <a:t>, 2020, pp. 4190–4197.</a:t>
+            </a:r>
+          </a:p>
+          <a:p>
+            <a:pPr marL="274320" indent="-274320">
+              <a:spcAft>
+                <a:spcPts val="100"/>
+              </a:spcAft>
+            </a:pPr>
+            <a:r>
+              <a:rPr sz="860" i="0">
+                <a:solidFill>
+                  <a:srgbClr val="1E2430"/>
+                </a:solidFill>
+                <a:latin typeface="Calibri"/>
+              </a:rPr>
+              <a:t>[87]	</a:t>
+            </a:r>
+            <a:r>
+              <a:rPr sz="860" i="0">
+                <a:solidFill>
+                  <a:srgbClr val="1E2430"/>
+                </a:solidFill>
+                <a:latin typeface="Calibri"/>
+              </a:rPr>
+              <a:t>M. D. Zeiler and R. Fergus, “Visualizing and understanding convolutional networks,” in </a:t>
+            </a:r>
+            <a:r>
+              <a:rPr sz="860" i="1">
+                <a:solidFill>
+                  <a:srgbClr val="1E2430"/>
+                </a:solidFill>
+                <a:latin typeface="Calibri"/>
+              </a:rPr>
+              <a:t>Computer Vision – ECCV 2014</a:t>
+            </a:r>
+            <a:r>
+              <a:rPr sz="860" i="0">
+                <a:solidFill>
+                  <a:srgbClr val="1E2430"/>
+                </a:solidFill>
+                <a:latin typeface="Calibri"/>
+              </a:rPr>
+              <a:t>, 2014, pp. 818–833.</a:t>
+            </a:r>
+          </a:p>
+          <a:p>
+            <a:pPr marL="274320" indent="-274320">
+              <a:spcAft>
+                <a:spcPts val="100"/>
+              </a:spcAft>
+            </a:pPr>
+            <a:r>
+              <a:rPr sz="860" i="0">
+                <a:solidFill>
+                  <a:srgbClr val="1E2430"/>
+                </a:solidFill>
+                <a:latin typeface="Calibri"/>
+              </a:rPr>
+              <a:t>[88]	</a:t>
+            </a:r>
+            <a:r>
+              <a:rPr sz="860" i="0">
+                <a:solidFill>
+                  <a:srgbClr val="1E2430"/>
+                </a:solidFill>
+                <a:latin typeface="Calibri"/>
+              </a:rPr>
+              <a:t>N. Otsu, “A threshold selection method from gray-level histograms,” </a:t>
+            </a:r>
+            <a:r>
+              <a:rPr sz="860" i="1">
+                <a:solidFill>
+                  <a:srgbClr val="1E2430"/>
+                </a:solidFill>
+                <a:latin typeface="Calibri"/>
+              </a:rPr>
+              <a:t>IEEE Transactions on Systems, Man, and Cybernetics</a:t>
+            </a:r>
+            <a:r>
+              <a:rPr sz="860" i="0">
+                <a:solidFill>
+                  <a:srgbClr val="1E2430"/>
+                </a:solidFill>
+                <a:latin typeface="Calibri"/>
+              </a:rPr>
+              <a:t>, vol. 9, no. 1, pp. 62–66, 1979.</a:t>
+            </a:r>
+          </a:p>
+          <a:p>
+            <a:pPr marL="274320" indent="-274320">
+              <a:spcAft>
+                <a:spcPts val="100"/>
+              </a:spcAft>
+            </a:pPr>
+            <a:r>
+              <a:rPr sz="860" i="0">
+                <a:solidFill>
+                  <a:srgbClr val="1E2430"/>
+                </a:solidFill>
+                <a:latin typeface="Calibri"/>
+              </a:rPr>
+              <a:t>[89]	</a:t>
+            </a:r>
+            <a:r>
+              <a:rPr sz="860" i="0">
+                <a:solidFill>
+                  <a:srgbClr val="1E2430"/>
+                </a:solidFill>
+                <a:latin typeface="Calibri"/>
+              </a:rPr>
+              <a:t>B. H. Menze et al., “The multimodal brain tumor image segmentation benchmark (BRATS),” </a:t>
+            </a:r>
+            <a:r>
+              <a:rPr sz="860" i="1">
+                <a:solidFill>
+                  <a:srgbClr val="1E2430"/>
+                </a:solidFill>
+                <a:latin typeface="Calibri"/>
+              </a:rPr>
+              <a:t>IEEE Transactions on Medical Imaging</a:t>
+            </a:r>
+            <a:r>
+              <a:rPr sz="860" i="0">
+                <a:solidFill>
+                  <a:srgbClr val="1E2430"/>
+                </a:solidFill>
+                <a:latin typeface="Calibri"/>
+              </a:rPr>
+              <a:t>, vol. 34, no. 10, pp. 1993–2024, 2015.</a:t>
+            </a:r>
+          </a:p>
+          <a:p>
+            <a:pPr marL="274320" indent="-274320">
+              <a:spcAft>
+                <a:spcPts val="100"/>
+              </a:spcAft>
+            </a:pPr>
+            <a:r>
+              <a:rPr sz="860" i="0">
+                <a:solidFill>
+                  <a:srgbClr val="1E2430"/>
+                </a:solidFill>
+                <a:latin typeface="Calibri"/>
+              </a:rPr>
+              <a:t>[90]	</a:t>
+            </a:r>
+            <a:r>
+              <a:rPr sz="860" i="0">
+                <a:solidFill>
+                  <a:srgbClr val="1E2430"/>
+                </a:solidFill>
+                <a:latin typeface="Calibri"/>
+              </a:rPr>
+              <a:t>F. Wilcoxon, “Individual comparisons by ranking methods,” </a:t>
+            </a:r>
+            <a:r>
+              <a:rPr sz="860" i="1">
+                <a:solidFill>
+                  <a:srgbClr val="1E2430"/>
+                </a:solidFill>
+                <a:latin typeface="Calibri"/>
+              </a:rPr>
+              <a:t>Biometrics Bulletin</a:t>
+            </a:r>
+            <a:r>
+              <a:rPr sz="860" i="0">
+                <a:solidFill>
+                  <a:srgbClr val="1E2430"/>
+                </a:solidFill>
+                <a:latin typeface="Calibri"/>
+              </a:rPr>
+              <a:t>, vol. 1, no. 6, pp. 80–83, 1945.</a:t>
+            </a:r>
+          </a:p>
+          <a:p>
+            <a:pPr marL="274320" indent="-274320">
+              <a:spcAft>
+                <a:spcPts val="100"/>
+              </a:spcAft>
+            </a:pPr>
+            <a:r>
+              <a:rPr sz="860" i="0">
+                <a:solidFill>
+                  <a:srgbClr val="1E2430"/>
+                </a:solidFill>
+                <a:latin typeface="Calibri"/>
+              </a:rPr>
+              <a:t>[91]	</a:t>
+            </a:r>
+            <a:r>
+              <a:rPr sz="860" i="0">
+                <a:solidFill>
+                  <a:srgbClr val="1E2430"/>
+                </a:solidFill>
+                <a:latin typeface="Calibri"/>
+              </a:rPr>
+              <a:t>C. Spearman, “The proof and measurement of association between two things,” </a:t>
+            </a:r>
+            <a:r>
+              <a:rPr sz="860" i="1">
+                <a:solidFill>
+                  <a:srgbClr val="1E2430"/>
+                </a:solidFill>
+                <a:latin typeface="Calibri"/>
+              </a:rPr>
+              <a:t>The American Journal of Psychology</a:t>
+            </a:r>
+            <a:r>
+              <a:rPr sz="860" i="0">
+                <a:solidFill>
+                  <a:srgbClr val="1E2430"/>
+                </a:solidFill>
+                <a:latin typeface="Calibri"/>
+              </a:rPr>
+              <a:t>, vol. 15, no. 1, pp. 72–101, 1904.</a:t>
+            </a:r>
+          </a:p>
+          <a:p>
+            <a:pPr marL="274320" indent="-274320">
+              <a:spcAft>
+                <a:spcPts val="100"/>
+              </a:spcAft>
+            </a:pPr>
+            <a:r>
+              <a:rPr sz="860" i="0">
+                <a:solidFill>
+                  <a:srgbClr val="1E2430"/>
+                </a:solidFill>
+                <a:latin typeface="Calibri"/>
+              </a:rPr>
+              <a:t>[92]	</a:t>
+            </a:r>
+            <a:r>
+              <a:rPr sz="860" i="0">
+                <a:solidFill>
+                  <a:srgbClr val="1E2430"/>
+                </a:solidFill>
+                <a:latin typeface="Calibri"/>
+              </a:rPr>
+              <a:t>G. Wang, W. Li, M. Aertsen, J. Deprest, S. Ourselin, and T. Vercauteren, “Aleatoric uncertainty estimation with test-time augmentation for medical image segmentation with convolutional neural networks,” </a:t>
+            </a:r>
+            <a:r>
+              <a:rPr sz="860" i="1">
+                <a:solidFill>
+                  <a:srgbClr val="1E2430"/>
+                </a:solidFill>
+                <a:latin typeface="Calibri"/>
+              </a:rPr>
+              <a:t>Neurocomputing</a:t>
+            </a:r>
+            <a:r>
+              <a:rPr sz="860" i="0">
+                <a:solidFill>
+                  <a:srgbClr val="1E2430"/>
+                </a:solidFill>
+                <a:latin typeface="Calibri"/>
+              </a:rPr>
+              <a:t>, vol. 338, pp. 34–45, 2019.</a:t>
+            </a:r>
+          </a:p>
+          <a:p>
+            <a:pPr marL="274320" indent="-274320">
+              <a:spcAft>
+                <a:spcPts val="100"/>
+              </a:spcAft>
+            </a:pPr>
+            <a:r>
+              <a:rPr sz="860" i="0">
+                <a:solidFill>
+                  <a:srgbClr val="1E2430"/>
+                </a:solidFill>
+                <a:latin typeface="Calibri"/>
+              </a:rPr>
+              <a:t>[93]	</a:t>
+            </a:r>
+            <a:r>
+              <a:rPr sz="860" i="0">
+                <a:solidFill>
+                  <a:srgbClr val="1E2430"/>
+                </a:solidFill>
+                <a:latin typeface="Calibri"/>
+              </a:rPr>
+              <a:t>A. G. Roy, S. Conjeti, N. Navab, and C. Wachinger, “Bayesian QuickNAT: Model uncertainty in deep whole-brain segmentation for structure-wise quality control,” </a:t>
+            </a:r>
+            <a:r>
+              <a:rPr sz="860" i="1">
+                <a:solidFill>
+                  <a:srgbClr val="1E2430"/>
+                </a:solidFill>
+                <a:latin typeface="Calibri"/>
+              </a:rPr>
+              <a:t>NeuroImage</a:t>
+            </a:r>
+            <a:r>
+              <a:rPr sz="860" i="0">
+                <a:solidFill>
+                  <a:srgbClr val="1E2430"/>
+                </a:solidFill>
+                <a:latin typeface="Calibri"/>
+              </a:rPr>
+              <a:t>, vol. 195, pp. 11–22, 2019.</a:t>
+            </a:r>
+          </a:p>
+          <a:p>
+            <a:pPr marL="274320" indent="-274320">
+              <a:spcAft>
+                <a:spcPts val="100"/>
+              </a:spcAft>
+            </a:pPr>
+            <a:r>
+              <a:rPr sz="860" i="0">
+                <a:solidFill>
+                  <a:srgbClr val="1E2430"/>
+                </a:solidFill>
+                <a:latin typeface="Calibri"/>
+              </a:rPr>
+              <a:t>[94]	</a:t>
+            </a:r>
+            <a:r>
+              <a:rPr sz="860" i="0">
+                <a:solidFill>
+                  <a:srgbClr val="1E2430"/>
+                </a:solidFill>
+                <a:latin typeface="Calibri"/>
+              </a:rPr>
+              <a:t>A. Mehrtash, W. M. Wells, C. M. Tempany, P. Abolmaesumi, and T. Kapur, “Confidence calibration and predictive uncertainty estimation for deep medical image segmentation,” </a:t>
+            </a:r>
+            <a:r>
+              <a:rPr sz="860" i="1">
+                <a:solidFill>
+                  <a:srgbClr val="1E2430"/>
+                </a:solidFill>
+                <a:latin typeface="Calibri"/>
+              </a:rPr>
+              <a:t>IEEE Transactions on Medical Imaging</a:t>
+            </a:r>
+            <a:r>
+              <a:rPr sz="860" i="0">
+                <a:solidFill>
+                  <a:srgbClr val="1E2430"/>
+                </a:solidFill>
+                <a:latin typeface="Calibri"/>
+              </a:rPr>
+              <a:t>, vol. 39, no. 12, pp. 3868–3878, 2020.</a:t>
+            </a:r>
+          </a:p>
+          <a:p>
+            <a:pPr marL="274320" indent="-274320">
+              <a:spcAft>
+                <a:spcPts val="100"/>
+              </a:spcAft>
+            </a:pPr>
+            <a:r>
+              <a:rPr sz="860" i="0">
+                <a:solidFill>
+                  <a:srgbClr val="1E2430"/>
+                </a:solidFill>
+                <a:latin typeface="Calibri"/>
+              </a:rPr>
+              <a:t>[95]	</a:t>
+            </a:r>
+            <a:r>
+              <a:rPr sz="860" i="0">
+                <a:solidFill>
+                  <a:srgbClr val="1E2430"/>
+                </a:solidFill>
+                <a:latin typeface="Calibri"/>
+              </a:rPr>
+              <a:t>K. Vinogradova, A. Dibrov, and G. Myers, “Towards interpretable semantic segmentation via gradient-weighted class activation mapping (student abstract),” </a:t>
+            </a:r>
+            <a:r>
+              <a:rPr sz="860" i="1">
+                <a:solidFill>
+                  <a:srgbClr val="1E2430"/>
+                </a:solidFill>
+                <a:latin typeface="Calibri"/>
+              </a:rPr>
+              <a:t>Proceedings of the AAAI Conference on Artificial Intelligence</a:t>
+            </a:r>
+            <a:r>
+              <a:rPr sz="860" i="0">
+                <a:solidFill>
+                  <a:srgbClr val="1E2430"/>
+                </a:solidFill>
+                <a:latin typeface="Calibri"/>
+              </a:rPr>
+              <a:t>, vol. 34, no. 10, pp. 13943–13944, 2020.</a:t>
+            </a:r>
+          </a:p>
+          <a:p>
+            <a:pPr marL="274320" indent="-274320">
+              <a:spcAft>
+                <a:spcPts val="100"/>
+              </a:spcAft>
+            </a:pPr>
+            <a:r>
+              <a:rPr sz="860" i="0">
                 <a:solidFill>
                   <a:srgbClr val="1E2430"/>
                 </a:solidFill>
@@ -22945,7 +23158,7 @@
               <a:t>[96]	</a:t>
             </a:r>
             <a:r>
-              <a:rPr sz="780" i="0">
+              <a:rPr sz="860" i="0">
                 <a:solidFill>
                   <a:srgbClr val="1E2430"/>
                 </a:solidFill>
@@ -22954,7 +23167,7 @@
               <a:t>L. Maier-Hein et al., “Metrics reloaded: Recommendations for image analysis validation,” </a:t>
             </a:r>
             <a:r>
-              <a:rPr sz="780" i="1">
+              <a:rPr sz="860" i="1">
                 <a:solidFill>
                   <a:srgbClr val="1E2430"/>
                 </a:solidFill>
@@ -22963,7 +23176,7 @@
               <a:t>Nature Methods</a:t>
             </a:r>
             <a:r>
-              <a:rPr sz="780" i="0">
+              <a:rPr sz="860" i="0">
                 <a:solidFill>
                   <a:srgbClr val="1E2430"/>
                 </a:solidFill>

--- a/Materials/Presentation.pptx
+++ b/Materials/Presentation.pptx
@@ -3359,7 +3359,7 @@
           <a:lstStyle/>
           <a:p>
             <a:r>
-              <a:t>Replace the sample image with the guide's approval mail before the review.</a:t>
+              <a:t>The guide approved Review 3 by mail: the presentation and demonstration were approved, the report and meetings were rated satisfied, and the Turnitin similarity was 5%.</a:t>
             </a:r>
           </a:p>
         </p:txBody>
@@ -19602,7 +19602,7 @@
       </p:sp>
       <p:pic>
         <p:nvPicPr>
-          <p:cNvPr id="7" name="Picture 6" descr="Screen Shot 2026-10-05 at 11.12.42 AM.png"/>
+          <p:cNvPr id="7" name="Picture 6" descr="Approval mail from the guide for Review 3 of Project ID 18812UG01"/>
           <p:cNvPicPr>
             <a:picLocks noChangeAspect="1"/>
           </p:cNvPicPr>
@@ -19622,8 +19622,8 @@
         </p:blipFill>
         <p:spPr>
           <a:xfrm>
-            <a:off x="1624358" y="1371600"/>
-            <a:ext cx="8942979" cy="2671465"/>
+            <a:off x="1791150" y="1371600"/>
+            <a:ext cx="8609700" cy="3749040"/>
           </a:xfrm>
           <a:prstGeom prst="rect">
             <a:avLst/>

--- a/Materials/Presentation.pptx
+++ b/Materials/Presentation.pptx
@@ -29094,7 +29094,7 @@
                 </a:solidFill>
                 <a:latin typeface="Calibri"/>
               </a:rPr>
-              <a:t>Nine ImageNet-pretrained backbones (six CNNs, two transformers, one hybrid) are trained under one code path with an equal number of optimiser steps, for tumour detection and glioma, meningioma or pituitary classification. Fold ensembles are compared with bootstrap CIs, Holm-corrected McNemar tests, calibration, cost, Grad-CAM and a background-only shortcut test.</a:t>
+              <a:t>We introduce a leakage-controlled, calibrated, and efficient pipeline for MRI tumour detection and subtype classification that discards near-duplicates and conflicting images prior to group-aware splitting. We evaluate nine ImageNet-pretrained convolutional, transformer and hybrid backbones under an equal budget of optimiser steps using bootstrapped confidence intervals, McNemar tests with Holm correction, temperature scaling, and Grad-CAM and background-only shortcut audits.</a:t>
             </a:r>
           </a:p>
         </p:txBody>
